--- a/Classifying ED Visits with an LLM.pptx
+++ b/Classifying ED Visits with an LLM.pptx
@@ -520,7 +520,7 @@
           <a:p>
             <a:r>
               <a:rPr lang="en-US" dirty="0"/>
-              <a:t>The notebook and data are at https://github.com/bja2376/triage-llm-tutorial This tutorial shows how to run a small language model on your own laptop and use it to guess the diagnosis category for an emergency department visit from the triage record alone. We compare three prompting techniques on the same visits and score each one against the diagnosis the ED actually recorded. Everything uses the open MIMIC-IV-ED demo, so you can rebuild it end to end without a PhysioNet account.</a:t>
+              <a:t>The notebook and data are at https://github.com/bja2376/triage-llm-tutorial The idea here is pretty simple. Can a small model running on my laptop look at just the triage record and guess what kind of diagnosis the ED ends up giving? I tried three prompting techniques on the same visits and scored each one against what the ED actually recorded. It all runs on the open MIMIC-IV-ED demo, so you don't need a PhysioNet account to follow along.</a:t>
             </a:r>
             <a:endParaRPr lang="en-US" dirty="0"/>
           </a:p>
@@ -608,7 +608,7 @@
           <a:p>
             <a:r>
               <a:rPr lang="en-US" dirty="0"/>
-              <a:t>This step turns each triage row into a few lines of text, which is the table-to-prompt idea from the CancerGPT paper in Module 13. The show helper writes "not recorded" for any missing value, because a raw "nan" means nothing to the model. The test cell after it builds a row with a missing temperature and checks that "nan" never appears. The same function builds every prompt in step 5, so the technique is the only thing that changes. Long lines on the slide are wrapped to fit.</a:t>
+              <a:t>This turns each triage row into a few lines of text, which is the same table-to-prompt idea from the CancerGPT paper in Module 13. The show helper writes "not recorded" for anything missing, since a raw "nan" doesn't mean anything to the model. The test cell builds a row with a missing temperature and checks that "nan" never shows up. Every prompt in step 5 goes through this same function, so the technique is the only thing that changes.</a:t>
             </a:r>
             <a:endParaRPr lang="en-US" dirty="0"/>
           </a:p>
@@ -696,7 +696,7 @@
           <a:p>
             <a:r>
               <a:rPr lang="en-US" dirty="0"/>
-              <a:t>This slide explains the three techniques before we look at the code. All three share one system instruction that asks for the most likely ED diagnosis and its ICD-10 code in JSON. Zero-shot sends only the triage summary. Few-shot adds three solved stays as earlier chat turns. Chain-of-thought asks the model to reason step by step before answering. Each one is compared against zero-shot rather than stacked, so any change in score can be traced to one technique. All three come from Module 13 and Practices 1 and 2.</a:t>
+              <a:t>Before the code, here's how the three techniques differ. They all share the same system message, which asks for the most likely ED diagnosis and its ICD-10 code in JSON. Zero-shot just sends the triage summary. Few-shot adds three solved stays as earlier turns in the chat. Chain-of-thought asks the model to reason step by step first. I compared each one against zero-shot instead of stacking them, so if a score changes you know which technique caused it.</a:t>
             </a:r>
             <a:endParaRPr lang="en-US" dirty="0"/>
           </a:p>
@@ -784,7 +784,7 @@
           <a:p>
             <a:r>
               <a:rPr lang="en-US" dirty="0"/>
-              <a:t>This cell picks the three few-shot examples by a fixed rule, taking the first stay from each of the three most common chapters, so anyone who reruns it gets the same examples. It then removes every stay from those three patients, not just the example stays, so the model is never scored on a patient it has already seen. That leaves 94 stays from 29 patients. If your counts differ, check that you did not change N_CASES or SEED. Long lines on the slide are wrapped to fit.</a:t>
+              <a:t>The three examples are picked by a fixed rule, which is the first stay from each of the three most common chapters. That way anyone who reruns it gets the same examples. Then I drop every stay from those three patients, not just the example stays, so the model never gets scored on a patient it's already seen. That leaves 94 stays from 29 patients. If your counts are different, check that you didn't change N_CASES or SEED.</a:t>
             </a:r>
             <a:endParaRPr lang="en-US" dirty="0"/>
           </a:p>
@@ -872,7 +872,7 @@
           <a:p>
             <a:r>
               <a:rPr lang="en-US" dirty="0"/>
-              <a:t>This one function builds every prompt, which keeps the comparison clean. Every technique starts with the same system message. Few-shot adds each example as a user turn with its triage summary and an assistant turn with the real ED answer in our JSON format. Chain-of-thought adds one sentence asking the model to reason first, and zero-shot adds nothing. The notebook does not print the roles, but you can check them with [m["role"] for m in build_messages(eval_df.iloc[0], "few_shot")]. Long lines on the slide are wrapped to fit.</a:t>
+              <a:t>This one function builds every prompt, which keeps the comparison fair. Every technique starts with the same system message. For few-shot, each example goes in as a user turn with the triage summary and then an assistant turn with the real ED answer in our JSON format. Chain-of-thought just tacks on one sentence asking the model to reason first, and zero-shot doesn't add anything.</a:t>
             </a:r>
             <a:endParaRPr lang="en-US" dirty="0"/>
           </a:p>
@@ -960,7 +960,7 @@
           <a:p>
             <a:r>
               <a:rPr lang="en-US" dirty="0"/>
-              <a:t>This function sends one prompt to the local model and checks the reply. Passing the Pydantic schema to format= makes Ollama return JSON in that shape, and Pydantic then validates it, as in Practice 2. The chain-of-thought schema puts reasoning first, so the model writes it before committing to an answer. Temperature 0 and a fixed seed keep answers repeatable, and num_predict caps the length because small models can loop in JSON mode. An answer that fails to validate is counted as wrong rather than dropped.</a:t>
+              <a:t>This sends one prompt to the local model and checks what comes back. Passing the Pydantic schema to format= makes Ollama return JSON in that shape, and then Pydantic validates it. In the chain-of-thought schema, reasoning comes first so the model has to write it out before it commits to an answer. Temperature 0 and a fixed seed keep things repeatable. num_predict caps the length because small models can get stuck looping in JSON mode. If an answer doesn't validate, I count it as wrong rather than dropping it.</a:t>
             </a:r>
             <a:endParaRPr lang="en-US" dirty="0"/>
           </a:p>
@@ -1048,7 +1048,7 @@
           <a:p>
             <a:r>
               <a:rPr lang="en-US" dirty="0"/>
-              <a:t>This loop runs every technique over the same 94 stays in the same order, which is what makes the accuracies comparable. It stores one row per answer, so the results table ends up with 282 rows. Zero-shot and few-shot take about a minute each, and chain-of-thought takes about seven because it writes a paragraph before every answer. The notebook keeps more columns than the slide shows, including the reasoning, which helps when you want to read individual mistakes.</a:t>
+              <a:t>This runs every technique over the same 94 stays in the same order, which is what makes the accuracies comparable. It saves one row per answer, so you end up with 282 rows. Zero-shot and few-shot take about a minute each. Chain-of-thought takes about seven because it writes a whole paragraph before every answer. I kept the reasoning column because it's really helpful when you want to read through individual mistakes.</a:t>
             </a:r>
             <a:endParaRPr lang="en-US" dirty="0"/>
           </a:p>
@@ -1136,7 +1136,7 @@
           <a:p>
             <a:r>
               <a:rPr lang="en-US" dirty="0"/>
-              <a:t>This cell turns the raw answers into three numbers per technique. Each predicted code is mapped to a chapter with the same function from step 3, and an answer that failed to parse counts as wrong. Each code is also checked against the ICD-10 dictionary, which is the hallucination check from Practices 1 and 3. A model can invent a code like R07.99 that still lands in the right chapter, which is why invented codes are measured separately. The charts on the next slide come from cells 24 and 25.</a:t>
+              <a:t>This turns the raw answers into three numbers per technique. Each predicted code gets mapped to a chapter with the same function from step 3, and anything that failed to parse counts as wrong. I also check every code against the ICD-10 dictionary to catch ones the model made up. The model can invent something like R07.99 and still land in the right chapter, so I track invented codes separately. The charts on the next slide come from cells [17] and [18].</a:t>
             </a:r>
             <a:endParaRPr lang="en-US" dirty="0"/>
           </a:p>
@@ -1224,7 +1224,7 @@
           <a:p>
             <a:r>
               <a:rPr lang="en-US" dirty="0"/>
-              <a:t>Zero-shot reached 31% chapter accuracy, few-shot 30% and chain-of-thought 24%. For context, random guessing among 22 chapters scores under 5%, and always guessing Symptoms &amp; signs scores about 26%. So the model learned something from the triage text, but it only edges past the simplest baseline, and with 94 stays the 95% interval is about ±10 points. Few-shot cut invented codes from 49% to 43%, which suggests the examples teach the format more than the diagnosis. My reading is that the triage record itself limits accuracy, which a larger sample could test. The confusion matrix is for zero-shot, and its biggest error is 7 Symptoms stays labeled Circulatory.</a:t>
+              <a:t>Zero-shot got 31% chapter accuracy, few-shot got 30% and chain-of-thought got 24%. Random guessing across 22 chapters would get under 5%, and always guessing Symptoms &amp; signs gets about 26%. So the model is picking up something from the triage text, but it barely beats the simplest baseline. With only 94 stays the 95% interval is about ±10 points, so I wouldn't read much into the gaps. The thing that surprised me is that few-shot didn't help accuracy. It did cut invented codes from 49% to 43%, so I think the examples teach the format more than the diagnosis. The confusion matrix is for zero-shot, and the biggest miss is 7 Symptoms stays it called Circulatory.</a:t>
             </a:r>
             <a:endParaRPr lang="en-US" dirty="0"/>
           </a:p>
@@ -1312,7 +1312,7 @@
           <a:p>
             <a:r>
               <a:rPr lang="en-US" dirty="0"/>
-              <a:t>The accuracy is low, and part of that comes from the labels. The ED records a billing code after the workup, and when it cannot confirm a cause it records only the symptom, so a reasonable answer can still count as wrong. As lectures 10.2 and 8.2 discuss, a tool like this could only draft a chapter for a clinician to check, with human review to guard against automation bias. Natural next steps are more cases from the credentialed data, a larger local model, other MIMIC-IV-ED tables such as medrecon, or giving the model an ICD-10 lookup.</a:t>
+              <a:t>The accuracy is low, and I think a good part of that is the labels. The ED records a billing code after the workup, and if they can't confirm a cause they just code the symptom. So a pretty reasonable answer can still get marked wrong. Lectures 10.2 and 8.2 cover this well. At most a tool like this could draft a category for a clinician to check, and you'd want human review to guard against automation bias. If I kept going, I'd try more cases from the credentialed data, a bigger local model, other MIMIC-IV-ED tables like medrecon, or giving the model an ICD-10 lookup.</a:t>
             </a:r>
             <a:endParaRPr lang="en-US" dirty="0"/>
           </a:p>
@@ -1400,7 +1400,7 @@
           <a:p>
             <a:r>
               <a:rPr lang="en-US" dirty="0"/>
-              <a:t>These are the sources for the data, the model and the methods. The demo data is openly licensed, which is why it can be committed to the repo. Even with temperature 0 and a fixed seed, LLM output can vary slightly across hardware and Ollama versions, so a peer's numbers may not match these exactly. The overall pattern should hold.</a:t>
+              <a:t>These are the sources for the data, the model and the methods. The demo data is openly licensed, which is why I could commit it to the repo. One heads up is that even with temperature 0 and a fixed seed, LLM output can shift a little across hardware and Ollama versions. Your numbers might not match mine exactly, but the overall pattern should hold.</a:t>
             </a:r>
             <a:endParaRPr lang="en-US" dirty="0"/>
           </a:p>
@@ -1488,7 +1488,7 @@
           <a:p>
             <a:r>
               <a:rPr lang="en-US" dirty="0"/>
-              <a:t>This slide sets up the question the tutorial tries to answer. A triage record is the first structured note in an ED visit, and it holds the chief complaint, vitals, pain score, arrival mode and ESI acuity, where 1 is the most urgent and 5 the least. The diagnosis on the right is only recorded hours later, after labs, imaging and an exam. A draft category at triage could help a clinician think ahead or route the case, but it is a suggestion to check and never a replacement for clinical judgment. The record shown is one real stay from the demo data.</a:t>
+              <a:t>A triage record is basically the first structured note you get in an ED visit. It has the chief complaint, vitals, pain score, how the patient arrived and the ESI acuity, where 1 is the most urgent and 5 is the least. The diagnosis on the right doesn't get recorded until hours later, after labs and imaging and an exam. I wanted to see whether a model could give a rough category up front. That would only ever be a suggestion for a clinician to check. This is a real stay from the demo data.</a:t>
             </a:r>
             <a:endParaRPr lang="en-US" dirty="0"/>
           </a:p>
@@ -1576,7 +1576,7 @@
           <a:p>
             <a:r>
               <a:rPr lang="en-US" dirty="0"/>
-              <a:t>This is the plan for the rest of the tutorial. Each of the seven steps matches a numbered section of the notebook, so you can follow along cell by cell. Steps 1 through 4 set up the model and prepare the data. Step 5 is where the LLM work happens, so it gets four slides. Steps 6 and 7 score the answers and read the results. The aim is to leave with a workflow you can reuse on other MIMIC tables, not just a single accuracy number.</a:t>
+              <a:t>This is the plan for the rest of the deck. The seven steps line up with the numbered sections in the notebook, so you can follow along cell by cell. Steps 1 to 4 are setup and data prep. Step 5 is where the actual LLM work happens, so it gets four slides. Steps 6 and 7 are scoring and results. I'm hoping you walk away with a workflow you can reuse on other MIMIC tables, not just one accuracy number.</a:t>
             </a:r>
             <a:endParaRPr lang="en-US" dirty="0"/>
           </a:p>
@@ -1664,7 +1664,7 @@
           <a:p>
             <a:r>
               <a:rPr lang="en-US" dirty="0"/>
-              <a:t>This slide shows how the tutorial extends the course rather than repeating it. From the course - Zero-shot, few-shot and chain-of-thought prompting (Module 13, Practices 1–2) - Checking JSON output with Pydantic (Practice 2) New here - The MIMIC-IV-ED triage table, which the course did not use - Measuring whether each technique actually helps</a:t>
+              <a:t>I wanted this to build on the course instead of just repeating it. From the course - Zero-shot, few-shot and chain-of-thought prompting (Module 13, Practices 1–2) - Checking JSON output with Pydantic (Practice 2) New here - The MIMIC-IV-ED triage table, which we didn't use in class - Actually measuring whether each technique helps</a:t>
             </a:r>
             <a:endParaRPr lang="en-US" dirty="0"/>
           </a:p>
@@ -1752,7 +1752,7 @@
           <a:p>
             <a:r>
               <a:rPr lang="en-US" dirty="0"/>
-              <a:t>This slide gets the code and a clean Python environment onto your machine, and the next slide covers Ollama. You need git and Python 3 installed first. The demo CSVs are already committed under data because their open license allows it, so cloning is the only download. Make the virtual environment inside the repo folder so the notebook installs its packages there. If you use uv instead of venv, add --seed, because otherwise the environment has no pip and the install cell fails. In VS Code, open the repo folder and choose the .venv kernel.</a:t>
+              <a:t>This slide gets the code and a Python environment onto your machine. Ollama is on the next slide. You'll need git and Python 3 installed first. The demo CSVs are already in the repo under data since the license allows it, so cloning is the only download. Make the virtual environment inside the repo folder so the notebook installs packages into it. If you use uv, add --seed or you won't have pip and the install cell will fail. I learned that one the hard way. In VS Code, open the repo folder and pick the .venv kernel.</a:t>
             </a:r>
             <a:endParaRPr lang="en-US" dirty="0"/>
           </a:p>
@@ -1840,7 +1840,7 @@
           <a:p>
             <a:r>
               <a:rPr lang="en-US" dirty="0"/>
-              <a:t>Ollama is the program that runs the model on your laptop, and the notebook talks to it through the ollama Python package. On macOS and Windows the installer runs Ollama in the background as an app, and on Linux the install script sets it up as a service. Pulling the model ahead of time is optional, but it lets you watch the 2 GB download finish before you start. A full run takes about 10 minutes, mostly for chain-of-thought. If anything hangs, check that the Ollama app is still running.</a:t>
+              <a:t>Ollama is what actually runs the model on your laptop. The notebook talks to it through the ollama Python package. On Mac and Windows the installer runs it in the background as an app, and on Linux the script sets it up as a service. You don't have to pull the model ahead of time, but I'd do it so you can watch the 2 GB download finish before you start. A full run takes about 10 minutes, and most of that is chain-of-thought. If anything hangs, check that Ollama is still running.</a:t>
             </a:r>
             <a:endParaRPr lang="en-US" dirty="0"/>
           </a:p>
@@ -1928,7 +1928,7 @@
           <a:p>
             <a:r>
               <a:rPr lang="en-US" dirty="0"/>
-              <a:t>We run a small open model locally because the MIMIC data use agreement does not allow sending records to an outside API like ChatGPT. Because of that, the same code would also work on the full credentialed data. The config cell is the one place to change settings. MODEL picks the model, N_CASES caps how many stays are scored and SEED keeps runs repeatable. The printed details and digest let a peer confirm they pulled the same weights. If the pull hangs, check that the Ollama app is running.</a:t>
+              <a:t>I'm running the model locally because the MIMIC data use agreement doesn't let you send records to an outside API like ChatGPT. A nice side effect is that the same code would work on the full credentialed data. The config cell is the only place you should need to change anything. MODEL picks the model, N_CASES caps how many stays get scored and SEED keeps runs repeatable. The printed details let you check that you pulled the same weights I did.</a:t>
             </a:r>
             <a:endParaRPr lang="en-US" dirty="0"/>
           </a:p>
@@ -2016,7 +2016,7 @@
           <a:p>
             <a:r>
               <a:rPr lang="en-US" dirty="0"/>
-              <a:t>This step builds one row per ED stay from five demo tables. Fields known at triage go beyond the triage table, so sex and arrival transport come from edstays and age comes from patients. The label is the primary diagnosis, which is the one with seq_num 1. We drop disposition, outtime, hadm_id and the other diagnoses, because they are recorded after the diagnosis and would leak the answer. Age is approximate, since anchor_age is the patient's age in their anchor year. The join on the slide leaves out the column lists, which the notebook includes.</a:t>
+              <a:t>Here I build one row per ED stay from five demo tables. What you know at triage isn't only in the triage table, so sex and arrival transport come from edstays and age comes from patients. The label is the primary diagnosis, which is the one with seq_num 1. I leave out disposition, outtime, hadm_id and the other diagnoses because they're recorded later and would give the answer away. Age is approximate since anchor_age is the patient's age in their anchor year. Picking the columns before each merge also keeps pandas from creating duplicate subject_id and gender columns.</a:t>
             </a:r>
             <a:endParaRPr lang="en-US" dirty="0"/>
           </a:p>
@@ -2104,7 +2104,7 @@
           <a:p>
             <a:r>
               <a:rPr lang="en-US" dirty="0"/>
-              <a:t>We score at the ICD-10 chapter level because an exact code is too fine-grained to guess from a triage record. The 22 chapters match the grouping from lecture 4.1 and Series 11. The function takes the first three characters of a code and finds the chapter whose range contains them, and the notebook version also rejects malformed codes. We keep only ICD-10 stays because the model answers in ICD-10. Notice that Symptoms &amp; signs is about a third of the stays, which is the baseline to remember when we read the accuracy later.</a:t>
+              <a:t>I score at the chapter level because guessing the exact code from a triage record is way too fine-grained. The 22 chapters are the standard top-level grouping in ICD-10-CM. The function takes the first three characters of a code and finds which chapter range they fall in. Anything that doesn't look like a real code comes back as Unknown. I only keep ICD-10 stays because that's what the model answers in. Symptoms &amp; signs is 41 of the 122 stays here and 24 of the 94 I score, so just guessing it every time gets you 26%. Keep that number in mind for the results.</a:t>
             </a:r>
             <a:endParaRPr lang="en-US" dirty="0"/>
           </a:p>
@@ -2231,9 +2231,9 @@
                 <a:solidFill>
                   <a:srgbClr val="17212B"/>
                 </a:solidFill>
-                <a:latin typeface="IBM Plex Sans" pitchFamily="34" charset="0"/>
-                <a:ea typeface="IBM Plex Sans" pitchFamily="34" charset="-122"/>
-                <a:cs typeface="IBM Plex Sans" pitchFamily="34" charset="-120"/>
+                <a:latin typeface="Arial" pitchFamily="34" charset="0"/>
+                <a:ea typeface="Arial" pitchFamily="34" charset="-122"/>
+                <a:cs typeface="Arial" pitchFamily="34" charset="-120"/>
               </a:defRPr>
             </a:lvl1pPr>
           </a:lstStyle>
@@ -2279,9 +2279,9 @@
                 <a:solidFill>
                   <a:srgbClr val="17212B"/>
                 </a:solidFill>
-                <a:latin typeface="IBM Plex Sans" pitchFamily="34" charset="0"/>
-                <a:ea typeface="IBM Plex Sans" pitchFamily="34" charset="-122"/>
-                <a:cs typeface="IBM Plex Sans" pitchFamily="34" charset="-120"/>
+                <a:latin typeface="Arial" pitchFamily="34" charset="0"/>
+                <a:ea typeface="Arial" pitchFamily="34" charset="-122"/>
+                <a:cs typeface="Arial" pitchFamily="34" charset="-120"/>
               </a:defRPr>
             </a:lvl1pPr>
           </a:lstStyle>
@@ -2359,9 +2359,9 @@
                 <a:solidFill>
                   <a:srgbClr val="17212B"/>
                 </a:solidFill>
-                <a:latin typeface="IBM Plex Sans" pitchFamily="34" charset="0"/>
-                <a:ea typeface="IBM Plex Sans" pitchFamily="34" charset="-122"/>
-                <a:cs typeface="IBM Plex Sans" pitchFamily="34" charset="-120"/>
+                <a:latin typeface="Arial" pitchFamily="34" charset="0"/>
+                <a:ea typeface="Arial" pitchFamily="34" charset="-122"/>
+                <a:cs typeface="Arial" pitchFamily="34" charset="-120"/>
               </a:defRPr>
             </a:lvl1pPr>
           </a:lstStyle>
@@ -2407,9 +2407,9 @@
                 <a:solidFill>
                   <a:srgbClr val="17212B"/>
                 </a:solidFill>
-                <a:latin typeface="IBM Plex Sans" pitchFamily="34" charset="0"/>
-                <a:ea typeface="IBM Plex Sans" pitchFamily="34" charset="-122"/>
-                <a:cs typeface="IBM Plex Sans" pitchFamily="34" charset="-120"/>
+                <a:latin typeface="Arial" pitchFamily="34" charset="0"/>
+                <a:ea typeface="Arial" pitchFamily="34" charset="-122"/>
+                <a:cs typeface="Arial" pitchFamily="34" charset="-120"/>
               </a:defRPr>
             </a:lvl1pPr>
           </a:lstStyle>
@@ -2743,9 +2743,9 @@
                 <a:solidFill>
                   <a:srgbClr val="6ECFC5"/>
                 </a:solidFill>
-                <a:latin typeface="IBM Plex Sans" pitchFamily="34" charset="0"/>
-                <a:ea typeface="IBM Plex Sans" pitchFamily="34" charset="-122"/>
-                <a:cs typeface="IBM Plex Sans" pitchFamily="34" charset="-120"/>
+                <a:latin typeface="Arial" pitchFamily="34" charset="0"/>
+                <a:ea typeface="Arial" pitchFamily="34" charset="-122"/>
+                <a:cs typeface="Arial" pitchFamily="34" charset="-120"/>
               </a:rPr>
               <a:t>MIMIC-IV-ED DEMO TRIAGE RECORDS</a:t>
             </a:r>
@@ -2789,9 +2789,9 @@
                 <a:solidFill>
                   <a:srgbClr val="F2F0EA"/>
                 </a:solidFill>
-                <a:latin typeface="IBM Plex Sans" pitchFamily="34" charset="0"/>
-                <a:ea typeface="IBM Plex Sans" pitchFamily="34" charset="-122"/>
-                <a:cs typeface="IBM Plex Sans" pitchFamily="34" charset="-120"/>
+                <a:latin typeface="Arial" pitchFamily="34" charset="0"/>
+                <a:ea typeface="Arial" pitchFamily="34" charset="-122"/>
+                <a:cs typeface="Arial" pitchFamily="34" charset="-120"/>
               </a:rPr>
               <a:t>Classifying ED visits with an LLM</a:t>
             </a:r>
@@ -2833,9 +2833,9 @@
                 <a:solidFill>
                   <a:srgbClr val="C8CED3"/>
                 </a:solidFill>
-                <a:latin typeface="IBM Plex Sans" pitchFamily="34" charset="0"/>
-                <a:ea typeface="IBM Plex Sans" pitchFamily="34" charset="-122"/>
-                <a:cs typeface="IBM Plex Sans" pitchFamily="34" charset="-120"/>
+                <a:latin typeface="Arial" pitchFamily="34" charset="0"/>
+                <a:ea typeface="Arial" pitchFamily="34" charset="-122"/>
+                <a:cs typeface="Arial" pitchFamily="34" charset="-120"/>
               </a:rPr>
               <a:t>Self-Learning Tutorial</a:t>
             </a:r>
@@ -2853,9 +2853,9 @@
                 <a:solidFill>
                   <a:srgbClr val="C8CED3"/>
                 </a:solidFill>
-                <a:latin typeface="IBM Plex Sans" pitchFamily="34" charset="0"/>
-                <a:ea typeface="IBM Plex Sans" pitchFamily="34" charset="-122"/>
-                <a:cs typeface="IBM Plex Sans" pitchFamily="34" charset="-120"/>
+                <a:latin typeface="Arial" pitchFamily="34" charset="0"/>
+                <a:ea typeface="Arial" pitchFamily="34" charset="-122"/>
+                <a:cs typeface="Arial" pitchFamily="34" charset="-120"/>
               </a:rPr>
               <a:t>AI in Healthcare</a:t>
             </a:r>
@@ -2897,9 +2897,9 @@
                 <a:solidFill>
                   <a:srgbClr val="8F9AA4"/>
                 </a:solidFill>
-                <a:latin typeface="IBM Plex Sans" pitchFamily="34" charset="0"/>
-                <a:ea typeface="IBM Plex Sans" pitchFamily="34" charset="-122"/>
-                <a:cs typeface="IBM Plex Sans" pitchFamily="34" charset="-120"/>
+                <a:latin typeface="Arial" pitchFamily="34" charset="0"/>
+                <a:ea typeface="Arial" pitchFamily="34" charset="-122"/>
+                <a:cs typeface="Arial" pitchFamily="34" charset="-120"/>
               </a:rPr>
               <a:t>Built with Python, Ollama (qwen2.5:3b) and Pydantic</a:t>
             </a:r>
@@ -2973,9 +2973,9 @@
                 <a:solidFill>
                   <a:srgbClr val="0E6E6C"/>
                 </a:solidFill>
-                <a:latin typeface="IBM Plex Sans" pitchFamily="34" charset="0"/>
-                <a:ea typeface="IBM Plex Sans" pitchFamily="34" charset="-122"/>
-                <a:cs typeface="IBM Plex Sans" pitchFamily="34" charset="-120"/>
+                <a:latin typeface="Arial" pitchFamily="34" charset="0"/>
+                <a:ea typeface="Arial" pitchFamily="34" charset="-122"/>
+                <a:cs typeface="Arial" pitchFamily="34" charset="-120"/>
               </a:rPr>
               <a:t>PROMPT (STEP 4 OF 7)</a:t>
             </a:r>
@@ -3019,9 +3019,9 @@
                 <a:solidFill>
                   <a:srgbClr val="17212B"/>
                 </a:solidFill>
-                <a:latin typeface="IBM Plex Sans" pitchFamily="34" charset="0"/>
-                <a:ea typeface="IBM Plex Sans" pitchFamily="34" charset="-122"/>
-                <a:cs typeface="IBM Plex Sans" pitchFamily="34" charset="-120"/>
+                <a:latin typeface="Arial" pitchFamily="34" charset="0"/>
+                <a:ea typeface="Arial" pitchFamily="34" charset="-122"/>
+                <a:cs typeface="Arial" pitchFamily="34" charset="-120"/>
               </a:rPr>
               <a:t>Each triage row becomes a short text summary that the model can read rather than a dataframe</a:t>
             </a:r>
@@ -3086,9 +3086,9 @@
                 <a:solidFill>
                   <a:srgbClr val="3A4651"/>
                 </a:solidFill>
-                <a:latin typeface="IBM Plex Sans" pitchFamily="34" charset="0"/>
-                <a:ea typeface="IBM Plex Sans" pitchFamily="34" charset="-122"/>
-                <a:cs typeface="IBM Plex Sans" pitchFamily="34" charset="-120"/>
+                <a:latin typeface="Arial" pitchFamily="34" charset="0"/>
+                <a:ea typeface="Arial" pitchFamily="34" charset="-122"/>
+                <a:cs typeface="Arial" pitchFamily="34" charset="-120"/>
               </a:rPr>
               <a:t>Missing values are written as "not recorded" instead of "nan" so that blanks don't confuse the model</a:t>
             </a:r>
@@ -3153,9 +3153,9 @@
                 <a:solidFill>
                   <a:srgbClr val="17212B"/>
                 </a:solidFill>
-                <a:latin typeface="IBM Plex Sans" pitchFamily="34" charset="0"/>
-                <a:ea typeface="IBM Plex Sans" pitchFamily="34" charset="-122"/>
-                <a:cs typeface="IBM Plex Sans" pitchFamily="34" charset="-120"/>
+                <a:latin typeface="Arial" pitchFamily="34" charset="0"/>
+                <a:ea typeface="Arial" pitchFamily="34" charset="-122"/>
+                <a:cs typeface="Arial" pitchFamily="34" charset="-120"/>
               </a:rPr>
               <a:t>Turn a row into text</a:t>
             </a:r>
@@ -3197,9 +3197,9 @@
                 <a:solidFill>
                   <a:srgbClr val="17212B"/>
                 </a:solidFill>
-                <a:latin typeface="IBM Plex Mono" pitchFamily="49" charset="0"/>
-                <a:ea typeface="IBM Plex Mono" pitchFamily="49" charset="-122"/>
-                <a:cs typeface="IBM Plex Mono" pitchFamily="49" charset="-120"/>
+                <a:latin typeface="Courier New" pitchFamily="49" charset="0"/>
+                <a:ea typeface="Courier New" pitchFamily="49" charset="-122"/>
+                <a:cs typeface="Courier New" pitchFamily="49" charset="-120"/>
               </a:rPr>
               <a:t>def show(x, unit=""):</a:t>
             </a:r>
@@ -3217,9 +3217,9 @@
                 <a:solidFill>
                   <a:srgbClr val="17212B"/>
                 </a:solidFill>
-                <a:latin typeface="IBM Plex Mono" pitchFamily="49" charset="0"/>
-                <a:ea typeface="IBM Plex Mono" pitchFamily="49" charset="-122"/>
-                <a:cs typeface="IBM Plex Mono" pitchFamily="49" charset="-120"/>
+                <a:latin typeface="Courier New" pitchFamily="49" charset="0"/>
+                <a:ea typeface="Courier New" pitchFamily="49" charset="-122"/>
+                <a:cs typeface="Courier New" pitchFamily="49" charset="-120"/>
               </a:rPr>
               <a:t>    return "not recorded" if pd.isna(x) else f"{x}{unit}"</a:t>
             </a:r>
@@ -3237,9 +3237,9 @@
                 <a:solidFill>
                   <a:srgbClr val="17212B"/>
                 </a:solidFill>
-                <a:latin typeface="IBM Plex Mono" pitchFamily="49" charset="0"/>
-                <a:ea typeface="IBM Plex Mono" pitchFamily="49" charset="-122"/>
-                <a:cs typeface="IBM Plex Mono" pitchFamily="49" charset="-120"/>
+                <a:latin typeface="Courier New" pitchFamily="49" charset="0"/>
+                <a:ea typeface="Courier New" pitchFamily="49" charset="-122"/>
+                <a:cs typeface="Courier New" pitchFamily="49" charset="-120"/>
               </a:rPr>
               <a:t>def make_prompt(row) -&gt; str:</a:t>
             </a:r>
@@ -3257,9 +3257,9 @@
                 <a:solidFill>
                   <a:srgbClr val="17212B"/>
                 </a:solidFill>
-                <a:latin typeface="IBM Plex Mono" pitchFamily="49" charset="0"/>
-                <a:ea typeface="IBM Plex Mono" pitchFamily="49" charset="-122"/>
-                <a:cs typeface="IBM Plex Mono" pitchFamily="49" charset="-120"/>
+                <a:latin typeface="Courier New" pitchFamily="49" charset="0"/>
+                <a:ea typeface="Courier New" pitchFamily="49" charset="-122"/>
+                <a:cs typeface="Courier New" pitchFamily="49" charset="-120"/>
               </a:rPr>
               <a:t>    sex = {"M": "male", "F": "female"}.get(row.gender,</a:t>
             </a:r>
@@ -3277,9 +3277,9 @@
                 <a:solidFill>
                   <a:srgbClr val="17212B"/>
                 </a:solidFill>
-                <a:latin typeface="IBM Plex Mono" pitchFamily="49" charset="0"/>
-                <a:ea typeface="IBM Plex Mono" pitchFamily="49" charset="-122"/>
-                <a:cs typeface="IBM Plex Mono" pitchFamily="49" charset="-120"/>
+                <a:latin typeface="Courier New" pitchFamily="49" charset="0"/>
+                <a:ea typeface="Courier New" pitchFamily="49" charset="-122"/>
+                <a:cs typeface="Courier New" pitchFamily="49" charset="-120"/>
               </a:rPr>
               <a:t>                                           "sex not recorded")</a:t>
             </a:r>
@@ -3297,9 +3297,9 @@
                 <a:solidFill>
                   <a:srgbClr val="17212B"/>
                 </a:solidFill>
-                <a:latin typeface="IBM Plex Mono" pitchFamily="49" charset="0"/>
-                <a:ea typeface="IBM Plex Mono" pitchFamily="49" charset="-122"/>
-                <a:cs typeface="IBM Plex Mono" pitchFamily="49" charset="-120"/>
+                <a:latin typeface="Courier New" pitchFamily="49" charset="0"/>
+                <a:ea typeface="Courier New" pitchFamily="49" charset="-122"/>
+                <a:cs typeface="Courier New" pitchFamily="49" charset="-120"/>
               </a:rPr>
               <a:t>    return (f"Age {row.anchor_age}, {sex}. "</a:t>
             </a:r>
@@ -3317,9 +3317,9 @@
                 <a:solidFill>
                   <a:srgbClr val="17212B"/>
                 </a:solidFill>
-                <a:latin typeface="IBM Plex Mono" pitchFamily="49" charset="0"/>
-                <a:ea typeface="IBM Plex Mono" pitchFamily="49" charset="-122"/>
-                <a:cs typeface="IBM Plex Mono" pitchFamily="49" charset="-120"/>
+                <a:latin typeface="Courier New" pitchFamily="49" charset="0"/>
+                <a:ea typeface="Courier New" pitchFamily="49" charset="-122"/>
+                <a:cs typeface="Courier New" pitchFamily="49" charset="-120"/>
               </a:rPr>
               <a:t>            f"Arrived by {show(row.arrival_transport).lower()}.\n"</a:t>
             </a:r>
@@ -3337,9 +3337,9 @@
                 <a:solidFill>
                   <a:srgbClr val="17212B"/>
                 </a:solidFill>
-                <a:latin typeface="IBM Plex Mono" pitchFamily="49" charset="0"/>
-                <a:ea typeface="IBM Plex Mono" pitchFamily="49" charset="-122"/>
-                <a:cs typeface="IBM Plex Mono" pitchFamily="49" charset="-120"/>
+                <a:latin typeface="Courier New" pitchFamily="49" charset="0"/>
+                <a:ea typeface="Courier New" pitchFamily="49" charset="-122"/>
+                <a:cs typeface="Courier New" pitchFamily="49" charset="-120"/>
               </a:rPr>
               <a:t>            f'Chief complaint: "{show(row.chiefcomplaint)}"\n'</a:t>
             </a:r>
@@ -3357,9 +3357,9 @@
                 <a:solidFill>
                   <a:srgbClr val="17212B"/>
                 </a:solidFill>
-                <a:latin typeface="IBM Plex Mono" pitchFamily="49" charset="0"/>
-                <a:ea typeface="IBM Plex Mono" pitchFamily="49" charset="-122"/>
-                <a:cs typeface="IBM Plex Mono" pitchFamily="49" charset="-120"/>
+                <a:latin typeface="Courier New" pitchFamily="49" charset="0"/>
+                <a:ea typeface="Courier New" pitchFamily="49" charset="-122"/>
+                <a:cs typeface="Courier New" pitchFamily="49" charset="-120"/>
               </a:rPr>
               <a:t>            f"Triage vitals: T {show(row.temperature, '°F')}, "</a:t>
             </a:r>
@@ -3377,9 +3377,9 @@
                 <a:solidFill>
                   <a:srgbClr val="17212B"/>
                 </a:solidFill>
-                <a:latin typeface="IBM Plex Mono" pitchFamily="49" charset="0"/>
-                <a:ea typeface="IBM Plex Mono" pitchFamily="49" charset="-122"/>
-                <a:cs typeface="IBM Plex Mono" pitchFamily="49" charset="-120"/>
+                <a:latin typeface="Courier New" pitchFamily="49" charset="0"/>
+                <a:ea typeface="Courier New" pitchFamily="49" charset="-122"/>
+                <a:cs typeface="Courier New" pitchFamily="49" charset="-120"/>
               </a:rPr>
               <a:t>            f"HR {show(row.heartrate)}, RR {show(row.resprate)}, "</a:t>
             </a:r>
@@ -3397,9 +3397,9 @@
                 <a:solidFill>
                   <a:srgbClr val="17212B"/>
                 </a:solidFill>
-                <a:latin typeface="IBM Plex Mono" pitchFamily="49" charset="0"/>
-                <a:ea typeface="IBM Plex Mono" pitchFamily="49" charset="-122"/>
-                <a:cs typeface="IBM Plex Mono" pitchFamily="49" charset="-120"/>
+                <a:latin typeface="Courier New" pitchFamily="49" charset="0"/>
+                <a:ea typeface="Courier New" pitchFamily="49" charset="-122"/>
+                <a:cs typeface="Courier New" pitchFamily="49" charset="-120"/>
               </a:rPr>
               <a:t>            f"SpO2 {show(row.o2sat, '%')}, "</a:t>
             </a:r>
@@ -3417,9 +3417,9 @@
                 <a:solidFill>
                   <a:srgbClr val="17212B"/>
                 </a:solidFill>
-                <a:latin typeface="IBM Plex Mono" pitchFamily="49" charset="0"/>
-                <a:ea typeface="IBM Plex Mono" pitchFamily="49" charset="-122"/>
-                <a:cs typeface="IBM Plex Mono" pitchFamily="49" charset="-120"/>
+                <a:latin typeface="Courier New" pitchFamily="49" charset="0"/>
+                <a:ea typeface="Courier New" pitchFamily="49" charset="-122"/>
+                <a:cs typeface="Courier New" pitchFamily="49" charset="-120"/>
               </a:rPr>
               <a:t>            f"BP {show(row.sbp)}/{show(row.dbp)}. "</a:t>
             </a:r>
@@ -3437,9 +3437,9 @@
                 <a:solidFill>
                   <a:srgbClr val="17212B"/>
                 </a:solidFill>
-                <a:latin typeface="IBM Plex Mono" pitchFamily="49" charset="0"/>
-                <a:ea typeface="IBM Plex Mono" pitchFamily="49" charset="-122"/>
-                <a:cs typeface="IBM Plex Mono" pitchFamily="49" charset="-120"/>
+                <a:latin typeface="Courier New" pitchFamily="49" charset="0"/>
+                <a:ea typeface="Courier New" pitchFamily="49" charset="-122"/>
+                <a:cs typeface="Courier New" pitchFamily="49" charset="-120"/>
               </a:rPr>
               <a:t>            f"Pain {show(row.pain)}/10. "</a:t>
             </a:r>
@@ -3457,9 +3457,9 @@
                 <a:solidFill>
                   <a:srgbClr val="17212B"/>
                 </a:solidFill>
-                <a:latin typeface="IBM Plex Mono" pitchFamily="49" charset="0"/>
-                <a:ea typeface="IBM Plex Mono" pitchFamily="49" charset="-122"/>
-                <a:cs typeface="IBM Plex Mono" pitchFamily="49" charset="-120"/>
+                <a:latin typeface="Courier New" pitchFamily="49" charset="0"/>
+                <a:ea typeface="Courier New" pitchFamily="49" charset="-122"/>
+                <a:cs typeface="Courier New" pitchFamily="49" charset="-120"/>
               </a:rPr>
               <a:t>            f"ESI acuity {show(row.acuity)}.")</a:t>
             </a:r>
@@ -3524,9 +3524,9 @@
                 <a:solidFill>
                   <a:srgbClr val="0E6E6C"/>
                 </a:solidFill>
-                <a:latin typeface="IBM Plex Sans" pitchFamily="34" charset="0"/>
-                <a:ea typeface="IBM Plex Sans" pitchFamily="34" charset="-122"/>
-                <a:cs typeface="IBM Plex Sans" pitchFamily="34" charset="-120"/>
+                <a:latin typeface="Arial" pitchFamily="34" charset="0"/>
+                <a:ea typeface="Arial" pitchFamily="34" charset="-122"/>
+                <a:cs typeface="Arial" pitchFamily="34" charset="-120"/>
               </a:rPr>
               <a:t>YOU SHOULD SEE</a:t>
             </a:r>
@@ -3568,9 +3568,9 @@
                 <a:solidFill>
                   <a:srgbClr val="17212B"/>
                 </a:solidFill>
-                <a:latin typeface="IBM Plex Mono" pitchFamily="49" charset="0"/>
-                <a:ea typeface="IBM Plex Mono" pitchFamily="49" charset="-122"/>
-                <a:cs typeface="IBM Plex Mono" pitchFamily="49" charset="-120"/>
+                <a:latin typeface="Courier New" pitchFamily="49" charset="0"/>
+                <a:ea typeface="Courier New" pitchFamily="49" charset="-122"/>
+                <a:cs typeface="Courier New" pitchFamily="49" charset="-120"/>
               </a:rPr>
               <a:t>Age 83, female. Arrived by ambulance.</a:t>
             </a:r>
@@ -3588,9 +3588,9 @@
                 <a:solidFill>
                   <a:srgbClr val="17212B"/>
                 </a:solidFill>
-                <a:latin typeface="IBM Plex Mono" pitchFamily="49" charset="0"/>
-                <a:ea typeface="IBM Plex Mono" pitchFamily="49" charset="-122"/>
-                <a:cs typeface="IBM Plex Mono" pitchFamily="49" charset="-120"/>
+                <a:latin typeface="Courier New" pitchFamily="49" charset="0"/>
+                <a:ea typeface="Courier New" pitchFamily="49" charset="-122"/>
+                <a:cs typeface="Courier New" pitchFamily="49" charset="-120"/>
               </a:rPr>
               <a:t>Chief complaint: "Syncope, Transfer"</a:t>
             </a:r>
@@ -3608,9 +3608,9 @@
                 <a:solidFill>
                   <a:srgbClr val="17212B"/>
                 </a:solidFill>
-                <a:latin typeface="IBM Plex Mono" pitchFamily="49" charset="0"/>
-                <a:ea typeface="IBM Plex Mono" pitchFamily="49" charset="-122"/>
-                <a:cs typeface="IBM Plex Mono" pitchFamily="49" charset="-120"/>
+                <a:latin typeface="Courier New" pitchFamily="49" charset="0"/>
+                <a:ea typeface="Courier New" pitchFamily="49" charset="-122"/>
+                <a:cs typeface="Courier New" pitchFamily="49" charset="-120"/>
               </a:rPr>
               <a:t>Triage vitals: T 97.7°F, HR 74.0, RR 20.0, SpO2 96.0%, BP 133.0/65.0. Pain 3/10. ESI acuity 2.0.</a:t>
             </a:r>
@@ -3652,9 +3652,9 @@
                 <a:solidFill>
                   <a:srgbClr val="17212B"/>
                 </a:solidFill>
-                <a:latin typeface="IBM Plex Sans" pitchFamily="34" charset="0"/>
-                <a:ea typeface="IBM Plex Sans" pitchFamily="34" charset="-122"/>
-                <a:cs typeface="IBM Plex Sans" pitchFamily="34" charset="-120"/>
+                <a:latin typeface="Arial" pitchFamily="34" charset="0"/>
+                <a:ea typeface="Arial" pitchFamily="34" charset="-122"/>
+                <a:cs typeface="Arial" pitchFamily="34" charset="-120"/>
               </a:rPr>
               <a:t>The test cell after it should print "prompt tests pass".</a:t>
             </a:r>
@@ -3696,11 +3696,11 @@
                 <a:solidFill>
                   <a:srgbClr val="5C6772"/>
                 </a:solidFill>
-                <a:latin typeface="IBM Plex Sans" pitchFamily="34" charset="0"/>
-                <a:ea typeface="IBM Plex Sans" pitchFamily="34" charset="-122"/>
-                <a:cs typeface="IBM Plex Sans" pitchFamily="34" charset="-120"/>
-              </a:rPr>
-              <a:t>Notebook cells 15–16</a:t>
+                <a:latin typeface="Arial" pitchFamily="34" charset="0"/>
+                <a:ea typeface="Arial" pitchFamily="34" charset="-122"/>
+                <a:cs typeface="Arial" pitchFamily="34" charset="-120"/>
+              </a:rPr>
+              <a:t>Notebook cells [10]–[11]</a:t>
             </a:r>
             <a:endParaRPr lang="en-US" sz="1200" dirty="0"/>
           </a:p>
@@ -3740,9 +3740,9 @@
                 <a:solidFill>
                   <a:srgbClr val="5C6772"/>
                 </a:solidFill>
-                <a:latin typeface="IBM Plex Sans" pitchFamily="34" charset="0"/>
-                <a:ea typeface="IBM Plex Sans" pitchFamily="34" charset="-122"/>
-                <a:cs typeface="IBM Plex Sans" pitchFamily="34" charset="-120"/>
+                <a:latin typeface="Arial" pitchFamily="34" charset="0"/>
+                <a:ea typeface="Arial" pitchFamily="34" charset="-122"/>
+                <a:cs typeface="Arial" pitchFamily="34" charset="-120"/>
               </a:rPr>
               <a:t>10</a:t>
             </a:r>
@@ -3816,9 +3816,9 @@
                 <a:solidFill>
                   <a:srgbClr val="0E6E6C"/>
                 </a:solidFill>
-                <a:latin typeface="IBM Plex Sans" pitchFamily="34" charset="0"/>
-                <a:ea typeface="IBM Plex Sans" pitchFamily="34" charset="-122"/>
-                <a:cs typeface="IBM Plex Sans" pitchFamily="34" charset="-120"/>
+                <a:latin typeface="Arial" pitchFamily="34" charset="0"/>
+                <a:ea typeface="Arial" pitchFamily="34" charset="-122"/>
+                <a:cs typeface="Arial" pitchFamily="34" charset="-120"/>
               </a:rPr>
               <a:t>ASK THE MODEL (STEP 5 OF 7)</a:t>
             </a:r>
@@ -3862,9 +3862,9 @@
                 <a:solidFill>
                   <a:srgbClr val="17212B"/>
                 </a:solidFill>
-                <a:latin typeface="IBM Plex Sans" pitchFamily="34" charset="0"/>
-                <a:ea typeface="IBM Plex Sans" pitchFamily="34" charset="-122"/>
-                <a:cs typeface="IBM Plex Sans" pitchFamily="34" charset="-120"/>
+                <a:latin typeface="Arial" pitchFamily="34" charset="0"/>
+                <a:ea typeface="Arial" pitchFamily="34" charset="-122"/>
+                <a:cs typeface="Arial" pitchFamily="34" charset="-120"/>
               </a:rPr>
               <a:t>Before running it, here is how the three prompting techniques differ</a:t>
             </a:r>
@@ -3929,9 +3929,9 @@
                 <a:solidFill>
                   <a:srgbClr val="3A4651"/>
                 </a:solidFill>
-                <a:latin typeface="IBM Plex Sans" pitchFamily="34" charset="0"/>
-                <a:ea typeface="IBM Plex Sans" pitchFamily="34" charset="-122"/>
-                <a:cs typeface="IBM Plex Sans" pitchFamily="34" charset="-120"/>
+                <a:latin typeface="Arial" pitchFamily="34" charset="0"/>
+                <a:ea typeface="Arial" pitchFamily="34" charset="-122"/>
+                <a:cs typeface="Arial" pitchFamily="34" charset="-120"/>
               </a:rPr>
               <a:t>Each technique changes only what the model sees before the question, so their scores can be compared directly</a:t>
             </a:r>
@@ -3996,9 +3996,9 @@
                 <a:solidFill>
                   <a:srgbClr val="17212B"/>
                 </a:solidFill>
-                <a:latin typeface="IBM Plex Sans" pitchFamily="34" charset="0"/>
-                <a:ea typeface="IBM Plex Sans" pitchFamily="34" charset="-122"/>
-                <a:cs typeface="IBM Plex Sans" pitchFamily="34" charset="-120"/>
+                <a:latin typeface="Arial" pitchFamily="34" charset="0"/>
+                <a:ea typeface="Arial" pitchFamily="34" charset="-122"/>
+                <a:cs typeface="Arial" pitchFamily="34" charset="-120"/>
               </a:rPr>
               <a:t>Zero-shot</a:t>
             </a:r>
@@ -4040,9 +4040,9 @@
                 <a:solidFill>
                   <a:srgbClr val="17212B"/>
                 </a:solidFill>
-                <a:latin typeface="IBM Plex Sans" pitchFamily="34" charset="0"/>
-                <a:ea typeface="IBM Plex Sans" pitchFamily="34" charset="-122"/>
-                <a:cs typeface="IBM Plex Sans" pitchFamily="34" charset="-120"/>
+                <a:latin typeface="Arial" pitchFamily="34" charset="0"/>
+                <a:ea typeface="Arial" pitchFamily="34" charset="-122"/>
+                <a:cs typeface="Arial" pitchFamily="34" charset="-120"/>
               </a:rPr>
               <a:t>The model gets the instruction and the triage summary and nothing else.</a:t>
             </a:r>
@@ -4084,9 +4084,9 @@
                 <a:solidFill>
                   <a:srgbClr val="3A4651"/>
                 </a:solidFill>
-                <a:latin typeface="IBM Plex Sans" pitchFamily="34" charset="0"/>
-                <a:ea typeface="IBM Plex Sans" pitchFamily="34" charset="-122"/>
-                <a:cs typeface="IBM Plex Sans" pitchFamily="34" charset="-120"/>
+                <a:latin typeface="Arial" pitchFamily="34" charset="0"/>
+                <a:ea typeface="Arial" pitchFamily="34" charset="-122"/>
+                <a:cs typeface="Arial" pitchFamily="34" charset="-120"/>
               </a:rPr>
               <a:t>This is the baseline, because it shows what the model knows on its own.</a:t>
             </a:r>
@@ -4151,9 +4151,9 @@
                 <a:solidFill>
                   <a:srgbClr val="17212B"/>
                 </a:solidFill>
-                <a:latin typeface="IBM Plex Sans" pitchFamily="34" charset="0"/>
-                <a:ea typeface="IBM Plex Sans" pitchFamily="34" charset="-122"/>
-                <a:cs typeface="IBM Plex Sans" pitchFamily="34" charset="-120"/>
+                <a:latin typeface="Arial" pitchFamily="34" charset="0"/>
+                <a:ea typeface="Arial" pitchFamily="34" charset="-122"/>
+                <a:cs typeface="Arial" pitchFamily="34" charset="-120"/>
               </a:rPr>
               <a:t>Few-shot</a:t>
             </a:r>
@@ -4195,9 +4195,9 @@
                 <a:solidFill>
                   <a:srgbClr val="17212B"/>
                 </a:solidFill>
-                <a:latin typeface="IBM Plex Sans" pitchFamily="34" charset="0"/>
-                <a:ea typeface="IBM Plex Sans" pitchFamily="34" charset="-122"/>
-                <a:cs typeface="IBM Plex Sans" pitchFamily="34" charset="-120"/>
+                <a:latin typeface="Arial" pitchFamily="34" charset="0"/>
+                <a:ea typeface="Arial" pitchFamily="34" charset="-122"/>
+                <a:cs typeface="Arial" pitchFamily="34" charset="-120"/>
               </a:rPr>
               <a:t>The model first sees three solved stays as earlier turns in the chat, and then the new stay.</a:t>
             </a:r>
@@ -4239,9 +4239,9 @@
                 <a:solidFill>
                   <a:srgbClr val="3A4651"/>
                 </a:solidFill>
-                <a:latin typeface="IBM Plex Sans" pitchFamily="34" charset="0"/>
-                <a:ea typeface="IBM Plex Sans" pitchFamily="34" charset="-122"/>
-                <a:cs typeface="IBM Plex Sans" pitchFamily="34" charset="-120"/>
+                <a:latin typeface="Arial" pitchFamily="34" charset="0"/>
+                <a:ea typeface="Arial" pitchFamily="34" charset="-122"/>
+                <a:cs typeface="Arial" pitchFamily="34" charset="-120"/>
               </a:rPr>
               <a:t>The examples show it the answer format and the kind of diagnosis the ED records.</a:t>
             </a:r>
@@ -4306,9 +4306,9 @@
                 <a:solidFill>
                   <a:srgbClr val="17212B"/>
                 </a:solidFill>
-                <a:latin typeface="IBM Plex Sans" pitchFamily="34" charset="0"/>
-                <a:ea typeface="IBM Plex Sans" pitchFamily="34" charset="-122"/>
-                <a:cs typeface="IBM Plex Sans" pitchFamily="34" charset="-120"/>
+                <a:latin typeface="Arial" pitchFamily="34" charset="0"/>
+                <a:ea typeface="Arial" pitchFamily="34" charset="-122"/>
+                <a:cs typeface="Arial" pitchFamily="34" charset="-120"/>
               </a:rPr>
               <a:t>Chain-of-thought</a:t>
             </a:r>
@@ -4350,9 +4350,9 @@
                 <a:solidFill>
                   <a:srgbClr val="17212B"/>
                 </a:solidFill>
-                <a:latin typeface="IBM Plex Sans" pitchFamily="34" charset="0"/>
-                <a:ea typeface="IBM Plex Sans" pitchFamily="34" charset="-122"/>
-                <a:cs typeface="IBM Plex Sans" pitchFamily="34" charset="-120"/>
+                <a:latin typeface="Arial" pitchFamily="34" charset="0"/>
+                <a:ea typeface="Arial" pitchFamily="34" charset="-122"/>
+                <a:cs typeface="Arial" pitchFamily="34" charset="-120"/>
               </a:rPr>
               <a:t>This is zero-shot with an added "think step by step", and the model writes its reasoning before its answer.</a:t>
             </a:r>
@@ -4394,9 +4394,9 @@
                 <a:solidFill>
                   <a:srgbClr val="3A4651"/>
                 </a:solidFill>
-                <a:latin typeface="IBM Plex Sans" pitchFamily="34" charset="0"/>
-                <a:ea typeface="IBM Plex Sans" pitchFamily="34" charset="-122"/>
-                <a:cs typeface="IBM Plex Sans" pitchFamily="34" charset="-120"/>
+                <a:latin typeface="Arial" pitchFamily="34" charset="0"/>
+                <a:ea typeface="Arial" pitchFamily="34" charset="-122"/>
+                <a:cs typeface="Arial" pitchFamily="34" charset="-120"/>
               </a:rPr>
               <a:t>Reasoning first can help large models work through a problem, but it also takes longer.</a:t>
             </a:r>
@@ -4406,7 +4406,202 @@
       </p:sp>
       <p:sp>
         <p:nvSpPr>
-          <p:cNvPr id="18" name="Text 16"/>
+          <p:cNvPr id="18" name="Shape 16"/>
+          <p:cNvSpPr/>
+          <p:nvPr/>
+        </p:nvSpPr>
+        <p:spPr>
+          <a:xfrm>
+            <a:off x="812800" y="4629547"/>
+            <a:ext cx="10566400" cy="0"/>
+          </a:xfrm>
+          <a:prstGeom prst="line">
+            <a:avLst/>
+          </a:prstGeom>
+          <a:noFill/>
+          <a:ln w="19050">
+            <a:solidFill>
+              <a:srgbClr val="17212B"/>
+            </a:solidFill>
+            <a:prstDash val="solid"/>
+          </a:ln>
+        </p:spPr>
+      </p:sp>
+      <p:sp>
+        <p:nvSpPr>
+          <p:cNvPr id="19" name="Text 17"/>
+          <p:cNvSpPr/>
+          <p:nvPr/>
+        </p:nvSpPr>
+        <p:spPr>
+          <a:xfrm>
+            <a:off x="812800" y="4740672"/>
+            <a:ext cx="10883392" cy="269230"/>
+          </a:xfrm>
+          <a:prstGeom prst="rect">
+            <a:avLst/>
+          </a:prstGeom>
+          <a:noFill/>
+          <a:ln/>
+        </p:spPr>
+        <p:txBody>
+          <a:bodyPr wrap="square" lIns="0" tIns="0" rIns="0" bIns="0" rtlCol="0" anchor="t">
+            <a:normAutofit/>
+          </a:bodyPr>
+          <a:lstStyle/>
+          <a:p>
+            <a:pPr algn="l" indent="0" marL="0">
+              <a:lnSpc>
+                <a:spcPts val="1920"/>
+              </a:lnSpc>
+              <a:buNone/>
+            </a:pPr>
+            <a:r>
+              <a:rPr lang="en-US" sz="1600" b="1" dirty="0">
+                <a:solidFill>
+                  <a:srgbClr val="17212B"/>
+                </a:solidFill>
+                <a:latin typeface="Arial" pitchFamily="34" charset="0"/>
+                <a:ea typeface="Arial" pitchFamily="34" charset="-122"/>
+                <a:cs typeface="Arial" pitchFamily="34" charset="-120"/>
+              </a:rPr>
+              <a:t>The actual prompt text</a:t>
+            </a:r>
+            <a:endParaRPr lang="en-US" sz="1600" dirty="0"/>
+          </a:p>
+        </p:txBody>
+      </p:sp>
+      <p:sp>
+        <p:nvSpPr>
+          <p:cNvPr id="20" name="Text 18"/>
+          <p:cNvSpPr/>
+          <p:nvPr/>
+        </p:nvSpPr>
+        <p:spPr>
+          <a:xfrm>
+            <a:off x="812800" y="5060702"/>
+            <a:ext cx="10883392" cy="642590"/>
+          </a:xfrm>
+          <a:prstGeom prst="rect">
+            <a:avLst/>
+          </a:prstGeom>
+          <a:noFill/>
+          <a:ln/>
+        </p:spPr>
+        <p:txBody>
+          <a:bodyPr wrap="square" lIns="0" tIns="0" rIns="0" bIns="0" rtlCol="0" anchor="t">
+            <a:normAutofit/>
+          </a:bodyPr>
+          <a:lstStyle/>
+          <a:p>
+            <a:pPr algn="l" indent="0" marL="0">
+              <a:lnSpc>
+                <a:spcPts val="1620"/>
+              </a:lnSpc>
+              <a:buNone/>
+            </a:pPr>
+            <a:r>
+              <a:rPr lang="en-US" sz="1200" dirty="0">
+                <a:solidFill>
+                  <a:srgbClr val="17212B"/>
+                </a:solidFill>
+                <a:latin typeface="Courier New" pitchFamily="49" charset="0"/>
+                <a:ea typeface="Courier New" pitchFamily="49" charset="-122"/>
+                <a:cs typeface="Courier New" pitchFamily="49" charset="-120"/>
+              </a:rPr>
+              <a:t>SYSTEM = ("You review emergency department triage records. Give the single most likely "</a:t>
+            </a:r>
+            <a:endParaRPr lang="en-US" sz="1200" dirty="0"/>
+          </a:p>
+          <a:p>
+            <a:pPr algn="l" indent="0" marL="0">
+              <a:lnSpc>
+                <a:spcPts val="1620"/>
+              </a:lnSpc>
+              <a:buNone/>
+            </a:pPr>
+            <a:r>
+              <a:rPr lang="en-US" sz="1200" dirty="0">
+                <a:solidFill>
+                  <a:srgbClr val="17212B"/>
+                </a:solidFill>
+                <a:latin typeface="Courier New" pitchFamily="49" charset="0"/>
+                <a:ea typeface="Courier New" pitchFamily="49" charset="-122"/>
+                <a:cs typeface="Courier New" pitchFamily="49" charset="-120"/>
+              </a:rPr>
+              <a:t>          "diagnosis the ED will record and its ICD-10-CM code. Answer only in the JSON format requested.")</a:t>
+            </a:r>
+            <a:endParaRPr lang="en-US" sz="1200" dirty="0"/>
+          </a:p>
+          <a:p>
+            <a:pPr algn="l" indent="0" marL="0">
+              <a:lnSpc>
+                <a:spcPts val="1620"/>
+              </a:lnSpc>
+              <a:buNone/>
+            </a:pPr>
+            <a:r>
+              <a:rPr lang="en-US" sz="1200" dirty="0">
+                <a:solidFill>
+                  <a:srgbClr val="17212B"/>
+                </a:solidFill>
+                <a:latin typeface="Courier New" pitchFamily="49" charset="0"/>
+                <a:ea typeface="Courier New" pitchFamily="49" charset="-122"/>
+                <a:cs typeface="Courier New" pitchFamily="49" charset="-120"/>
+              </a:rPr>
+              <a:t>COT_HINT = "\nThink step by step in the reasoning field before giving the diagnosis."</a:t>
+            </a:r>
+            <a:endParaRPr lang="en-US" sz="1200" dirty="0"/>
+          </a:p>
+        </p:txBody>
+      </p:sp>
+      <p:sp>
+        <p:nvSpPr>
+          <p:cNvPr id="21" name="Text 19"/>
+          <p:cNvSpPr/>
+          <p:nvPr/>
+        </p:nvSpPr>
+        <p:spPr>
+          <a:xfrm>
+            <a:off x="812800" y="6238280"/>
+            <a:ext cx="10203180" cy="238720"/>
+          </a:xfrm>
+          <a:prstGeom prst="rect">
+            <a:avLst/>
+          </a:prstGeom>
+          <a:noFill/>
+          <a:ln/>
+        </p:spPr>
+        <p:txBody>
+          <a:bodyPr wrap="square" lIns="0" tIns="0" rIns="0" bIns="0" rtlCol="0" anchor="t">
+            <a:normAutofit/>
+          </a:bodyPr>
+          <a:lstStyle/>
+          <a:p>
+            <a:pPr algn="l" indent="0" marL="0">
+              <a:lnSpc>
+                <a:spcPts val="1680"/>
+              </a:lnSpc>
+              <a:buNone/>
+            </a:pPr>
+            <a:r>
+              <a:rPr lang="en-US" sz="1200" dirty="0">
+                <a:solidFill>
+                  <a:srgbClr val="5C6772"/>
+                </a:solidFill>
+                <a:latin typeface="Arial" pitchFamily="34" charset="0"/>
+                <a:ea typeface="Arial" pitchFamily="34" charset="-122"/>
+                <a:cs typeface="Arial" pitchFamily="34" charset="-120"/>
+              </a:rPr>
+              <a:t>Notebook cell [12]</a:t>
+            </a:r>
+            <a:endParaRPr lang="en-US" sz="1200" dirty="0"/>
+          </a:p>
+        </p:txBody>
+      </p:sp>
+      <p:sp>
+        <p:nvSpPr>
+          <p:cNvPr id="22" name="Text 20"/>
           <p:cNvSpPr/>
           <p:nvPr/>
         </p:nvSpPr>
@@ -4438,9 +4633,9 @@
                 <a:solidFill>
                   <a:srgbClr val="5C6772"/>
                 </a:solidFill>
-                <a:latin typeface="IBM Plex Sans" pitchFamily="34" charset="0"/>
-                <a:ea typeface="IBM Plex Sans" pitchFamily="34" charset="-122"/>
-                <a:cs typeface="IBM Plex Sans" pitchFamily="34" charset="-120"/>
+                <a:latin typeface="Arial" pitchFamily="34" charset="0"/>
+                <a:ea typeface="Arial" pitchFamily="34" charset="-122"/>
+                <a:cs typeface="Arial" pitchFamily="34" charset="-120"/>
               </a:rPr>
               <a:t>11</a:t>
             </a:r>
@@ -4514,9 +4709,9 @@
                 <a:solidFill>
                   <a:srgbClr val="0E6E6C"/>
                 </a:solidFill>
-                <a:latin typeface="IBM Plex Sans" pitchFamily="34" charset="0"/>
-                <a:ea typeface="IBM Plex Sans" pitchFamily="34" charset="-122"/>
-                <a:cs typeface="IBM Plex Sans" pitchFamily="34" charset="-120"/>
+                <a:latin typeface="Arial" pitchFamily="34" charset="0"/>
+                <a:ea typeface="Arial" pitchFamily="34" charset="-122"/>
+                <a:cs typeface="Arial" pitchFamily="34" charset="-120"/>
               </a:rPr>
               <a:t>ASK THE MODEL (STEP 5 OF 7)</a:t>
             </a:r>
@@ -4560,9 +4755,9 @@
                 <a:solidFill>
                   <a:srgbClr val="17212B"/>
                 </a:solidFill>
-                <a:latin typeface="IBM Plex Sans" pitchFamily="34" charset="0"/>
-                <a:ea typeface="IBM Plex Sans" pitchFamily="34" charset="-122"/>
-                <a:cs typeface="IBM Plex Sans" pitchFamily="34" charset="-120"/>
+                <a:latin typeface="Arial" pitchFamily="34" charset="0"/>
+                <a:ea typeface="Arial" pitchFamily="34" charset="-122"/>
+                <a:cs typeface="Arial" pitchFamily="34" charset="-120"/>
               </a:rPr>
               <a:t>Few-shot examples are picked by a fixed rule, and their patients are kept out of scoring</a:t>
             </a:r>
@@ -4627,9 +4822,9 @@
                 <a:solidFill>
                   <a:srgbClr val="3A4651"/>
                 </a:solidFill>
-                <a:latin typeface="IBM Plex Sans" pitchFamily="34" charset="0"/>
-                <a:ea typeface="IBM Plex Sans" pitchFamily="34" charset="-122"/>
-                <a:cs typeface="IBM Plex Sans" pitchFamily="34" charset="-120"/>
+                <a:latin typeface="Arial" pitchFamily="34" charset="0"/>
+                <a:ea typeface="Arial" pitchFamily="34" charset="-122"/>
+                <a:cs typeface="Arial" pitchFamily="34" charset="-120"/>
               </a:rPr>
               <a:t>This keeps the comparison fair, because the model is never scored on a patient it has already been shown</a:t>
             </a:r>
@@ -4694,9 +4889,9 @@
                 <a:solidFill>
                   <a:srgbClr val="17212B"/>
                 </a:solidFill>
-                <a:latin typeface="IBM Plex Sans" pitchFamily="34" charset="0"/>
-                <a:ea typeface="IBM Plex Sans" pitchFamily="34" charset="-122"/>
-                <a:cs typeface="IBM Plex Sans" pitchFamily="34" charset="-120"/>
+                <a:latin typeface="Arial" pitchFamily="34" charset="0"/>
+                <a:ea typeface="Arial" pitchFamily="34" charset="-122"/>
+                <a:cs typeface="Arial" pitchFamily="34" charset="-120"/>
               </a:rPr>
               <a:t>Pick the examples and the evaluation set</a:t>
             </a:r>
@@ -4738,9 +4933,9 @@
                 <a:solidFill>
                   <a:srgbClr val="17212B"/>
                 </a:solidFill>
-                <a:latin typeface="IBM Plex Mono" pitchFamily="49" charset="0"/>
-                <a:ea typeface="IBM Plex Mono" pitchFamily="49" charset="-122"/>
-                <a:cs typeface="IBM Plex Mono" pitchFamily="49" charset="-120"/>
+                <a:latin typeface="Courier New" pitchFamily="49" charset="0"/>
+                <a:ea typeface="Courier New" pitchFamily="49" charset="-122"/>
+                <a:cs typeface="Courier New" pitchFamily="49" charset="-120"/>
               </a:rPr>
               <a:t>top3 = cohort.true_chapter.value_counts().index[:3]</a:t>
             </a:r>
@@ -4758,9 +4953,9 @@
                 <a:solidFill>
                   <a:srgbClr val="17212B"/>
                 </a:solidFill>
-                <a:latin typeface="IBM Plex Mono" pitchFamily="49" charset="0"/>
-                <a:ea typeface="IBM Plex Mono" pitchFamily="49" charset="-122"/>
-                <a:cs typeface="IBM Plex Mono" pitchFamily="49" charset="-120"/>
+                <a:latin typeface="Courier New" pitchFamily="49" charset="0"/>
+                <a:ea typeface="Courier New" pitchFamily="49" charset="-122"/>
+                <a:cs typeface="Courier New" pitchFamily="49" charset="-120"/>
               </a:rPr>
               <a:t>examples = (cohort[cohort.true_chapter.isin(top3)]</a:t>
             </a:r>
@@ -4778,9 +4973,9 @@
                 <a:solidFill>
                   <a:srgbClr val="17212B"/>
                 </a:solidFill>
-                <a:latin typeface="IBM Plex Mono" pitchFamily="49" charset="0"/>
-                <a:ea typeface="IBM Plex Mono" pitchFamily="49" charset="-122"/>
-                <a:cs typeface="IBM Plex Mono" pitchFamily="49" charset="-120"/>
+                <a:latin typeface="Courier New" pitchFamily="49" charset="0"/>
+                <a:ea typeface="Courier New" pitchFamily="49" charset="-122"/>
+                <a:cs typeface="Courier New" pitchFamily="49" charset="-120"/>
               </a:rPr>
               <a:t>            .sort_values("stay_id").groupby("true_chapter").head(1))</a:t>
             </a:r>
@@ -4798,9 +4993,9 @@
                 <a:solidFill>
                   <a:srgbClr val="17212B"/>
                 </a:solidFill>
-                <a:latin typeface="IBM Plex Mono" pitchFamily="49" charset="0"/>
-                <a:ea typeface="IBM Plex Mono" pitchFamily="49" charset="-122"/>
-                <a:cs typeface="IBM Plex Mono" pitchFamily="49" charset="-120"/>
+                <a:latin typeface="Courier New" pitchFamily="49" charset="0"/>
+                <a:ea typeface="Courier New" pitchFamily="49" charset="-122"/>
+                <a:cs typeface="Courier New" pitchFamily="49" charset="-120"/>
               </a:rPr>
               <a:t>eval_df = cohort[~cohort.subject_id.isin(examples.subject_id)]</a:t>
             </a:r>
@@ -4818,9 +5013,9 @@
                 <a:solidFill>
                   <a:srgbClr val="17212B"/>
                 </a:solidFill>
-                <a:latin typeface="IBM Plex Mono" pitchFamily="49" charset="0"/>
-                <a:ea typeface="IBM Plex Mono" pitchFamily="49" charset="-122"/>
-                <a:cs typeface="IBM Plex Mono" pitchFamily="49" charset="-120"/>
+                <a:latin typeface="Courier New" pitchFamily="49" charset="0"/>
+                <a:ea typeface="Courier New" pitchFamily="49" charset="-122"/>
+                <a:cs typeface="Courier New" pitchFamily="49" charset="-120"/>
               </a:rPr>
               <a:t>eval_df = eval_df.sample(n=min(N_CASES, len(eval_df)),</a:t>
             </a:r>
@@ -4838,9 +5033,9 @@
                 <a:solidFill>
                   <a:srgbClr val="17212B"/>
                 </a:solidFill>
-                <a:latin typeface="IBM Plex Mono" pitchFamily="49" charset="0"/>
-                <a:ea typeface="IBM Plex Mono" pitchFamily="49" charset="-122"/>
-                <a:cs typeface="IBM Plex Mono" pitchFamily="49" charset="-120"/>
+                <a:latin typeface="Courier New" pitchFamily="49" charset="0"/>
+                <a:ea typeface="Courier New" pitchFamily="49" charset="-122"/>
+                <a:cs typeface="Courier New" pitchFamily="49" charset="-120"/>
               </a:rPr>
               <a:t>                         random_state=SEED)</a:t>
             </a:r>
@@ -4867,9 +5062,9 @@
                 <a:solidFill>
                   <a:srgbClr val="17212B"/>
                 </a:solidFill>
-                <a:latin typeface="IBM Plex Mono" pitchFamily="49" charset="0"/>
-                <a:ea typeface="IBM Plex Mono" pitchFamily="49" charset="-122"/>
-                <a:cs typeface="IBM Plex Mono" pitchFamily="49" charset="-120"/>
+                <a:latin typeface="Courier New" pitchFamily="49" charset="0"/>
+                <a:ea typeface="Courier New" pitchFamily="49" charset="-122"/>
+                <a:cs typeface="Courier New" pitchFamily="49" charset="-120"/>
               </a:rPr>
               <a:t>print(examples[["stay_id", "chiefcomplaint",</a:t>
             </a:r>
@@ -4887,9 +5082,9 @@
                 <a:solidFill>
                   <a:srgbClr val="17212B"/>
                 </a:solidFill>
-                <a:latin typeface="IBM Plex Mono" pitchFamily="49" charset="0"/>
-                <a:ea typeface="IBM Plex Mono" pitchFamily="49" charset="-122"/>
-                <a:cs typeface="IBM Plex Mono" pitchFamily="49" charset="-120"/>
+                <a:latin typeface="Courier New" pitchFamily="49" charset="0"/>
+                <a:ea typeface="Courier New" pitchFamily="49" charset="-122"/>
+                <a:cs typeface="Courier New" pitchFamily="49" charset="-120"/>
               </a:rPr>
               <a:t>                "icd_code", "true_chapter"]])</a:t>
             </a:r>
@@ -4907,9 +5102,9 @@
                 <a:solidFill>
                   <a:srgbClr val="17212B"/>
                 </a:solidFill>
-                <a:latin typeface="IBM Plex Mono" pitchFamily="49" charset="0"/>
-                <a:ea typeface="IBM Plex Mono" pitchFamily="49" charset="-122"/>
-                <a:cs typeface="IBM Plex Mono" pitchFamily="49" charset="-120"/>
+                <a:latin typeface="Courier New" pitchFamily="49" charset="0"/>
+                <a:ea typeface="Courier New" pitchFamily="49" charset="-122"/>
+                <a:cs typeface="Courier New" pitchFamily="49" charset="-120"/>
               </a:rPr>
               <a:t>print(f"Evaluating on {len(eval_df)} stays from "</a:t>
             </a:r>
@@ -4927,9 +5122,9 @@
                 <a:solidFill>
                   <a:srgbClr val="17212B"/>
                 </a:solidFill>
-                <a:latin typeface="IBM Plex Mono" pitchFamily="49" charset="0"/>
-                <a:ea typeface="IBM Plex Mono" pitchFamily="49" charset="-122"/>
-                <a:cs typeface="IBM Plex Mono" pitchFamily="49" charset="-120"/>
+                <a:latin typeface="Courier New" pitchFamily="49" charset="0"/>
+                <a:ea typeface="Courier New" pitchFamily="49" charset="-122"/>
+                <a:cs typeface="Courier New" pitchFamily="49" charset="-120"/>
               </a:rPr>
               <a:t>      f"{eval_df.subject_id.nunique()} patients")</a:t>
             </a:r>
@@ -4994,9 +5189,9 @@
                 <a:solidFill>
                   <a:srgbClr val="0E6E6C"/>
                 </a:solidFill>
-                <a:latin typeface="IBM Plex Sans" pitchFamily="34" charset="0"/>
-                <a:ea typeface="IBM Plex Sans" pitchFamily="34" charset="-122"/>
-                <a:cs typeface="IBM Plex Sans" pitchFamily="34" charset="-120"/>
+                <a:latin typeface="Arial" pitchFamily="34" charset="0"/>
+                <a:ea typeface="Arial" pitchFamily="34" charset="-122"/>
+                <a:cs typeface="Arial" pitchFamily="34" charset="-120"/>
               </a:rPr>
               <a:t>YOU SHOULD SEE</a:t>
             </a:r>
@@ -5038,9 +5233,9 @@
                 <a:solidFill>
                   <a:srgbClr val="17212B"/>
                 </a:solidFill>
-                <a:latin typeface="IBM Plex Mono" pitchFamily="49" charset="0"/>
-                <a:ea typeface="IBM Plex Mono" pitchFamily="49" charset="-122"/>
-                <a:cs typeface="IBM Plex Mono" pitchFamily="49" charset="-120"/>
+                <a:latin typeface="Courier New" pitchFamily="49" charset="0"/>
+                <a:ea typeface="Courier New" pitchFamily="49" charset="-122"/>
+                <a:cs typeface="Courier New" pitchFamily="49" charset="-120"/>
               </a:rPr>
               <a:t>Fatigue, s/p Fall    R531</a:t>
             </a:r>
@@ -5058,9 +5253,9 @@
                 <a:solidFill>
                   <a:srgbClr val="17212B"/>
                 </a:solidFill>
-                <a:latin typeface="IBM Plex Mono" pitchFamily="49" charset="0"/>
-                <a:ea typeface="IBM Plex Mono" pitchFamily="49" charset="-122"/>
-                <a:cs typeface="IBM Plex Mono" pitchFamily="49" charset="-120"/>
+                <a:latin typeface="Courier New" pitchFamily="49" charset="0"/>
+                <a:ea typeface="Courier New" pitchFamily="49" charset="-122"/>
+                <a:cs typeface="Courier New" pitchFamily="49" charset="-120"/>
               </a:rPr>
               <a:t>MVC/INTUBATED TRAUMA S066X9A</a:t>
             </a:r>
@@ -5078,9 +5273,9 @@
                 <a:solidFill>
                   <a:srgbClr val="17212B"/>
                 </a:solidFill>
-                <a:latin typeface="IBM Plex Mono" pitchFamily="49" charset="0"/>
-                <a:ea typeface="IBM Plex Mono" pitchFamily="49" charset="-122"/>
-                <a:cs typeface="IBM Plex Mono" pitchFamily="49" charset="-120"/>
+                <a:latin typeface="Courier New" pitchFamily="49" charset="0"/>
+                <a:ea typeface="Courier New" pitchFamily="49" charset="-122"/>
+                <a:cs typeface="Courier New" pitchFamily="49" charset="-120"/>
               </a:rPr>
               <a:t>Transfer             I313</a:t>
             </a:r>
@@ -5107,9 +5302,9 @@
                 <a:solidFill>
                   <a:srgbClr val="17212B"/>
                 </a:solidFill>
-                <a:latin typeface="IBM Plex Mono" pitchFamily="49" charset="0"/>
-                <a:ea typeface="IBM Plex Mono" pitchFamily="49" charset="-122"/>
-                <a:cs typeface="IBM Plex Mono" pitchFamily="49" charset="-120"/>
+                <a:latin typeface="Courier New" pitchFamily="49" charset="0"/>
+                <a:ea typeface="Courier New" pitchFamily="49" charset="-122"/>
+                <a:cs typeface="Courier New" pitchFamily="49" charset="-120"/>
               </a:rPr>
               <a:t>Evaluating on 94 stays</a:t>
             </a:r>
@@ -5127,9 +5322,9 @@
                 <a:solidFill>
                   <a:srgbClr val="17212B"/>
                 </a:solidFill>
-                <a:latin typeface="IBM Plex Mono" pitchFamily="49" charset="0"/>
-                <a:ea typeface="IBM Plex Mono" pitchFamily="49" charset="-122"/>
-                <a:cs typeface="IBM Plex Mono" pitchFamily="49" charset="-120"/>
+                <a:latin typeface="Courier New" pitchFamily="49" charset="0"/>
+                <a:ea typeface="Courier New" pitchFamily="49" charset="-122"/>
+                <a:cs typeface="Courier New" pitchFamily="49" charset="-120"/>
               </a:rPr>
               <a:t>from 29 patients</a:t>
             </a:r>
@@ -5171,9 +5366,9 @@
                 <a:solidFill>
                   <a:srgbClr val="17212B"/>
                 </a:solidFill>
-                <a:latin typeface="IBM Plex Sans" pitchFamily="34" charset="0"/>
-                <a:ea typeface="IBM Plex Sans" pitchFamily="34" charset="-122"/>
-                <a:cs typeface="IBM Plex Sans" pitchFamily="34" charset="-120"/>
+                <a:latin typeface="Arial" pitchFamily="34" charset="0"/>
+                <a:ea typeface="Arial" pitchFamily="34" charset="-122"/>
+                <a:cs typeface="Arial" pitchFamily="34" charset="-120"/>
               </a:rPr>
               <a:t>The three examples come from the Symptoms, Injury and Circulatory chapters.</a:t>
             </a:r>
@@ -5215,11 +5410,11 @@
                 <a:solidFill>
                   <a:srgbClr val="5C6772"/>
                 </a:solidFill>
-                <a:latin typeface="IBM Plex Sans" pitchFamily="34" charset="0"/>
-                <a:ea typeface="IBM Plex Sans" pitchFamily="34" charset="-122"/>
-                <a:cs typeface="IBM Plex Sans" pitchFamily="34" charset="-120"/>
-              </a:rPr>
-              <a:t>Notebook cell 19</a:t>
+                <a:latin typeface="Arial" pitchFamily="34" charset="0"/>
+                <a:ea typeface="Arial" pitchFamily="34" charset="-122"/>
+                <a:cs typeface="Arial" pitchFamily="34" charset="-120"/>
+              </a:rPr>
+              <a:t>Notebook cell [13]</a:t>
             </a:r>
             <a:endParaRPr lang="en-US" sz="1200" dirty="0"/>
           </a:p>
@@ -5259,9 +5454,9 @@
                 <a:solidFill>
                   <a:srgbClr val="5C6772"/>
                 </a:solidFill>
-                <a:latin typeface="IBM Plex Sans" pitchFamily="34" charset="0"/>
-                <a:ea typeface="IBM Plex Sans" pitchFamily="34" charset="-122"/>
-                <a:cs typeface="IBM Plex Sans" pitchFamily="34" charset="-120"/>
+                <a:latin typeface="Arial" pitchFamily="34" charset="0"/>
+                <a:ea typeface="Arial" pitchFamily="34" charset="-122"/>
+                <a:cs typeface="Arial" pitchFamily="34" charset="-120"/>
               </a:rPr>
               <a:t>12</a:t>
             </a:r>
@@ -5335,9 +5530,9 @@
                 <a:solidFill>
                   <a:srgbClr val="0E6E6C"/>
                 </a:solidFill>
-                <a:latin typeface="IBM Plex Sans" pitchFamily="34" charset="0"/>
-                <a:ea typeface="IBM Plex Sans" pitchFamily="34" charset="-122"/>
-                <a:cs typeface="IBM Plex Sans" pitchFamily="34" charset="-120"/>
+                <a:latin typeface="Arial" pitchFamily="34" charset="0"/>
+                <a:ea typeface="Arial" pitchFamily="34" charset="-122"/>
+                <a:cs typeface="Arial" pitchFamily="34" charset="-120"/>
               </a:rPr>
               <a:t>ASK THE MODEL (STEP 5 OF 7)</a:t>
             </a:r>
@@ -5381,9 +5576,9 @@
                 <a:solidFill>
                   <a:srgbClr val="17212B"/>
                 </a:solidFill>
-                <a:latin typeface="IBM Plex Sans" pitchFamily="34" charset="0"/>
-                <a:ea typeface="IBM Plex Sans" pitchFamily="34" charset="-122"/>
-                <a:cs typeface="IBM Plex Sans" pitchFamily="34" charset="-120"/>
+                <a:latin typeface="Arial" pitchFamily="34" charset="0"/>
+                <a:ea typeface="Arial" pitchFamily="34" charset="-122"/>
+                <a:cs typeface="Arial" pitchFamily="34" charset="-120"/>
               </a:rPr>
               <a:t>One function builds every prompt, so the only difference between techniques is the messages it adds</a:t>
             </a:r>
@@ -5448,9 +5643,9 @@
                 <a:solidFill>
                   <a:srgbClr val="3A4651"/>
                 </a:solidFill>
-                <a:latin typeface="IBM Plex Sans" pitchFamily="34" charset="0"/>
-                <a:ea typeface="IBM Plex Sans" pitchFamily="34" charset="-122"/>
-                <a:cs typeface="IBM Plex Sans" pitchFamily="34" charset="-120"/>
+                <a:latin typeface="Arial" pitchFamily="34" charset="0"/>
+                <a:ea typeface="Arial" pitchFamily="34" charset="-122"/>
+                <a:cs typeface="Arial" pitchFamily="34" charset="-120"/>
               </a:rPr>
               <a:t>Few-shot adds three solved examples as earlier chat turns, chain-of-thought adds one sentence and zero-shot adds nothing</a:t>
             </a:r>
@@ -5515,9 +5710,9 @@
                 <a:solidFill>
                   <a:srgbClr val="17212B"/>
                 </a:solidFill>
-                <a:latin typeface="IBM Plex Sans" pitchFamily="34" charset="0"/>
-                <a:ea typeface="IBM Plex Sans" pitchFamily="34" charset="-122"/>
-                <a:cs typeface="IBM Plex Sans" pitchFamily="34" charset="-120"/>
+                <a:latin typeface="Arial" pitchFamily="34" charset="0"/>
+                <a:ea typeface="Arial" pitchFamily="34" charset="-122"/>
+                <a:cs typeface="Arial" pitchFamily="34" charset="-120"/>
               </a:rPr>
               <a:t>Build the messages</a:t>
             </a:r>
@@ -5559,9 +5754,9 @@
                 <a:solidFill>
                   <a:srgbClr val="17212B"/>
                 </a:solidFill>
-                <a:latin typeface="IBM Plex Mono" pitchFamily="49" charset="0"/>
-                <a:ea typeface="IBM Plex Mono" pitchFamily="49" charset="-122"/>
-                <a:cs typeface="IBM Plex Mono" pitchFamily="49" charset="-120"/>
+                <a:latin typeface="Courier New" pitchFamily="49" charset="0"/>
+                <a:ea typeface="Courier New" pitchFamily="49" charset="-122"/>
+                <a:cs typeface="Courier New" pitchFamily="49" charset="-120"/>
               </a:rPr>
               <a:t>def build_messages(row, technique: str) -&gt; list[dict]:</a:t>
             </a:r>
@@ -5579,9 +5774,9 @@
                 <a:solidFill>
                   <a:srgbClr val="17212B"/>
                 </a:solidFill>
-                <a:latin typeface="IBM Plex Mono" pitchFamily="49" charset="0"/>
-                <a:ea typeface="IBM Plex Mono" pitchFamily="49" charset="-122"/>
-                <a:cs typeface="IBM Plex Mono" pitchFamily="49" charset="-120"/>
+                <a:latin typeface="Courier New" pitchFamily="49" charset="0"/>
+                <a:ea typeface="Courier New" pitchFamily="49" charset="-122"/>
+                <a:cs typeface="Courier New" pitchFamily="49" charset="-120"/>
               </a:rPr>
               <a:t>    msgs = [{"role": "system", "content": SYSTEM}]</a:t>
             </a:r>
@@ -5599,9 +5794,9 @@
                 <a:solidFill>
                   <a:srgbClr val="17212B"/>
                 </a:solidFill>
-                <a:latin typeface="IBM Plex Mono" pitchFamily="49" charset="0"/>
-                <a:ea typeface="IBM Plex Mono" pitchFamily="49" charset="-122"/>
-                <a:cs typeface="IBM Plex Mono" pitchFamily="49" charset="-120"/>
+                <a:latin typeface="Courier New" pitchFamily="49" charset="0"/>
+                <a:ea typeface="Courier New" pitchFamily="49" charset="-122"/>
+                <a:cs typeface="Courier New" pitchFamily="49" charset="-120"/>
               </a:rPr>
               <a:t>    if technique == "few_shot":</a:t>
             </a:r>
@@ -5619,9 +5814,9 @@
                 <a:solidFill>
                   <a:srgbClr val="17212B"/>
                 </a:solidFill>
-                <a:latin typeface="IBM Plex Mono" pitchFamily="49" charset="0"/>
-                <a:ea typeface="IBM Plex Mono" pitchFamily="49" charset="-122"/>
-                <a:cs typeface="IBM Plex Mono" pitchFamily="49" charset="-120"/>
+                <a:latin typeface="Courier New" pitchFamily="49" charset="0"/>
+                <a:ea typeface="Courier New" pitchFamily="49" charset="-122"/>
+                <a:cs typeface="Courier New" pitchFamily="49" charset="-120"/>
               </a:rPr>
               <a:t>        for _, ex in examples.iterrows():</a:t>
             </a:r>
@@ -5639,9 +5834,9 @@
                 <a:solidFill>
                   <a:srgbClr val="17212B"/>
                 </a:solidFill>
-                <a:latin typeface="IBM Plex Mono" pitchFamily="49" charset="0"/>
-                <a:ea typeface="IBM Plex Mono" pitchFamily="49" charset="-122"/>
-                <a:cs typeface="IBM Plex Mono" pitchFamily="49" charset="-120"/>
+                <a:latin typeface="Courier New" pitchFamily="49" charset="0"/>
+                <a:ea typeface="Courier New" pitchFamily="49" charset="-122"/>
+                <a:cs typeface="Courier New" pitchFamily="49" charset="-120"/>
               </a:rPr>
               <a:t>            msgs.append({"role": "user", "content": make_prompt(ex)})</a:t>
             </a:r>
@@ -5659,9 +5854,9 @@
                 <a:solidFill>
                   <a:srgbClr val="17212B"/>
                 </a:solidFill>
-                <a:latin typeface="IBM Plex Mono" pitchFamily="49" charset="0"/>
-                <a:ea typeface="IBM Plex Mono" pitchFamily="49" charset="-122"/>
-                <a:cs typeface="IBM Plex Mono" pitchFamily="49" charset="-120"/>
+                <a:latin typeface="Courier New" pitchFamily="49" charset="0"/>
+                <a:ea typeface="Courier New" pitchFamily="49" charset="-122"/>
+                <a:cs typeface="Courier New" pitchFamily="49" charset="-120"/>
               </a:rPr>
               <a:t>            msgs.append({"role": "assistant", "content":</a:t>
             </a:r>
@@ -5679,9 +5874,9 @@
                 <a:solidFill>
                   <a:srgbClr val="17212B"/>
                 </a:solidFill>
-                <a:latin typeface="IBM Plex Mono" pitchFamily="49" charset="0"/>
-                <a:ea typeface="IBM Plex Mono" pitchFamily="49" charset="-122"/>
-                <a:cs typeface="IBM Plex Mono" pitchFamily="49" charset="-120"/>
+                <a:latin typeface="Courier New" pitchFamily="49" charset="0"/>
+                <a:ea typeface="Courier New" pitchFamily="49" charset="-122"/>
+                <a:cs typeface="Courier New" pitchFamily="49" charset="-120"/>
               </a:rPr>
               <a:t>                Answer(diagnosis=ex.icd_title,</a:t>
             </a:r>
@@ -5699,9 +5894,9 @@
                 <a:solidFill>
                   <a:srgbClr val="17212B"/>
                 </a:solidFill>
-                <a:latin typeface="IBM Plex Mono" pitchFamily="49" charset="0"/>
-                <a:ea typeface="IBM Plex Mono" pitchFamily="49" charset="-122"/>
-                <a:cs typeface="IBM Plex Mono" pitchFamily="49" charset="-120"/>
+                <a:latin typeface="Courier New" pitchFamily="49" charset="0"/>
+                <a:ea typeface="Courier New" pitchFamily="49" charset="-122"/>
+                <a:cs typeface="Courier New" pitchFamily="49" charset="-120"/>
               </a:rPr>
               <a:t>                       icd10=ex.icd_code).model_dump_json()})</a:t>
             </a:r>
@@ -5719,9 +5914,9 @@
                 <a:solidFill>
                   <a:srgbClr val="17212B"/>
                 </a:solidFill>
-                <a:latin typeface="IBM Plex Mono" pitchFamily="49" charset="0"/>
-                <a:ea typeface="IBM Plex Mono" pitchFamily="49" charset="-122"/>
-                <a:cs typeface="IBM Plex Mono" pitchFamily="49" charset="-120"/>
+                <a:latin typeface="Courier New" pitchFamily="49" charset="0"/>
+                <a:ea typeface="Courier New" pitchFamily="49" charset="-122"/>
+                <a:cs typeface="Courier New" pitchFamily="49" charset="-120"/>
               </a:rPr>
               <a:t>    user = make_prompt(row) + (COT_HINT if technique == "cot" else "")</a:t>
             </a:r>
@@ -5739,9 +5934,9 @@
                 <a:solidFill>
                   <a:srgbClr val="17212B"/>
                 </a:solidFill>
-                <a:latin typeface="IBM Plex Mono" pitchFamily="49" charset="0"/>
-                <a:ea typeface="IBM Plex Mono" pitchFamily="49" charset="-122"/>
-                <a:cs typeface="IBM Plex Mono" pitchFamily="49" charset="-120"/>
+                <a:latin typeface="Courier New" pitchFamily="49" charset="0"/>
+                <a:ea typeface="Courier New" pitchFamily="49" charset="-122"/>
+                <a:cs typeface="Courier New" pitchFamily="49" charset="-120"/>
               </a:rPr>
               <a:t>    msgs.append({"role": "user", "content": user})</a:t>
             </a:r>
@@ -5759,9 +5954,9 @@
                 <a:solidFill>
                   <a:srgbClr val="17212B"/>
                 </a:solidFill>
-                <a:latin typeface="IBM Plex Mono" pitchFamily="49" charset="0"/>
-                <a:ea typeface="IBM Plex Mono" pitchFamily="49" charset="-122"/>
-                <a:cs typeface="IBM Plex Mono" pitchFamily="49" charset="-120"/>
+                <a:latin typeface="Courier New" pitchFamily="49" charset="0"/>
+                <a:ea typeface="Courier New" pitchFamily="49" charset="-122"/>
+                <a:cs typeface="Courier New" pitchFamily="49" charset="-120"/>
               </a:rPr>
               <a:t>    return msgs</a:t>
             </a:r>
@@ -5826,9 +6021,9 @@
                 <a:solidFill>
                   <a:srgbClr val="0E6E6C"/>
                 </a:solidFill>
-                <a:latin typeface="IBM Plex Sans" pitchFamily="34" charset="0"/>
-                <a:ea typeface="IBM Plex Sans" pitchFamily="34" charset="-122"/>
-                <a:cs typeface="IBM Plex Sans" pitchFamily="34" charset="-120"/>
+                <a:latin typeface="Arial" pitchFamily="34" charset="0"/>
+                <a:ea typeface="Arial" pitchFamily="34" charset="-122"/>
+                <a:cs typeface="Arial" pitchFamily="34" charset="-120"/>
               </a:rPr>
               <a:t>YOU SHOULD SEE</a:t>
             </a:r>
@@ -5870,11 +6065,11 @@
                 <a:solidFill>
                   <a:srgbClr val="17212B"/>
                 </a:solidFill>
-                <a:latin typeface="IBM Plex Sans" pitchFamily="34" charset="0"/>
-                <a:ea typeface="IBM Plex Sans" pitchFamily="34" charset="-122"/>
-                <a:cs typeface="IBM Plex Sans" pitchFamily="34" charset="-120"/>
-              </a:rPr>
-              <a:t>Printing the roles of one few-shot prompt gives eight messages.</a:t>
+                <a:latin typeface="Arial" pitchFamily="34" charset="0"/>
+                <a:ea typeface="Arial" pitchFamily="34" charset="-122"/>
+                <a:cs typeface="Arial" pitchFamily="34" charset="-120"/>
+              </a:rPr>
+              <a:t>Run this line in a new cell to list the roles in a few-shot prompt.</a:t>
             </a:r>
             <a:endParaRPr lang="en-US" sz="1300" dirty="0"/>
           </a:p>
@@ -5889,6 +6084,70 @@
         <p:spPr>
           <a:xfrm>
             <a:off x="7823200" y="3654921"/>
+            <a:ext cx="3662680" cy="436860"/>
+          </a:xfrm>
+          <a:prstGeom prst="rect">
+            <a:avLst/>
+          </a:prstGeom>
+          <a:noFill/>
+          <a:ln/>
+        </p:spPr>
+        <p:txBody>
+          <a:bodyPr wrap="square" lIns="0" tIns="0" rIns="0" bIns="0" rtlCol="0" anchor="t">
+            <a:normAutofit/>
+          </a:bodyPr>
+          <a:lstStyle/>
+          <a:p>
+            <a:pPr algn="l" indent="0" marL="0">
+              <a:lnSpc>
+                <a:spcPts val="1620"/>
+              </a:lnSpc>
+              <a:buNone/>
+            </a:pPr>
+            <a:r>
+              <a:rPr lang="en-US" sz="1200" dirty="0">
+                <a:solidFill>
+                  <a:srgbClr val="17212B"/>
+                </a:solidFill>
+                <a:latin typeface="Courier New" pitchFamily="49" charset="0"/>
+                <a:ea typeface="Courier New" pitchFamily="49" charset="-122"/>
+                <a:cs typeface="Courier New" pitchFamily="49" charset="-120"/>
+              </a:rPr>
+              <a:t>[m["role"] for m in build_messages(</a:t>
+            </a:r>
+            <a:endParaRPr lang="en-US" sz="1200" dirty="0"/>
+          </a:p>
+          <a:p>
+            <a:pPr algn="l" indent="0" marL="0">
+              <a:lnSpc>
+                <a:spcPts val="1620"/>
+              </a:lnSpc>
+              <a:buNone/>
+            </a:pPr>
+            <a:r>
+              <a:rPr lang="en-US" sz="1200" dirty="0">
+                <a:solidFill>
+                  <a:srgbClr val="17212B"/>
+                </a:solidFill>
+                <a:latin typeface="Courier New" pitchFamily="49" charset="0"/>
+                <a:ea typeface="Courier New" pitchFamily="49" charset="-122"/>
+                <a:cs typeface="Courier New" pitchFamily="49" charset="-120"/>
+              </a:rPr>
+              <a:t>    eval_df.iloc[0], "few_shot")]</a:t>
+            </a:r>
+            <a:endParaRPr lang="en-US" sz="1200" dirty="0"/>
+          </a:p>
+        </p:txBody>
+      </p:sp>
+      <p:sp>
+        <p:nvSpPr>
+          <p:cNvPr id="13" name="Text 11"/>
+          <p:cNvSpPr/>
+          <p:nvPr/>
+        </p:nvSpPr>
+        <p:spPr>
+          <a:xfrm>
+            <a:off x="7823200" y="4142581"/>
             <a:ext cx="3662680" cy="1054050"/>
           </a:xfrm>
           <a:prstGeom prst="rect">
@@ -5914,11 +6173,11 @@
                 <a:solidFill>
                   <a:srgbClr val="17212B"/>
                 </a:solidFill>
-                <a:latin typeface="IBM Plex Mono" pitchFamily="49" charset="0"/>
-                <a:ea typeface="IBM Plex Mono" pitchFamily="49" charset="-122"/>
-                <a:cs typeface="IBM Plex Mono" pitchFamily="49" charset="-120"/>
-              </a:rPr>
-              <a:t>system</a:t>
+                <a:latin typeface="Courier New" pitchFamily="49" charset="0"/>
+                <a:ea typeface="Courier New" pitchFamily="49" charset="-122"/>
+                <a:cs typeface="Courier New" pitchFamily="49" charset="-120"/>
+              </a:rPr>
+              <a:t>['system',</a:t>
             </a:r>
             <a:endParaRPr lang="en-US" sz="1200" dirty="0"/>
           </a:p>
@@ -5934,22 +6193,11 @@
                 <a:solidFill>
                   <a:srgbClr val="17212B"/>
                 </a:solidFill>
-                <a:latin typeface="IBM Plex Mono" pitchFamily="49" charset="0"/>
-                <a:ea typeface="IBM Plex Mono" pitchFamily="49" charset="-122"/>
-                <a:cs typeface="IBM Plex Mono" pitchFamily="49" charset="-120"/>
-              </a:rPr>
-              <a:t>user, assistant  </a:t>
-            </a:r>
-            <a:r>
-              <a:rPr lang="en-US" sz="1200" dirty="0">
-                <a:solidFill>
-                  <a:srgbClr val="5C6772"/>
-                </a:solidFill>
-                <a:latin typeface="IBM Plex Mono" pitchFamily="49" charset="0"/>
-                <a:ea typeface="IBM Plex Mono" pitchFamily="49" charset="-122"/>
-                <a:cs typeface="IBM Plex Mono" pitchFamily="49" charset="-120"/>
-              </a:rPr>
-              <a:t># example 1</a:t>
+                <a:latin typeface="Courier New" pitchFamily="49" charset="0"/>
+                <a:ea typeface="Courier New" pitchFamily="49" charset="-122"/>
+                <a:cs typeface="Courier New" pitchFamily="49" charset="-120"/>
+              </a:rPr>
+              <a:t> 'user', 'assistant',</a:t>
             </a:r>
             <a:endParaRPr lang="en-US" sz="1200" dirty="0"/>
           </a:p>
@@ -5965,22 +6213,11 @@
                 <a:solidFill>
                   <a:srgbClr val="17212B"/>
                 </a:solidFill>
-                <a:latin typeface="IBM Plex Mono" pitchFamily="49" charset="0"/>
-                <a:ea typeface="IBM Plex Mono" pitchFamily="49" charset="-122"/>
-                <a:cs typeface="IBM Plex Mono" pitchFamily="49" charset="-120"/>
-              </a:rPr>
-              <a:t>user, assistant  </a:t>
-            </a:r>
-            <a:r>
-              <a:rPr lang="en-US" sz="1200" dirty="0">
-                <a:solidFill>
-                  <a:srgbClr val="5C6772"/>
-                </a:solidFill>
-                <a:latin typeface="IBM Plex Mono" pitchFamily="49" charset="0"/>
-                <a:ea typeface="IBM Plex Mono" pitchFamily="49" charset="-122"/>
-                <a:cs typeface="IBM Plex Mono" pitchFamily="49" charset="-120"/>
-              </a:rPr>
-              <a:t># example 2</a:t>
+                <a:latin typeface="Courier New" pitchFamily="49" charset="0"/>
+                <a:ea typeface="Courier New" pitchFamily="49" charset="-122"/>
+                <a:cs typeface="Courier New" pitchFamily="49" charset="-120"/>
+              </a:rPr>
+              <a:t> 'user', 'assistant',</a:t>
             </a:r>
             <a:endParaRPr lang="en-US" sz="1200" dirty="0"/>
           </a:p>
@@ -5996,22 +6233,11 @@
                 <a:solidFill>
                   <a:srgbClr val="17212B"/>
                 </a:solidFill>
-                <a:latin typeface="IBM Plex Mono" pitchFamily="49" charset="0"/>
-                <a:ea typeface="IBM Plex Mono" pitchFamily="49" charset="-122"/>
-                <a:cs typeface="IBM Plex Mono" pitchFamily="49" charset="-120"/>
-              </a:rPr>
-              <a:t>user, assistant  </a:t>
-            </a:r>
-            <a:r>
-              <a:rPr lang="en-US" sz="1200" dirty="0">
-                <a:solidFill>
-                  <a:srgbClr val="5C6772"/>
-                </a:solidFill>
-                <a:latin typeface="IBM Plex Mono" pitchFamily="49" charset="0"/>
-                <a:ea typeface="IBM Plex Mono" pitchFamily="49" charset="-122"/>
-                <a:cs typeface="IBM Plex Mono" pitchFamily="49" charset="-120"/>
-              </a:rPr>
-              <a:t># example 3</a:t>
+                <a:latin typeface="Courier New" pitchFamily="49" charset="0"/>
+                <a:ea typeface="Courier New" pitchFamily="49" charset="-122"/>
+                <a:cs typeface="Courier New" pitchFamily="49" charset="-120"/>
+              </a:rPr>
+              <a:t> 'user', 'assistant',</a:t>
             </a:r>
             <a:endParaRPr lang="en-US" sz="1200" dirty="0"/>
           </a:p>
@@ -6027,36 +6253,25 @@
                 <a:solidFill>
                   <a:srgbClr val="17212B"/>
                 </a:solidFill>
-                <a:latin typeface="IBM Plex Mono" pitchFamily="49" charset="0"/>
-                <a:ea typeface="IBM Plex Mono" pitchFamily="49" charset="-122"/>
-                <a:cs typeface="IBM Plex Mono" pitchFamily="49" charset="-120"/>
-              </a:rPr>
-              <a:t>user             </a:t>
-            </a:r>
-            <a:r>
-              <a:rPr lang="en-US" sz="1200" dirty="0">
-                <a:solidFill>
-                  <a:srgbClr val="5C6772"/>
-                </a:solidFill>
-                <a:latin typeface="IBM Plex Mono" pitchFamily="49" charset="0"/>
-                <a:ea typeface="IBM Plex Mono" pitchFamily="49" charset="-122"/>
-                <a:cs typeface="IBM Plex Mono" pitchFamily="49" charset="-120"/>
-              </a:rPr>
-              <a:t># the new stay</a:t>
-            </a:r>
-            <a:endParaRPr lang="en-US" sz="1200" dirty="0"/>
-          </a:p>
-        </p:txBody>
-      </p:sp>
-      <p:sp>
-        <p:nvSpPr>
-          <p:cNvPr id="13" name="Text 11"/>
-          <p:cNvSpPr/>
-          <p:nvPr/>
-        </p:nvSpPr>
-        <p:spPr>
-          <a:xfrm>
-            <a:off x="7823200" y="4810571"/>
+                <a:latin typeface="Courier New" pitchFamily="49" charset="0"/>
+                <a:ea typeface="Courier New" pitchFamily="49" charset="-122"/>
+                <a:cs typeface="Courier New" pitchFamily="49" charset="-120"/>
+              </a:rPr>
+              <a:t> 'user']</a:t>
+            </a:r>
+            <a:endParaRPr lang="en-US" sz="1200" dirty="0"/>
+          </a:p>
+        </p:txBody>
+      </p:sp>
+      <p:sp>
+        <p:nvSpPr>
+          <p:cNvPr id="14" name="Text 12"/>
+          <p:cNvSpPr/>
+          <p:nvPr/>
+        </p:nvSpPr>
+        <p:spPr>
+          <a:xfrm>
+            <a:off x="7823200" y="5298232"/>
             <a:ext cx="3662680" cy="487660"/>
           </a:xfrm>
           <a:prstGeom prst="rect">
@@ -6082,9 +6297,9 @@
                 <a:solidFill>
                   <a:srgbClr val="17212B"/>
                 </a:solidFill>
-                <a:latin typeface="IBM Plex Sans" pitchFamily="34" charset="0"/>
-                <a:ea typeface="IBM Plex Sans" pitchFamily="34" charset="-122"/>
-                <a:cs typeface="IBM Plex Sans" pitchFamily="34" charset="-120"/>
+                <a:latin typeface="Arial" pitchFamily="34" charset="0"/>
+                <a:ea typeface="Arial" pitchFamily="34" charset="-122"/>
+                <a:cs typeface="Arial" pitchFamily="34" charset="-120"/>
               </a:rPr>
               <a:t>Zero-shot and chain-of-thought prompts have only two, the system message and the new stay.</a:t>
             </a:r>
@@ -6094,7 +6309,7 @@
       </p:sp>
       <p:sp>
         <p:nvSpPr>
-          <p:cNvPr id="14" name="Text 12"/>
+          <p:cNvPr id="15" name="Text 13"/>
           <p:cNvSpPr/>
           <p:nvPr/>
         </p:nvSpPr>
@@ -6126,19 +6341,19 @@
                 <a:solidFill>
                   <a:srgbClr val="5C6772"/>
                 </a:solidFill>
-                <a:latin typeface="IBM Plex Sans" pitchFamily="34" charset="0"/>
-                <a:ea typeface="IBM Plex Sans" pitchFamily="34" charset="-122"/>
-                <a:cs typeface="IBM Plex Sans" pitchFamily="34" charset="-120"/>
-              </a:rPr>
-              <a:t>Notebook cell 18</a:t>
-            </a:r>
-            <a:endParaRPr lang="en-US" sz="1200" dirty="0"/>
-          </a:p>
-        </p:txBody>
-      </p:sp>
-      <p:sp>
-        <p:nvSpPr>
-          <p:cNvPr id="15" name="Text 13"/>
+                <a:latin typeface="Arial" pitchFamily="34" charset="0"/>
+                <a:ea typeface="Arial" pitchFamily="34" charset="-122"/>
+                <a:cs typeface="Arial" pitchFamily="34" charset="-120"/>
+              </a:rPr>
+              <a:t>Notebook cell [12]</a:t>
+            </a:r>
+            <a:endParaRPr lang="en-US" sz="1200" dirty="0"/>
+          </a:p>
+        </p:txBody>
+      </p:sp>
+      <p:sp>
+        <p:nvSpPr>
+          <p:cNvPr id="16" name="Text 14"/>
           <p:cNvSpPr/>
           <p:nvPr/>
         </p:nvSpPr>
@@ -6170,9 +6385,9 @@
                 <a:solidFill>
                   <a:srgbClr val="5C6772"/>
                 </a:solidFill>
-                <a:latin typeface="IBM Plex Sans" pitchFamily="34" charset="0"/>
-                <a:ea typeface="IBM Plex Sans" pitchFamily="34" charset="-122"/>
-                <a:cs typeface="IBM Plex Sans" pitchFamily="34" charset="-120"/>
+                <a:latin typeface="Arial" pitchFamily="34" charset="0"/>
+                <a:ea typeface="Arial" pitchFamily="34" charset="-122"/>
+                <a:cs typeface="Arial" pitchFamily="34" charset="-120"/>
               </a:rPr>
               <a:t>13</a:t>
             </a:r>
@@ -6246,9 +6461,9 @@
                 <a:solidFill>
                   <a:srgbClr val="0E6E6C"/>
                 </a:solidFill>
-                <a:latin typeface="IBM Plex Sans" pitchFamily="34" charset="0"/>
-                <a:ea typeface="IBM Plex Sans" pitchFamily="34" charset="-122"/>
-                <a:cs typeface="IBM Plex Sans" pitchFamily="34" charset="-120"/>
+                <a:latin typeface="Arial" pitchFamily="34" charset="0"/>
+                <a:ea typeface="Arial" pitchFamily="34" charset="-122"/>
+                <a:cs typeface="Arial" pitchFamily="34" charset="-120"/>
               </a:rPr>
               <a:t>ASK THE MODEL (STEP 5 OF 7)</a:t>
             </a:r>
@@ -6292,9 +6507,9 @@
                 <a:solidFill>
                   <a:srgbClr val="17212B"/>
                 </a:solidFill>
-                <a:latin typeface="IBM Plex Sans" pitchFamily="34" charset="0"/>
-                <a:ea typeface="IBM Plex Sans" pitchFamily="34" charset="-122"/>
-                <a:cs typeface="IBM Plex Sans" pitchFamily="34" charset="-120"/>
+                <a:latin typeface="Arial" pitchFamily="34" charset="0"/>
+                <a:ea typeface="Arial" pitchFamily="34" charset="-122"/>
+                <a:cs typeface="Arial" pitchFamily="34" charset="-120"/>
               </a:rPr>
               <a:t>One function sends each prompt to Ollama and checks the answer against a Pydantic schema</a:t>
             </a:r>
@@ -6359,9 +6574,9 @@
                 <a:solidFill>
                   <a:srgbClr val="3A4651"/>
                 </a:solidFill>
-                <a:latin typeface="IBM Plex Sans" pitchFamily="34" charset="0"/>
-                <a:ea typeface="IBM Plex Sans" pitchFamily="34" charset="-122"/>
-                <a:cs typeface="IBM Plex Sans" pitchFamily="34" charset="-120"/>
+                <a:latin typeface="Arial" pitchFamily="34" charset="0"/>
+                <a:ea typeface="Arial" pitchFamily="34" charset="-122"/>
+                <a:cs typeface="Arial" pitchFamily="34" charset="-120"/>
               </a:rPr>
               <a:t>Passing the schema to format= makes the model return JSON, and any answer that fails to parse is counted as wrong</a:t>
             </a:r>
@@ -6426,9 +6641,9 @@
                 <a:solidFill>
                   <a:srgbClr val="17212B"/>
                 </a:solidFill>
-                <a:latin typeface="IBM Plex Sans" pitchFamily="34" charset="0"/>
-                <a:ea typeface="IBM Plex Sans" pitchFamily="34" charset="-122"/>
-                <a:cs typeface="IBM Plex Sans" pitchFamily="34" charset="-120"/>
+                <a:latin typeface="Arial" pitchFamily="34" charset="0"/>
+                <a:ea typeface="Arial" pitchFamily="34" charset="-122"/>
+                <a:cs typeface="Arial" pitchFamily="34" charset="-120"/>
               </a:rPr>
               <a:t>Ask and validate</a:t>
             </a:r>
@@ -6470,9 +6685,9 @@
                 <a:solidFill>
                   <a:srgbClr val="17212B"/>
                 </a:solidFill>
-                <a:latin typeface="IBM Plex Mono" pitchFamily="49" charset="0"/>
-                <a:ea typeface="IBM Plex Mono" pitchFamily="49" charset="-122"/>
-                <a:cs typeface="IBM Plex Mono" pitchFamily="49" charset="-120"/>
+                <a:latin typeface="Courier New" pitchFamily="49" charset="0"/>
+                <a:ea typeface="Courier New" pitchFamily="49" charset="-122"/>
+                <a:cs typeface="Courier New" pitchFamily="49" charset="-120"/>
               </a:rPr>
               <a:t>def ask(row, technique: str):</a:t>
             </a:r>
@@ -6490,9 +6705,9 @@
                 <a:solidFill>
                   <a:srgbClr val="17212B"/>
                 </a:solidFill>
-                <a:latin typeface="IBM Plex Mono" pitchFamily="49" charset="0"/>
-                <a:ea typeface="IBM Plex Mono" pitchFamily="49" charset="-122"/>
-                <a:cs typeface="IBM Plex Mono" pitchFamily="49" charset="-120"/>
+                <a:latin typeface="Courier New" pitchFamily="49" charset="0"/>
+                <a:ea typeface="Courier New" pitchFamily="49" charset="-122"/>
+                <a:cs typeface="Courier New" pitchFamily="49" charset="-120"/>
               </a:rPr>
               <a:t>    schema = AnswerCoT if technique == "cot" else Answer</a:t>
             </a:r>
@@ -6510,9 +6725,9 @@
                 <a:solidFill>
                   <a:srgbClr val="17212B"/>
                 </a:solidFill>
-                <a:latin typeface="IBM Plex Mono" pitchFamily="49" charset="0"/>
-                <a:ea typeface="IBM Plex Mono" pitchFamily="49" charset="-122"/>
-                <a:cs typeface="IBM Plex Mono" pitchFamily="49" charset="-120"/>
+                <a:latin typeface="Courier New" pitchFamily="49" charset="0"/>
+                <a:ea typeface="Courier New" pitchFamily="49" charset="-122"/>
+                <a:cs typeface="Courier New" pitchFamily="49" charset="-120"/>
               </a:rPr>
               <a:t>    resp = ollama.chat(model=MODEL,</a:t>
             </a:r>
@@ -6530,9 +6745,9 @@
                 <a:solidFill>
                   <a:srgbClr val="17212B"/>
                 </a:solidFill>
-                <a:latin typeface="IBM Plex Mono" pitchFamily="49" charset="0"/>
-                <a:ea typeface="IBM Plex Mono" pitchFamily="49" charset="-122"/>
-                <a:cs typeface="IBM Plex Mono" pitchFamily="49" charset="-120"/>
+                <a:latin typeface="Courier New" pitchFamily="49" charset="0"/>
+                <a:ea typeface="Courier New" pitchFamily="49" charset="-122"/>
+                <a:cs typeface="Courier New" pitchFamily="49" charset="-120"/>
               </a:rPr>
               <a:t>        messages=build_messages(row, technique),</a:t>
             </a:r>
@@ -6550,9 +6765,9 @@
                 <a:solidFill>
                   <a:srgbClr val="17212B"/>
                 </a:solidFill>
-                <a:latin typeface="IBM Plex Mono" pitchFamily="49" charset="0"/>
-                <a:ea typeface="IBM Plex Mono" pitchFamily="49" charset="-122"/>
-                <a:cs typeface="IBM Plex Mono" pitchFamily="49" charset="-120"/>
+                <a:latin typeface="Courier New" pitchFamily="49" charset="0"/>
+                <a:ea typeface="Courier New" pitchFamily="49" charset="-122"/>
+                <a:cs typeface="Courier New" pitchFamily="49" charset="-120"/>
               </a:rPr>
               <a:t>        format=schema.model_json_schema(),</a:t>
             </a:r>
@@ -6570,9 +6785,9 @@
                 <a:solidFill>
                   <a:srgbClr val="17212B"/>
                 </a:solidFill>
-                <a:latin typeface="IBM Plex Mono" pitchFamily="49" charset="0"/>
-                <a:ea typeface="IBM Plex Mono" pitchFamily="49" charset="-122"/>
-                <a:cs typeface="IBM Plex Mono" pitchFamily="49" charset="-120"/>
+                <a:latin typeface="Courier New" pitchFamily="49" charset="0"/>
+                <a:ea typeface="Courier New" pitchFamily="49" charset="-122"/>
+                <a:cs typeface="Courier New" pitchFamily="49" charset="-120"/>
               </a:rPr>
               <a:t>        options={"temperature": 0, "seed": SEED,</a:t>
             </a:r>
@@ -6590,9 +6805,9 @@
                 <a:solidFill>
                   <a:srgbClr val="17212B"/>
                 </a:solidFill>
-                <a:latin typeface="IBM Plex Mono" pitchFamily="49" charset="0"/>
-                <a:ea typeface="IBM Plex Mono" pitchFamily="49" charset="-122"/>
-                <a:cs typeface="IBM Plex Mono" pitchFamily="49" charset="-120"/>
+                <a:latin typeface="Courier New" pitchFamily="49" charset="0"/>
+                <a:ea typeface="Courier New" pitchFamily="49" charset="-122"/>
+                <a:cs typeface="Courier New" pitchFamily="49" charset="-120"/>
               </a:rPr>
               <a:t>                 "num_predict": 512})</a:t>
             </a:r>
@@ -6610,9 +6825,9 @@
                 <a:solidFill>
                   <a:srgbClr val="17212B"/>
                 </a:solidFill>
-                <a:latin typeface="IBM Plex Mono" pitchFamily="49" charset="0"/>
-                <a:ea typeface="IBM Plex Mono" pitchFamily="49" charset="-122"/>
-                <a:cs typeface="IBM Plex Mono" pitchFamily="49" charset="-120"/>
+                <a:latin typeface="Courier New" pitchFamily="49" charset="0"/>
+                <a:ea typeface="Courier New" pitchFamily="49" charset="-122"/>
+                <a:cs typeface="Courier New" pitchFamily="49" charset="-120"/>
               </a:rPr>
               <a:t>    try:</a:t>
             </a:r>
@@ -6630,9 +6845,9 @@
                 <a:solidFill>
                   <a:srgbClr val="17212B"/>
                 </a:solidFill>
-                <a:latin typeface="IBM Plex Mono" pitchFamily="49" charset="0"/>
-                <a:ea typeface="IBM Plex Mono" pitchFamily="49" charset="-122"/>
-                <a:cs typeface="IBM Plex Mono" pitchFamily="49" charset="-120"/>
+                <a:latin typeface="Courier New" pitchFamily="49" charset="0"/>
+                <a:ea typeface="Courier New" pitchFamily="49" charset="-122"/>
+                <a:cs typeface="Courier New" pitchFamily="49" charset="-120"/>
               </a:rPr>
               <a:t>        a = schema.model_validate_json(resp.message.content)</a:t>
             </a:r>
@@ -6650,9 +6865,9 @@
                 <a:solidFill>
                   <a:srgbClr val="17212B"/>
                 </a:solidFill>
-                <a:latin typeface="IBM Plex Mono" pitchFamily="49" charset="0"/>
-                <a:ea typeface="IBM Plex Mono" pitchFamily="49" charset="-122"/>
-                <a:cs typeface="IBM Plex Mono" pitchFamily="49" charset="-120"/>
+                <a:latin typeface="Courier New" pitchFamily="49" charset="0"/>
+                <a:ea typeface="Courier New" pitchFamily="49" charset="-122"/>
+                <a:cs typeface="Courier New" pitchFamily="49" charset="-120"/>
               </a:rPr>
               <a:t>        return (a.diagnosis, a.icd10,</a:t>
             </a:r>
@@ -6670,9 +6885,9 @@
                 <a:solidFill>
                   <a:srgbClr val="17212B"/>
                 </a:solidFill>
-                <a:latin typeface="IBM Plex Mono" pitchFamily="49" charset="0"/>
-                <a:ea typeface="IBM Plex Mono" pitchFamily="49" charset="-122"/>
-                <a:cs typeface="IBM Plex Mono" pitchFamily="49" charset="-120"/>
+                <a:latin typeface="Courier New" pitchFamily="49" charset="0"/>
+                <a:ea typeface="Courier New" pitchFamily="49" charset="-122"/>
+                <a:cs typeface="Courier New" pitchFamily="49" charset="-120"/>
               </a:rPr>
               <a:t>                getattr(a, "reasoning", None), True)</a:t>
             </a:r>
@@ -6690,9 +6905,9 @@
                 <a:solidFill>
                   <a:srgbClr val="17212B"/>
                 </a:solidFill>
-                <a:latin typeface="IBM Plex Mono" pitchFamily="49" charset="0"/>
-                <a:ea typeface="IBM Plex Mono" pitchFamily="49" charset="-122"/>
-                <a:cs typeface="IBM Plex Mono" pitchFamily="49" charset="-120"/>
+                <a:latin typeface="Courier New" pitchFamily="49" charset="0"/>
+                <a:ea typeface="Courier New" pitchFamily="49" charset="-122"/>
+                <a:cs typeface="Courier New" pitchFamily="49" charset="-120"/>
               </a:rPr>
               <a:t>    except ValidationError:</a:t>
             </a:r>
@@ -6710,9 +6925,9 @@
                 <a:solidFill>
                   <a:srgbClr val="17212B"/>
                 </a:solidFill>
-                <a:latin typeface="IBM Plex Mono" pitchFamily="49" charset="0"/>
-                <a:ea typeface="IBM Plex Mono" pitchFamily="49" charset="-122"/>
-                <a:cs typeface="IBM Plex Mono" pitchFamily="49" charset="-120"/>
+                <a:latin typeface="Courier New" pitchFamily="49" charset="0"/>
+                <a:ea typeface="Courier New" pitchFamily="49" charset="-122"/>
+                <a:cs typeface="Courier New" pitchFamily="49" charset="-120"/>
               </a:rPr>
               <a:t>        return None, None, None, False</a:t>
             </a:r>
@@ -6777,9 +6992,9 @@
                 <a:solidFill>
                   <a:srgbClr val="0E6E6C"/>
                 </a:solidFill>
-                <a:latin typeface="IBM Plex Sans" pitchFamily="34" charset="0"/>
-                <a:ea typeface="IBM Plex Sans" pitchFamily="34" charset="-122"/>
-                <a:cs typeface="IBM Plex Sans" pitchFamily="34" charset="-120"/>
+                <a:latin typeface="Arial" pitchFamily="34" charset="0"/>
+                <a:ea typeface="Arial" pitchFamily="34" charset="-122"/>
+                <a:cs typeface="Arial" pitchFamily="34" charset="-120"/>
               </a:rPr>
               <a:t>YOU SHOULD SEE</a:t>
             </a:r>
@@ -6821,9 +7036,9 @@
                 <a:solidFill>
                   <a:srgbClr val="17212B"/>
                 </a:solidFill>
-                <a:latin typeface="IBM Plex Mono" pitchFamily="49" charset="0"/>
-                <a:ea typeface="IBM Plex Mono" pitchFamily="49" charset="-122"/>
-                <a:cs typeface="IBM Plex Mono" pitchFamily="49" charset="-120"/>
+                <a:latin typeface="Courier New" pitchFamily="49" charset="0"/>
+                <a:ea typeface="Courier New" pitchFamily="49" charset="-122"/>
+                <a:cs typeface="Courier New" pitchFamily="49" charset="-120"/>
               </a:rPr>
               <a:t>few_shot ('Corneal ulcer of eye, unspecified', 'H56.1', None, True)</a:t>
             </a:r>
@@ -6865,9 +7080,9 @@
                 <a:solidFill>
                   <a:srgbClr val="17212B"/>
                 </a:solidFill>
-                <a:latin typeface="IBM Plex Sans" pitchFamily="34" charset="0"/>
-                <a:ea typeface="IBM Plex Sans" pitchFamily="34" charset="-122"/>
-                <a:cs typeface="IBM Plex Sans" pitchFamily="34" charset="-120"/>
+                <a:latin typeface="Arial" pitchFamily="34" charset="0"/>
+                <a:ea typeface="Arial" pitchFamily="34" charset="-122"/>
+                <a:cs typeface="Arial" pitchFamily="34" charset="-120"/>
               </a:rPr>
               <a:t>The answer schemas</a:t>
             </a:r>
@@ -6909,9 +7124,9 @@
                 <a:solidFill>
                   <a:srgbClr val="17212B"/>
                 </a:solidFill>
-                <a:latin typeface="IBM Plex Mono" pitchFamily="49" charset="0"/>
-                <a:ea typeface="IBM Plex Mono" pitchFamily="49" charset="-122"/>
-                <a:cs typeface="IBM Plex Mono" pitchFamily="49" charset="-120"/>
+                <a:latin typeface="Courier New" pitchFamily="49" charset="0"/>
+                <a:ea typeface="Courier New" pitchFamily="49" charset="-122"/>
+                <a:cs typeface="Courier New" pitchFamily="49" charset="-120"/>
               </a:rPr>
               <a:t>class Answer(BaseModel):</a:t>
             </a:r>
@@ -6929,9 +7144,9 @@
                 <a:solidFill>
                   <a:srgbClr val="17212B"/>
                 </a:solidFill>
-                <a:latin typeface="IBM Plex Mono" pitchFamily="49" charset="0"/>
-                <a:ea typeface="IBM Plex Mono" pitchFamily="49" charset="-122"/>
-                <a:cs typeface="IBM Plex Mono" pitchFamily="49" charset="-120"/>
+                <a:latin typeface="Courier New" pitchFamily="49" charset="0"/>
+                <a:ea typeface="Courier New" pitchFamily="49" charset="-122"/>
+                <a:cs typeface="Courier New" pitchFamily="49" charset="-120"/>
               </a:rPr>
               <a:t>    diagnosis: str</a:t>
             </a:r>
@@ -6949,9 +7164,9 @@
                 <a:solidFill>
                   <a:srgbClr val="17212B"/>
                 </a:solidFill>
-                <a:latin typeface="IBM Plex Mono" pitchFamily="49" charset="0"/>
-                <a:ea typeface="IBM Plex Mono" pitchFamily="49" charset="-122"/>
-                <a:cs typeface="IBM Plex Mono" pitchFamily="49" charset="-120"/>
+                <a:latin typeface="Courier New" pitchFamily="49" charset="0"/>
+                <a:ea typeface="Courier New" pitchFamily="49" charset="-122"/>
+                <a:cs typeface="Courier New" pitchFamily="49" charset="-120"/>
               </a:rPr>
               <a:t>    icd10: str</a:t>
             </a:r>
@@ -6969,9 +7184,9 @@
                 <a:solidFill>
                   <a:srgbClr val="17212B"/>
                 </a:solidFill>
-                <a:latin typeface="IBM Plex Mono" pitchFamily="49" charset="0"/>
-                <a:ea typeface="IBM Plex Mono" pitchFamily="49" charset="-122"/>
-                <a:cs typeface="IBM Plex Mono" pitchFamily="49" charset="-120"/>
+                <a:latin typeface="Courier New" pitchFamily="49" charset="0"/>
+                <a:ea typeface="Courier New" pitchFamily="49" charset="-122"/>
+                <a:cs typeface="Courier New" pitchFamily="49" charset="-120"/>
               </a:rPr>
               <a:t>class AnswerCoT(BaseModel):</a:t>
             </a:r>
@@ -6989,9 +7204,9 @@
                 <a:solidFill>
                   <a:srgbClr val="17212B"/>
                 </a:solidFill>
-                <a:latin typeface="IBM Plex Mono" pitchFamily="49" charset="0"/>
-                <a:ea typeface="IBM Plex Mono" pitchFamily="49" charset="-122"/>
-                <a:cs typeface="IBM Plex Mono" pitchFamily="49" charset="-120"/>
+                <a:latin typeface="Courier New" pitchFamily="49" charset="0"/>
+                <a:ea typeface="Courier New" pitchFamily="49" charset="-122"/>
+                <a:cs typeface="Courier New" pitchFamily="49" charset="-120"/>
               </a:rPr>
               <a:t>    reasoning: str</a:t>
             </a:r>
@@ -7009,9 +7224,9 @@
                 <a:solidFill>
                   <a:srgbClr val="17212B"/>
                 </a:solidFill>
-                <a:latin typeface="IBM Plex Mono" pitchFamily="49" charset="0"/>
-                <a:ea typeface="IBM Plex Mono" pitchFamily="49" charset="-122"/>
-                <a:cs typeface="IBM Plex Mono" pitchFamily="49" charset="-120"/>
+                <a:latin typeface="Courier New" pitchFamily="49" charset="0"/>
+                <a:ea typeface="Courier New" pitchFamily="49" charset="-122"/>
+                <a:cs typeface="Courier New" pitchFamily="49" charset="-120"/>
               </a:rPr>
               <a:t>    diagnosis: str</a:t>
             </a:r>
@@ -7029,9 +7244,9 @@
                 <a:solidFill>
                   <a:srgbClr val="17212B"/>
                 </a:solidFill>
-                <a:latin typeface="IBM Plex Mono" pitchFamily="49" charset="0"/>
-                <a:ea typeface="IBM Plex Mono" pitchFamily="49" charset="-122"/>
-                <a:cs typeface="IBM Plex Mono" pitchFamily="49" charset="-120"/>
+                <a:latin typeface="Courier New" pitchFamily="49" charset="0"/>
+                <a:ea typeface="Courier New" pitchFamily="49" charset="-122"/>
+                <a:cs typeface="Courier New" pitchFamily="49" charset="-120"/>
               </a:rPr>
               <a:t>    icd10: str</a:t>
             </a:r>
@@ -7073,11 +7288,11 @@
                 <a:solidFill>
                   <a:srgbClr val="5C6772"/>
                 </a:solidFill>
-                <a:latin typeface="IBM Plex Sans" pitchFamily="34" charset="0"/>
-                <a:ea typeface="IBM Plex Sans" pitchFamily="34" charset="-122"/>
-                <a:cs typeface="IBM Plex Sans" pitchFamily="34" charset="-120"/>
-              </a:rPr>
-              <a:t>Notebook cells 18 and 20</a:t>
+                <a:latin typeface="Arial" pitchFamily="34" charset="0"/>
+                <a:ea typeface="Arial" pitchFamily="34" charset="-122"/>
+                <a:cs typeface="Arial" pitchFamily="34" charset="-120"/>
+              </a:rPr>
+              <a:t>Notebook cells [12] and [14]</a:t>
             </a:r>
             <a:endParaRPr lang="en-US" sz="1200" dirty="0"/>
           </a:p>
@@ -7117,9 +7332,9 @@
                 <a:solidFill>
                   <a:srgbClr val="5C6772"/>
                 </a:solidFill>
-                <a:latin typeface="IBM Plex Sans" pitchFamily="34" charset="0"/>
-                <a:ea typeface="IBM Plex Sans" pitchFamily="34" charset="-122"/>
-                <a:cs typeface="IBM Plex Sans" pitchFamily="34" charset="-120"/>
+                <a:latin typeface="Arial" pitchFamily="34" charset="0"/>
+                <a:ea typeface="Arial" pitchFamily="34" charset="-122"/>
+                <a:cs typeface="Arial" pitchFamily="34" charset="-120"/>
               </a:rPr>
               <a:t>14</a:t>
             </a:r>
@@ -7193,9 +7408,9 @@
                 <a:solidFill>
                   <a:srgbClr val="0E6E6C"/>
                 </a:solidFill>
-                <a:latin typeface="IBM Plex Sans" pitchFamily="34" charset="0"/>
-                <a:ea typeface="IBM Plex Sans" pitchFamily="34" charset="-122"/>
-                <a:cs typeface="IBM Plex Sans" pitchFamily="34" charset="-120"/>
+                <a:latin typeface="Arial" pitchFamily="34" charset="0"/>
+                <a:ea typeface="Arial" pitchFamily="34" charset="-122"/>
+                <a:cs typeface="Arial" pitchFamily="34" charset="-120"/>
               </a:rPr>
               <a:t>ASK THE MODEL (STEP 5 OF 7)</a:t>
             </a:r>
@@ -7239,9 +7454,9 @@
                 <a:solidFill>
                   <a:srgbClr val="17212B"/>
                 </a:solidFill>
-                <a:latin typeface="IBM Plex Sans" pitchFamily="34" charset="0"/>
-                <a:ea typeface="IBM Plex Sans" pitchFamily="34" charset="-122"/>
-                <a:cs typeface="IBM Plex Sans" pitchFamily="34" charset="-120"/>
+                <a:latin typeface="Arial" pitchFamily="34" charset="0"/>
+                <a:ea typeface="Arial" pitchFamily="34" charset="-122"/>
+                <a:cs typeface="Arial" pitchFamily="34" charset="-120"/>
               </a:rPr>
               <a:t>The full run asks all three prompts about the same 94 stays, which takes about 10 minutes</a:t>
             </a:r>
@@ -7306,9 +7521,9 @@
                 <a:solidFill>
                   <a:srgbClr val="3A4651"/>
                 </a:solidFill>
-                <a:latin typeface="IBM Plex Sans" pitchFamily="34" charset="0"/>
-                <a:ea typeface="IBM Plex Sans" pitchFamily="34" charset="-122"/>
-                <a:cs typeface="IBM Plex Sans" pitchFamily="34" charset="-120"/>
+                <a:latin typeface="Arial" pitchFamily="34" charset="0"/>
+                <a:ea typeface="Arial" pitchFamily="34" charset="-122"/>
+                <a:cs typeface="Arial" pitchFamily="34" charset="-120"/>
               </a:rPr>
               <a:t>Chain-of-thought takes about five times longer than the other two because it writes out its reasoning first</a:t>
             </a:r>
@@ -7373,9 +7588,9 @@
                 <a:solidFill>
                   <a:srgbClr val="17212B"/>
                 </a:solidFill>
-                <a:latin typeface="IBM Plex Sans" pitchFamily="34" charset="0"/>
-                <a:ea typeface="IBM Plex Sans" pitchFamily="34" charset="-122"/>
-                <a:cs typeface="IBM Plex Sans" pitchFamily="34" charset="-120"/>
+                <a:latin typeface="Arial" pitchFamily="34" charset="0"/>
+                <a:ea typeface="Arial" pitchFamily="34" charset="-122"/>
+                <a:cs typeface="Arial" pitchFamily="34" charset="-120"/>
               </a:rPr>
               <a:t>Run every stay through every technique</a:t>
             </a:r>
@@ -7392,7 +7607,7 @@
         <p:spPr>
           <a:xfrm>
             <a:off x="812800" y="2889796"/>
-            <a:ext cx="6802120" cy="2494161"/>
+            <a:ext cx="6802120" cy="2699891"/>
           </a:xfrm>
           <a:prstGeom prst="rect">
             <a:avLst/>
@@ -7417,9 +7632,9 @@
                 <a:solidFill>
                   <a:srgbClr val="17212B"/>
                 </a:solidFill>
-                <a:latin typeface="IBM Plex Mono" pitchFamily="49" charset="0"/>
-                <a:ea typeface="IBM Plex Mono" pitchFamily="49" charset="-122"/>
-                <a:cs typeface="IBM Plex Mono" pitchFamily="49" charset="-120"/>
+                <a:latin typeface="Courier New" pitchFamily="49" charset="0"/>
+                <a:ea typeface="Courier New" pitchFamily="49" charset="-122"/>
+                <a:cs typeface="Courier New" pitchFamily="49" charset="-120"/>
               </a:rPr>
               <a:t>TECHNIQUES = ["zero_shot", "few_shot", "cot"]</a:t>
             </a:r>
@@ -7437,9 +7652,9 @@
                 <a:solidFill>
                   <a:srgbClr val="17212B"/>
                 </a:solidFill>
-                <a:latin typeface="IBM Plex Mono" pitchFamily="49" charset="0"/>
-                <a:ea typeface="IBM Plex Mono" pitchFamily="49" charset="-122"/>
-                <a:cs typeface="IBM Plex Mono" pitchFamily="49" charset="-120"/>
+                <a:latin typeface="Courier New" pitchFamily="49" charset="0"/>
+                <a:ea typeface="Courier New" pitchFamily="49" charset="-122"/>
+                <a:cs typeface="Courier New" pitchFamily="49" charset="-120"/>
               </a:rPr>
               <a:t>rows = []</a:t>
             </a:r>
@@ -7457,9 +7672,9 @@
                 <a:solidFill>
                   <a:srgbClr val="17212B"/>
                 </a:solidFill>
-                <a:latin typeface="IBM Plex Mono" pitchFamily="49" charset="0"/>
-                <a:ea typeface="IBM Plex Mono" pitchFamily="49" charset="-122"/>
-                <a:cs typeface="IBM Plex Mono" pitchFamily="49" charset="-120"/>
+                <a:latin typeface="Courier New" pitchFamily="49" charset="0"/>
+                <a:ea typeface="Courier New" pitchFamily="49" charset="-122"/>
+                <a:cs typeface="Courier New" pitchFamily="49" charset="-120"/>
               </a:rPr>
               <a:t>for technique in TECHNIQUES:</a:t>
             </a:r>
@@ -7477,9 +7692,9 @@
                 <a:solidFill>
                   <a:srgbClr val="17212B"/>
                 </a:solidFill>
-                <a:latin typeface="IBM Plex Mono" pitchFamily="49" charset="0"/>
-                <a:ea typeface="IBM Plex Mono" pitchFamily="49" charset="-122"/>
-                <a:cs typeface="IBM Plex Mono" pitchFamily="49" charset="-120"/>
+                <a:latin typeface="Courier New" pitchFamily="49" charset="0"/>
+                <a:ea typeface="Courier New" pitchFamily="49" charset="-122"/>
+                <a:cs typeface="Courier New" pitchFamily="49" charset="-120"/>
               </a:rPr>
               <a:t>    for _, row in tqdm(eval_df.iterrows(), total=len(eval_df),</a:t>
             </a:r>
@@ -7497,9 +7712,9 @@
                 <a:solidFill>
                   <a:srgbClr val="17212B"/>
                 </a:solidFill>
-                <a:latin typeface="IBM Plex Mono" pitchFamily="49" charset="0"/>
-                <a:ea typeface="IBM Plex Mono" pitchFamily="49" charset="-122"/>
-                <a:cs typeface="IBM Plex Mono" pitchFamily="49" charset="-120"/>
+                <a:latin typeface="Courier New" pitchFamily="49" charset="0"/>
+                <a:ea typeface="Courier New" pitchFamily="49" charset="-122"/>
+                <a:cs typeface="Courier New" pitchFamily="49" charset="-120"/>
               </a:rPr>
               <a:t>                       desc=technique):</a:t>
             </a:r>
@@ -7517,9 +7732,9 @@
                 <a:solidFill>
                   <a:srgbClr val="17212B"/>
                 </a:solidFill>
-                <a:latin typeface="IBM Plex Mono" pitchFamily="49" charset="0"/>
-                <a:ea typeface="IBM Plex Mono" pitchFamily="49" charset="-122"/>
-                <a:cs typeface="IBM Plex Mono" pitchFamily="49" charset="-120"/>
+                <a:latin typeface="Courier New" pitchFamily="49" charset="0"/>
+                <a:ea typeface="Courier New" pitchFamily="49" charset="-122"/>
+                <a:cs typeface="Courier New" pitchFamily="49" charset="-120"/>
               </a:rPr>
               <a:t>        dx, code, reasoning, ok = ask(row, technique)</a:t>
             </a:r>
@@ -7537,11 +7752,11 @@
                 <a:solidFill>
                   <a:srgbClr val="17212B"/>
                 </a:solidFill>
-                <a:latin typeface="IBM Plex Mono" pitchFamily="49" charset="0"/>
-                <a:ea typeface="IBM Plex Mono" pitchFamily="49" charset="-122"/>
-                <a:cs typeface="IBM Plex Mono" pitchFamily="49" charset="-120"/>
-              </a:rPr>
-              <a:t>        rows.append({"stay_id": row.stay_id,</a:t>
+                <a:latin typeface="Courier New" pitchFamily="49" charset="0"/>
+                <a:ea typeface="Courier New" pitchFamily="49" charset="-122"/>
+                <a:cs typeface="Courier New" pitchFamily="49" charset="-120"/>
+              </a:rPr>
+              <a:t>        rows.append({</a:t>
             </a:r>
             <a:endParaRPr lang="en-US" sz="1200" dirty="0"/>
           </a:p>
@@ -7557,11 +7772,11 @@
                 <a:solidFill>
                   <a:srgbClr val="17212B"/>
                 </a:solidFill>
-                <a:latin typeface="IBM Plex Mono" pitchFamily="49" charset="0"/>
-                <a:ea typeface="IBM Plex Mono" pitchFamily="49" charset="-122"/>
-                <a:cs typeface="IBM Plex Mono" pitchFamily="49" charset="-120"/>
-              </a:rPr>
-              <a:t>            "technique": technique,</a:t>
+                <a:latin typeface="Courier New" pitchFamily="49" charset="0"/>
+                <a:ea typeface="Courier New" pitchFamily="49" charset="-122"/>
+                <a:cs typeface="Courier New" pitchFamily="49" charset="-120"/>
+              </a:rPr>
+              <a:t>            "stay_id": row.stay_id, "technique": technique,</a:t>
             </a:r>
             <a:endParaRPr lang="en-US" sz="1200" dirty="0"/>
           </a:p>
@@ -7577,9 +7792,29 @@
                 <a:solidFill>
                   <a:srgbClr val="17212B"/>
                 </a:solidFill>
-                <a:latin typeface="IBM Plex Mono" pitchFamily="49" charset="0"/>
-                <a:ea typeface="IBM Plex Mono" pitchFamily="49" charset="-122"/>
-                <a:cs typeface="IBM Plex Mono" pitchFamily="49" charset="-120"/>
+                <a:latin typeface="Courier New" pitchFamily="49" charset="0"/>
+                <a:ea typeface="Courier New" pitchFamily="49" charset="-122"/>
+                <a:cs typeface="Courier New" pitchFamily="49" charset="-120"/>
+              </a:rPr>
+              <a:t>            "true_code": row.icd_code,</a:t>
+            </a:r>
+            <a:endParaRPr lang="en-US" sz="1200" dirty="0"/>
+          </a:p>
+          <a:p>
+            <a:pPr algn="l" indent="0" marL="0">
+              <a:lnSpc>
+                <a:spcPts val="1620"/>
+              </a:lnSpc>
+              <a:buNone/>
+            </a:pPr>
+            <a:r>
+              <a:rPr lang="en-US" sz="1200" dirty="0">
+                <a:solidFill>
+                  <a:srgbClr val="17212B"/>
+                </a:solidFill>
+                <a:latin typeface="Courier New" pitchFamily="49" charset="0"/>
+                <a:ea typeface="Courier New" pitchFamily="49" charset="-122"/>
+                <a:cs typeface="Courier New" pitchFamily="49" charset="-120"/>
               </a:rPr>
               <a:t>            "true_chapter": row.true_chapter,</a:t>
             </a:r>
@@ -7597,11 +7832,11 @@
                 <a:solidFill>
                   <a:srgbClr val="17212B"/>
                 </a:solidFill>
-                <a:latin typeface="IBM Plex Mono" pitchFamily="49" charset="0"/>
-                <a:ea typeface="IBM Plex Mono" pitchFamily="49" charset="-122"/>
-                <a:cs typeface="IBM Plex Mono" pitchFamily="49" charset="-120"/>
-              </a:rPr>
-              <a:t>            "pred_code": code,</a:t>
+                <a:latin typeface="Courier New" pitchFamily="49" charset="0"/>
+                <a:ea typeface="Courier New" pitchFamily="49" charset="-122"/>
+                <a:cs typeface="Courier New" pitchFamily="49" charset="-120"/>
+              </a:rPr>
+              <a:t>            "pred_diagnosis": dx, "pred_code": code,</a:t>
             </a:r>
             <a:endParaRPr lang="en-US" sz="1200" dirty="0"/>
           </a:p>
@@ -7617,11 +7852,11 @@
                 <a:solidFill>
                   <a:srgbClr val="17212B"/>
                 </a:solidFill>
-                <a:latin typeface="IBM Plex Mono" pitchFamily="49" charset="0"/>
-                <a:ea typeface="IBM Plex Mono" pitchFamily="49" charset="-122"/>
-                <a:cs typeface="IBM Plex Mono" pitchFamily="49" charset="-120"/>
-              </a:rPr>
-              <a:t>            "parse_ok": ok})</a:t>
+                <a:latin typeface="Courier New" pitchFamily="49" charset="0"/>
+                <a:ea typeface="Courier New" pitchFamily="49" charset="-122"/>
+                <a:cs typeface="Courier New" pitchFamily="49" charset="-120"/>
+              </a:rPr>
+              <a:t>            "reasoning": reasoning, "parse_ok": ok})</a:t>
             </a:r>
             <a:endParaRPr lang="en-US" sz="1200" dirty="0"/>
           </a:p>
@@ -7637,9 +7872,9 @@
                 <a:solidFill>
                   <a:srgbClr val="17212B"/>
                 </a:solidFill>
-                <a:latin typeface="IBM Plex Mono" pitchFamily="49" charset="0"/>
-                <a:ea typeface="IBM Plex Mono" pitchFamily="49" charset="-122"/>
-                <a:cs typeface="IBM Plex Mono" pitchFamily="49" charset="-120"/>
+                <a:latin typeface="Courier New" pitchFamily="49" charset="0"/>
+                <a:ea typeface="Courier New" pitchFamily="49" charset="-122"/>
+                <a:cs typeface="Courier New" pitchFamily="49" charset="-120"/>
               </a:rPr>
               <a:t>results = pd.DataFrame(rows)</a:t>
             </a:r>
@@ -7704,9 +7939,9 @@
                 <a:solidFill>
                   <a:srgbClr val="0E6E6C"/>
                 </a:solidFill>
-                <a:latin typeface="IBM Plex Sans" pitchFamily="34" charset="0"/>
-                <a:ea typeface="IBM Plex Sans" pitchFamily="34" charset="-122"/>
-                <a:cs typeface="IBM Plex Sans" pitchFamily="34" charset="-120"/>
+                <a:latin typeface="Arial" pitchFamily="34" charset="0"/>
+                <a:ea typeface="Arial" pitchFamily="34" charset="-122"/>
+                <a:cs typeface="Arial" pitchFamily="34" charset="-120"/>
               </a:rPr>
               <a:t>YOU SHOULD SEE</a:t>
             </a:r>
@@ -7748,11 +7983,11 @@
                 <a:solidFill>
                   <a:srgbClr val="17212B"/>
                 </a:solidFill>
-                <a:latin typeface="IBM Plex Mono" pitchFamily="49" charset="0"/>
-                <a:ea typeface="IBM Plex Mono" pitchFamily="49" charset="-122"/>
-                <a:cs typeface="IBM Plex Mono" pitchFamily="49" charset="-120"/>
-              </a:rPr>
-              <a:t>zero_shot: 100% 94/94 [01:25]</a:t>
+                <a:latin typeface="Courier New" pitchFamily="49" charset="0"/>
+                <a:ea typeface="Courier New" pitchFamily="49" charset="-122"/>
+                <a:cs typeface="Courier New" pitchFamily="49" charset="-120"/>
+              </a:rPr>
+              <a:t>zero_shot: 100% 94/94 [01:28]</a:t>
             </a:r>
             <a:endParaRPr lang="en-US" sz="1200" dirty="0"/>
           </a:p>
@@ -7768,11 +8003,11 @@
                 <a:solidFill>
                   <a:srgbClr val="17212B"/>
                 </a:solidFill>
-                <a:latin typeface="IBM Plex Mono" pitchFamily="49" charset="0"/>
-                <a:ea typeface="IBM Plex Mono" pitchFamily="49" charset="-122"/>
-                <a:cs typeface="IBM Plex Mono" pitchFamily="49" charset="-120"/>
-              </a:rPr>
-              <a:t>few_shot:  100% 94/94 [01:04]</a:t>
+                <a:latin typeface="Courier New" pitchFamily="49" charset="0"/>
+                <a:ea typeface="Courier New" pitchFamily="49" charset="-122"/>
+                <a:cs typeface="Courier New" pitchFamily="49" charset="-120"/>
+              </a:rPr>
+              <a:t>few_shot:  100% 94/94 [01:07]</a:t>
             </a:r>
             <a:endParaRPr lang="en-US" sz="1200" dirty="0"/>
           </a:p>
@@ -7788,11 +8023,11 @@
                 <a:solidFill>
                   <a:srgbClr val="17212B"/>
                 </a:solidFill>
-                <a:latin typeface="IBM Plex Mono" pitchFamily="49" charset="0"/>
-                <a:ea typeface="IBM Plex Mono" pitchFamily="49" charset="-122"/>
-                <a:cs typeface="IBM Plex Mono" pitchFamily="49" charset="-120"/>
-              </a:rPr>
-              <a:t>cot:       100% 94/94 [06:56]</a:t>
+                <a:latin typeface="Courier New" pitchFamily="49" charset="0"/>
+                <a:ea typeface="Courier New" pitchFamily="49" charset="-122"/>
+                <a:cs typeface="Courier New" pitchFamily="49" charset="-120"/>
+              </a:rPr>
+              <a:t>cot:       100% 94/94 [07:07]</a:t>
             </a:r>
             <a:endParaRPr lang="en-US" sz="1200" dirty="0"/>
           </a:p>
@@ -7832,9 +8067,9 @@
                 <a:solidFill>
                   <a:srgbClr val="17212B"/>
                 </a:solidFill>
-                <a:latin typeface="IBM Plex Sans" pitchFamily="34" charset="0"/>
-                <a:ea typeface="IBM Plex Sans" pitchFamily="34" charset="-122"/>
-                <a:cs typeface="IBM Plex Sans" pitchFamily="34" charset="-120"/>
+                <a:latin typeface="Arial" pitchFamily="34" charset="0"/>
+                <a:ea typeface="Arial" pitchFamily="34" charset="-122"/>
+                <a:cs typeface="Arial" pitchFamily="34" charset="-120"/>
               </a:rPr>
               <a:t>Three progress bars appear, one for each technique, followed by the first rows of the results table.</a:t>
             </a:r>
@@ -7876,9 +8111,9 @@
                 <a:solidFill>
                   <a:srgbClr val="17212B"/>
                 </a:solidFill>
-                <a:latin typeface="IBM Plex Sans" pitchFamily="34" charset="0"/>
-                <a:ea typeface="IBM Plex Sans" pitchFamily="34" charset="-122"/>
-                <a:cs typeface="IBM Plex Sans" pitchFamily="34" charset="-120"/>
+                <a:latin typeface="Arial" pitchFamily="34" charset="0"/>
+                <a:ea typeface="Arial" pitchFamily="34" charset="-122"/>
+                <a:cs typeface="Arial" pitchFamily="34" charset="-120"/>
               </a:rPr>
               <a:t>If the run is too slow on your machine, lower N_CASES in the config cell and run it again.</a:t>
             </a:r>
@@ -7920,11 +8155,11 @@
                 <a:solidFill>
                   <a:srgbClr val="5C6772"/>
                 </a:solidFill>
-                <a:latin typeface="IBM Plex Sans" pitchFamily="34" charset="0"/>
-                <a:ea typeface="IBM Plex Sans" pitchFamily="34" charset="-122"/>
-                <a:cs typeface="IBM Plex Sans" pitchFamily="34" charset="-120"/>
-              </a:rPr>
-              <a:t>Notebook cell 21</a:t>
+                <a:latin typeface="Arial" pitchFamily="34" charset="0"/>
+                <a:ea typeface="Arial" pitchFamily="34" charset="-122"/>
+                <a:cs typeface="Arial" pitchFamily="34" charset="-120"/>
+              </a:rPr>
+              <a:t>Notebook cell [15]</a:t>
             </a:r>
             <a:endParaRPr lang="en-US" sz="1200" dirty="0"/>
           </a:p>
@@ -7964,9 +8199,9 @@
                 <a:solidFill>
                   <a:srgbClr val="5C6772"/>
                 </a:solidFill>
-                <a:latin typeface="IBM Plex Sans" pitchFamily="34" charset="0"/>
-                <a:ea typeface="IBM Plex Sans" pitchFamily="34" charset="-122"/>
-                <a:cs typeface="IBM Plex Sans" pitchFamily="34" charset="-120"/>
+                <a:latin typeface="Arial" pitchFamily="34" charset="0"/>
+                <a:ea typeface="Arial" pitchFamily="34" charset="-122"/>
+                <a:cs typeface="Arial" pitchFamily="34" charset="-120"/>
               </a:rPr>
               <a:t>15</a:t>
             </a:r>
@@ -8040,9 +8275,9 @@
                 <a:solidFill>
                   <a:srgbClr val="0E6E6C"/>
                 </a:solidFill>
-                <a:latin typeface="IBM Plex Sans" pitchFamily="34" charset="0"/>
-                <a:ea typeface="IBM Plex Sans" pitchFamily="34" charset="-122"/>
-                <a:cs typeface="IBM Plex Sans" pitchFamily="34" charset="-120"/>
+                <a:latin typeface="Arial" pitchFamily="34" charset="0"/>
+                <a:ea typeface="Arial" pitchFamily="34" charset="-122"/>
+                <a:cs typeface="Arial" pitchFamily="34" charset="-120"/>
               </a:rPr>
               <a:t>SCORE (STEP 6 OF 7)</a:t>
             </a:r>
@@ -8086,9 +8321,9 @@
                 <a:solidFill>
                   <a:srgbClr val="17212B"/>
                 </a:solidFill>
-                <a:latin typeface="IBM Plex Sans" pitchFamily="34" charset="0"/>
-                <a:ea typeface="IBM Plex Sans" pitchFamily="34" charset="-122"/>
-                <a:cs typeface="IBM Plex Sans" pitchFamily="34" charset="-120"/>
+                <a:latin typeface="Arial" pitchFamily="34" charset="0"/>
+                <a:ea typeface="Arial" pitchFamily="34" charset="-122"/>
+                <a:cs typeface="Arial" pitchFamily="34" charset="-120"/>
               </a:rPr>
               <a:t>Each answer is scored by its ICD-10 chapter and checked against the code dictionary</a:t>
             </a:r>
@@ -8153,9 +8388,9 @@
                 <a:solidFill>
                   <a:srgbClr val="3A4651"/>
                 </a:solidFill>
-                <a:latin typeface="IBM Plex Sans" pitchFamily="34" charset="0"/>
-                <a:ea typeface="IBM Plex Sans" pitchFamily="34" charset="-122"/>
-                <a:cs typeface="IBM Plex Sans" pitchFamily="34" charset="-120"/>
+                <a:latin typeface="Arial" pitchFamily="34" charset="0"/>
+                <a:ea typeface="Arial" pitchFamily="34" charset="-122"/>
+                <a:cs typeface="Arial" pitchFamily="34" charset="-120"/>
               </a:rPr>
               <a:t>Accuracy and the invented-code rate are measured separately, because a made-up code can still land in the right chapter</a:t>
             </a:r>
@@ -8220,9 +8455,9 @@
                 <a:solidFill>
                   <a:srgbClr val="17212B"/>
                 </a:solidFill>
-                <a:latin typeface="IBM Plex Sans" pitchFamily="34" charset="0"/>
-                <a:ea typeface="IBM Plex Sans" pitchFamily="34" charset="-122"/>
-                <a:cs typeface="IBM Plex Sans" pitchFamily="34" charset="-120"/>
+                <a:latin typeface="Arial" pitchFamily="34" charset="0"/>
+                <a:ea typeface="Arial" pitchFamily="34" charset="-122"/>
+                <a:cs typeface="Arial" pitchFamily="34" charset="-120"/>
               </a:rPr>
               <a:t>Score each prompt</a:t>
             </a:r>
@@ -8264,9 +8499,9 @@
                 <a:solidFill>
                   <a:srgbClr val="17212B"/>
                 </a:solidFill>
-                <a:latin typeface="IBM Plex Mono" pitchFamily="49" charset="0"/>
-                <a:ea typeface="IBM Plex Mono" pitchFamily="49" charset="-122"/>
-                <a:cs typeface="IBM Plex Mono" pitchFamily="49" charset="-120"/>
+                <a:latin typeface="Courier New" pitchFamily="49" charset="0"/>
+                <a:ea typeface="Courier New" pitchFamily="49" charset="-122"/>
+                <a:cs typeface="Courier New" pitchFamily="49" charset="-120"/>
               </a:rPr>
               <a:t>results["pred_chapter"] = results.pred_code.map(</a:t>
             </a:r>
@@ -8284,9 +8519,9 @@
                 <a:solidFill>
                   <a:srgbClr val="17212B"/>
                 </a:solidFill>
-                <a:latin typeface="IBM Plex Mono" pitchFamily="49" charset="0"/>
-                <a:ea typeface="IBM Plex Mono" pitchFamily="49" charset="-122"/>
-                <a:cs typeface="IBM Plex Mono" pitchFamily="49" charset="-120"/>
+                <a:latin typeface="Courier New" pitchFamily="49" charset="0"/>
+                <a:ea typeface="Courier New" pitchFamily="49" charset="-122"/>
+                <a:cs typeface="Courier New" pitchFamily="49" charset="-120"/>
               </a:rPr>
               <a:t>    lambda c: icd10_chapter(c) if isinstance(c, str)</a:t>
             </a:r>
@@ -8304,9 +8539,9 @@
                 <a:solidFill>
                   <a:srgbClr val="17212B"/>
                 </a:solidFill>
-                <a:latin typeface="IBM Plex Mono" pitchFamily="49" charset="0"/>
-                <a:ea typeface="IBM Plex Mono" pitchFamily="49" charset="-122"/>
-                <a:cs typeface="IBM Plex Mono" pitchFamily="49" charset="-120"/>
+                <a:latin typeface="Courier New" pitchFamily="49" charset="0"/>
+                <a:ea typeface="Courier New" pitchFamily="49" charset="-122"/>
+                <a:cs typeface="Courier New" pitchFamily="49" charset="-120"/>
               </a:rPr>
               <a:t>    else "Parse failed")</a:t>
             </a:r>
@@ -8324,9 +8559,9 @@
                 <a:solidFill>
                   <a:srgbClr val="17212B"/>
                 </a:solidFill>
-                <a:latin typeface="IBM Plex Mono" pitchFamily="49" charset="0"/>
-                <a:ea typeface="IBM Plex Mono" pitchFamily="49" charset="-122"/>
-                <a:cs typeface="IBM Plex Mono" pitchFamily="49" charset="-120"/>
+                <a:latin typeface="Courier New" pitchFamily="49" charset="0"/>
+                <a:ea typeface="Courier New" pitchFamily="49" charset="-122"/>
+                <a:cs typeface="Courier New" pitchFamily="49" charset="-120"/>
               </a:rPr>
               <a:t>results["correct"] = results.pred_chapter == results.true_chapter</a:t>
             </a:r>
@@ -8344,9 +8579,9 @@
                 <a:solidFill>
                   <a:srgbClr val="17212B"/>
                 </a:solidFill>
-                <a:latin typeface="IBM Plex Mono" pitchFamily="49" charset="0"/>
-                <a:ea typeface="IBM Plex Mono" pitchFamily="49" charset="-122"/>
-                <a:cs typeface="IBM Plex Mono" pitchFamily="49" charset="-120"/>
+                <a:latin typeface="Courier New" pitchFamily="49" charset="0"/>
+                <a:ea typeface="Courier New" pitchFamily="49" charset="-122"/>
+                <a:cs typeface="Courier New" pitchFamily="49" charset="-120"/>
               </a:rPr>
               <a:t>results["valid_code"] = results.pred_code.map(</a:t>
             </a:r>
@@ -8364,9 +8599,9 @@
                 <a:solidFill>
                   <a:srgbClr val="17212B"/>
                 </a:solidFill>
-                <a:latin typeface="IBM Plex Mono" pitchFamily="49" charset="0"/>
-                <a:ea typeface="IBM Plex Mono" pitchFamily="49" charset="-122"/>
-                <a:cs typeface="IBM Plex Mono" pitchFamily="49" charset="-120"/>
+                <a:latin typeface="Courier New" pitchFamily="49" charset="0"/>
+                <a:ea typeface="Courier New" pitchFamily="49" charset="-122"/>
+                <a:cs typeface="Courier New" pitchFamily="49" charset="-120"/>
               </a:rPr>
               <a:t>    lambda c: clean_code(c) in valid_icd10 if isinstance(c, str)</a:t>
             </a:r>
@@ -8384,9 +8619,9 @@
                 <a:solidFill>
                   <a:srgbClr val="17212B"/>
                 </a:solidFill>
-                <a:latin typeface="IBM Plex Mono" pitchFamily="49" charset="0"/>
-                <a:ea typeface="IBM Plex Mono" pitchFamily="49" charset="-122"/>
-                <a:cs typeface="IBM Plex Mono" pitchFamily="49" charset="-120"/>
+                <a:latin typeface="Courier New" pitchFamily="49" charset="0"/>
+                <a:ea typeface="Courier New" pitchFamily="49" charset="-122"/>
+                <a:cs typeface="Courier New" pitchFamily="49" charset="-120"/>
               </a:rPr>
               <a:t>    else np.nan).astype(float)</a:t>
             </a:r>
@@ -8413,9 +8648,9 @@
                 <a:solidFill>
                   <a:srgbClr val="17212B"/>
                 </a:solidFill>
-                <a:latin typeface="IBM Plex Mono" pitchFamily="49" charset="0"/>
-                <a:ea typeface="IBM Plex Mono" pitchFamily="49" charset="-122"/>
-                <a:cs typeface="IBM Plex Mono" pitchFamily="49" charset="-120"/>
+                <a:latin typeface="Courier New" pitchFamily="49" charset="0"/>
+                <a:ea typeface="Courier New" pitchFamily="49" charset="-122"/>
+                <a:cs typeface="Courier New" pitchFamily="49" charset="-120"/>
               </a:rPr>
               <a:t>summary = results.groupby("technique", sort=False).agg(</a:t>
             </a:r>
@@ -8433,9 +8668,9 @@
                 <a:solidFill>
                   <a:srgbClr val="17212B"/>
                 </a:solidFill>
-                <a:latin typeface="IBM Plex Mono" pitchFamily="49" charset="0"/>
-                <a:ea typeface="IBM Plex Mono" pitchFamily="49" charset="-122"/>
-                <a:cs typeface="IBM Plex Mono" pitchFamily="49" charset="-120"/>
+                <a:latin typeface="Courier New" pitchFamily="49" charset="0"/>
+                <a:ea typeface="Courier New" pitchFamily="49" charset="-122"/>
+                <a:cs typeface="Courier New" pitchFamily="49" charset="-120"/>
               </a:rPr>
               <a:t>    accuracy=("correct", "mean"),</a:t>
             </a:r>
@@ -8453,9 +8688,9 @@
                 <a:solidFill>
                   <a:srgbClr val="17212B"/>
                 </a:solidFill>
-                <a:latin typeface="IBM Plex Mono" pitchFamily="49" charset="0"/>
-                <a:ea typeface="IBM Plex Mono" pitchFamily="49" charset="-122"/>
-                <a:cs typeface="IBM Plex Mono" pitchFamily="49" charset="-120"/>
+                <a:latin typeface="Courier New" pitchFamily="49" charset="0"/>
+                <a:ea typeface="Courier New" pitchFamily="49" charset="-122"/>
+                <a:cs typeface="Courier New" pitchFamily="49" charset="-120"/>
               </a:rPr>
               <a:t>    invented_code=("valid_code", lambda v: 1 - v.mean()),</a:t>
             </a:r>
@@ -8473,9 +8708,9 @@
                 <a:solidFill>
                   <a:srgbClr val="17212B"/>
                 </a:solidFill>
-                <a:latin typeface="IBM Plex Mono" pitchFamily="49" charset="0"/>
-                <a:ea typeface="IBM Plex Mono" pitchFamily="49" charset="-122"/>
-                <a:cs typeface="IBM Plex Mono" pitchFamily="49" charset="-120"/>
+                <a:latin typeface="Courier New" pitchFamily="49" charset="0"/>
+                <a:ea typeface="Courier New" pitchFamily="49" charset="-122"/>
+                <a:cs typeface="Courier New" pitchFamily="49" charset="-120"/>
               </a:rPr>
               <a:t>    parse_failed=("parse_ok", lambda v: 1 - v.mean()))</a:t>
             </a:r>
@@ -8540,9 +8775,9 @@
                 <a:solidFill>
                   <a:srgbClr val="0E6E6C"/>
                 </a:solidFill>
-                <a:latin typeface="IBM Plex Sans" pitchFamily="34" charset="0"/>
-                <a:ea typeface="IBM Plex Sans" pitchFamily="34" charset="-122"/>
-                <a:cs typeface="IBM Plex Sans" pitchFamily="34" charset="-120"/>
+                <a:latin typeface="Arial" pitchFamily="34" charset="0"/>
+                <a:ea typeface="Arial" pitchFamily="34" charset="-122"/>
+                <a:cs typeface="Arial" pitchFamily="34" charset="-120"/>
               </a:rPr>
               <a:t>YOU SHOULD SEE</a:t>
             </a:r>
@@ -8595,16 +8830,16 @@
                           <a:solidFill>
                             <a:srgbClr val="17212B"/>
                           </a:solidFill>
-                          <a:latin typeface="IBM Plex Sans" pitchFamily="34" charset="0"/>
-                          <a:ea typeface="IBM Plex Sans" pitchFamily="34" charset="-122"/>
-                          <a:cs typeface="IBM Plex Sans" pitchFamily="34" charset="-120"/>
+                          <a:latin typeface="Arial" pitchFamily="34" charset="0"/>
+                          <a:ea typeface="Arial" pitchFamily="34" charset="-122"/>
+                          <a:cs typeface="Arial" pitchFamily="34" charset="-120"/>
                         </a:rPr>
                         <a:t>technique</a:t>
                       </a:r>
                       <a:endParaRPr lang="en-US" sz="1200" dirty="0">
-                        <a:latin typeface="IBM Plex Sans" charset="0"/>
-                        <a:ea typeface="IBM Plex Sans" charset="0"/>
-                        <a:cs typeface="IBM Plex Sans" charset="0"/>
+                        <a:latin typeface="Arial" charset="0"/>
+                        <a:ea typeface="Arial" charset="0"/>
+                        <a:cs typeface="Arial" charset="0"/>
                       </a:endParaRPr>
                     </a:p>
                   </a:txBody>
@@ -8666,16 +8901,16 @@
                           <a:solidFill>
                             <a:srgbClr val="17212B"/>
                           </a:solidFill>
-                          <a:latin typeface="IBM Plex Sans" pitchFamily="34" charset="0"/>
-                          <a:ea typeface="IBM Plex Sans" pitchFamily="34" charset="-122"/>
-                          <a:cs typeface="IBM Plex Sans" pitchFamily="34" charset="-120"/>
+                          <a:latin typeface="Arial" pitchFamily="34" charset="0"/>
+                          <a:ea typeface="Arial" pitchFamily="34" charset="-122"/>
+                          <a:cs typeface="Arial" pitchFamily="34" charset="-120"/>
                         </a:rPr>
                         <a:t>acc.</a:t>
                       </a:r>
                       <a:endParaRPr lang="en-US" sz="1200" dirty="0">
-                        <a:latin typeface="IBM Plex Sans" charset="0"/>
-                        <a:ea typeface="IBM Plex Sans" charset="0"/>
-                        <a:cs typeface="IBM Plex Sans" charset="0"/>
+                        <a:latin typeface="Arial" charset="0"/>
+                        <a:ea typeface="Arial" charset="0"/>
+                        <a:cs typeface="Arial" charset="0"/>
                       </a:endParaRPr>
                     </a:p>
                   </a:txBody>
@@ -8737,16 +8972,16 @@
                           <a:solidFill>
                             <a:srgbClr val="17212B"/>
                           </a:solidFill>
-                          <a:latin typeface="IBM Plex Sans" pitchFamily="34" charset="0"/>
-                          <a:ea typeface="IBM Plex Sans" pitchFamily="34" charset="-122"/>
-                          <a:cs typeface="IBM Plex Sans" pitchFamily="34" charset="-120"/>
+                          <a:latin typeface="Arial" pitchFamily="34" charset="0"/>
+                          <a:ea typeface="Arial" pitchFamily="34" charset="-122"/>
+                          <a:cs typeface="Arial" pitchFamily="34" charset="-120"/>
                         </a:rPr>
                         <a:t>invented</a:t>
                       </a:r>
                       <a:endParaRPr lang="en-US" sz="1200" dirty="0">
-                        <a:latin typeface="IBM Plex Sans" charset="0"/>
-                        <a:ea typeface="IBM Plex Sans" charset="0"/>
-                        <a:cs typeface="IBM Plex Sans" charset="0"/>
+                        <a:latin typeface="Arial" charset="0"/>
+                        <a:ea typeface="Arial" charset="0"/>
+                        <a:cs typeface="Arial" charset="0"/>
                       </a:endParaRPr>
                     </a:p>
                   </a:txBody>
@@ -8808,16 +9043,16 @@
                           <a:solidFill>
                             <a:srgbClr val="17212B"/>
                           </a:solidFill>
-                          <a:latin typeface="IBM Plex Sans" pitchFamily="34" charset="0"/>
-                          <a:ea typeface="IBM Plex Sans" pitchFamily="34" charset="-122"/>
-                          <a:cs typeface="IBM Plex Sans" pitchFamily="34" charset="-120"/>
+                          <a:latin typeface="Arial" pitchFamily="34" charset="0"/>
+                          <a:ea typeface="Arial" pitchFamily="34" charset="-122"/>
+                          <a:cs typeface="Arial" pitchFamily="34" charset="-120"/>
                         </a:rPr>
                         <a:t>parse</a:t>
                       </a:r>
                       <a:endParaRPr lang="en-US" sz="1200" dirty="0">
-                        <a:latin typeface="IBM Plex Sans" charset="0"/>
-                        <a:ea typeface="IBM Plex Sans" charset="0"/>
-                        <a:cs typeface="IBM Plex Sans" charset="0"/>
+                        <a:latin typeface="Arial" charset="0"/>
+                        <a:ea typeface="Arial" charset="0"/>
+                        <a:cs typeface="Arial" charset="0"/>
                       </a:endParaRPr>
                     </a:p>
                   </a:txBody>
@@ -8881,16 +9116,16 @@
                           <a:solidFill>
                             <a:srgbClr val="17212B"/>
                           </a:solidFill>
-                          <a:latin typeface="IBM Plex Sans" pitchFamily="34" charset="0"/>
-                          <a:ea typeface="IBM Plex Sans" pitchFamily="34" charset="-122"/>
-                          <a:cs typeface="IBM Plex Sans" pitchFamily="34" charset="-120"/>
+                          <a:latin typeface="Arial" pitchFamily="34" charset="0"/>
+                          <a:ea typeface="Arial" pitchFamily="34" charset="-122"/>
+                          <a:cs typeface="Arial" pitchFamily="34" charset="-120"/>
                         </a:rPr>
                         <a:t>zero_shot</a:t>
                       </a:r>
                       <a:endParaRPr lang="en-US" sz="1200" dirty="0">
-                        <a:latin typeface="IBM Plex Sans" charset="0"/>
-                        <a:ea typeface="IBM Plex Sans" charset="0"/>
-                        <a:cs typeface="IBM Plex Sans" charset="0"/>
+                        <a:latin typeface="Arial" charset="0"/>
+                        <a:ea typeface="Arial" charset="0"/>
+                        <a:cs typeface="Arial" charset="0"/>
                       </a:endParaRPr>
                     </a:p>
                   </a:txBody>
@@ -8949,16 +9184,16 @@
                           <a:solidFill>
                             <a:srgbClr val="17212B"/>
                           </a:solidFill>
-                          <a:latin typeface="IBM Plex Sans" pitchFamily="34" charset="0"/>
-                          <a:ea typeface="IBM Plex Sans" pitchFamily="34" charset="-122"/>
-                          <a:cs typeface="IBM Plex Sans" pitchFamily="34" charset="-120"/>
+                          <a:latin typeface="Arial" pitchFamily="34" charset="0"/>
+                          <a:ea typeface="Arial" pitchFamily="34" charset="-122"/>
+                          <a:cs typeface="Arial" pitchFamily="34" charset="-120"/>
                         </a:rPr>
                         <a:t>31%</a:t>
                       </a:r>
                       <a:endParaRPr lang="en-US" sz="1200" dirty="0">
-                        <a:latin typeface="IBM Plex Sans" charset="0"/>
-                        <a:ea typeface="IBM Plex Sans" charset="0"/>
-                        <a:cs typeface="IBM Plex Sans" charset="0"/>
+                        <a:latin typeface="Arial" charset="0"/>
+                        <a:ea typeface="Arial" charset="0"/>
+                        <a:cs typeface="Arial" charset="0"/>
                       </a:endParaRPr>
                     </a:p>
                   </a:txBody>
@@ -9017,16 +9252,16 @@
                           <a:solidFill>
                             <a:srgbClr val="17212B"/>
                           </a:solidFill>
-                          <a:latin typeface="IBM Plex Sans" pitchFamily="34" charset="0"/>
-                          <a:ea typeface="IBM Plex Sans" pitchFamily="34" charset="-122"/>
-                          <a:cs typeface="IBM Plex Sans" pitchFamily="34" charset="-120"/>
+                          <a:latin typeface="Arial" pitchFamily="34" charset="0"/>
+                          <a:ea typeface="Arial" pitchFamily="34" charset="-122"/>
+                          <a:cs typeface="Arial" pitchFamily="34" charset="-120"/>
                         </a:rPr>
                         <a:t>49%</a:t>
                       </a:r>
                       <a:endParaRPr lang="en-US" sz="1200" dirty="0">
-                        <a:latin typeface="IBM Plex Sans" charset="0"/>
-                        <a:ea typeface="IBM Plex Sans" charset="0"/>
-                        <a:cs typeface="IBM Plex Sans" charset="0"/>
+                        <a:latin typeface="Arial" charset="0"/>
+                        <a:ea typeface="Arial" charset="0"/>
+                        <a:cs typeface="Arial" charset="0"/>
                       </a:endParaRPr>
                     </a:p>
                   </a:txBody>
@@ -9085,16 +9320,16 @@
                           <a:solidFill>
                             <a:srgbClr val="17212B"/>
                           </a:solidFill>
-                          <a:latin typeface="IBM Plex Sans" pitchFamily="34" charset="0"/>
-                          <a:ea typeface="IBM Plex Sans" pitchFamily="34" charset="-122"/>
-                          <a:cs typeface="IBM Plex Sans" pitchFamily="34" charset="-120"/>
+                          <a:latin typeface="Arial" pitchFamily="34" charset="0"/>
+                          <a:ea typeface="Arial" pitchFamily="34" charset="-122"/>
+                          <a:cs typeface="Arial" pitchFamily="34" charset="-120"/>
                         </a:rPr>
                         <a:t>0%</a:t>
                       </a:r>
                       <a:endParaRPr lang="en-US" sz="1200" dirty="0">
-                        <a:latin typeface="IBM Plex Sans" charset="0"/>
-                        <a:ea typeface="IBM Plex Sans" charset="0"/>
-                        <a:cs typeface="IBM Plex Sans" charset="0"/>
+                        <a:latin typeface="Arial" charset="0"/>
+                        <a:ea typeface="Arial" charset="0"/>
+                        <a:cs typeface="Arial" charset="0"/>
                       </a:endParaRPr>
                     </a:p>
                   </a:txBody>
@@ -9155,16 +9390,16 @@
                           <a:solidFill>
                             <a:srgbClr val="17212B"/>
                           </a:solidFill>
-                          <a:latin typeface="IBM Plex Sans" pitchFamily="34" charset="0"/>
-                          <a:ea typeface="IBM Plex Sans" pitchFamily="34" charset="-122"/>
-                          <a:cs typeface="IBM Plex Sans" pitchFamily="34" charset="-120"/>
+                          <a:latin typeface="Arial" pitchFamily="34" charset="0"/>
+                          <a:ea typeface="Arial" pitchFamily="34" charset="-122"/>
+                          <a:cs typeface="Arial" pitchFamily="34" charset="-120"/>
                         </a:rPr>
                         <a:t>few_shot</a:t>
                       </a:r>
                       <a:endParaRPr lang="en-US" sz="1200" dirty="0">
-                        <a:latin typeface="IBM Plex Sans" charset="0"/>
-                        <a:ea typeface="IBM Plex Sans" charset="0"/>
-                        <a:cs typeface="IBM Plex Sans" charset="0"/>
+                        <a:latin typeface="Arial" charset="0"/>
+                        <a:ea typeface="Arial" charset="0"/>
+                        <a:cs typeface="Arial" charset="0"/>
                       </a:endParaRPr>
                     </a:p>
                   </a:txBody>
@@ -9223,16 +9458,16 @@
                           <a:solidFill>
                             <a:srgbClr val="17212B"/>
                           </a:solidFill>
-                          <a:latin typeface="IBM Plex Sans" pitchFamily="34" charset="0"/>
-                          <a:ea typeface="IBM Plex Sans" pitchFamily="34" charset="-122"/>
-                          <a:cs typeface="IBM Plex Sans" pitchFamily="34" charset="-120"/>
+                          <a:latin typeface="Arial" pitchFamily="34" charset="0"/>
+                          <a:ea typeface="Arial" pitchFamily="34" charset="-122"/>
+                          <a:cs typeface="Arial" pitchFamily="34" charset="-120"/>
                         </a:rPr>
                         <a:t>30%</a:t>
                       </a:r>
                       <a:endParaRPr lang="en-US" sz="1200" dirty="0">
-                        <a:latin typeface="IBM Plex Sans" charset="0"/>
-                        <a:ea typeface="IBM Plex Sans" charset="0"/>
-                        <a:cs typeface="IBM Plex Sans" charset="0"/>
+                        <a:latin typeface="Arial" charset="0"/>
+                        <a:ea typeface="Arial" charset="0"/>
+                        <a:cs typeface="Arial" charset="0"/>
                       </a:endParaRPr>
                     </a:p>
                   </a:txBody>
@@ -9291,16 +9526,16 @@
                           <a:solidFill>
                             <a:srgbClr val="17212B"/>
                           </a:solidFill>
-                          <a:latin typeface="IBM Plex Sans" pitchFamily="34" charset="0"/>
-                          <a:ea typeface="IBM Plex Sans" pitchFamily="34" charset="-122"/>
-                          <a:cs typeface="IBM Plex Sans" pitchFamily="34" charset="-120"/>
+                          <a:latin typeface="Arial" pitchFamily="34" charset="0"/>
+                          <a:ea typeface="Arial" pitchFamily="34" charset="-122"/>
+                          <a:cs typeface="Arial" pitchFamily="34" charset="-120"/>
                         </a:rPr>
                         <a:t>43%</a:t>
                       </a:r>
                       <a:endParaRPr lang="en-US" sz="1200" dirty="0">
-                        <a:latin typeface="IBM Plex Sans" charset="0"/>
-                        <a:ea typeface="IBM Plex Sans" charset="0"/>
-                        <a:cs typeface="IBM Plex Sans" charset="0"/>
+                        <a:latin typeface="Arial" charset="0"/>
+                        <a:ea typeface="Arial" charset="0"/>
+                        <a:cs typeface="Arial" charset="0"/>
                       </a:endParaRPr>
                     </a:p>
                   </a:txBody>
@@ -9359,16 +9594,16 @@
                           <a:solidFill>
                             <a:srgbClr val="17212B"/>
                           </a:solidFill>
-                          <a:latin typeface="IBM Plex Sans" pitchFamily="34" charset="0"/>
-                          <a:ea typeface="IBM Plex Sans" pitchFamily="34" charset="-122"/>
-                          <a:cs typeface="IBM Plex Sans" pitchFamily="34" charset="-120"/>
+                          <a:latin typeface="Arial" pitchFamily="34" charset="0"/>
+                          <a:ea typeface="Arial" pitchFamily="34" charset="-122"/>
+                          <a:cs typeface="Arial" pitchFamily="34" charset="-120"/>
                         </a:rPr>
                         <a:t>0%</a:t>
                       </a:r>
                       <a:endParaRPr lang="en-US" sz="1200" dirty="0">
-                        <a:latin typeface="IBM Plex Sans" charset="0"/>
-                        <a:ea typeface="IBM Plex Sans" charset="0"/>
-                        <a:cs typeface="IBM Plex Sans" charset="0"/>
+                        <a:latin typeface="Arial" charset="0"/>
+                        <a:ea typeface="Arial" charset="0"/>
+                        <a:cs typeface="Arial" charset="0"/>
                       </a:endParaRPr>
                     </a:p>
                   </a:txBody>
@@ -9429,16 +9664,16 @@
                           <a:solidFill>
                             <a:srgbClr val="17212B"/>
                           </a:solidFill>
-                          <a:latin typeface="IBM Plex Sans" pitchFamily="34" charset="0"/>
-                          <a:ea typeface="IBM Plex Sans" pitchFamily="34" charset="-122"/>
-                          <a:cs typeface="IBM Plex Sans" pitchFamily="34" charset="-120"/>
+                          <a:latin typeface="Arial" pitchFamily="34" charset="0"/>
+                          <a:ea typeface="Arial" pitchFamily="34" charset="-122"/>
+                          <a:cs typeface="Arial" pitchFamily="34" charset="-120"/>
                         </a:rPr>
                         <a:t>cot</a:t>
                       </a:r>
                       <a:endParaRPr lang="en-US" sz="1200" dirty="0">
-                        <a:latin typeface="IBM Plex Sans" charset="0"/>
-                        <a:ea typeface="IBM Plex Sans" charset="0"/>
-                        <a:cs typeface="IBM Plex Sans" charset="0"/>
+                        <a:latin typeface="Arial" charset="0"/>
+                        <a:ea typeface="Arial" charset="0"/>
+                        <a:cs typeface="Arial" charset="0"/>
                       </a:endParaRPr>
                     </a:p>
                   </a:txBody>
@@ -9497,16 +9732,16 @@
                           <a:solidFill>
                             <a:srgbClr val="17212B"/>
                           </a:solidFill>
-                          <a:latin typeface="IBM Plex Sans" pitchFamily="34" charset="0"/>
-                          <a:ea typeface="IBM Plex Sans" pitchFamily="34" charset="-122"/>
-                          <a:cs typeface="IBM Plex Sans" pitchFamily="34" charset="-120"/>
+                          <a:latin typeface="Arial" pitchFamily="34" charset="0"/>
+                          <a:ea typeface="Arial" pitchFamily="34" charset="-122"/>
+                          <a:cs typeface="Arial" pitchFamily="34" charset="-120"/>
                         </a:rPr>
                         <a:t>24%</a:t>
                       </a:r>
                       <a:endParaRPr lang="en-US" sz="1200" dirty="0">
-                        <a:latin typeface="IBM Plex Sans" charset="0"/>
-                        <a:ea typeface="IBM Plex Sans" charset="0"/>
-                        <a:cs typeface="IBM Plex Sans" charset="0"/>
+                        <a:latin typeface="Arial" charset="0"/>
+                        <a:ea typeface="Arial" charset="0"/>
+                        <a:cs typeface="Arial" charset="0"/>
                       </a:endParaRPr>
                     </a:p>
                   </a:txBody>
@@ -9565,16 +9800,16 @@
                           <a:solidFill>
                             <a:srgbClr val="17212B"/>
                           </a:solidFill>
-                          <a:latin typeface="IBM Plex Sans" pitchFamily="34" charset="0"/>
-                          <a:ea typeface="IBM Plex Sans" pitchFamily="34" charset="-122"/>
-                          <a:cs typeface="IBM Plex Sans" pitchFamily="34" charset="-120"/>
+                          <a:latin typeface="Arial" pitchFamily="34" charset="0"/>
+                          <a:ea typeface="Arial" pitchFamily="34" charset="-122"/>
+                          <a:cs typeface="Arial" pitchFamily="34" charset="-120"/>
                         </a:rPr>
                         <a:t>60%</a:t>
                       </a:r>
                       <a:endParaRPr lang="en-US" sz="1200" dirty="0">
-                        <a:latin typeface="IBM Plex Sans" charset="0"/>
-                        <a:ea typeface="IBM Plex Sans" charset="0"/>
-                        <a:cs typeface="IBM Plex Sans" charset="0"/>
+                        <a:latin typeface="Arial" charset="0"/>
+                        <a:ea typeface="Arial" charset="0"/>
+                        <a:cs typeface="Arial" charset="0"/>
                       </a:endParaRPr>
                     </a:p>
                   </a:txBody>
@@ -9633,16 +9868,16 @@
                           <a:solidFill>
                             <a:srgbClr val="17212B"/>
                           </a:solidFill>
-                          <a:latin typeface="IBM Plex Sans" pitchFamily="34" charset="0"/>
-                          <a:ea typeface="IBM Plex Sans" pitchFamily="34" charset="-122"/>
-                          <a:cs typeface="IBM Plex Sans" pitchFamily="34" charset="-120"/>
+                          <a:latin typeface="Arial" pitchFamily="34" charset="0"/>
+                          <a:ea typeface="Arial" pitchFamily="34" charset="-122"/>
+                          <a:cs typeface="Arial" pitchFamily="34" charset="-120"/>
                         </a:rPr>
                         <a:t>5%</a:t>
                       </a:r>
                       <a:endParaRPr lang="en-US" sz="1200" dirty="0">
-                        <a:latin typeface="IBM Plex Sans" charset="0"/>
-                        <a:ea typeface="IBM Plex Sans" charset="0"/>
-                        <a:cs typeface="IBM Plex Sans" charset="0"/>
+                        <a:latin typeface="Arial" charset="0"/>
+                        <a:ea typeface="Arial" charset="0"/>
+                        <a:cs typeface="Arial" charset="0"/>
                       </a:endParaRPr>
                     </a:p>
                   </a:txBody>
@@ -9724,9 +9959,9 @@
                 <a:solidFill>
                   <a:srgbClr val="17212B"/>
                 </a:solidFill>
-                <a:latin typeface="IBM Plex Sans" pitchFamily="34" charset="0"/>
-                <a:ea typeface="IBM Plex Sans" pitchFamily="34" charset="-122"/>
-                <a:cs typeface="IBM Plex Sans" pitchFamily="34" charset="-120"/>
+                <a:latin typeface="Arial" pitchFamily="34" charset="0"/>
+                <a:ea typeface="Arial" pitchFamily="34" charset="-122"/>
+                <a:cs typeface="Arial" pitchFamily="34" charset="-120"/>
               </a:rPr>
               <a:t>The next slide reads these numbers alongside the notebook's charts.</a:t>
             </a:r>
@@ -9768,11 +10003,11 @@
                 <a:solidFill>
                   <a:srgbClr val="5C6772"/>
                 </a:solidFill>
-                <a:latin typeface="IBM Plex Sans" pitchFamily="34" charset="0"/>
-                <a:ea typeface="IBM Plex Sans" pitchFamily="34" charset="-122"/>
-                <a:cs typeface="IBM Plex Sans" pitchFamily="34" charset="-120"/>
-              </a:rPr>
-              <a:t>Notebook cell 23</a:t>
+                <a:latin typeface="Arial" pitchFamily="34" charset="0"/>
+                <a:ea typeface="Arial" pitchFamily="34" charset="-122"/>
+                <a:cs typeface="Arial" pitchFamily="34" charset="-120"/>
+              </a:rPr>
+              <a:t>Notebook cell [16]</a:t>
             </a:r>
             <a:endParaRPr lang="en-US" sz="1200" dirty="0"/>
           </a:p>
@@ -9812,9 +10047,9 @@
                 <a:solidFill>
                   <a:srgbClr val="5C6772"/>
                 </a:solidFill>
-                <a:latin typeface="IBM Plex Sans" pitchFamily="34" charset="0"/>
-                <a:ea typeface="IBM Plex Sans" pitchFamily="34" charset="-122"/>
-                <a:cs typeface="IBM Plex Sans" pitchFamily="34" charset="-120"/>
+                <a:latin typeface="Arial" pitchFamily="34" charset="0"/>
+                <a:ea typeface="Arial" pitchFamily="34" charset="-122"/>
+                <a:cs typeface="Arial" pitchFamily="34" charset="-120"/>
               </a:rPr>
               <a:t>16</a:t>
             </a:r>
@@ -9888,9 +10123,9 @@
                 <a:solidFill>
                   <a:srgbClr val="0E6E6C"/>
                 </a:solidFill>
-                <a:latin typeface="IBM Plex Sans" pitchFamily="34" charset="0"/>
-                <a:ea typeface="IBM Plex Sans" pitchFamily="34" charset="-122"/>
-                <a:cs typeface="IBM Plex Sans" pitchFamily="34" charset="-120"/>
+                <a:latin typeface="Arial" pitchFamily="34" charset="0"/>
+                <a:ea typeface="Arial" pitchFamily="34" charset="-122"/>
+                <a:cs typeface="Arial" pitchFamily="34" charset="-120"/>
               </a:rPr>
               <a:t>RESULTS (STEP 7 OF 7)</a:t>
             </a:r>
@@ -9934,9 +10169,9 @@
                 <a:solidFill>
                   <a:srgbClr val="17212B"/>
                 </a:solidFill>
-                <a:latin typeface="IBM Plex Sans" pitchFamily="34" charset="0"/>
-                <a:ea typeface="IBM Plex Sans" pitchFamily="34" charset="-122"/>
-                <a:cs typeface="IBM Plex Sans" pitchFamily="34" charset="-120"/>
+                <a:latin typeface="Arial" pitchFamily="34" charset="0"/>
+                <a:ea typeface="Arial" pitchFamily="34" charset="-122"/>
+                <a:cs typeface="Arial" pitchFamily="34" charset="-120"/>
               </a:rPr>
               <a:t>None of the techniques clearly beat zero-shot, and chain-of-thought did worst</a:t>
             </a:r>
@@ -10001,9 +10236,9 @@
                 <a:solidFill>
                   <a:srgbClr val="3A4651"/>
                 </a:solidFill>
-                <a:latin typeface="IBM Plex Sans" pitchFamily="34" charset="0"/>
-                <a:ea typeface="IBM Plex Sans" pitchFamily="34" charset="-122"/>
-                <a:cs typeface="IBM Plex Sans" pitchFamily="34" charset="-120"/>
+                <a:latin typeface="Arial" pitchFamily="34" charset="0"/>
+                <a:ea typeface="Arial" pitchFamily="34" charset="-122"/>
+                <a:cs typeface="Arial" pitchFamily="34" charset="-120"/>
               </a:rPr>
               <a:t>Adding examples didn't make the model more accurate, and the ±10-point noise is larger than any gap between the prompts</a:t>
             </a:r>
@@ -10152,9 +10387,9 @@
                         <a:buNone/>
                       </a:pPr>
                       <a:endParaRPr lang="en-US" sz="1200" dirty="0">
-                        <a:latin typeface="IBM Plex Sans" charset="0"/>
-                        <a:ea typeface="IBM Plex Sans" charset="0"/>
-                        <a:cs typeface="IBM Plex Sans" charset="0"/>
+                        <a:latin typeface="Arial" charset="0"/>
+                        <a:ea typeface="Arial" charset="0"/>
+                        <a:cs typeface="Arial" charset="0"/>
                       </a:endParaRPr>
                     </a:p>
                   </a:txBody>
@@ -10216,16 +10451,16 @@
                           <a:solidFill>
                             <a:srgbClr val="17212B"/>
                           </a:solidFill>
-                          <a:latin typeface="IBM Plex Sans" pitchFamily="34" charset="0"/>
-                          <a:ea typeface="IBM Plex Sans" pitchFamily="34" charset="-122"/>
-                          <a:cs typeface="IBM Plex Sans" pitchFamily="34" charset="-120"/>
+                          <a:latin typeface="Arial" pitchFamily="34" charset="0"/>
+                          <a:ea typeface="Arial" pitchFamily="34" charset="-122"/>
+                          <a:cs typeface="Arial" pitchFamily="34" charset="-120"/>
                         </a:rPr>
                         <a:t>Zero</a:t>
                       </a:r>
                       <a:endParaRPr lang="en-US" sz="1200" dirty="0">
-                        <a:latin typeface="IBM Plex Sans" charset="0"/>
-                        <a:ea typeface="IBM Plex Sans" charset="0"/>
-                        <a:cs typeface="IBM Plex Sans" charset="0"/>
+                        <a:latin typeface="Arial" charset="0"/>
+                        <a:ea typeface="Arial" charset="0"/>
+                        <a:cs typeface="Arial" charset="0"/>
                       </a:endParaRPr>
                     </a:p>
                   </a:txBody>
@@ -10287,16 +10522,16 @@
                           <a:solidFill>
                             <a:srgbClr val="17212B"/>
                           </a:solidFill>
-                          <a:latin typeface="IBM Plex Sans" pitchFamily="34" charset="0"/>
-                          <a:ea typeface="IBM Plex Sans" pitchFamily="34" charset="-122"/>
-                          <a:cs typeface="IBM Plex Sans" pitchFamily="34" charset="-120"/>
+                          <a:latin typeface="Arial" pitchFamily="34" charset="0"/>
+                          <a:ea typeface="Arial" pitchFamily="34" charset="-122"/>
+                          <a:cs typeface="Arial" pitchFamily="34" charset="-120"/>
                         </a:rPr>
                         <a:t>Few</a:t>
                       </a:r>
                       <a:endParaRPr lang="en-US" sz="1200" dirty="0">
-                        <a:latin typeface="IBM Plex Sans" charset="0"/>
-                        <a:ea typeface="IBM Plex Sans" charset="0"/>
-                        <a:cs typeface="IBM Plex Sans" charset="0"/>
+                        <a:latin typeface="Arial" charset="0"/>
+                        <a:ea typeface="Arial" charset="0"/>
+                        <a:cs typeface="Arial" charset="0"/>
                       </a:endParaRPr>
                     </a:p>
                   </a:txBody>
@@ -10358,16 +10593,16 @@
                           <a:solidFill>
                             <a:srgbClr val="17212B"/>
                           </a:solidFill>
-                          <a:latin typeface="IBM Plex Sans" pitchFamily="34" charset="0"/>
-                          <a:ea typeface="IBM Plex Sans" pitchFamily="34" charset="-122"/>
-                          <a:cs typeface="IBM Plex Sans" pitchFamily="34" charset="-120"/>
+                          <a:latin typeface="Arial" pitchFamily="34" charset="0"/>
+                          <a:ea typeface="Arial" pitchFamily="34" charset="-122"/>
+                          <a:cs typeface="Arial" pitchFamily="34" charset="-120"/>
                         </a:rPr>
                         <a:t>CoT</a:t>
                       </a:r>
                       <a:endParaRPr lang="en-US" sz="1200" dirty="0">
-                        <a:latin typeface="IBM Plex Sans" charset="0"/>
-                        <a:ea typeface="IBM Plex Sans" charset="0"/>
-                        <a:cs typeface="IBM Plex Sans" charset="0"/>
+                        <a:latin typeface="Arial" charset="0"/>
+                        <a:ea typeface="Arial" charset="0"/>
+                        <a:cs typeface="Arial" charset="0"/>
                       </a:endParaRPr>
                     </a:p>
                   </a:txBody>
@@ -10431,16 +10666,16 @@
                           <a:solidFill>
                             <a:srgbClr val="17212B"/>
                           </a:solidFill>
-                          <a:latin typeface="IBM Plex Sans" pitchFamily="34" charset="0"/>
-                          <a:ea typeface="IBM Plex Sans" pitchFamily="34" charset="-122"/>
-                          <a:cs typeface="IBM Plex Sans" pitchFamily="34" charset="-120"/>
+                          <a:latin typeface="Arial" pitchFamily="34" charset="0"/>
+                          <a:ea typeface="Arial" pitchFamily="34" charset="-122"/>
+                          <a:cs typeface="Arial" pitchFamily="34" charset="-120"/>
                         </a:rPr>
                         <a:t>Accuracy</a:t>
                       </a:r>
                       <a:endParaRPr lang="en-US" sz="1200" dirty="0">
-                        <a:latin typeface="IBM Plex Sans" charset="0"/>
-                        <a:ea typeface="IBM Plex Sans" charset="0"/>
-                        <a:cs typeface="IBM Plex Sans" charset="0"/>
+                        <a:latin typeface="Arial" charset="0"/>
+                        <a:ea typeface="Arial" charset="0"/>
+                        <a:cs typeface="Arial" charset="0"/>
                       </a:endParaRPr>
                     </a:p>
                   </a:txBody>
@@ -10499,16 +10734,16 @@
                           <a:solidFill>
                             <a:srgbClr val="17212B"/>
                           </a:solidFill>
-                          <a:latin typeface="IBM Plex Sans" pitchFamily="34" charset="0"/>
-                          <a:ea typeface="IBM Plex Sans" pitchFamily="34" charset="-122"/>
-                          <a:cs typeface="IBM Plex Sans" pitchFamily="34" charset="-120"/>
+                          <a:latin typeface="Arial" pitchFamily="34" charset="0"/>
+                          <a:ea typeface="Arial" pitchFamily="34" charset="-122"/>
+                          <a:cs typeface="Arial" pitchFamily="34" charset="-120"/>
                         </a:rPr>
                         <a:t>31%</a:t>
                       </a:r>
                       <a:endParaRPr lang="en-US" sz="1200" dirty="0">
-                        <a:latin typeface="IBM Plex Sans" charset="0"/>
-                        <a:ea typeface="IBM Plex Sans" charset="0"/>
-                        <a:cs typeface="IBM Plex Sans" charset="0"/>
+                        <a:latin typeface="Arial" charset="0"/>
+                        <a:ea typeface="Arial" charset="0"/>
+                        <a:cs typeface="Arial" charset="0"/>
                       </a:endParaRPr>
                     </a:p>
                   </a:txBody>
@@ -10567,16 +10802,16 @@
                           <a:solidFill>
                             <a:srgbClr val="17212B"/>
                           </a:solidFill>
-                          <a:latin typeface="IBM Plex Sans" pitchFamily="34" charset="0"/>
-                          <a:ea typeface="IBM Plex Sans" pitchFamily="34" charset="-122"/>
-                          <a:cs typeface="IBM Plex Sans" pitchFamily="34" charset="-120"/>
+                          <a:latin typeface="Arial" pitchFamily="34" charset="0"/>
+                          <a:ea typeface="Arial" pitchFamily="34" charset="-122"/>
+                          <a:cs typeface="Arial" pitchFamily="34" charset="-120"/>
                         </a:rPr>
                         <a:t>30%</a:t>
                       </a:r>
                       <a:endParaRPr lang="en-US" sz="1200" dirty="0">
-                        <a:latin typeface="IBM Plex Sans" charset="0"/>
-                        <a:ea typeface="IBM Plex Sans" charset="0"/>
-                        <a:cs typeface="IBM Plex Sans" charset="0"/>
+                        <a:latin typeface="Arial" charset="0"/>
+                        <a:ea typeface="Arial" charset="0"/>
+                        <a:cs typeface="Arial" charset="0"/>
                       </a:endParaRPr>
                     </a:p>
                   </a:txBody>
@@ -10635,16 +10870,16 @@
                           <a:solidFill>
                             <a:srgbClr val="17212B"/>
                           </a:solidFill>
-                          <a:latin typeface="IBM Plex Sans" pitchFamily="34" charset="0"/>
-                          <a:ea typeface="IBM Plex Sans" pitchFamily="34" charset="-122"/>
-                          <a:cs typeface="IBM Plex Sans" pitchFamily="34" charset="-120"/>
+                          <a:latin typeface="Arial" pitchFamily="34" charset="0"/>
+                          <a:ea typeface="Arial" pitchFamily="34" charset="-122"/>
+                          <a:cs typeface="Arial" pitchFamily="34" charset="-120"/>
                         </a:rPr>
                         <a:t>24%</a:t>
                       </a:r>
                       <a:endParaRPr lang="en-US" sz="1200" dirty="0">
-                        <a:latin typeface="IBM Plex Sans" charset="0"/>
-                        <a:ea typeface="IBM Plex Sans" charset="0"/>
-                        <a:cs typeface="IBM Plex Sans" charset="0"/>
+                        <a:latin typeface="Arial" charset="0"/>
+                        <a:ea typeface="Arial" charset="0"/>
+                        <a:cs typeface="Arial" charset="0"/>
                       </a:endParaRPr>
                     </a:p>
                   </a:txBody>
@@ -10705,16 +10940,16 @@
                           <a:solidFill>
                             <a:srgbClr val="17212B"/>
                           </a:solidFill>
-                          <a:latin typeface="IBM Plex Sans" pitchFamily="34" charset="0"/>
-                          <a:ea typeface="IBM Plex Sans" pitchFamily="34" charset="-122"/>
-                          <a:cs typeface="IBM Plex Sans" pitchFamily="34" charset="-120"/>
+                          <a:latin typeface="Arial" pitchFamily="34" charset="0"/>
+                          <a:ea typeface="Arial" pitchFamily="34" charset="-122"/>
+                          <a:cs typeface="Arial" pitchFamily="34" charset="-120"/>
                         </a:rPr>
                         <a:t>Invented code</a:t>
                       </a:r>
                       <a:endParaRPr lang="en-US" sz="1200" dirty="0">
-                        <a:latin typeface="IBM Plex Sans" charset="0"/>
-                        <a:ea typeface="IBM Plex Sans" charset="0"/>
-                        <a:cs typeface="IBM Plex Sans" charset="0"/>
+                        <a:latin typeface="Arial" charset="0"/>
+                        <a:ea typeface="Arial" charset="0"/>
+                        <a:cs typeface="Arial" charset="0"/>
                       </a:endParaRPr>
                     </a:p>
                   </a:txBody>
@@ -10773,16 +11008,16 @@
                           <a:solidFill>
                             <a:srgbClr val="17212B"/>
                           </a:solidFill>
-                          <a:latin typeface="IBM Plex Sans" pitchFamily="34" charset="0"/>
-                          <a:ea typeface="IBM Plex Sans" pitchFamily="34" charset="-122"/>
-                          <a:cs typeface="IBM Plex Sans" pitchFamily="34" charset="-120"/>
+                          <a:latin typeface="Arial" pitchFamily="34" charset="0"/>
+                          <a:ea typeface="Arial" pitchFamily="34" charset="-122"/>
+                          <a:cs typeface="Arial" pitchFamily="34" charset="-120"/>
                         </a:rPr>
                         <a:t>49%</a:t>
                       </a:r>
                       <a:endParaRPr lang="en-US" sz="1200" dirty="0">
-                        <a:latin typeface="IBM Plex Sans" charset="0"/>
-                        <a:ea typeface="IBM Plex Sans" charset="0"/>
-                        <a:cs typeface="IBM Plex Sans" charset="0"/>
+                        <a:latin typeface="Arial" charset="0"/>
+                        <a:ea typeface="Arial" charset="0"/>
+                        <a:cs typeface="Arial" charset="0"/>
                       </a:endParaRPr>
                     </a:p>
                   </a:txBody>
@@ -10841,16 +11076,16 @@
                           <a:solidFill>
                             <a:srgbClr val="17212B"/>
                           </a:solidFill>
-                          <a:latin typeface="IBM Plex Sans" pitchFamily="34" charset="0"/>
-                          <a:ea typeface="IBM Plex Sans" pitchFamily="34" charset="-122"/>
-                          <a:cs typeface="IBM Plex Sans" pitchFamily="34" charset="-120"/>
+                          <a:latin typeface="Arial" pitchFamily="34" charset="0"/>
+                          <a:ea typeface="Arial" pitchFamily="34" charset="-122"/>
+                          <a:cs typeface="Arial" pitchFamily="34" charset="-120"/>
                         </a:rPr>
                         <a:t>43%</a:t>
                       </a:r>
                       <a:endParaRPr lang="en-US" sz="1200" dirty="0">
-                        <a:latin typeface="IBM Plex Sans" charset="0"/>
-                        <a:ea typeface="IBM Plex Sans" charset="0"/>
-                        <a:cs typeface="IBM Plex Sans" charset="0"/>
+                        <a:latin typeface="Arial" charset="0"/>
+                        <a:ea typeface="Arial" charset="0"/>
+                        <a:cs typeface="Arial" charset="0"/>
                       </a:endParaRPr>
                     </a:p>
                   </a:txBody>
@@ -10909,16 +11144,16 @@
                           <a:solidFill>
                             <a:srgbClr val="17212B"/>
                           </a:solidFill>
-                          <a:latin typeface="IBM Plex Sans" pitchFamily="34" charset="0"/>
-                          <a:ea typeface="IBM Plex Sans" pitchFamily="34" charset="-122"/>
-                          <a:cs typeface="IBM Plex Sans" pitchFamily="34" charset="-120"/>
+                          <a:latin typeface="Arial" pitchFamily="34" charset="0"/>
+                          <a:ea typeface="Arial" pitchFamily="34" charset="-122"/>
+                          <a:cs typeface="Arial" pitchFamily="34" charset="-120"/>
                         </a:rPr>
                         <a:t>60%</a:t>
                       </a:r>
                       <a:endParaRPr lang="en-US" sz="1200" dirty="0">
-                        <a:latin typeface="IBM Plex Sans" charset="0"/>
-                        <a:ea typeface="IBM Plex Sans" charset="0"/>
-                        <a:cs typeface="IBM Plex Sans" charset="0"/>
+                        <a:latin typeface="Arial" charset="0"/>
+                        <a:ea typeface="Arial" charset="0"/>
+                        <a:cs typeface="Arial" charset="0"/>
                       </a:endParaRPr>
                     </a:p>
                   </a:txBody>
@@ -10979,16 +11214,16 @@
                           <a:solidFill>
                             <a:srgbClr val="17212B"/>
                           </a:solidFill>
-                          <a:latin typeface="IBM Plex Sans" pitchFamily="34" charset="0"/>
-                          <a:ea typeface="IBM Plex Sans" pitchFamily="34" charset="-122"/>
-                          <a:cs typeface="IBM Plex Sans" pitchFamily="34" charset="-120"/>
+                          <a:latin typeface="Arial" pitchFamily="34" charset="0"/>
+                          <a:ea typeface="Arial" pitchFamily="34" charset="-122"/>
+                          <a:cs typeface="Arial" pitchFamily="34" charset="-120"/>
                         </a:rPr>
                         <a:t>Parse failed</a:t>
                       </a:r>
                       <a:endParaRPr lang="en-US" sz="1200" dirty="0">
-                        <a:latin typeface="IBM Plex Sans" charset="0"/>
-                        <a:ea typeface="IBM Plex Sans" charset="0"/>
-                        <a:cs typeface="IBM Plex Sans" charset="0"/>
+                        <a:latin typeface="Arial" charset="0"/>
+                        <a:ea typeface="Arial" charset="0"/>
+                        <a:cs typeface="Arial" charset="0"/>
                       </a:endParaRPr>
                     </a:p>
                   </a:txBody>
@@ -11047,16 +11282,16 @@
                           <a:solidFill>
                             <a:srgbClr val="17212B"/>
                           </a:solidFill>
-                          <a:latin typeface="IBM Plex Sans" pitchFamily="34" charset="0"/>
-                          <a:ea typeface="IBM Plex Sans" pitchFamily="34" charset="-122"/>
-                          <a:cs typeface="IBM Plex Sans" pitchFamily="34" charset="-120"/>
+                          <a:latin typeface="Arial" pitchFamily="34" charset="0"/>
+                          <a:ea typeface="Arial" pitchFamily="34" charset="-122"/>
+                          <a:cs typeface="Arial" pitchFamily="34" charset="-120"/>
                         </a:rPr>
                         <a:t>0%</a:t>
                       </a:r>
                       <a:endParaRPr lang="en-US" sz="1200" dirty="0">
-                        <a:latin typeface="IBM Plex Sans" charset="0"/>
-                        <a:ea typeface="IBM Plex Sans" charset="0"/>
-                        <a:cs typeface="IBM Plex Sans" charset="0"/>
+                        <a:latin typeface="Arial" charset="0"/>
+                        <a:ea typeface="Arial" charset="0"/>
+                        <a:cs typeface="Arial" charset="0"/>
                       </a:endParaRPr>
                     </a:p>
                   </a:txBody>
@@ -11115,16 +11350,16 @@
                           <a:solidFill>
                             <a:srgbClr val="17212B"/>
                           </a:solidFill>
-                          <a:latin typeface="IBM Plex Sans" pitchFamily="34" charset="0"/>
-                          <a:ea typeface="IBM Plex Sans" pitchFamily="34" charset="-122"/>
-                          <a:cs typeface="IBM Plex Sans" pitchFamily="34" charset="-120"/>
+                          <a:latin typeface="Arial" pitchFamily="34" charset="0"/>
+                          <a:ea typeface="Arial" pitchFamily="34" charset="-122"/>
+                          <a:cs typeface="Arial" pitchFamily="34" charset="-120"/>
                         </a:rPr>
                         <a:t>0%</a:t>
                       </a:r>
                       <a:endParaRPr lang="en-US" sz="1200" dirty="0">
-                        <a:latin typeface="IBM Plex Sans" charset="0"/>
-                        <a:ea typeface="IBM Plex Sans" charset="0"/>
-                        <a:cs typeface="IBM Plex Sans" charset="0"/>
+                        <a:latin typeface="Arial" charset="0"/>
+                        <a:ea typeface="Arial" charset="0"/>
+                        <a:cs typeface="Arial" charset="0"/>
                       </a:endParaRPr>
                     </a:p>
                   </a:txBody>
@@ -11183,16 +11418,16 @@
                           <a:solidFill>
                             <a:srgbClr val="17212B"/>
                           </a:solidFill>
-                          <a:latin typeface="IBM Plex Sans" pitchFamily="34" charset="0"/>
-                          <a:ea typeface="IBM Plex Sans" pitchFamily="34" charset="-122"/>
-                          <a:cs typeface="IBM Plex Sans" pitchFamily="34" charset="-120"/>
+                          <a:latin typeface="Arial" pitchFamily="34" charset="0"/>
+                          <a:ea typeface="Arial" pitchFamily="34" charset="-122"/>
+                          <a:cs typeface="Arial" pitchFamily="34" charset="-120"/>
                         </a:rPr>
                         <a:t>5%</a:t>
                       </a:r>
                       <a:endParaRPr lang="en-US" sz="1200" dirty="0">
-                        <a:latin typeface="IBM Plex Sans" charset="0"/>
-                        <a:ea typeface="IBM Plex Sans" charset="0"/>
-                        <a:cs typeface="IBM Plex Sans" charset="0"/>
+                        <a:latin typeface="Arial" charset="0"/>
+                        <a:ea typeface="Arial" charset="0"/>
+                        <a:cs typeface="Arial" charset="0"/>
                       </a:endParaRPr>
                     </a:p>
                   </a:txBody>
@@ -11274,9 +11509,9 @@
                 <a:solidFill>
                   <a:srgbClr val="17212B"/>
                 </a:solidFill>
-                <a:latin typeface="IBM Plex Sans" pitchFamily="34" charset="0"/>
-                <a:ea typeface="IBM Plex Sans" pitchFamily="34" charset="-122"/>
-                <a:cs typeface="IBM Plex Sans" pitchFamily="34" charset="-120"/>
+                <a:latin typeface="Arial" pitchFamily="34" charset="0"/>
+                <a:ea typeface="Arial" pitchFamily="34" charset="-122"/>
+                <a:cs typeface="Arial" pitchFamily="34" charset="-120"/>
               </a:rPr>
               <a:t>Few-shot invented fewer codes, which suggests the examples teach the code format more than the diagnosis.</a:t>
             </a:r>
@@ -11318,9 +11553,9 @@
                 <a:solidFill>
                   <a:srgbClr val="17212B"/>
                 </a:solidFill>
-                <a:latin typeface="IBM Plex Sans" pitchFamily="34" charset="0"/>
-                <a:ea typeface="IBM Plex Sans" pitchFamily="34" charset="-122"/>
-                <a:cs typeface="IBM Plex Sans" pitchFamily="34" charset="-120"/>
+                <a:latin typeface="Arial" pitchFamily="34" charset="0"/>
+                <a:ea typeface="Arial" pitchFamily="34" charset="-122"/>
+                <a:cs typeface="Arial" pitchFamily="34" charset="-120"/>
               </a:rPr>
               <a:t>The most common error is 7 "Symptoms" stays that the model labeled "Circulatory" because the ED coded only the symptom.</a:t>
             </a:r>
@@ -11362,11 +11597,11 @@
                 <a:solidFill>
                   <a:srgbClr val="5C6772"/>
                 </a:solidFill>
-                <a:latin typeface="IBM Plex Sans" pitchFamily="34" charset="0"/>
-                <a:ea typeface="IBM Plex Sans" pitchFamily="34" charset="-122"/>
-                <a:cs typeface="IBM Plex Sans" pitchFamily="34" charset="-120"/>
-              </a:rPr>
-              <a:t>Notebook cells 23–25</a:t>
+                <a:latin typeface="Arial" pitchFamily="34" charset="0"/>
+                <a:ea typeface="Arial" pitchFamily="34" charset="-122"/>
+                <a:cs typeface="Arial" pitchFamily="34" charset="-120"/>
+              </a:rPr>
+              <a:t>Notebook cells [16]–[18]</a:t>
             </a:r>
             <a:endParaRPr lang="en-US" sz="1200" dirty="0"/>
           </a:p>
@@ -11406,9 +11641,9 @@
                 <a:solidFill>
                   <a:srgbClr val="5C6772"/>
                 </a:solidFill>
-                <a:latin typeface="IBM Plex Sans" pitchFamily="34" charset="0"/>
-                <a:ea typeface="IBM Plex Sans" pitchFamily="34" charset="-122"/>
-                <a:cs typeface="IBM Plex Sans" pitchFamily="34" charset="-120"/>
+                <a:latin typeface="Arial" pitchFamily="34" charset="0"/>
+                <a:ea typeface="Arial" pitchFamily="34" charset="-122"/>
+                <a:cs typeface="Arial" pitchFamily="34" charset="-120"/>
               </a:rPr>
               <a:t>17</a:t>
             </a:r>
@@ -11482,9 +11717,9 @@
                 <a:solidFill>
                   <a:srgbClr val="5C6772"/>
                 </a:solidFill>
-                <a:latin typeface="IBM Plex Sans" pitchFamily="34" charset="0"/>
-                <a:ea typeface="IBM Plex Sans" pitchFamily="34" charset="-122"/>
-                <a:cs typeface="IBM Plex Sans" pitchFamily="34" charset="-120"/>
+                <a:latin typeface="Arial" pitchFamily="34" charset="0"/>
+                <a:ea typeface="Arial" pitchFamily="34" charset="-122"/>
+                <a:cs typeface="Arial" pitchFamily="34" charset="-120"/>
               </a:rPr>
               <a:t>18</a:t>
             </a:r>
@@ -11526,9 +11761,9 @@
                 <a:solidFill>
                   <a:srgbClr val="0E6E6C"/>
                 </a:solidFill>
-                <a:latin typeface="IBM Plex Sans" pitchFamily="34" charset="0"/>
-                <a:ea typeface="IBM Plex Sans" pitchFamily="34" charset="-122"/>
-                <a:cs typeface="IBM Plex Sans" pitchFamily="34" charset="-120"/>
+                <a:latin typeface="Arial" pitchFamily="34" charset="0"/>
+                <a:ea typeface="Arial" pitchFamily="34" charset="-122"/>
+                <a:cs typeface="Arial" pitchFamily="34" charset="-120"/>
               </a:rPr>
               <a:t>LIMITATIONS AND RESPONSIBLE USE (STEP 7 OF 7)</a:t>
             </a:r>
@@ -11572,9 +11807,9 @@
                 <a:solidFill>
                   <a:srgbClr val="17212B"/>
                 </a:solidFill>
-                <a:latin typeface="IBM Plex Sans" pitchFamily="34" charset="0"/>
-                <a:ea typeface="IBM Plex Sans" pitchFamily="34" charset="-122"/>
-                <a:cs typeface="IBM Plex Sans" pitchFamily="34" charset="-120"/>
+                <a:latin typeface="Arial" pitchFamily="34" charset="0"/>
+                <a:ea typeface="Arial" pitchFamily="34" charset="-122"/>
+                <a:cs typeface="Arial" pitchFamily="34" charset="-120"/>
               </a:rPr>
               <a:t>These results are only a first look because the labels are imperfect and both the sample and the model are small</a:t>
             </a:r>
@@ -11639,9 +11874,9 @@
                 <a:solidFill>
                   <a:srgbClr val="3A4651"/>
                 </a:solidFill>
-                <a:latin typeface="IBM Plex Sans" pitchFamily="34" charset="0"/>
-                <a:ea typeface="IBM Plex Sans" pitchFamily="34" charset="-122"/>
-                <a:cs typeface="IBM Plex Sans" pitchFamily="34" charset="-120"/>
+                <a:latin typeface="Arial" pitchFamily="34" charset="0"/>
+                <a:ea typeface="Arial" pitchFamily="34" charset="-122"/>
+                <a:cs typeface="Arial" pitchFamily="34" charset="-120"/>
               </a:rPr>
               <a:t>This should only be used as decision support, where a clinician reviews the draft so that automation bias doesn't creep in</a:t>
             </a:r>
@@ -11706,9 +11941,9 @@
                 <a:solidFill>
                   <a:srgbClr val="17212B"/>
                 </a:solidFill>
-                <a:latin typeface="IBM Plex Sans" pitchFamily="34" charset="0"/>
-                <a:ea typeface="IBM Plex Sans" pitchFamily="34" charset="-122"/>
-                <a:cs typeface="IBM Plex Sans" pitchFamily="34" charset="-120"/>
+                <a:latin typeface="Arial" pitchFamily="34" charset="0"/>
+                <a:ea typeface="Arial" pitchFamily="34" charset="-122"/>
+                <a:cs typeface="Arial" pitchFamily="34" charset="-120"/>
               </a:rPr>
               <a:t>Billing labels</a:t>
             </a:r>
@@ -11750,9 +11985,9 @@
                 <a:solidFill>
                   <a:srgbClr val="17212B"/>
                 </a:solidFill>
-                <a:latin typeface="IBM Plex Sans" pitchFamily="34" charset="0"/>
-                <a:ea typeface="IBM Plex Sans" pitchFamily="34" charset="-122"/>
-                <a:cs typeface="IBM Plex Sans" pitchFamily="34" charset="-120"/>
+                <a:latin typeface="Arial" pitchFamily="34" charset="0"/>
+                <a:ea typeface="Arial" pitchFamily="34" charset="-122"/>
+                <a:cs typeface="Arial" pitchFamily="34" charset="-120"/>
               </a:rPr>
               <a:t>The codes are assigned after the workup and are not a gold standard, and they often record only the symptom.</a:t>
             </a:r>
@@ -11817,9 +12052,9 @@
                 <a:solidFill>
                   <a:srgbClr val="17212B"/>
                 </a:solidFill>
-                <a:latin typeface="IBM Plex Sans" pitchFamily="34" charset="0"/>
-                <a:ea typeface="IBM Plex Sans" pitchFamily="34" charset="-122"/>
-                <a:cs typeface="IBM Plex Sans" pitchFamily="34" charset="-120"/>
+                <a:latin typeface="Arial" pitchFamily="34" charset="0"/>
+                <a:ea typeface="Arial" pitchFamily="34" charset="-122"/>
+                <a:cs typeface="Arial" pitchFamily="34" charset="-120"/>
               </a:rPr>
               <a:t>Small sample</a:t>
             </a:r>
@@ -11861,9 +12096,9 @@
                 <a:solidFill>
                   <a:srgbClr val="17212B"/>
                 </a:solidFill>
-                <a:latin typeface="IBM Plex Sans" pitchFamily="34" charset="0"/>
-                <a:ea typeface="IBM Plex Sans" pitchFamily="34" charset="-122"/>
-                <a:cs typeface="IBM Plex Sans" pitchFamily="34" charset="-120"/>
+                <a:latin typeface="Arial" pitchFamily="34" charset="0"/>
+                <a:ea typeface="Arial" pitchFamily="34" charset="-122"/>
+                <a:cs typeface="Arial" pitchFamily="34" charset="-120"/>
               </a:rPr>
               <a:t>We scored only 94 stays from 29 patients, so the estimates are noisy.</a:t>
             </a:r>
@@ -11928,9 +12163,9 @@
                 <a:solidFill>
                   <a:srgbClr val="17212B"/>
                 </a:solidFill>
-                <a:latin typeface="IBM Plex Sans" pitchFamily="34" charset="0"/>
-                <a:ea typeface="IBM Plex Sans" pitchFamily="34" charset="-122"/>
-                <a:cs typeface="IBM Plex Sans" pitchFamily="34" charset="-120"/>
+                <a:latin typeface="Arial" pitchFamily="34" charset="0"/>
+                <a:ea typeface="Arial" pitchFamily="34" charset="-122"/>
+                <a:cs typeface="Arial" pitchFamily="34" charset="-120"/>
               </a:rPr>
               <a:t>One hospital</a:t>
             </a:r>
@@ -11972,9 +12207,9 @@
                 <a:solidFill>
                   <a:srgbClr val="17212B"/>
                 </a:solidFill>
-                <a:latin typeface="IBM Plex Sans" pitchFamily="34" charset="0"/>
-                <a:ea typeface="IBM Plex Sans" pitchFamily="34" charset="-122"/>
-                <a:cs typeface="IBM Plex Sans" pitchFamily="34" charset="-120"/>
+                <a:latin typeface="Arial" pitchFamily="34" charset="0"/>
+                <a:ea typeface="Arial" pitchFamily="34" charset="-122"/>
+                <a:cs typeface="Arial" pitchFamily="34" charset="-120"/>
               </a:rPr>
               <a:t>All of the data comes from Beth Israel Deaconess, and its coding habits may not carry over to other hospitals.</a:t>
             </a:r>
@@ -12039,9 +12274,9 @@
                 <a:solidFill>
                   <a:srgbClr val="17212B"/>
                 </a:solidFill>
-                <a:latin typeface="IBM Plex Sans" pitchFamily="34" charset="0"/>
-                <a:ea typeface="IBM Plex Sans" pitchFamily="34" charset="-122"/>
-                <a:cs typeface="IBM Plex Sans" pitchFamily="34" charset="-120"/>
+                <a:latin typeface="Arial" pitchFamily="34" charset="0"/>
+                <a:ea typeface="Arial" pitchFamily="34" charset="-122"/>
+                <a:cs typeface="Arial" pitchFamily="34" charset="-120"/>
               </a:rPr>
               <a:t>One small model</a:t>
             </a:r>
@@ -12083,9 +12318,9 @@
                 <a:solidFill>
                   <a:srgbClr val="17212B"/>
                 </a:solidFill>
-                <a:latin typeface="IBM Plex Sans" pitchFamily="34" charset="0"/>
-                <a:ea typeface="IBM Plex Sans" pitchFamily="34" charset="-122"/>
-                <a:cs typeface="IBM Plex Sans" pitchFamily="34" charset="-120"/>
+                <a:latin typeface="Arial" pitchFamily="34" charset="0"/>
+                <a:ea typeface="Arial" pitchFamily="34" charset="-122"/>
+                <a:cs typeface="Arial" pitchFamily="34" charset="-120"/>
               </a:rPr>
               <a:t>We used a single 3B, 4-bit model with one seed, and a larger model may behave differently.</a:t>
             </a:r>
@@ -12150,9 +12385,9 @@
                 <a:solidFill>
                   <a:srgbClr val="17212B"/>
                 </a:solidFill>
-                <a:latin typeface="IBM Plex Sans" pitchFamily="34" charset="0"/>
-                <a:ea typeface="IBM Plex Sans" pitchFamily="34" charset="-122"/>
-                <a:cs typeface="IBM Plex Sans" pitchFamily="34" charset="-120"/>
+                <a:latin typeface="Arial" pitchFamily="34" charset="0"/>
+                <a:ea typeface="Arial" pitchFamily="34" charset="-122"/>
+                <a:cs typeface="Arial" pitchFamily="34" charset="-120"/>
               </a:rPr>
               <a:t>Unfaithful reasoning</a:t>
             </a:r>
@@ -12194,9 +12429,9 @@
                 <a:solidFill>
                   <a:srgbClr val="17212B"/>
                 </a:solidFill>
-                <a:latin typeface="IBM Plex Sans" pitchFamily="34" charset="0"/>
-                <a:ea typeface="IBM Plex Sans" pitchFamily="34" charset="-122"/>
-                <a:cs typeface="IBM Plex Sans" pitchFamily="34" charset="-120"/>
+                <a:latin typeface="Arial" pitchFamily="34" charset="0"/>
+                <a:ea typeface="Arial" pitchFamily="34" charset="-122"/>
+                <a:cs typeface="Arial" pitchFamily="34" charset="-120"/>
               </a:rPr>
               <a:t>The CoT reasoning sounds plausible, but it can invent findings or answer in ICD-9.</a:t>
             </a:r>
@@ -12261,9 +12496,9 @@
                 <a:solidFill>
                   <a:srgbClr val="0E6E6C"/>
                 </a:solidFill>
-                <a:latin typeface="IBM Plex Sans" pitchFamily="34" charset="0"/>
-                <a:ea typeface="IBM Plex Sans" pitchFamily="34" charset="-122"/>
-                <a:cs typeface="IBM Plex Sans" pitchFamily="34" charset="-120"/>
+                <a:latin typeface="Arial" pitchFamily="34" charset="0"/>
+                <a:ea typeface="Arial" pitchFamily="34" charset="-122"/>
+                <a:cs typeface="Arial" pitchFamily="34" charset="-120"/>
               </a:rPr>
               <a:t>Decision support only</a:t>
             </a:r>
@@ -12305,11 +12540,11 @@
                 <a:solidFill>
                   <a:srgbClr val="17212B"/>
                 </a:solidFill>
-                <a:latin typeface="IBM Plex Sans" pitchFamily="34" charset="0"/>
-                <a:ea typeface="IBM Plex Sans" pitchFamily="34" charset="-122"/>
-                <a:cs typeface="IBM Plex Sans" pitchFamily="34" charset="-120"/>
-              </a:rPr>
-              <a:t>A tool like this should never replace triage judgment (lectures 10.2 and 8.2).</a:t>
+                <a:latin typeface="Arial" pitchFamily="34" charset="0"/>
+                <a:ea typeface="Arial" pitchFamily="34" charset="-122"/>
+                <a:cs typeface="Arial" pitchFamily="34" charset="-120"/>
+              </a:rPr>
+              <a:t>A tool like this should never replace triage judgment.</a:t>
             </a:r>
             <a:endParaRPr lang="en-US" sz="1300" dirty="0"/>
           </a:p>
@@ -12381,9 +12616,9 @@
                 <a:solidFill>
                   <a:srgbClr val="0E6E6C"/>
                 </a:solidFill>
-                <a:latin typeface="IBM Plex Sans" pitchFamily="34" charset="0"/>
-                <a:ea typeface="IBM Plex Sans" pitchFamily="34" charset="-122"/>
-                <a:cs typeface="IBM Plex Sans" pitchFamily="34" charset="-120"/>
+                <a:latin typeface="Arial" pitchFamily="34" charset="0"/>
+                <a:ea typeface="Arial" pitchFamily="34" charset="-122"/>
+                <a:cs typeface="Arial" pitchFamily="34" charset="-120"/>
               </a:rPr>
               <a:t>REFERENCES</a:t>
             </a:r>
@@ -12427,9 +12662,9 @@
                 <a:solidFill>
                   <a:srgbClr val="17212B"/>
                 </a:solidFill>
-                <a:latin typeface="IBM Plex Sans" pitchFamily="34" charset="0"/>
-                <a:ea typeface="IBM Plex Sans" pitchFamily="34" charset="-122"/>
-                <a:cs typeface="IBM Plex Sans" pitchFamily="34" charset="-120"/>
+                <a:latin typeface="Arial" pitchFamily="34" charset="0"/>
+                <a:ea typeface="Arial" pitchFamily="34" charset="-122"/>
+                <a:cs typeface="Arial" pitchFamily="34" charset="-120"/>
               </a:rPr>
               <a:t>Data, tools and papers used in this tutorial</a:t>
             </a:r>
@@ -12494,9 +12729,9 @@
                 <a:solidFill>
                   <a:srgbClr val="17212B"/>
                 </a:solidFill>
-                <a:latin typeface="IBM Plex Sans" pitchFamily="34" charset="0"/>
-                <a:ea typeface="IBM Plex Sans" pitchFamily="34" charset="-122"/>
-                <a:cs typeface="IBM Plex Sans" pitchFamily="34" charset="-120"/>
+                <a:latin typeface="Arial" pitchFamily="34" charset="0"/>
+                <a:ea typeface="Arial" pitchFamily="34" charset="-122"/>
+                <a:cs typeface="Arial" pitchFamily="34" charset="-120"/>
               </a:rPr>
               <a:t>Data</a:t>
             </a:r>
@@ -12538,9 +12773,9 @@
                 <a:solidFill>
                   <a:srgbClr val="17212B"/>
                 </a:solidFill>
-                <a:latin typeface="IBM Plex Sans" pitchFamily="34" charset="0"/>
-                <a:ea typeface="IBM Plex Sans" pitchFamily="34" charset="-122"/>
-                <a:cs typeface="IBM Plex Sans" pitchFamily="34" charset="-120"/>
+                <a:latin typeface="Arial" pitchFamily="34" charset="0"/>
+                <a:ea typeface="Arial" pitchFamily="34" charset="-122"/>
+                <a:cs typeface="Arial" pitchFamily="34" charset="-120"/>
               </a:rPr>
               <a:t>Johnson, A., Bulgarelli, L., Pollard, T., Celi, L. A., Horng, S., &amp; Mark, R. (2023). MIMIC-IV-ED Demo (version 2.2). PhysioNet. https://doi.org/10.13026/jzz5-vs76</a:t>
             </a:r>
@@ -12582,9 +12817,9 @@
                 <a:solidFill>
                   <a:srgbClr val="17212B"/>
                 </a:solidFill>
-                <a:latin typeface="IBM Plex Sans" pitchFamily="34" charset="0"/>
-                <a:ea typeface="IBM Plex Sans" pitchFamily="34" charset="-122"/>
-                <a:cs typeface="IBM Plex Sans" pitchFamily="34" charset="-120"/>
+                <a:latin typeface="Arial" pitchFamily="34" charset="0"/>
+                <a:ea typeface="Arial" pitchFamily="34" charset="-122"/>
+                <a:cs typeface="Arial" pitchFamily="34" charset="-120"/>
               </a:rPr>
               <a:t>Johnson, A., Bulgarelli, L., Pollard, T., Horng, S., Celi, L. A., &amp; Mark, R. (2022). MIMIC-IV Clinical Database Demo. PhysioNet. https://doi.org/10.13026/ng9m-3n32</a:t>
             </a:r>
@@ -12626,9 +12861,9 @@
                 <a:solidFill>
                   <a:srgbClr val="17212B"/>
                 </a:solidFill>
-                <a:latin typeface="IBM Plex Sans" pitchFamily="34" charset="0"/>
-                <a:ea typeface="IBM Plex Sans" pitchFamily="34" charset="-122"/>
-                <a:cs typeface="IBM Plex Sans" pitchFamily="34" charset="-120"/>
+                <a:latin typeface="Arial" pitchFamily="34" charset="0"/>
+                <a:ea typeface="Arial" pitchFamily="34" charset="-122"/>
+                <a:cs typeface="Arial" pitchFamily="34" charset="-120"/>
               </a:rPr>
               <a:t>Pollard, T., Moody, B. E., Lehman, L., Gow, B., Fernandes, C., Xie, C., Johnson, A., Mark, R. G., &amp; Heldt, T. (2026). PhysioNet as a global platform for biomedical research. Nature Health. https://doi.org/10.1038/s44360-026-00096-z</a:t>
             </a:r>
@@ -12693,9 +12928,9 @@
                 <a:solidFill>
                   <a:srgbClr val="17212B"/>
                 </a:solidFill>
-                <a:latin typeface="IBM Plex Sans" pitchFamily="34" charset="0"/>
-                <a:ea typeface="IBM Plex Sans" pitchFamily="34" charset="-122"/>
-                <a:cs typeface="IBM Plex Sans" pitchFamily="34" charset="-120"/>
+                <a:latin typeface="Arial" pitchFamily="34" charset="0"/>
+                <a:ea typeface="Arial" pitchFamily="34" charset="-122"/>
+                <a:cs typeface="Arial" pitchFamily="34" charset="-120"/>
               </a:rPr>
               <a:t>Models, tools and papers</a:t>
             </a:r>
@@ -12737,9 +12972,9 @@
                 <a:solidFill>
                   <a:srgbClr val="17212B"/>
                 </a:solidFill>
-                <a:latin typeface="IBM Plex Sans" pitchFamily="34" charset="0"/>
-                <a:ea typeface="IBM Plex Sans" pitchFamily="34" charset="-122"/>
-                <a:cs typeface="IBM Plex Sans" pitchFamily="34" charset="-120"/>
+                <a:latin typeface="Arial" pitchFamily="34" charset="0"/>
+                <a:ea typeface="Arial" pitchFamily="34" charset="-122"/>
+                <a:cs typeface="Arial" pitchFamily="34" charset="-120"/>
               </a:rPr>
               <a:t>Qwen Team. Qwen2.5 Technical Report. arXiv 2412.15115, 2024.</a:t>
             </a:r>
@@ -12781,9 +13016,9 @@
                 <a:solidFill>
                   <a:srgbClr val="17212B"/>
                 </a:solidFill>
-                <a:latin typeface="IBM Plex Sans" pitchFamily="34" charset="0"/>
-                <a:ea typeface="IBM Plex Sans" pitchFamily="34" charset="-122"/>
-                <a:cs typeface="IBM Plex Sans" pitchFamily="34" charset="-120"/>
+                <a:latin typeface="Arial" pitchFamily="34" charset="0"/>
+                <a:ea typeface="Arial" pitchFamily="34" charset="-122"/>
+                <a:cs typeface="Arial" pitchFamily="34" charset="-120"/>
               </a:rPr>
               <a:t>Ollama, ollama.com, for running the model locally, and Pydantic, docs.pydantic.dev, for validating the JSON answers.</a:t>
             </a:r>
@@ -12825,9 +13060,9 @@
                 <a:solidFill>
                   <a:srgbClr val="17212B"/>
                 </a:solidFill>
-                <a:latin typeface="IBM Plex Sans" pitchFamily="34" charset="0"/>
-                <a:ea typeface="IBM Plex Sans" pitchFamily="34" charset="-122"/>
-                <a:cs typeface="IBM Plex Sans" pitchFamily="34" charset="-120"/>
+                <a:latin typeface="Arial" pitchFamily="34" charset="0"/>
+                <a:ea typeface="Arial" pitchFamily="34" charset="-122"/>
+                <a:cs typeface="Arial" pitchFamily="34" charset="-120"/>
               </a:rPr>
               <a:t>Li T, et al. CancerGPT for few shot drug pair synergy prediction using large pretrained language models. npj Digital Medicine, 2024.</a:t>
             </a:r>
@@ -12869,9 +13104,9 @@
                 <a:solidFill>
                   <a:srgbClr val="17212B"/>
                 </a:solidFill>
-                <a:latin typeface="IBM Plex Sans" pitchFamily="34" charset="0"/>
-                <a:ea typeface="IBM Plex Sans" pitchFamily="34" charset="-122"/>
-                <a:cs typeface="IBM Plex Sans" pitchFamily="34" charset="-120"/>
+                <a:latin typeface="Arial" pitchFamily="34" charset="0"/>
+                <a:ea typeface="Arial" pitchFamily="34" charset="-122"/>
+                <a:cs typeface="Arial" pitchFamily="34" charset="-120"/>
               </a:rPr>
               <a:t>Course Module 13 (prompting) and Practices 1–3, lectures 2.2, 4.1, 8.2 and 10.2, and Series 9 and 11.</a:t>
             </a:r>
@@ -12913,9 +13148,9 @@
                 <a:solidFill>
                   <a:srgbClr val="5C6772"/>
                 </a:solidFill>
-                <a:latin typeface="IBM Plex Sans" pitchFamily="34" charset="0"/>
-                <a:ea typeface="IBM Plex Sans" pitchFamily="34" charset="-122"/>
-                <a:cs typeface="IBM Plex Sans" pitchFamily="34" charset="-120"/>
+                <a:latin typeface="Arial" pitchFamily="34" charset="0"/>
+                <a:ea typeface="Arial" pitchFamily="34" charset="-122"/>
+                <a:cs typeface="Arial" pitchFamily="34" charset="-120"/>
               </a:rPr>
               <a:t>19</a:t>
             </a:r>
@@ -12989,9 +13224,9 @@
                 <a:solidFill>
                   <a:srgbClr val="0E6E6C"/>
                 </a:solidFill>
-                <a:latin typeface="IBM Plex Sans" pitchFamily="34" charset="0"/>
-                <a:ea typeface="IBM Plex Sans" pitchFamily="34" charset="-122"/>
-                <a:cs typeface="IBM Plex Sans" pitchFamily="34" charset="-120"/>
+                <a:latin typeface="Arial" pitchFamily="34" charset="0"/>
+                <a:ea typeface="Arial" pitchFamily="34" charset="-122"/>
+                <a:cs typeface="Arial" pitchFamily="34" charset="-120"/>
               </a:rPr>
               <a:t>THE PROBLEM</a:t>
             </a:r>
@@ -13035,9 +13270,9 @@
                 <a:solidFill>
                   <a:srgbClr val="17212B"/>
                 </a:solidFill>
-                <a:latin typeface="IBM Plex Sans" pitchFamily="34" charset="0"/>
-                <a:ea typeface="IBM Plex Sans" pitchFamily="34" charset="-122"/>
-                <a:cs typeface="IBM Plex Sans" pitchFamily="34" charset="-120"/>
+                <a:latin typeface="Arial" pitchFamily="34" charset="0"/>
+                <a:ea typeface="Arial" pitchFamily="34" charset="-122"/>
+                <a:cs typeface="Arial" pitchFamily="34" charset="-120"/>
               </a:rPr>
               <a:t>Clinicians get a triage record in minutes but the diagnosis comes hours later and clinicians must rehash old facts</a:t>
             </a:r>
@@ -13102,9 +13337,9 @@
                 <a:solidFill>
                   <a:srgbClr val="3A4651"/>
                 </a:solidFill>
-                <a:latin typeface="IBM Plex Sans" pitchFamily="34" charset="0"/>
-                <a:ea typeface="IBM Plex Sans" pitchFamily="34" charset="-122"/>
-                <a:cs typeface="IBM Plex Sans" pitchFamily="34" charset="-120"/>
+                <a:latin typeface="Arial" pitchFamily="34" charset="0"/>
+                <a:ea typeface="Arial" pitchFamily="34" charset="-122"/>
+                <a:cs typeface="Arial" pitchFamily="34" charset="-120"/>
               </a:rPr>
               <a:t>An LLM that drafts the diagnosis category at triage could support the clinician rather than replace them</a:t>
             </a:r>
@@ -13146,9 +13381,9 @@
                 <a:solidFill>
                   <a:srgbClr val="17212B"/>
                 </a:solidFill>
-                <a:latin typeface="IBM Plex Sans" pitchFamily="34" charset="0"/>
-                <a:ea typeface="IBM Plex Sans" pitchFamily="34" charset="-122"/>
-                <a:cs typeface="IBM Plex Sans" pitchFamily="34" charset="-120"/>
+                <a:latin typeface="Arial" pitchFamily="34" charset="0"/>
+                <a:ea typeface="Arial" pitchFamily="34" charset="-122"/>
+                <a:cs typeface="Arial" pitchFamily="34" charset="-120"/>
               </a:rPr>
               <a:t>What a triage record looks like</a:t>
             </a:r>
@@ -13190,9 +13425,9 @@
                 <a:solidFill>
                   <a:srgbClr val="17212B"/>
                 </a:solidFill>
-                <a:latin typeface="IBM Plex Sans" pitchFamily="34" charset="0"/>
-                <a:ea typeface="IBM Plex Sans" pitchFamily="34" charset="-122"/>
-                <a:cs typeface="IBM Plex Sans" pitchFamily="34" charset="-120"/>
+                <a:latin typeface="Arial" pitchFamily="34" charset="0"/>
+                <a:ea typeface="Arial" pitchFamily="34" charset="-122"/>
+                <a:cs typeface="Arial" pitchFamily="34" charset="-120"/>
               </a:rPr>
               <a:t>Age 83, female. Arrived by ambulance.</a:t>
             </a:r>
@@ -13210,9 +13445,9 @@
                 <a:solidFill>
                   <a:srgbClr val="17212B"/>
                 </a:solidFill>
-                <a:latin typeface="IBM Plex Sans" pitchFamily="34" charset="0"/>
-                <a:ea typeface="IBM Plex Sans" pitchFamily="34" charset="-122"/>
-                <a:cs typeface="IBM Plex Sans" pitchFamily="34" charset="-120"/>
+                <a:latin typeface="Arial" pitchFamily="34" charset="0"/>
+                <a:ea typeface="Arial" pitchFamily="34" charset="-122"/>
+                <a:cs typeface="Arial" pitchFamily="34" charset="-120"/>
               </a:rPr>
               <a:t>Chief complaint: "Syncope, Transfer"</a:t>
             </a:r>
@@ -13230,9 +13465,9 @@
                 <a:solidFill>
                   <a:srgbClr val="17212B"/>
                 </a:solidFill>
-                <a:latin typeface="IBM Plex Sans" pitchFamily="34" charset="0"/>
-                <a:ea typeface="IBM Plex Sans" pitchFamily="34" charset="-122"/>
-                <a:cs typeface="IBM Plex Sans" pitchFamily="34" charset="-120"/>
+                <a:latin typeface="Arial" pitchFamily="34" charset="0"/>
+                <a:ea typeface="Arial" pitchFamily="34" charset="-122"/>
+                <a:cs typeface="Arial" pitchFamily="34" charset="-120"/>
               </a:rPr>
               <a:t>T 97.7°F, HR 74, RR 20, SpO2 96%,</a:t>
             </a:r>
@@ -13250,9 +13485,9 @@
                 <a:solidFill>
                   <a:srgbClr val="17212B"/>
                 </a:solidFill>
-                <a:latin typeface="IBM Plex Sans" pitchFamily="34" charset="0"/>
-                <a:ea typeface="IBM Plex Sans" pitchFamily="34" charset="-122"/>
-                <a:cs typeface="IBM Plex Sans" pitchFamily="34" charset="-120"/>
+                <a:latin typeface="Arial" pitchFamily="34" charset="0"/>
+                <a:ea typeface="Arial" pitchFamily="34" charset="-122"/>
+                <a:cs typeface="Arial" pitchFamily="34" charset="-120"/>
               </a:rPr>
               <a:t>BP 133/65. Pain 3/10. ESI acuity 2.</a:t>
             </a:r>
@@ -13294,9 +13529,9 @@
                 <a:solidFill>
                   <a:srgbClr val="17212B"/>
                 </a:solidFill>
-                <a:latin typeface="IBM Plex Sans" pitchFamily="34" charset="0"/>
-                <a:ea typeface="IBM Plex Sans" pitchFamily="34" charset="-122"/>
-                <a:cs typeface="IBM Plex Sans" pitchFamily="34" charset="-120"/>
+                <a:latin typeface="Arial" pitchFamily="34" charset="0"/>
+                <a:ea typeface="Arial" pitchFamily="34" charset="-122"/>
+                <a:cs typeface="Arial" pitchFamily="34" charset="-120"/>
               </a:rPr>
               <a:t>The model sees the complaint, vitals, pain, acuity, arrival, age and sex.</a:t>
             </a:r>
@@ -13338,9 +13573,9 @@
                 <a:solidFill>
                   <a:srgbClr val="17212B"/>
                 </a:solidFill>
-                <a:latin typeface="IBM Plex Sans" pitchFamily="34" charset="0"/>
-                <a:ea typeface="IBM Plex Sans" pitchFamily="34" charset="-122"/>
-                <a:cs typeface="IBM Plex Sans" pitchFamily="34" charset="-120"/>
+                <a:latin typeface="Arial" pitchFamily="34" charset="0"/>
+                <a:ea typeface="Arial" pitchFamily="34" charset="-122"/>
+                <a:cs typeface="Arial" pitchFamily="34" charset="-120"/>
               </a:rPr>
               <a:t>What the ED recorded later</a:t>
             </a:r>
@@ -13382,9 +13617,9 @@
                 <a:solidFill>
                   <a:srgbClr val="17212B"/>
                 </a:solidFill>
-                <a:latin typeface="IBM Plex Sans" pitchFamily="34" charset="0"/>
-                <a:ea typeface="IBM Plex Sans" pitchFamily="34" charset="-122"/>
-                <a:cs typeface="IBM Plex Sans" pitchFamily="34" charset="-120"/>
+                <a:latin typeface="Arial" pitchFamily="34" charset="0"/>
+                <a:ea typeface="Arial" pitchFamily="34" charset="-122"/>
+                <a:cs typeface="Arial" pitchFamily="34" charset="-120"/>
               </a:rPr>
               <a:t>Primary diagnosis (seq_num = 1)</a:t>
             </a:r>
@@ -13402,9 +13637,9 @@
                 <a:solidFill>
                   <a:srgbClr val="17212B"/>
                 </a:solidFill>
-                <a:latin typeface="IBM Plex Sans" pitchFamily="34" charset="0"/>
-                <a:ea typeface="IBM Plex Sans" pitchFamily="34" charset="-122"/>
-                <a:cs typeface="IBM Plex Sans" pitchFamily="34" charset="-120"/>
+                <a:latin typeface="Arial" pitchFamily="34" charset="0"/>
+                <a:ea typeface="Arial" pitchFamily="34" charset="-122"/>
+                <a:cs typeface="Arial" pitchFamily="34" charset="-120"/>
               </a:rPr>
               <a:t>R55, Syncope and collapse</a:t>
             </a:r>
@@ -13446,9 +13681,9 @@
                 <a:solidFill>
                   <a:srgbClr val="17212B"/>
                 </a:solidFill>
-                <a:latin typeface="IBM Plex Sans" pitchFamily="34" charset="0"/>
-                <a:ea typeface="IBM Plex Sans" pitchFamily="34" charset="-122"/>
-                <a:cs typeface="IBM Plex Sans" pitchFamily="34" charset="-120"/>
+                <a:latin typeface="Arial" pitchFamily="34" charset="0"/>
+                <a:ea typeface="Arial" pitchFamily="34" charset="-122"/>
+                <a:cs typeface="Arial" pitchFamily="34" charset="-120"/>
               </a:rPr>
               <a:t>We score the model against the ICD-10 chapter of this diagnosis, which here is "Symptoms &amp; signs".</a:t>
             </a:r>
@@ -13490,11 +13725,11 @@
                 <a:solidFill>
                   <a:srgbClr val="5C6772"/>
                 </a:solidFill>
-                <a:latin typeface="IBM Plex Sans" pitchFamily="34" charset="0"/>
-                <a:ea typeface="IBM Plex Sans" pitchFamily="34" charset="-122"/>
-                <a:cs typeface="IBM Plex Sans" pitchFamily="34" charset="-120"/>
-              </a:rPr>
-              <a:t>Notebook cell 15</a:t>
+                <a:latin typeface="Arial" pitchFamily="34" charset="0"/>
+                <a:ea typeface="Arial" pitchFamily="34" charset="-122"/>
+                <a:cs typeface="Arial" pitchFamily="34" charset="-120"/>
+              </a:rPr>
+              <a:t>Notebook cell [10]</a:t>
             </a:r>
             <a:endParaRPr lang="en-US" sz="1200" dirty="0"/>
           </a:p>
@@ -13534,9 +13769,9 @@
                 <a:solidFill>
                   <a:srgbClr val="5C6772"/>
                 </a:solidFill>
-                <a:latin typeface="IBM Plex Sans" pitchFamily="34" charset="0"/>
-                <a:ea typeface="IBM Plex Sans" pitchFamily="34" charset="-122"/>
-                <a:cs typeface="IBM Plex Sans" pitchFamily="34" charset="-120"/>
+                <a:latin typeface="Arial" pitchFamily="34" charset="0"/>
+                <a:ea typeface="Arial" pitchFamily="34" charset="-122"/>
+                <a:cs typeface="Arial" pitchFamily="34" charset="-120"/>
               </a:rPr>
               <a:t>2</a:t>
             </a:r>
@@ -13610,9 +13845,9 @@
                 <a:solidFill>
                   <a:srgbClr val="0E6E6C"/>
                 </a:solidFill>
-                <a:latin typeface="IBM Plex Sans" pitchFamily="34" charset="0"/>
-                <a:ea typeface="IBM Plex Sans" pitchFamily="34" charset="-122"/>
-                <a:cs typeface="IBM Plex Sans" pitchFamily="34" charset="-120"/>
+                <a:latin typeface="Arial" pitchFamily="34" charset="0"/>
+                <a:ea typeface="Arial" pitchFamily="34" charset="-122"/>
+                <a:cs typeface="Arial" pitchFamily="34" charset="-120"/>
               </a:rPr>
               <a:t>WHAT YOU WILL LEARN</a:t>
             </a:r>
@@ -13656,9 +13891,9 @@
                 <a:solidFill>
                   <a:srgbClr val="17212B"/>
                 </a:solidFill>
-                <a:latin typeface="IBM Plex Sans" pitchFamily="34" charset="0"/>
-                <a:ea typeface="IBM Plex Sans" pitchFamily="34" charset="-122"/>
-                <a:cs typeface="IBM Plex Sans" pitchFamily="34" charset="-120"/>
+                <a:latin typeface="Arial" pitchFamily="34" charset="0"/>
+                <a:ea typeface="Arial" pitchFamily="34" charset="-122"/>
+                <a:cs typeface="Arial" pitchFamily="34" charset="-120"/>
               </a:rPr>
               <a:t>This tutorial walks through seven steps beginning with a raw triage table and concluding with a scored LLM</a:t>
             </a:r>
@@ -13723,9 +13958,9 @@
                 <a:solidFill>
                   <a:srgbClr val="3A4651"/>
                 </a:solidFill>
-                <a:latin typeface="IBM Plex Sans" pitchFamily="34" charset="0"/>
-                <a:ea typeface="IBM Plex Sans" pitchFamily="34" charset="-122"/>
-                <a:cs typeface="IBM Plex Sans" pitchFamily="34" charset="-120"/>
+                <a:latin typeface="Arial" pitchFamily="34" charset="0"/>
+                <a:ea typeface="Arial" pitchFamily="34" charset="-122"/>
+                <a:cs typeface="Arial" pitchFamily="34" charset="-120"/>
               </a:rPr>
               <a:t>By the end you will be able to run an LLM locally on MIMIC data, prompt it three ways and measure whether the prompting helped</a:t>
             </a:r>
@@ -13790,9 +14025,9 @@
                 <a:solidFill>
                   <a:srgbClr val="0E6E6C"/>
                 </a:solidFill>
-                <a:latin typeface="IBM Plex Sans" pitchFamily="34" charset="0"/>
-                <a:ea typeface="IBM Plex Sans" pitchFamily="34" charset="-122"/>
-                <a:cs typeface="IBM Plex Sans" pitchFamily="34" charset="-120"/>
+                <a:latin typeface="Arial" pitchFamily="34" charset="0"/>
+                <a:ea typeface="Arial" pitchFamily="34" charset="-122"/>
+                <a:cs typeface="Arial" pitchFamily="34" charset="-120"/>
               </a:rPr>
               <a:t>You will learn how to</a:t>
             </a:r>
@@ -13834,9 +14069,9 @@
                 <a:solidFill>
                   <a:srgbClr val="17212B"/>
                 </a:solidFill>
-                <a:latin typeface="IBM Plex Sans" pitchFamily="34" charset="0"/>
-                <a:ea typeface="IBM Plex Sans" pitchFamily="34" charset="-122"/>
-                <a:cs typeface="IBM Plex Sans" pitchFamily="34" charset="-120"/>
+                <a:latin typeface="Arial" pitchFamily="34" charset="0"/>
+                <a:ea typeface="Arial" pitchFamily="34" charset="-122"/>
+                <a:cs typeface="Arial" pitchFamily="34" charset="-120"/>
               </a:rPr>
               <a:t>Run an open-weight LLM on your own laptop with Ollama, so patient records never leave the machine.</a:t>
             </a:r>
@@ -13878,9 +14113,9 @@
                 <a:solidFill>
                   <a:srgbClr val="17212B"/>
                 </a:solidFill>
-                <a:latin typeface="IBM Plex Sans" pitchFamily="34" charset="0"/>
-                <a:ea typeface="IBM Plex Sans" pitchFamily="34" charset="-122"/>
-                <a:cs typeface="IBM Plex Sans" pitchFamily="34" charset="-120"/>
+                <a:latin typeface="Arial" pitchFamily="34" charset="0"/>
+                <a:ea typeface="Arial" pitchFamily="34" charset="-122"/>
+                <a:cs typeface="Arial" pitchFamily="34" charset="-120"/>
               </a:rPr>
               <a:t>Turn a row of MIMIC-IV-ED data into a prompt and get structured JSON back.</a:t>
             </a:r>
@@ -13922,9 +14157,9 @@
                 <a:solidFill>
                   <a:srgbClr val="17212B"/>
                 </a:solidFill>
-                <a:latin typeface="IBM Plex Sans" pitchFamily="34" charset="0"/>
-                <a:ea typeface="IBM Plex Sans" pitchFamily="34" charset="-122"/>
-                <a:cs typeface="IBM Plex Sans" pitchFamily="34" charset="-120"/>
+                <a:latin typeface="Arial" pitchFamily="34" charset="0"/>
+                <a:ea typeface="Arial" pitchFamily="34" charset="-122"/>
+                <a:cs typeface="Arial" pitchFamily="34" charset="-120"/>
               </a:rPr>
               <a:t>Compare zero-shot, few-shot and chain-of-thought prompting against real ED diagnoses.</a:t>
             </a:r>
@@ -13989,9 +14224,9 @@
                 <a:solidFill>
                   <a:srgbClr val="17212B"/>
                 </a:solidFill>
-                <a:latin typeface="IBM Plex Sans" pitchFamily="34" charset="0"/>
-                <a:ea typeface="IBM Plex Sans" pitchFamily="34" charset="-122"/>
-                <a:cs typeface="IBM Plex Sans" pitchFamily="34" charset="-120"/>
+                <a:latin typeface="Arial" pitchFamily="34" charset="0"/>
+                <a:ea typeface="Arial" pitchFamily="34" charset="-122"/>
+                <a:cs typeface="Arial" pitchFamily="34" charset="-120"/>
               </a:rPr>
               <a:t>The seven steps</a:t>
             </a:r>
@@ -14007,22 +14242,22 @@
         </p:nvSpPr>
         <p:spPr>
           <a:xfrm>
-            <a:off x="5543352" y="3273971"/>
-            <a:ext cx="6005012" cy="1829792"/>
-          </a:xfrm>
-          <a:prstGeom prst="rect">
-            <a:avLst/>
-          </a:prstGeom>
-          <a:noFill/>
-          <a:ln/>
-        </p:spPr>
-        <p:txBody>
-          <a:bodyPr wrap="square" lIns="0" tIns="0" rIns="0" bIns="0" rtlCol="0" anchor="t">
-            <a:normAutofit/>
-          </a:bodyPr>
-          <a:lstStyle/>
-          <a:p>
-            <a:pPr algn="l" marL="197048" indent="-197048">
+            <a:off x="5542657" y="3273971"/>
+            <a:ext cx="6005707" cy="1829792"/>
+          </a:xfrm>
+          <a:prstGeom prst="rect">
+            <a:avLst/>
+          </a:prstGeom>
+          <a:noFill/>
+          <a:ln/>
+        </p:spPr>
+        <p:txBody>
+          <a:bodyPr wrap="square" lIns="0" tIns="0" rIns="0" bIns="0" rtlCol="0" anchor="t">
+            <a:normAutofit/>
+          </a:bodyPr>
+          <a:lstStyle/>
+          <a:p>
+            <a:pPr algn="l" marL="197743" indent="-197743">
               <a:lnSpc>
                 <a:spcPts val="2030"/>
               </a:lnSpc>
@@ -14035,16 +14270,16 @@
                 <a:solidFill>
                   <a:srgbClr val="17212B"/>
                 </a:solidFill>
-                <a:latin typeface="IBM Plex Sans" pitchFamily="34" charset="0"/>
-                <a:ea typeface="IBM Plex Sans" pitchFamily="34" charset="-122"/>
-                <a:cs typeface="IBM Plex Sans" pitchFamily="34" charset="-120"/>
+                <a:latin typeface="Arial" pitchFamily="34" charset="0"/>
+                <a:ea typeface="Arial" pitchFamily="34" charset="-122"/>
+                <a:cs typeface="Arial" pitchFamily="34" charset="-120"/>
               </a:rPr>
               <a:t>Set up a local model with Ollama</a:t>
             </a:r>
             <a:endParaRPr lang="en-US" sz="1400" dirty="0"/>
           </a:p>
           <a:p>
-            <a:pPr algn="l" marL="197048" indent="-197048">
+            <a:pPr algn="l" marL="197743" indent="-197743">
               <a:lnSpc>
                 <a:spcPts val="2030"/>
               </a:lnSpc>
@@ -14057,16 +14292,16 @@
                 <a:solidFill>
                   <a:srgbClr val="17212B"/>
                 </a:solidFill>
-                <a:latin typeface="IBM Plex Sans" pitchFamily="34" charset="0"/>
-                <a:ea typeface="IBM Plex Sans" pitchFamily="34" charset="-122"/>
-                <a:cs typeface="IBM Plex Sans" pitchFamily="34" charset="-120"/>
+                <a:latin typeface="Arial" pitchFamily="34" charset="0"/>
+                <a:ea typeface="Arial" pitchFamily="34" charset="-122"/>
+                <a:cs typeface="Arial" pitchFamily="34" charset="-120"/>
               </a:rPr>
               <a:t>Build the cohort from five demo tables</a:t>
             </a:r>
             <a:endParaRPr lang="en-US" sz="1400" dirty="0"/>
           </a:p>
           <a:p>
-            <a:pPr algn="l" marL="197048" indent="-197048">
+            <a:pPr algn="l" marL="197743" indent="-197743">
               <a:lnSpc>
                 <a:spcPts val="2030"/>
               </a:lnSpc>
@@ -14079,16 +14314,16 @@
                 <a:solidFill>
                   <a:srgbClr val="17212B"/>
                 </a:solidFill>
-                <a:latin typeface="IBM Plex Sans" pitchFamily="34" charset="0"/>
-                <a:ea typeface="IBM Plex Sans" pitchFamily="34" charset="-122"/>
-                <a:cs typeface="IBM Plex Sans" pitchFamily="34" charset="-120"/>
+                <a:latin typeface="Arial" pitchFamily="34" charset="0"/>
+                <a:ea typeface="Arial" pitchFamily="34" charset="-122"/>
+                <a:cs typeface="Arial" pitchFamily="34" charset="-120"/>
               </a:rPr>
               <a:t>Group each diagnosis into an ICD-10 chapter</a:t>
             </a:r>
             <a:endParaRPr lang="en-US" sz="1400" dirty="0"/>
           </a:p>
           <a:p>
-            <a:pPr algn="l" marL="197048" indent="-197048">
+            <a:pPr algn="l" marL="197743" indent="-197743">
               <a:lnSpc>
                 <a:spcPts val="2030"/>
               </a:lnSpc>
@@ -14101,16 +14336,16 @@
                 <a:solidFill>
                   <a:srgbClr val="17212B"/>
                 </a:solidFill>
-                <a:latin typeface="IBM Plex Sans" pitchFamily="34" charset="0"/>
-                <a:ea typeface="IBM Plex Sans" pitchFamily="34" charset="-122"/>
-                <a:cs typeface="IBM Plex Sans" pitchFamily="34" charset="-120"/>
+                <a:latin typeface="Arial" pitchFamily="34" charset="0"/>
+                <a:ea typeface="Arial" pitchFamily="34" charset="-122"/>
+                <a:cs typeface="Arial" pitchFamily="34" charset="-120"/>
               </a:rPr>
               <a:t>Turn each triage row into a text prompt</a:t>
             </a:r>
             <a:endParaRPr lang="en-US" sz="1400" dirty="0"/>
           </a:p>
           <a:p>
-            <a:pPr algn="l" marL="197048" indent="-197048">
+            <a:pPr algn="l" marL="197743" indent="-197743">
               <a:lnSpc>
                 <a:spcPts val="2030"/>
               </a:lnSpc>
@@ -14123,16 +14358,16 @@
                 <a:solidFill>
                   <a:srgbClr val="17212B"/>
                 </a:solidFill>
-                <a:latin typeface="IBM Plex Sans" pitchFamily="34" charset="0"/>
-                <a:ea typeface="IBM Plex Sans" pitchFamily="34" charset="-122"/>
-                <a:cs typeface="IBM Plex Sans" pitchFamily="34" charset="-120"/>
+                <a:latin typeface="Arial" pitchFamily="34" charset="0"/>
+                <a:ea typeface="Arial" pitchFamily="34" charset="-122"/>
+                <a:cs typeface="Arial" pitchFamily="34" charset="-120"/>
               </a:rPr>
               <a:t>Ask the model with three prompting techniques</a:t>
             </a:r>
             <a:endParaRPr lang="en-US" sz="1400" dirty="0"/>
           </a:p>
           <a:p>
-            <a:pPr algn="l" marL="197048" indent="-197048">
+            <a:pPr algn="l" marL="197743" indent="-197743">
               <a:lnSpc>
                 <a:spcPts val="2030"/>
               </a:lnSpc>
@@ -14145,16 +14380,16 @@
                 <a:solidFill>
                   <a:srgbClr val="17212B"/>
                 </a:solidFill>
-                <a:latin typeface="IBM Plex Sans" pitchFamily="34" charset="0"/>
-                <a:ea typeface="IBM Plex Sans" pitchFamily="34" charset="-122"/>
-                <a:cs typeface="IBM Plex Sans" pitchFamily="34" charset="-120"/>
+                <a:latin typeface="Arial" pitchFamily="34" charset="0"/>
+                <a:ea typeface="Arial" pitchFamily="34" charset="-122"/>
+                <a:cs typeface="Arial" pitchFamily="34" charset="-120"/>
               </a:rPr>
               <a:t>Score the answers by chapter</a:t>
             </a:r>
             <a:endParaRPr lang="en-US" sz="1400" dirty="0"/>
           </a:p>
           <a:p>
-            <a:pPr algn="l" marL="197048" indent="-197048">
+            <a:pPr algn="l" marL="197743" indent="-197743">
               <a:lnSpc>
                 <a:spcPts val="2030"/>
               </a:lnSpc>
@@ -14167,9 +14402,9 @@
                 <a:solidFill>
                   <a:srgbClr val="17212B"/>
                 </a:solidFill>
-                <a:latin typeface="IBM Plex Sans" pitchFamily="34" charset="0"/>
-                <a:ea typeface="IBM Plex Sans" pitchFamily="34" charset="-122"/>
-                <a:cs typeface="IBM Plex Sans" pitchFamily="34" charset="-120"/>
+                <a:latin typeface="Arial" pitchFamily="34" charset="0"/>
+                <a:ea typeface="Arial" pitchFamily="34" charset="-122"/>
+                <a:cs typeface="Arial" pitchFamily="34" charset="-120"/>
               </a:rPr>
               <a:t>Read the results and their limits</a:t>
             </a:r>
@@ -14211,9 +14446,9 @@
                 <a:solidFill>
                   <a:srgbClr val="5C6772"/>
                 </a:solidFill>
-                <a:latin typeface="IBM Plex Sans" pitchFamily="34" charset="0"/>
-                <a:ea typeface="IBM Plex Sans" pitchFamily="34" charset="-122"/>
-                <a:cs typeface="IBM Plex Sans" pitchFamily="34" charset="-120"/>
+                <a:latin typeface="Arial" pitchFamily="34" charset="0"/>
+                <a:ea typeface="Arial" pitchFamily="34" charset="-122"/>
+                <a:cs typeface="Arial" pitchFamily="34" charset="-120"/>
               </a:rPr>
               <a:t>3</a:t>
             </a:r>
@@ -14287,9 +14522,9 @@
                 <a:solidFill>
                   <a:srgbClr val="0E6E6C"/>
                 </a:solidFill>
-                <a:latin typeface="IBM Plex Sans" pitchFamily="34" charset="0"/>
-                <a:ea typeface="IBM Plex Sans" pitchFamily="34" charset="-122"/>
-                <a:cs typeface="IBM Plex Sans" pitchFamily="34" charset="-120"/>
+                <a:latin typeface="Arial" pitchFamily="34" charset="0"/>
+                <a:ea typeface="Arial" pitchFamily="34" charset="-122"/>
+                <a:cs typeface="Arial" pitchFamily="34" charset="-120"/>
               </a:rPr>
               <a:t>WHAT THIS BUILDS ON</a:t>
             </a:r>
@@ -14333,9 +14568,9 @@
                 <a:solidFill>
                   <a:srgbClr val="17212B"/>
                 </a:solidFill>
-                <a:latin typeface="IBM Plex Sans" pitchFamily="34" charset="0"/>
-                <a:ea typeface="IBM Plex Sans" pitchFamily="34" charset="-122"/>
-                <a:cs typeface="IBM Plex Sans" pitchFamily="34" charset="-120"/>
+                <a:latin typeface="Arial" pitchFamily="34" charset="0"/>
+                <a:ea typeface="Arial" pitchFamily="34" charset="-122"/>
+                <a:cs typeface="Arial" pitchFamily="34" charset="-120"/>
               </a:rPr>
               <a:t>Module 13 provided an overview of prompting techniques and this tutorial tests them on real ED visits</a:t>
             </a:r>
@@ -14400,9 +14635,9 @@
                 <a:solidFill>
                   <a:srgbClr val="3A4651"/>
                 </a:solidFill>
-                <a:latin typeface="IBM Plex Sans" pitchFamily="34" charset="0"/>
-                <a:ea typeface="IBM Plex Sans" pitchFamily="34" charset="-122"/>
-                <a:cs typeface="IBM Plex Sans" pitchFamily="34" charset="-120"/>
+                <a:latin typeface="Arial" pitchFamily="34" charset="0"/>
+                <a:ea typeface="Arial" pitchFamily="34" charset="-122"/>
+                <a:cs typeface="Arial" pitchFamily="34" charset="-120"/>
               </a:rPr>
               <a:t>Every technique comes from the course, while the MIMIC-IV-ED tables and the measured accuracy are new</a:t>
             </a:r>
@@ -14467,9 +14702,9 @@
                 <a:solidFill>
                   <a:srgbClr val="17212B"/>
                 </a:solidFill>
-                <a:latin typeface="IBM Plex Sans" pitchFamily="34" charset="0"/>
-                <a:ea typeface="IBM Plex Sans" pitchFamily="34" charset="-122"/>
-                <a:cs typeface="IBM Plex Sans" pitchFamily="34" charset="-120"/>
+                <a:latin typeface="Arial" pitchFamily="34" charset="0"/>
+                <a:ea typeface="Arial" pitchFamily="34" charset="-122"/>
+                <a:cs typeface="Arial" pitchFamily="34" charset="-120"/>
               </a:rPr>
               <a:t>From the course</a:t>
             </a:r>
@@ -14511,9 +14746,9 @@
                 <a:solidFill>
                   <a:srgbClr val="17212B"/>
                 </a:solidFill>
-                <a:latin typeface="IBM Plex Sans" pitchFamily="34" charset="0"/>
-                <a:ea typeface="IBM Plex Sans" pitchFamily="34" charset="-122"/>
-                <a:cs typeface="IBM Plex Sans" pitchFamily="34" charset="-120"/>
+                <a:latin typeface="Arial" pitchFamily="34" charset="0"/>
+                <a:ea typeface="Arial" pitchFamily="34" charset="-122"/>
+                <a:cs typeface="Arial" pitchFamily="34" charset="-120"/>
               </a:rPr>
               <a:t>The course covered zero-shot, few-shot and chain-of-thought prompting and showed how to check JSON output with Pydantic.</a:t>
             </a:r>
@@ -14578,9 +14813,9 @@
                 <a:solidFill>
                   <a:srgbClr val="0E6E6C"/>
                 </a:solidFill>
-                <a:latin typeface="IBM Plex Sans" pitchFamily="34" charset="0"/>
-                <a:ea typeface="IBM Plex Sans" pitchFamily="34" charset="-122"/>
-                <a:cs typeface="IBM Plex Sans" pitchFamily="34" charset="-120"/>
+                <a:latin typeface="Arial" pitchFamily="34" charset="0"/>
+                <a:ea typeface="Arial" pitchFamily="34" charset="-122"/>
+                <a:cs typeface="Arial" pitchFamily="34" charset="-120"/>
               </a:rPr>
               <a:t>New here</a:t>
             </a:r>
@@ -14622,9 +14857,9 @@
                 <a:solidFill>
                   <a:srgbClr val="17212B"/>
                 </a:solidFill>
-                <a:latin typeface="IBM Plex Sans" pitchFamily="34" charset="0"/>
-                <a:ea typeface="IBM Plex Sans" pitchFamily="34" charset="-122"/>
-                <a:cs typeface="IBM Plex Sans" pitchFamily="34" charset="-120"/>
+                <a:latin typeface="Arial" pitchFamily="34" charset="0"/>
+                <a:ea typeface="Arial" pitchFamily="34" charset="-122"/>
+                <a:cs typeface="Arial" pitchFamily="34" charset="-120"/>
               </a:rPr>
               <a:t>This tutorial applies them to MIMIC-IV-ED triage records, uses real ED diagnoses as labels and measures how accurate each technique is.</a:t>
             </a:r>
@@ -14666,9 +14901,9 @@
                 <a:solidFill>
                   <a:srgbClr val="5C6772"/>
                 </a:solidFill>
-                <a:latin typeface="IBM Plex Sans" pitchFamily="34" charset="0"/>
-                <a:ea typeface="IBM Plex Sans" pitchFamily="34" charset="-122"/>
-                <a:cs typeface="IBM Plex Sans" pitchFamily="34" charset="-120"/>
+                <a:latin typeface="Arial" pitchFamily="34" charset="0"/>
+                <a:ea typeface="Arial" pitchFamily="34" charset="-122"/>
+                <a:cs typeface="Arial" pitchFamily="34" charset="-120"/>
               </a:rPr>
               <a:t>4</a:t>
             </a:r>
@@ -14742,9 +14977,9 @@
                 <a:solidFill>
                   <a:srgbClr val="0E6E6C"/>
                 </a:solidFill>
-                <a:latin typeface="IBM Plex Sans" pitchFamily="34" charset="0"/>
-                <a:ea typeface="IBM Plex Sans" pitchFamily="34" charset="-122"/>
-                <a:cs typeface="IBM Plex Sans" pitchFamily="34" charset="-120"/>
+                <a:latin typeface="Arial" pitchFamily="34" charset="0"/>
+                <a:ea typeface="Arial" pitchFamily="34" charset="-122"/>
+                <a:cs typeface="Arial" pitchFamily="34" charset="-120"/>
               </a:rPr>
               <a:t>BEFORE YOU START (1 OF 2)</a:t>
             </a:r>
@@ -14788,9 +15023,9 @@
                 <a:solidFill>
                   <a:srgbClr val="17212B"/>
                 </a:solidFill>
-                <a:latin typeface="IBM Plex Sans" pitchFamily="34" charset="0"/>
-                <a:ea typeface="IBM Plex Sans" pitchFamily="34" charset="-122"/>
-                <a:cs typeface="IBM Plex Sans" pitchFamily="34" charset="-120"/>
+                <a:latin typeface="Arial" pitchFamily="34" charset="0"/>
+                <a:ea typeface="Arial" pitchFamily="34" charset="-122"/>
+                <a:cs typeface="Arial" pitchFamily="34" charset="-120"/>
               </a:rPr>
               <a:t>Before step 1, get the code onto your machine and give it its own Python environment</a:t>
             </a:r>
@@ -14855,9 +15090,9 @@
                 <a:solidFill>
                   <a:srgbClr val="3A4651"/>
                 </a:solidFill>
-                <a:latin typeface="IBM Plex Sans" pitchFamily="34" charset="0"/>
-                <a:ea typeface="IBM Plex Sans" pitchFamily="34" charset="-122"/>
-                <a:cs typeface="IBM Plex Sans" pitchFamily="34" charset="-120"/>
+                <a:latin typeface="Arial" pitchFamily="34" charset="0"/>
+                <a:ea typeface="Arial" pitchFamily="34" charset="-122"/>
+                <a:cs typeface="Arial" pitchFamily="34" charset="-120"/>
               </a:rPr>
               <a:t>The demo data is already in the repo, so you don't need a PhysioNet account to follow along</a:t>
             </a:r>
@@ -14922,9 +15157,9 @@
                 <a:solidFill>
                   <a:srgbClr val="17212B"/>
                 </a:solidFill>
-                <a:latin typeface="IBM Plex Sans" pitchFamily="34" charset="0"/>
-                <a:ea typeface="IBM Plex Sans" pitchFamily="34" charset="-122"/>
-                <a:cs typeface="IBM Plex Sans" pitchFamily="34" charset="-120"/>
+                <a:latin typeface="Arial" pitchFamily="34" charset="0"/>
+                <a:ea typeface="Arial" pitchFamily="34" charset="-122"/>
+                <a:cs typeface="Arial" pitchFamily="34" charset="-120"/>
               </a:rPr>
               <a:t>1. Clone the repo</a:t>
             </a:r>
@@ -14966,9 +15201,9 @@
                 <a:solidFill>
                   <a:srgbClr val="17212B"/>
                 </a:solidFill>
-                <a:latin typeface="IBM Plex Mono" pitchFamily="49" charset="0"/>
-                <a:ea typeface="IBM Plex Mono" pitchFamily="49" charset="-122"/>
-                <a:cs typeface="IBM Plex Mono" pitchFamily="49" charset="-120"/>
+                <a:latin typeface="Courier New" pitchFamily="49" charset="0"/>
+                <a:ea typeface="Courier New" pitchFamily="49" charset="-122"/>
+                <a:cs typeface="Courier New" pitchFamily="49" charset="-120"/>
               </a:rPr>
               <a:t>git clone https://github.com/bja2376/triage-llm-tutorial.git</a:t>
             </a:r>
@@ -14986,9 +15221,9 @@
                 <a:solidFill>
                   <a:srgbClr val="17212B"/>
                 </a:solidFill>
-                <a:latin typeface="IBM Plex Mono" pitchFamily="49" charset="0"/>
-                <a:ea typeface="IBM Plex Mono" pitchFamily="49" charset="-122"/>
-                <a:cs typeface="IBM Plex Mono" pitchFamily="49" charset="-120"/>
+                <a:latin typeface="Courier New" pitchFamily="49" charset="0"/>
+                <a:ea typeface="Courier New" pitchFamily="49" charset="-122"/>
+                <a:cs typeface="Courier New" pitchFamily="49" charset="-120"/>
               </a:rPr>
               <a:t>cd triage-llm-tutorial</a:t>
             </a:r>
@@ -15030,9 +15265,9 @@
                 <a:solidFill>
                   <a:srgbClr val="17212B"/>
                 </a:solidFill>
-                <a:latin typeface="IBM Plex Sans" pitchFamily="34" charset="0"/>
-                <a:ea typeface="IBM Plex Sans" pitchFamily="34" charset="-122"/>
-                <a:cs typeface="IBM Plex Sans" pitchFamily="34" charset="-120"/>
+                <a:latin typeface="Arial" pitchFamily="34" charset="0"/>
+                <a:ea typeface="Arial" pitchFamily="34" charset="-122"/>
+                <a:cs typeface="Arial" pitchFamily="34" charset="-120"/>
               </a:rPr>
               <a:t>2. Make and activate a virtual environment</a:t>
             </a:r>
@@ -15074,9 +15309,9 @@
                 <a:solidFill>
                   <a:srgbClr val="17212B"/>
                 </a:solidFill>
-                <a:latin typeface="IBM Plex Mono" pitchFamily="49" charset="0"/>
-                <a:ea typeface="IBM Plex Mono" pitchFamily="49" charset="-122"/>
-                <a:cs typeface="IBM Plex Mono" pitchFamily="49" charset="-120"/>
+                <a:latin typeface="Courier New" pitchFamily="49" charset="0"/>
+                <a:ea typeface="Courier New" pitchFamily="49" charset="-122"/>
+                <a:cs typeface="Courier New" pitchFamily="49" charset="-120"/>
               </a:rPr>
               <a:t>python -m venv .venv</a:t>
             </a:r>
@@ -15094,9 +15329,9 @@
                 <a:solidFill>
                   <a:srgbClr val="17212B"/>
                 </a:solidFill>
-                <a:latin typeface="IBM Plex Mono" pitchFamily="49" charset="0"/>
-                <a:ea typeface="IBM Plex Mono" pitchFamily="49" charset="-122"/>
-                <a:cs typeface="IBM Plex Mono" pitchFamily="49" charset="-120"/>
+                <a:latin typeface="Courier New" pitchFamily="49" charset="0"/>
+                <a:ea typeface="Courier New" pitchFamily="49" charset="-122"/>
+                <a:cs typeface="Courier New" pitchFamily="49" charset="-120"/>
               </a:rPr>
               <a:t>source .venv/bin/activate      </a:t>
             </a:r>
@@ -15105,9 +15340,9 @@
                 <a:solidFill>
                   <a:srgbClr val="5C6772"/>
                 </a:solidFill>
-                <a:latin typeface="IBM Plex Mono" pitchFamily="49" charset="0"/>
-                <a:ea typeface="IBM Plex Mono" pitchFamily="49" charset="-122"/>
-                <a:cs typeface="IBM Plex Mono" pitchFamily="49" charset="-120"/>
+                <a:latin typeface="Courier New" pitchFamily="49" charset="0"/>
+                <a:ea typeface="Courier New" pitchFamily="49" charset="-122"/>
+                <a:cs typeface="Courier New" pitchFamily="49" charset="-120"/>
               </a:rPr>
               <a:t># macOS or Linux</a:t>
             </a:r>
@@ -15125,9 +15360,9 @@
                 <a:solidFill>
                   <a:srgbClr val="17212B"/>
                 </a:solidFill>
-                <a:latin typeface="IBM Plex Mono" pitchFamily="49" charset="0"/>
-                <a:ea typeface="IBM Plex Mono" pitchFamily="49" charset="-122"/>
-                <a:cs typeface="IBM Plex Mono" pitchFamily="49" charset="-120"/>
+                <a:latin typeface="Courier New" pitchFamily="49" charset="0"/>
+                <a:ea typeface="Courier New" pitchFamily="49" charset="-122"/>
+                <a:cs typeface="Courier New" pitchFamily="49" charset="-120"/>
               </a:rPr>
               <a:t>.venv\Scripts\activate         </a:t>
             </a:r>
@@ -15136,9 +15371,9 @@
                 <a:solidFill>
                   <a:srgbClr val="5C6772"/>
                 </a:solidFill>
-                <a:latin typeface="IBM Plex Mono" pitchFamily="49" charset="0"/>
-                <a:ea typeface="IBM Plex Mono" pitchFamily="49" charset="-122"/>
-                <a:cs typeface="IBM Plex Mono" pitchFamily="49" charset="-120"/>
+                <a:latin typeface="Courier New" pitchFamily="49" charset="0"/>
+                <a:ea typeface="Courier New" pitchFamily="49" charset="-122"/>
+                <a:cs typeface="Courier New" pitchFamily="49" charset="-120"/>
               </a:rPr>
               <a:t># Windows</a:t>
             </a:r>
@@ -15180,9 +15415,9 @@
                 <a:solidFill>
                   <a:srgbClr val="17212B"/>
                 </a:solidFill>
-                <a:latin typeface="IBM Plex Sans" pitchFamily="34" charset="0"/>
-                <a:ea typeface="IBM Plex Sans" pitchFamily="34" charset="-122"/>
-                <a:cs typeface="IBM Plex Sans" pitchFamily="34" charset="-120"/>
+                <a:latin typeface="Arial" pitchFamily="34" charset="0"/>
+                <a:ea typeface="Arial" pitchFamily="34" charset="-122"/>
+                <a:cs typeface="Arial" pitchFamily="34" charset="-120"/>
               </a:rPr>
               <a:t>3. Install Jupyter and open the notebook</a:t>
             </a:r>
@@ -15224,9 +15459,9 @@
                 <a:solidFill>
                   <a:srgbClr val="17212B"/>
                 </a:solidFill>
-                <a:latin typeface="IBM Plex Mono" pitchFamily="49" charset="0"/>
-                <a:ea typeface="IBM Plex Mono" pitchFamily="49" charset="-122"/>
-                <a:cs typeface="IBM Plex Mono" pitchFamily="49" charset="-120"/>
+                <a:latin typeface="Courier New" pitchFamily="49" charset="0"/>
+                <a:ea typeface="Courier New" pitchFamily="49" charset="-122"/>
+                <a:cs typeface="Courier New" pitchFamily="49" charset="-120"/>
               </a:rPr>
               <a:t>pip install jupyter</a:t>
             </a:r>
@@ -15244,9 +15479,9 @@
                 <a:solidFill>
                   <a:srgbClr val="17212B"/>
                 </a:solidFill>
-                <a:latin typeface="IBM Plex Mono" pitchFamily="49" charset="0"/>
-                <a:ea typeface="IBM Plex Mono" pitchFamily="49" charset="-122"/>
-                <a:cs typeface="IBM Plex Mono" pitchFamily="49" charset="-120"/>
+                <a:latin typeface="Courier New" pitchFamily="49" charset="0"/>
+                <a:ea typeface="Courier New" pitchFamily="49" charset="-122"/>
+                <a:cs typeface="Courier New" pitchFamily="49" charset="-120"/>
               </a:rPr>
               <a:t>jupyter notebook triage_llm_tutorial.ipynb</a:t>
             </a:r>
@@ -15311,9 +15546,9 @@
                 <a:solidFill>
                   <a:srgbClr val="0E6E6C"/>
                 </a:solidFill>
-                <a:latin typeface="IBM Plex Sans" pitchFamily="34" charset="0"/>
-                <a:ea typeface="IBM Plex Sans" pitchFamily="34" charset="-122"/>
-                <a:cs typeface="IBM Plex Sans" pitchFamily="34" charset="-120"/>
+                <a:latin typeface="Arial" pitchFamily="34" charset="0"/>
+                <a:ea typeface="Arial" pitchFamily="34" charset="-122"/>
+                <a:cs typeface="Arial" pitchFamily="34" charset="-120"/>
               </a:rPr>
               <a:t>YOU SHOULD SEE</a:t>
             </a:r>
@@ -15355,9 +15590,9 @@
                 <a:solidFill>
                   <a:srgbClr val="17212B"/>
                 </a:solidFill>
-                <a:latin typeface="IBM Plex Sans" pitchFamily="34" charset="0"/>
-                <a:ea typeface="IBM Plex Sans" pitchFamily="34" charset="-122"/>
-                <a:cs typeface="IBM Plex Sans" pitchFamily="34" charset="-120"/>
+                <a:latin typeface="Arial" pitchFamily="34" charset="0"/>
+                <a:ea typeface="Arial" pitchFamily="34" charset="-122"/>
+                <a:cs typeface="Arial" pitchFamily="34" charset="-120"/>
               </a:rPr>
               <a:t>After cloning, the folder holds the data and the notebook.</a:t>
             </a:r>
@@ -15399,9 +15634,9 @@
                 <a:solidFill>
                   <a:srgbClr val="17212B"/>
                 </a:solidFill>
-                <a:latin typeface="IBM Plex Mono" pitchFamily="49" charset="0"/>
-                <a:ea typeface="IBM Plex Mono" pitchFamily="49" charset="-122"/>
-                <a:cs typeface="IBM Plex Mono" pitchFamily="49" charset="-120"/>
+                <a:latin typeface="Courier New" pitchFamily="49" charset="0"/>
+                <a:ea typeface="Courier New" pitchFamily="49" charset="-122"/>
+                <a:cs typeface="Courier New" pitchFamily="49" charset="-120"/>
               </a:rPr>
               <a:t>data/</a:t>
             </a:r>
@@ -15419,9 +15654,9 @@
                 <a:solidFill>
                   <a:srgbClr val="17212B"/>
                 </a:solidFill>
-                <a:latin typeface="IBM Plex Mono" pitchFamily="49" charset="0"/>
-                <a:ea typeface="IBM Plex Mono" pitchFamily="49" charset="-122"/>
-                <a:cs typeface="IBM Plex Mono" pitchFamily="49" charset="-120"/>
+                <a:latin typeface="Courier New" pitchFamily="49" charset="0"/>
+                <a:ea typeface="Courier New" pitchFamily="49" charset="-122"/>
+                <a:cs typeface="Courier New" pitchFamily="49" charset="-120"/>
               </a:rPr>
               <a:t>triage_llm_tutorial.ipynb</a:t>
             </a:r>
@@ -15439,9 +15674,9 @@
                 <a:solidFill>
                   <a:srgbClr val="17212B"/>
                 </a:solidFill>
-                <a:latin typeface="IBM Plex Mono" pitchFamily="49" charset="0"/>
-                <a:ea typeface="IBM Plex Mono" pitchFamily="49" charset="-122"/>
-                <a:cs typeface="IBM Plex Mono" pitchFamily="49" charset="-120"/>
+                <a:latin typeface="Courier New" pitchFamily="49" charset="0"/>
+                <a:ea typeface="Courier New" pitchFamily="49" charset="-122"/>
+                <a:cs typeface="Courier New" pitchFamily="49" charset="-120"/>
               </a:rPr>
               <a:t>triage_llm_tutorial.pdf</a:t>
             </a:r>
@@ -15483,9 +15718,9 @@
                 <a:solidFill>
                   <a:srgbClr val="17212B"/>
                 </a:solidFill>
-                <a:latin typeface="IBM Plex Sans" pitchFamily="34" charset="0"/>
-                <a:ea typeface="IBM Plex Sans" pitchFamily="34" charset="-122"/>
-                <a:cs typeface="IBM Plex Sans" pitchFamily="34" charset="-120"/>
+                <a:latin typeface="Arial" pitchFamily="34" charset="0"/>
+                <a:ea typeface="Arial" pitchFamily="34" charset="-122"/>
+                <a:cs typeface="Arial" pitchFamily="34" charset="-120"/>
               </a:rPr>
               <a:t>Once the environment is active, your terminal prompt starts with (.venv).</a:t>
             </a:r>
@@ -15527,9 +15762,9 @@
                 <a:solidFill>
                   <a:srgbClr val="17212B"/>
                 </a:solidFill>
-                <a:latin typeface="IBM Plex Sans" pitchFamily="34" charset="0"/>
-                <a:ea typeface="IBM Plex Sans" pitchFamily="34" charset="-122"/>
-                <a:cs typeface="IBM Plex Sans" pitchFamily="34" charset="-120"/>
+                <a:latin typeface="Arial" pitchFamily="34" charset="0"/>
+                <a:ea typeface="Arial" pitchFamily="34" charset="-122"/>
+                <a:cs typeface="Arial" pitchFamily="34" charset="-120"/>
               </a:rPr>
               <a:t>Jupyter then opens the notebook in your browser.</a:t>
             </a:r>
@@ -15571,9 +15806,9 @@
                 <a:solidFill>
                   <a:srgbClr val="5C6772"/>
                 </a:solidFill>
-                <a:latin typeface="IBM Plex Sans" pitchFamily="34" charset="0"/>
-                <a:ea typeface="IBM Plex Sans" pitchFamily="34" charset="-122"/>
-                <a:cs typeface="IBM Plex Sans" pitchFamily="34" charset="-120"/>
+                <a:latin typeface="Arial" pitchFamily="34" charset="0"/>
+                <a:ea typeface="Arial" pitchFamily="34" charset="-122"/>
+                <a:cs typeface="Arial" pitchFamily="34" charset="-120"/>
               </a:rPr>
               <a:t>Notebook section "Before you start"</a:t>
             </a:r>
@@ -15615,9 +15850,9 @@
                 <a:solidFill>
                   <a:srgbClr val="5C6772"/>
                 </a:solidFill>
-                <a:latin typeface="IBM Plex Sans" pitchFamily="34" charset="0"/>
-                <a:ea typeface="IBM Plex Sans" pitchFamily="34" charset="-122"/>
-                <a:cs typeface="IBM Plex Sans" pitchFamily="34" charset="-120"/>
+                <a:latin typeface="Arial" pitchFamily="34" charset="0"/>
+                <a:ea typeface="Arial" pitchFamily="34" charset="-122"/>
+                <a:cs typeface="Arial" pitchFamily="34" charset="-120"/>
               </a:rPr>
               <a:t>5</a:t>
             </a:r>
@@ -15691,9 +15926,9 @@
                 <a:solidFill>
                   <a:srgbClr val="0E6E6C"/>
                 </a:solidFill>
-                <a:latin typeface="IBM Plex Sans" pitchFamily="34" charset="0"/>
-                <a:ea typeface="IBM Plex Sans" pitchFamily="34" charset="-122"/>
-                <a:cs typeface="IBM Plex Sans" pitchFamily="34" charset="-120"/>
+                <a:latin typeface="Arial" pitchFamily="34" charset="0"/>
+                <a:ea typeface="Arial" pitchFamily="34" charset="-122"/>
+                <a:cs typeface="Arial" pitchFamily="34" charset="-120"/>
               </a:rPr>
               <a:t>BEFORE YOU START (2 OF 2)</a:t>
             </a:r>
@@ -15737,9 +15972,9 @@
                 <a:solidFill>
                   <a:srgbClr val="17212B"/>
                 </a:solidFill>
-                <a:latin typeface="IBM Plex Sans" pitchFamily="34" charset="0"/>
-                <a:ea typeface="IBM Plex Sans" pitchFamily="34" charset="-122"/>
-                <a:cs typeface="IBM Plex Sans" pitchFamily="34" charset="-120"/>
+                <a:latin typeface="Arial" pitchFamily="34" charset="0"/>
+                <a:ea typeface="Arial" pitchFamily="34" charset="-122"/>
+                <a:cs typeface="Arial" pitchFamily="34" charset="-120"/>
               </a:rPr>
               <a:t>Then install Ollama, which runs the model on your laptop, and run the whole notebook</a:t>
             </a:r>
@@ -15804,9 +16039,9 @@
                 <a:solidFill>
                   <a:srgbClr val="3A4651"/>
                 </a:solidFill>
-                <a:latin typeface="IBM Plex Sans" pitchFamily="34" charset="0"/>
-                <a:ea typeface="IBM Plex Sans" pitchFamily="34" charset="-122"/>
-                <a:cs typeface="IBM Plex Sans" pitchFamily="34" charset="-120"/>
+                <a:latin typeface="Arial" pitchFamily="34" charset="0"/>
+                <a:ea typeface="Arial" pitchFamily="34" charset="-122"/>
+                <a:cs typeface="Arial" pitchFamily="34" charset="-120"/>
               </a:rPr>
               <a:t>Ollama has to be running before you start the notebook, because the setup cell asks it to download the model</a:t>
             </a:r>
@@ -15871,9 +16106,9 @@
                 <a:solidFill>
                   <a:srgbClr val="17212B"/>
                 </a:solidFill>
-                <a:latin typeface="IBM Plex Sans" pitchFamily="34" charset="0"/>
-                <a:ea typeface="IBM Plex Sans" pitchFamily="34" charset="-122"/>
-                <a:cs typeface="IBM Plex Sans" pitchFamily="34" charset="-120"/>
+                <a:latin typeface="Arial" pitchFamily="34" charset="0"/>
+                <a:ea typeface="Arial" pitchFamily="34" charset="-122"/>
+                <a:cs typeface="Arial" pitchFamily="34" charset="-120"/>
               </a:rPr>
               <a:t>4. Install Ollama</a:t>
             </a:r>
@@ -15915,9 +16150,9 @@
                 <a:solidFill>
                   <a:srgbClr val="17212B"/>
                 </a:solidFill>
-                <a:latin typeface="IBM Plex Sans" pitchFamily="34" charset="0"/>
-                <a:ea typeface="IBM Plex Sans" pitchFamily="34" charset="-122"/>
-                <a:cs typeface="IBM Plex Sans" pitchFamily="34" charset="-120"/>
+                <a:latin typeface="Arial" pitchFamily="34" charset="0"/>
+                <a:ea typeface="Arial" pitchFamily="34" charset="-122"/>
+                <a:cs typeface="Arial" pitchFamily="34" charset="-120"/>
               </a:rPr>
               <a:t>On macOS or Windows, download the installer from ollama.com/download and open the app. On Linux, run</a:t>
             </a:r>
@@ -15959,9 +16194,9 @@
                 <a:solidFill>
                   <a:srgbClr val="17212B"/>
                 </a:solidFill>
-                <a:latin typeface="IBM Plex Mono" pitchFamily="49" charset="0"/>
-                <a:ea typeface="IBM Plex Mono" pitchFamily="49" charset="-122"/>
-                <a:cs typeface="IBM Plex Mono" pitchFamily="49" charset="-120"/>
+                <a:latin typeface="Courier New" pitchFamily="49" charset="0"/>
+                <a:ea typeface="Courier New" pitchFamily="49" charset="-122"/>
+                <a:cs typeface="Courier New" pitchFamily="49" charset="-120"/>
               </a:rPr>
               <a:t>curl -fsSL https://ollama.com/install.sh | sh</a:t>
             </a:r>
@@ -16003,9 +16238,9 @@
                 <a:solidFill>
                   <a:srgbClr val="17212B"/>
                 </a:solidFill>
-                <a:latin typeface="IBM Plex Sans" pitchFamily="34" charset="0"/>
-                <a:ea typeface="IBM Plex Sans" pitchFamily="34" charset="-122"/>
-                <a:cs typeface="IBM Plex Sans" pitchFamily="34" charset="-120"/>
+                <a:latin typeface="Arial" pitchFamily="34" charset="0"/>
+                <a:ea typeface="Arial" pitchFamily="34" charset="-122"/>
+                <a:cs typeface="Arial" pitchFamily="34" charset="-120"/>
               </a:rPr>
               <a:t>5. Check that it works</a:t>
             </a:r>
@@ -16047,9 +16282,9 @@
                 <a:solidFill>
                   <a:srgbClr val="17212B"/>
                 </a:solidFill>
-                <a:latin typeface="IBM Plex Mono" pitchFamily="49" charset="0"/>
-                <a:ea typeface="IBM Plex Mono" pitchFamily="49" charset="-122"/>
-                <a:cs typeface="IBM Plex Mono" pitchFamily="49" charset="-120"/>
+                <a:latin typeface="Courier New" pitchFamily="49" charset="0"/>
+                <a:ea typeface="Courier New" pitchFamily="49" charset="-122"/>
+                <a:cs typeface="Courier New" pitchFamily="49" charset="-120"/>
               </a:rPr>
               <a:t>ollama --version</a:t>
             </a:r>
@@ -16067,9 +16302,9 @@
                 <a:solidFill>
                   <a:srgbClr val="17212B"/>
                 </a:solidFill>
-                <a:latin typeface="IBM Plex Mono" pitchFamily="49" charset="0"/>
-                <a:ea typeface="IBM Plex Mono" pitchFamily="49" charset="-122"/>
-                <a:cs typeface="IBM Plex Mono" pitchFamily="49" charset="-120"/>
+                <a:latin typeface="Courier New" pitchFamily="49" charset="0"/>
+                <a:ea typeface="Courier New" pitchFamily="49" charset="-122"/>
+                <a:cs typeface="Courier New" pitchFamily="49" charset="-120"/>
               </a:rPr>
               <a:t>ollama pull qwen2.5:3b    </a:t>
             </a:r>
@@ -16078,9 +16313,9 @@
                 <a:solidFill>
                   <a:srgbClr val="5C6772"/>
                 </a:solidFill>
-                <a:latin typeface="IBM Plex Mono" pitchFamily="49" charset="0"/>
-                <a:ea typeface="IBM Plex Mono" pitchFamily="49" charset="-122"/>
-                <a:cs typeface="IBM Plex Mono" pitchFamily="49" charset="-120"/>
+                <a:latin typeface="Courier New" pitchFamily="49" charset="0"/>
+                <a:ea typeface="Courier New" pitchFamily="49" charset="-122"/>
+                <a:cs typeface="Courier New" pitchFamily="49" charset="-120"/>
               </a:rPr>
               <a:t># optional, the notebook does this too</a:t>
             </a:r>
@@ -16122,9 +16357,9 @@
                 <a:solidFill>
                   <a:srgbClr val="17212B"/>
                 </a:solidFill>
-                <a:latin typeface="IBM Plex Sans" pitchFamily="34" charset="0"/>
-                <a:ea typeface="IBM Plex Sans" pitchFamily="34" charset="-122"/>
-                <a:cs typeface="IBM Plex Sans" pitchFamily="34" charset="-120"/>
+                <a:latin typeface="Arial" pitchFamily="34" charset="0"/>
+                <a:ea typeface="Arial" pitchFamily="34" charset="-122"/>
+                <a:cs typeface="Arial" pitchFamily="34" charset="-120"/>
               </a:rPr>
               <a:t>6. Run every cell</a:t>
             </a:r>
@@ -16166,9 +16401,9 @@
                 <a:solidFill>
                   <a:srgbClr val="17212B"/>
                 </a:solidFill>
-                <a:latin typeface="IBM Plex Sans" pitchFamily="34" charset="0"/>
-                <a:ea typeface="IBM Plex Sans" pitchFamily="34" charset="-122"/>
-                <a:cs typeface="IBM Plex Sans" pitchFamily="34" charset="-120"/>
+                <a:latin typeface="Arial" pitchFamily="34" charset="0"/>
+                <a:ea typeface="Arial" pitchFamily="34" charset="-122"/>
+                <a:cs typeface="Arial" pitchFamily="34" charset="-120"/>
               </a:rPr>
               <a:t>In Jupyter, open the Run menu and choose Run All Cells. Keep Ollama open until the last cell finishes.</a:t>
             </a:r>
@@ -16233,9 +16468,9 @@
                 <a:solidFill>
                   <a:srgbClr val="0E6E6C"/>
                 </a:solidFill>
-                <a:latin typeface="IBM Plex Sans" pitchFamily="34" charset="0"/>
-                <a:ea typeface="IBM Plex Sans" pitchFamily="34" charset="-122"/>
-                <a:cs typeface="IBM Plex Sans" pitchFamily="34" charset="-120"/>
+                <a:latin typeface="Arial" pitchFamily="34" charset="0"/>
+                <a:ea typeface="Arial" pitchFamily="34" charset="-122"/>
+                <a:cs typeface="Arial" pitchFamily="34" charset="-120"/>
               </a:rPr>
               <a:t>YOU SHOULD SEE</a:t>
             </a:r>
@@ -16277,9 +16512,9 @@
                 <a:solidFill>
                   <a:srgbClr val="17212B"/>
                 </a:solidFill>
-                <a:latin typeface="IBM Plex Sans" pitchFamily="34" charset="0"/>
-                <a:ea typeface="IBM Plex Sans" pitchFamily="34" charset="-122"/>
-                <a:cs typeface="IBM Plex Sans" pitchFamily="34" charset="-120"/>
+                <a:latin typeface="Arial" pitchFamily="34" charset="0"/>
+                <a:ea typeface="Arial" pitchFamily="34" charset="-122"/>
+                <a:cs typeface="Arial" pitchFamily="34" charset="-120"/>
               </a:rPr>
               <a:t>ollama --version prints a version number, and the pull ends with</a:t>
             </a:r>
@@ -16321,9 +16556,9 @@
                 <a:solidFill>
                   <a:srgbClr val="17212B"/>
                 </a:solidFill>
-                <a:latin typeface="IBM Plex Mono" pitchFamily="49" charset="0"/>
-                <a:ea typeface="IBM Plex Mono" pitchFamily="49" charset="-122"/>
-                <a:cs typeface="IBM Plex Mono" pitchFamily="49" charset="-120"/>
+                <a:latin typeface="Courier New" pitchFamily="49" charset="0"/>
+                <a:ea typeface="Courier New" pitchFamily="49" charset="-122"/>
+                <a:cs typeface="Courier New" pitchFamily="49" charset="-120"/>
               </a:rPr>
               <a:t>success</a:t>
             </a:r>
@@ -16365,9 +16600,9 @@
                 <a:solidFill>
                   <a:srgbClr val="17212B"/>
                 </a:solidFill>
-                <a:latin typeface="IBM Plex Sans" pitchFamily="34" charset="0"/>
-                <a:ea typeface="IBM Plex Sans" pitchFamily="34" charset="-122"/>
-                <a:cs typeface="IBM Plex Sans" pitchFamily="34" charset="-120"/>
+                <a:latin typeface="Arial" pitchFamily="34" charset="0"/>
+                <a:ea typeface="Arial" pitchFamily="34" charset="-122"/>
+                <a:cs typeface="Arial" pitchFamily="34" charset="-120"/>
               </a:rPr>
               <a:t>The full run takes about 10 minutes on a laptop. Each code cell opens with a comment that says what it should print, so you can check every step against it.</a:t>
             </a:r>
@@ -16409,11 +16644,11 @@
                 <a:solidFill>
                   <a:srgbClr val="5C6772"/>
                 </a:solidFill>
-                <a:latin typeface="IBM Plex Sans" pitchFamily="34" charset="0"/>
-                <a:ea typeface="IBM Plex Sans" pitchFamily="34" charset="-122"/>
-                <a:cs typeface="IBM Plex Sans" pitchFamily="34" charset="-120"/>
-              </a:rPr>
-              <a:t>Notebook section "Before you start" and cell 4</a:t>
+                <a:latin typeface="Arial" pitchFamily="34" charset="0"/>
+                <a:ea typeface="Arial" pitchFamily="34" charset="-122"/>
+                <a:cs typeface="Arial" pitchFamily="34" charset="-120"/>
+              </a:rPr>
+              <a:t>Notebook section "Before you start" and cell [2]</a:t>
             </a:r>
             <a:endParaRPr lang="en-US" sz="1200" dirty="0"/>
           </a:p>
@@ -16453,9 +16688,9 @@
                 <a:solidFill>
                   <a:srgbClr val="5C6772"/>
                 </a:solidFill>
-                <a:latin typeface="IBM Plex Sans" pitchFamily="34" charset="0"/>
-                <a:ea typeface="IBM Plex Sans" pitchFamily="34" charset="-122"/>
-                <a:cs typeface="IBM Plex Sans" pitchFamily="34" charset="-120"/>
+                <a:latin typeface="Arial" pitchFamily="34" charset="0"/>
+                <a:ea typeface="Arial" pitchFamily="34" charset="-122"/>
+                <a:cs typeface="Arial" pitchFamily="34" charset="-120"/>
               </a:rPr>
               <a:t>6</a:t>
             </a:r>
@@ -16529,9 +16764,9 @@
                 <a:solidFill>
                   <a:srgbClr val="0E6E6C"/>
                 </a:solidFill>
-                <a:latin typeface="IBM Plex Sans" pitchFamily="34" charset="0"/>
-                <a:ea typeface="IBM Plex Sans" pitchFamily="34" charset="-122"/>
-                <a:cs typeface="IBM Plex Sans" pitchFamily="34" charset="-120"/>
+                <a:latin typeface="Arial" pitchFamily="34" charset="0"/>
+                <a:ea typeface="Arial" pitchFamily="34" charset="-122"/>
+                <a:cs typeface="Arial" pitchFamily="34" charset="-120"/>
               </a:rPr>
               <a:t>SETUP (STEP 1 OF 7)</a:t>
             </a:r>
@@ -16575,9 +16810,9 @@
                 <a:solidFill>
                   <a:srgbClr val="17212B"/>
                 </a:solidFill>
-                <a:latin typeface="IBM Plex Sans" pitchFamily="34" charset="0"/>
-                <a:ea typeface="IBM Plex Sans" pitchFamily="34" charset="-122"/>
-                <a:cs typeface="IBM Plex Sans" pitchFamily="34" charset="-120"/>
+                <a:latin typeface="Arial" pitchFamily="34" charset="0"/>
+                <a:ea typeface="Arial" pitchFamily="34" charset="-122"/>
+                <a:cs typeface="Arial" pitchFamily="34" charset="-120"/>
               </a:rPr>
               <a:t>First, run a small open model locally so no patient record leaves the machine</a:t>
             </a:r>
@@ -16642,11 +16877,11 @@
                 <a:solidFill>
                   <a:srgbClr val="3A4651"/>
                 </a:solidFill>
-                <a:latin typeface="IBM Plex Sans" pitchFamily="34" charset="0"/>
-                <a:ea typeface="IBM Plex Sans" pitchFamily="34" charset="-122"/>
-                <a:cs typeface="IBM Plex Sans" pitchFamily="34" charset="-120"/>
-              </a:rPr>
-              <a:t>A 3B model answers in about 2.3 seconds per call on a laptop, which is fast enough to score every stay in a reasonable amount of time</a:t>
+                <a:latin typeface="Arial" pitchFamily="34" charset="0"/>
+                <a:ea typeface="Arial" pitchFamily="34" charset="-122"/>
+                <a:cs typeface="Arial" pitchFamily="34" charset="-120"/>
+              </a:rPr>
+              <a:t>A 3B model answers in about 3.6 seconds per call on a laptop, which is fast enough to score every stay in a reasonable amount of time</a:t>
             </a:r>
             <a:endParaRPr lang="en-US" sz="1500" dirty="0"/>
           </a:p>
@@ -16709,9 +16944,9 @@
                 <a:solidFill>
                   <a:srgbClr val="17212B"/>
                 </a:solidFill>
-                <a:latin typeface="IBM Plex Sans" pitchFamily="34" charset="0"/>
-                <a:ea typeface="IBM Plex Sans" pitchFamily="34" charset="-122"/>
-                <a:cs typeface="IBM Plex Sans" pitchFamily="34" charset="-120"/>
+                <a:latin typeface="Arial" pitchFamily="34" charset="0"/>
+                <a:ea typeface="Arial" pitchFamily="34" charset="-122"/>
+                <a:cs typeface="Arial" pitchFamily="34" charset="-120"/>
               </a:rPr>
               <a:t>The config cell</a:t>
             </a:r>
@@ -16753,9 +16988,9 @@
                 <a:solidFill>
                   <a:srgbClr val="17212B"/>
                 </a:solidFill>
-                <a:latin typeface="IBM Plex Mono" pitchFamily="49" charset="0"/>
-                <a:ea typeface="IBM Plex Mono" pitchFamily="49" charset="-122"/>
-                <a:cs typeface="IBM Plex Mono" pitchFamily="49" charset="-120"/>
+                <a:latin typeface="Courier New" pitchFamily="49" charset="0"/>
+                <a:ea typeface="Courier New" pitchFamily="49" charset="-122"/>
+                <a:cs typeface="Courier New" pitchFamily="49" charset="-120"/>
               </a:rPr>
               <a:t>MODEL   = "qwen2.5:3b"   </a:t>
             </a:r>
@@ -16764,9 +16999,9 @@
                 <a:solidFill>
                   <a:srgbClr val="5C6772"/>
                 </a:solidFill>
-                <a:latin typeface="IBM Plex Mono" pitchFamily="49" charset="0"/>
-                <a:ea typeface="IBM Plex Mono" pitchFamily="49" charset="-122"/>
-                <a:cs typeface="IBM Plex Mono" pitchFamily="49" charset="-120"/>
+                <a:latin typeface="Courier New" pitchFamily="49" charset="0"/>
+                <a:ea typeface="Courier New" pitchFamily="49" charset="-122"/>
+                <a:cs typeface="Courier New" pitchFamily="49" charset="-120"/>
               </a:rPr>
               <a:t># served by Ollama</a:t>
             </a:r>
@@ -16784,9 +17019,9 @@
                 <a:solidFill>
                   <a:srgbClr val="17212B"/>
                 </a:solidFill>
-                <a:latin typeface="IBM Plex Mono" pitchFamily="49" charset="0"/>
-                <a:ea typeface="IBM Plex Mono" pitchFamily="49" charset="-122"/>
-                <a:cs typeface="IBM Plex Mono" pitchFamily="49" charset="-120"/>
+                <a:latin typeface="Courier New" pitchFamily="49" charset="0"/>
+                <a:ea typeface="Courier New" pitchFamily="49" charset="-122"/>
+                <a:cs typeface="Courier New" pitchFamily="49" charset="-120"/>
               </a:rPr>
               <a:t>N_CASES = 1000           </a:t>
             </a:r>
@@ -16795,9 +17030,9 @@
                 <a:solidFill>
                   <a:srgbClr val="5C6772"/>
                 </a:solidFill>
-                <a:latin typeface="IBM Plex Mono" pitchFamily="49" charset="0"/>
-                <a:ea typeface="IBM Plex Mono" pitchFamily="49" charset="-122"/>
-                <a:cs typeface="IBM Plex Mono" pitchFamily="49" charset="-120"/>
+                <a:latin typeface="Courier New" pitchFamily="49" charset="0"/>
+                <a:ea typeface="Courier New" pitchFamily="49" charset="-122"/>
+                <a:cs typeface="Courier New" pitchFamily="49" charset="-120"/>
               </a:rPr>
               <a:t># lower = faster</a:t>
             </a:r>
@@ -16815,9 +17050,9 @@
                 <a:solidFill>
                   <a:srgbClr val="17212B"/>
                 </a:solidFill>
-                <a:latin typeface="IBM Plex Mono" pitchFamily="49" charset="0"/>
-                <a:ea typeface="IBM Plex Mono" pitchFamily="49" charset="-122"/>
-                <a:cs typeface="IBM Plex Mono" pitchFamily="49" charset="-120"/>
+                <a:latin typeface="Courier New" pitchFamily="49" charset="0"/>
+                <a:ea typeface="Courier New" pitchFamily="49" charset="-122"/>
+                <a:cs typeface="Courier New" pitchFamily="49" charset="-120"/>
               </a:rPr>
               <a:t>SEED    = 42</a:t>
             </a:r>
@@ -16835,9 +17070,9 @@
                 <a:solidFill>
                   <a:srgbClr val="17212B"/>
                 </a:solidFill>
-                <a:latin typeface="IBM Plex Mono" pitchFamily="49" charset="0"/>
-                <a:ea typeface="IBM Plex Mono" pitchFamily="49" charset="-122"/>
-                <a:cs typeface="IBM Plex Mono" pitchFamily="49" charset="-120"/>
+                <a:latin typeface="Courier New" pitchFamily="49" charset="0"/>
+                <a:ea typeface="Courier New" pitchFamily="49" charset="-122"/>
+                <a:cs typeface="Courier New" pitchFamily="49" charset="-120"/>
               </a:rPr>
               <a:t>DATA    = Path("data")</a:t>
             </a:r>
@@ -16864,9 +17099,9 @@
                 <a:solidFill>
                   <a:srgbClr val="17212B"/>
                 </a:solidFill>
-                <a:latin typeface="IBM Plex Mono" pitchFamily="49" charset="0"/>
-                <a:ea typeface="IBM Plex Mono" pitchFamily="49" charset="-122"/>
-                <a:cs typeface="IBM Plex Mono" pitchFamily="49" charset="-120"/>
+                <a:latin typeface="Courier New" pitchFamily="49" charset="0"/>
+                <a:ea typeface="Courier New" pitchFamily="49" charset="-122"/>
+                <a:cs typeface="Courier New" pitchFamily="49" charset="-120"/>
               </a:rPr>
               <a:t>print("pull:", ollama.pull(MODEL).status)</a:t>
             </a:r>
@@ -16884,9 +17119,9 @@
                 <a:solidFill>
                   <a:srgbClr val="17212B"/>
                 </a:solidFill>
-                <a:latin typeface="IBM Plex Mono" pitchFamily="49" charset="0"/>
-                <a:ea typeface="IBM Plex Mono" pitchFamily="49" charset="-122"/>
-                <a:cs typeface="IBM Plex Mono" pitchFamily="49" charset="-120"/>
+                <a:latin typeface="Courier New" pitchFamily="49" charset="0"/>
+                <a:ea typeface="Courier New" pitchFamily="49" charset="-122"/>
+                <a:cs typeface="Courier New" pitchFamily="49" charset="-120"/>
               </a:rPr>
               <a:t>print(ollama.show(MODEL).details)</a:t>
             </a:r>
@@ -16928,9 +17163,9 @@
                 <a:solidFill>
                   <a:srgbClr val="17212B"/>
                 </a:solidFill>
-                <a:latin typeface="IBM Plex Sans" pitchFamily="34" charset="0"/>
-                <a:ea typeface="IBM Plex Sans" pitchFamily="34" charset="-122"/>
-                <a:cs typeface="IBM Plex Sans" pitchFamily="34" charset="-120"/>
+                <a:latin typeface="Arial" pitchFamily="34" charset="0"/>
+                <a:ea typeface="Arial" pitchFamily="34" charset="-122"/>
+                <a:cs typeface="Arial" pitchFamily="34" charset="-120"/>
               </a:rPr>
               <a:t>One timed test call</a:t>
             </a:r>
@@ -16972,9 +17207,9 @@
                 <a:solidFill>
                   <a:srgbClr val="17212B"/>
                 </a:solidFill>
-                <a:latin typeface="IBM Plex Mono" pitchFamily="49" charset="0"/>
-                <a:ea typeface="IBM Plex Mono" pitchFamily="49" charset="-122"/>
-                <a:cs typeface="IBM Plex Mono" pitchFamily="49" charset="-120"/>
+                <a:latin typeface="Courier New" pitchFamily="49" charset="0"/>
+                <a:ea typeface="Courier New" pitchFamily="49" charset="-122"/>
+                <a:cs typeface="Courier New" pitchFamily="49" charset="-120"/>
               </a:rPr>
               <a:t>r = ollama.chat(model=MODEL, messages=[{"role": "user",</a:t>
             </a:r>
@@ -16992,9 +17227,9 @@
                 <a:solidFill>
                   <a:srgbClr val="17212B"/>
                 </a:solidFill>
-                <a:latin typeface="IBM Plex Mono" pitchFamily="49" charset="0"/>
-                <a:ea typeface="IBM Plex Mono" pitchFamily="49" charset="-122"/>
-                <a:cs typeface="IBM Plex Mono" pitchFamily="49" charset="-120"/>
+                <a:latin typeface="Courier New" pitchFamily="49" charset="0"/>
+                <a:ea typeface="Courier New" pitchFamily="49" charset="-122"/>
+                <a:cs typeface="Courier New" pitchFamily="49" charset="-120"/>
               </a:rPr>
               <a:t>    "content": "Name one ICD-10 chapter."}],</a:t>
             </a:r>
@@ -17012,9 +17247,9 @@
                 <a:solidFill>
                   <a:srgbClr val="17212B"/>
                 </a:solidFill>
-                <a:latin typeface="IBM Plex Mono" pitchFamily="49" charset="0"/>
-                <a:ea typeface="IBM Plex Mono" pitchFamily="49" charset="-122"/>
-                <a:cs typeface="IBM Plex Mono" pitchFamily="49" charset="-120"/>
+                <a:latin typeface="Courier New" pitchFamily="49" charset="0"/>
+                <a:ea typeface="Courier New" pitchFamily="49" charset="-122"/>
+                <a:cs typeface="Courier New" pitchFamily="49" charset="-120"/>
               </a:rPr>
               <a:t>    options={"temperature": 0, "seed": SEED})</a:t>
             </a:r>
@@ -17079,9 +17314,9 @@
                 <a:solidFill>
                   <a:srgbClr val="0E6E6C"/>
                 </a:solidFill>
-                <a:latin typeface="IBM Plex Sans" pitchFamily="34" charset="0"/>
-                <a:ea typeface="IBM Plex Sans" pitchFamily="34" charset="-122"/>
-                <a:cs typeface="IBM Plex Sans" pitchFamily="34" charset="-120"/>
+                <a:latin typeface="Arial" pitchFamily="34" charset="0"/>
+                <a:ea typeface="Arial" pitchFamily="34" charset="-122"/>
+                <a:cs typeface="Arial" pitchFamily="34" charset="-120"/>
               </a:rPr>
               <a:t>YOU SHOULD SEE</a:t>
             </a:r>
@@ -17123,9 +17358,9 @@
                 <a:solidFill>
                   <a:srgbClr val="17212B"/>
                 </a:solidFill>
-                <a:latin typeface="IBM Plex Mono" pitchFamily="49" charset="0"/>
-                <a:ea typeface="IBM Plex Mono" pitchFamily="49" charset="-122"/>
-                <a:cs typeface="IBM Plex Mono" pitchFamily="49" charset="-120"/>
+                <a:latin typeface="Courier New" pitchFamily="49" charset="0"/>
+                <a:ea typeface="Courier New" pitchFamily="49" charset="-122"/>
+                <a:cs typeface="Courier New" pitchFamily="49" charset="-120"/>
               </a:rPr>
               <a:t>pull: success</a:t>
             </a:r>
@@ -17143,9 +17378,9 @@
                 <a:solidFill>
                   <a:srgbClr val="17212B"/>
                 </a:solidFill>
-                <a:latin typeface="IBM Plex Mono" pitchFamily="49" charset="0"/>
-                <a:ea typeface="IBM Plex Mono" pitchFamily="49" charset="-122"/>
-                <a:cs typeface="IBM Plex Mono" pitchFamily="49" charset="-120"/>
+                <a:latin typeface="Courier New" pitchFamily="49" charset="0"/>
+                <a:ea typeface="Courier New" pitchFamily="49" charset="-122"/>
+                <a:cs typeface="Courier New" pitchFamily="49" charset="-120"/>
               </a:rPr>
               <a:t>family='qwen2'</a:t>
             </a:r>
@@ -17163,9 +17398,9 @@
                 <a:solidFill>
                   <a:srgbClr val="17212B"/>
                 </a:solidFill>
-                <a:latin typeface="IBM Plex Mono" pitchFamily="49" charset="0"/>
-                <a:ea typeface="IBM Plex Mono" pitchFamily="49" charset="-122"/>
-                <a:cs typeface="IBM Plex Mono" pitchFamily="49" charset="-120"/>
+                <a:latin typeface="Courier New" pitchFamily="49" charset="0"/>
+                <a:ea typeface="Courier New" pitchFamily="49" charset="-122"/>
+                <a:cs typeface="Courier New" pitchFamily="49" charset="-120"/>
               </a:rPr>
               <a:t>parameter_size='3.1B'</a:t>
             </a:r>
@@ -17183,9 +17418,9 @@
                 <a:solidFill>
                   <a:srgbClr val="17212B"/>
                 </a:solidFill>
-                <a:latin typeface="IBM Plex Mono" pitchFamily="49" charset="0"/>
-                <a:ea typeface="IBM Plex Mono" pitchFamily="49" charset="-122"/>
-                <a:cs typeface="IBM Plex Mono" pitchFamily="49" charset="-120"/>
+                <a:latin typeface="Courier New" pitchFamily="49" charset="0"/>
+                <a:ea typeface="Courier New" pitchFamily="49" charset="-122"/>
+                <a:cs typeface="Courier New" pitchFamily="49" charset="-120"/>
               </a:rPr>
               <a:t>quantization_level='Q4_K_M'</a:t>
             </a:r>
@@ -17212,11 +17447,11 @@
                 <a:solidFill>
                   <a:srgbClr val="17212B"/>
                 </a:solidFill>
-                <a:latin typeface="IBM Plex Mono" pitchFamily="49" charset="0"/>
-                <a:ea typeface="IBM Plex Mono" pitchFamily="49" charset="-122"/>
-                <a:cs typeface="IBM Plex Mono" pitchFamily="49" charset="-120"/>
-              </a:rPr>
-              <a:t>2.3s per call</a:t>
+                <a:latin typeface="Courier New" pitchFamily="49" charset="0"/>
+                <a:ea typeface="Courier New" pitchFamily="49" charset="-122"/>
+                <a:cs typeface="Courier New" pitchFamily="49" charset="-120"/>
+              </a:rPr>
+              <a:t>3.6s per call</a:t>
             </a:r>
             <a:endParaRPr lang="en-US" sz="1200" dirty="0"/>
           </a:p>
@@ -17256,9 +17491,9 @@
                 <a:solidFill>
                   <a:srgbClr val="17212B"/>
                 </a:solidFill>
-                <a:latin typeface="IBM Plex Sans" pitchFamily="34" charset="0"/>
-                <a:ea typeface="IBM Plex Sans" pitchFamily="34" charset="-122"/>
-                <a:cs typeface="IBM Plex Sans" pitchFamily="34" charset="-120"/>
+                <a:latin typeface="Arial" pitchFamily="34" charset="0"/>
+                <a:ea typeface="Arial" pitchFamily="34" charset="-122"/>
+                <a:cs typeface="Arial" pitchFamily="34" charset="-120"/>
               </a:rPr>
               <a:t>The full run takes roughly the per-call time multiplied by 3 prompts and by N_CASES.</a:t>
             </a:r>
@@ -17300,11 +17535,11 @@
                 <a:solidFill>
                   <a:srgbClr val="5C6772"/>
                 </a:solidFill>
-                <a:latin typeface="IBM Plex Sans" pitchFamily="34" charset="0"/>
-                <a:ea typeface="IBM Plex Sans" pitchFamily="34" charset="-122"/>
-                <a:cs typeface="IBM Plex Sans" pitchFamily="34" charset="-120"/>
-              </a:rPr>
-              <a:t>Notebook cells 3–5</a:t>
+                <a:latin typeface="Arial" pitchFamily="34" charset="0"/>
+                <a:ea typeface="Arial" pitchFamily="34" charset="-122"/>
+                <a:cs typeface="Arial" pitchFamily="34" charset="-120"/>
+              </a:rPr>
+              <a:t>Notebook cells [1]–[3]</a:t>
             </a:r>
             <a:endParaRPr lang="en-US" sz="1200" dirty="0"/>
           </a:p>
@@ -17344,9 +17579,9 @@
                 <a:solidFill>
                   <a:srgbClr val="5C6772"/>
                 </a:solidFill>
-                <a:latin typeface="IBM Plex Sans" pitchFamily="34" charset="0"/>
-                <a:ea typeface="IBM Plex Sans" pitchFamily="34" charset="-122"/>
-                <a:cs typeface="IBM Plex Sans" pitchFamily="34" charset="-120"/>
+                <a:latin typeface="Arial" pitchFamily="34" charset="0"/>
+                <a:ea typeface="Arial" pitchFamily="34" charset="-122"/>
+                <a:cs typeface="Arial" pitchFamily="34" charset="-120"/>
               </a:rPr>
               <a:t>7</a:t>
             </a:r>
@@ -17395,38 +17630,38 @@
         <p:spPr>
           <a:xfrm>
             <a:off x="812800" y="812800"/>
-            <a:ext cx="10883392" cy="236736"/>
-          </a:xfrm>
-          <a:prstGeom prst="rect">
-            <a:avLst/>
-          </a:prstGeom>
-          <a:noFill/>
-          <a:ln/>
-        </p:spPr>
-        <p:txBody>
-          <a:bodyPr wrap="square" lIns="0" tIns="0" rIns="0" bIns="0" rtlCol="0" anchor="t">
-            <a:normAutofit/>
-          </a:bodyPr>
-          <a:lstStyle/>
-          <a:p>
-            <a:pPr algn="l" indent="0" marL="0">
-              <a:lnSpc>
-                <a:spcPts val="1675"/>
-              </a:lnSpc>
-              <a:buNone/>
-            </a:pPr>
-            <a:r>
-              <a:rPr lang="en-US" sz="1196" spc="100" kern="0" dirty="0">
+            <a:ext cx="10883392" cy="227558"/>
+          </a:xfrm>
+          <a:prstGeom prst="rect">
+            <a:avLst/>
+          </a:prstGeom>
+          <a:noFill/>
+          <a:ln/>
+        </p:spPr>
+        <p:txBody>
+          <a:bodyPr wrap="square" lIns="0" tIns="0" rIns="0" bIns="0" rtlCol="0" anchor="t">
+            <a:normAutofit/>
+          </a:bodyPr>
+          <a:lstStyle/>
+          <a:p>
+            <a:pPr algn="l" indent="0" marL="0">
+              <a:lnSpc>
+                <a:spcPts val="1622"/>
+              </a:lnSpc>
+              <a:buNone/>
+            </a:pPr>
+            <a:r>
+              <a:rPr lang="en-US" sz="1159" spc="100" kern="0" dirty="0">
                 <a:solidFill>
                   <a:srgbClr val="0E6E6C"/>
                 </a:solidFill>
-                <a:latin typeface="IBM Plex Sans" pitchFamily="34" charset="0"/>
-                <a:ea typeface="IBM Plex Sans" pitchFamily="34" charset="-122"/>
-                <a:cs typeface="IBM Plex Sans" pitchFamily="34" charset="-120"/>
+                <a:latin typeface="Arial" pitchFamily="34" charset="0"/>
+                <a:ea typeface="Arial" pitchFamily="34" charset="-122"/>
+                <a:cs typeface="Arial" pitchFamily="34" charset="-120"/>
               </a:rPr>
               <a:t>DATA (STEP 2 OF 7)</a:t>
             </a:r>
-            <a:endParaRPr lang="en-US" sz="1196" dirty="0"/>
+            <a:endParaRPr lang="en-US" sz="1159" dirty="0"/>
           </a:p>
         </p:txBody>
       </p:sp>
@@ -17440,39 +17675,39 @@
         </p:nvSpPr>
         <p:spPr>
           <a:xfrm>
-            <a:off x="812800" y="1100336"/>
-            <a:ext cx="10464800" cy="777726"/>
-          </a:xfrm>
-          <a:prstGeom prst="rect">
-            <a:avLst/>
-          </a:prstGeom>
-          <a:noFill/>
-          <a:ln/>
-        </p:spPr>
-        <p:txBody>
-          <a:bodyPr wrap="square" lIns="0" tIns="0" rIns="0" bIns="0" rtlCol="0" anchor="t">
-            <a:normAutofit/>
-          </a:bodyPr>
-          <a:lstStyle/>
-          <a:p>
-            <a:pPr algn="l" indent="0" marL="0">
-              <a:lnSpc>
-                <a:spcPts val="2962"/>
-              </a:lnSpc>
-              <a:buNone/>
-            </a:pPr>
-            <a:r>
-              <a:rPr lang="en-US" sz="2576" b="1" i="0" dirty="0">
-                <a:solidFill>
-                  <a:srgbClr val="17212B"/>
-                </a:solidFill>
-                <a:latin typeface="IBM Plex Sans" pitchFamily="34" charset="0"/>
-                <a:ea typeface="IBM Plex Sans" pitchFamily="34" charset="-122"/>
-                <a:cs typeface="IBM Plex Sans" pitchFamily="34" charset="-120"/>
+            <a:off x="812800" y="1091158"/>
+            <a:ext cx="10464800" cy="744984"/>
+          </a:xfrm>
+          <a:prstGeom prst="rect">
+            <a:avLst/>
+          </a:prstGeom>
+          <a:noFill/>
+          <a:ln/>
+        </p:spPr>
+        <p:txBody>
+          <a:bodyPr wrap="square" lIns="0" tIns="0" rIns="0" bIns="0" rtlCol="0" anchor="t">
+            <a:normAutofit/>
+          </a:bodyPr>
+          <a:lstStyle/>
+          <a:p>
+            <a:pPr algn="l" indent="0" marL="0">
+              <a:lnSpc>
+                <a:spcPts val="2831"/>
+              </a:lnSpc>
+              <a:buNone/>
+            </a:pPr>
+            <a:r>
+              <a:rPr lang="en-US" sz="2462" b="1" i="0" dirty="0">
+                <a:solidFill>
+                  <a:srgbClr val="17212B"/>
+                </a:solidFill>
+                <a:latin typeface="Arial" pitchFamily="34" charset="0"/>
+                <a:ea typeface="Arial" pitchFamily="34" charset="-122"/>
+                <a:cs typeface="Arial" pitchFamily="34" charset="-120"/>
               </a:rPr>
               <a:t>Next, we join five demo tables into one row per ED stay and keep only the fields known at triage</a:t>
             </a:r>
-            <a:endParaRPr lang="en-US" sz="2576" dirty="0"/>
+            <a:endParaRPr lang="en-US" sz="2462" dirty="0"/>
           </a:p>
         </p:txBody>
       </p:sp>
@@ -17484,8 +17719,8 @@
         </p:nvSpPr>
         <p:spPr>
           <a:xfrm>
-            <a:off x="825500" y="1928862"/>
-            <a:ext cx="0" cy="509587"/>
+            <a:off x="825500" y="1886942"/>
+            <a:ext cx="0" cy="487363"/>
           </a:xfrm>
           <a:prstGeom prst="line">
             <a:avLst/>
@@ -17507,39 +17742,39 @@
         </p:nvSpPr>
         <p:spPr>
           <a:xfrm>
-            <a:off x="965200" y="1928862"/>
-            <a:ext cx="10307828" cy="534988"/>
-          </a:xfrm>
-          <a:prstGeom prst="rect">
-            <a:avLst/>
-          </a:prstGeom>
-          <a:noFill/>
-          <a:ln/>
-        </p:spPr>
-        <p:txBody>
-          <a:bodyPr wrap="square" lIns="0" tIns="0" rIns="0" bIns="0" rtlCol="0" anchor="t">
-            <a:normAutofit/>
-          </a:bodyPr>
-          <a:lstStyle/>
-          <a:p>
-            <a:pPr algn="l" indent="0" marL="0">
-              <a:lnSpc>
-                <a:spcPts val="2012"/>
-              </a:lnSpc>
-              <a:buNone/>
-            </a:pPr>
-            <a:r>
-              <a:rPr lang="en-US" sz="1491" dirty="0">
+            <a:off x="965200" y="1886942"/>
+            <a:ext cx="10307828" cy="512762"/>
+          </a:xfrm>
+          <a:prstGeom prst="rect">
+            <a:avLst/>
+          </a:prstGeom>
+          <a:noFill/>
+          <a:ln/>
+        </p:spPr>
+        <p:txBody>
+          <a:bodyPr wrap="square" lIns="0" tIns="0" rIns="0" bIns="0" rtlCol="0" anchor="t">
+            <a:normAutofit/>
+          </a:bodyPr>
+          <a:lstStyle/>
+          <a:p>
+            <a:pPr algn="l" indent="0" marL="0">
+              <a:lnSpc>
+                <a:spcPts val="1936"/>
+              </a:lnSpc>
+              <a:buNone/>
+            </a:pPr>
+            <a:r>
+              <a:rPr lang="en-US" sz="1434" dirty="0">
                 <a:solidFill>
                   <a:srgbClr val="3A4651"/>
                 </a:solidFill>
-                <a:latin typeface="IBM Plex Sans" pitchFamily="34" charset="0"/>
-                <a:ea typeface="IBM Plex Sans" pitchFamily="34" charset="-122"/>
-                <a:cs typeface="IBM Plex Sans" pitchFamily="34" charset="-120"/>
+                <a:latin typeface="Arial" pitchFamily="34" charset="0"/>
+                <a:ea typeface="Arial" pitchFamily="34" charset="-122"/>
+                <a:cs typeface="Arial" pitchFamily="34" charset="-120"/>
               </a:rPr>
               <a:t>The cohort has 221 stays from 63 patients, and we leave out anything recorded after the diagnosis so the answer doesn't leak into the prompt</a:t>
             </a:r>
-            <a:endParaRPr lang="en-US" sz="1491" dirty="0"/>
+            <a:endParaRPr lang="en-US" sz="1434" dirty="0"/>
           </a:p>
         </p:txBody>
       </p:sp>
@@ -17551,7 +17786,7 @@
         </p:nvSpPr>
         <p:spPr>
           <a:xfrm>
-            <a:off x="812800" y="2752775"/>
+            <a:off x="812800" y="2688630"/>
             <a:ext cx="6604000" cy="0"/>
           </a:xfrm>
           <a:prstGeom prst="line">
@@ -17574,7 +17809,7 @@
         </p:nvSpPr>
         <p:spPr>
           <a:xfrm>
-            <a:off x="812800" y="2863900"/>
+            <a:off x="812800" y="2799755"/>
             <a:ext cx="6802120" cy="269230"/>
           </a:xfrm>
           <a:prstGeom prst="rect">
@@ -17600,9 +17835,9 @@
                 <a:solidFill>
                   <a:srgbClr val="17212B"/>
                 </a:solidFill>
-                <a:latin typeface="IBM Plex Sans" pitchFamily="34" charset="0"/>
-                <a:ea typeface="IBM Plex Sans" pitchFamily="34" charset="-122"/>
-                <a:cs typeface="IBM Plex Sans" pitchFamily="34" charset="-120"/>
+                <a:latin typeface="Arial" pitchFamily="34" charset="0"/>
+                <a:ea typeface="Arial" pitchFamily="34" charset="-122"/>
+                <a:cs typeface="Arial" pitchFamily="34" charset="-120"/>
               </a:rPr>
               <a:t>Load the tables and build the cohort</a:t>
             </a:r>
@@ -17618,8 +17853,8 @@
         </p:nvSpPr>
         <p:spPr>
           <a:xfrm>
-            <a:off x="812800" y="3183930"/>
-            <a:ext cx="6802120" cy="2288431"/>
+            <a:off x="812800" y="3119785"/>
+            <a:ext cx="6802120" cy="2905621"/>
           </a:xfrm>
           <a:prstGeom prst="rect">
             <a:avLst/>
@@ -17644,9 +17879,9 @@
                 <a:solidFill>
                   <a:srgbClr val="17212B"/>
                 </a:solidFill>
-                <a:latin typeface="IBM Plex Mono" pitchFamily="49" charset="0"/>
-                <a:ea typeface="IBM Plex Mono" pitchFamily="49" charset="-122"/>
-                <a:cs typeface="IBM Plex Mono" pitchFamily="49" charset="-120"/>
+                <a:latin typeface="Courier New" pitchFamily="49" charset="0"/>
+                <a:ea typeface="Courier New" pitchFamily="49" charset="-122"/>
+                <a:cs typeface="Courier New" pitchFamily="49" charset="-120"/>
               </a:rPr>
               <a:t>edstays   = pd.read_csv(DATA / "ed/edstays.csv.gz")</a:t>
             </a:r>
@@ -17664,9 +17899,9 @@
                 <a:solidFill>
                   <a:srgbClr val="17212B"/>
                 </a:solidFill>
-                <a:latin typeface="IBM Plex Mono" pitchFamily="49" charset="0"/>
-                <a:ea typeface="IBM Plex Mono" pitchFamily="49" charset="-122"/>
-                <a:cs typeface="IBM Plex Mono" pitchFamily="49" charset="-120"/>
+                <a:latin typeface="Courier New" pitchFamily="49" charset="0"/>
+                <a:ea typeface="Courier New" pitchFamily="49" charset="-122"/>
+                <a:cs typeface="Courier New" pitchFamily="49" charset="-120"/>
               </a:rPr>
               <a:t>triage    = pd.read_csv(DATA / "ed/triage.csv.gz")</a:t>
             </a:r>
@@ -17684,9 +17919,9 @@
                 <a:solidFill>
                   <a:srgbClr val="17212B"/>
                 </a:solidFill>
-                <a:latin typeface="IBM Plex Mono" pitchFamily="49" charset="0"/>
-                <a:ea typeface="IBM Plex Mono" pitchFamily="49" charset="-122"/>
-                <a:cs typeface="IBM Plex Mono" pitchFamily="49" charset="-120"/>
+                <a:latin typeface="Courier New" pitchFamily="49" charset="0"/>
+                <a:ea typeface="Courier New" pitchFamily="49" charset="-122"/>
+                <a:cs typeface="Courier New" pitchFamily="49" charset="-120"/>
               </a:rPr>
               <a:t>diagnosis = pd.read_csv(DATA / "ed/diagnosis.csv.gz")</a:t>
             </a:r>
@@ -17704,9 +17939,9 @@
                 <a:solidFill>
                   <a:srgbClr val="17212B"/>
                 </a:solidFill>
-                <a:latin typeface="IBM Plex Mono" pitchFamily="49" charset="0"/>
-                <a:ea typeface="IBM Plex Mono" pitchFamily="49" charset="-122"/>
-                <a:cs typeface="IBM Plex Mono" pitchFamily="49" charset="-120"/>
+                <a:latin typeface="Courier New" pitchFamily="49" charset="0"/>
+                <a:ea typeface="Courier New" pitchFamily="49" charset="-122"/>
+                <a:cs typeface="Courier New" pitchFamily="49" charset="-120"/>
               </a:rPr>
               <a:t>patients  = pd.read_csv(DATA / "hosp/patients.csv.gz")</a:t>
             </a:r>
@@ -17724,9 +17959,9 @@
                 <a:solidFill>
                   <a:srgbClr val="17212B"/>
                 </a:solidFill>
-                <a:latin typeface="IBM Plex Mono" pitchFamily="49" charset="0"/>
-                <a:ea typeface="IBM Plex Mono" pitchFamily="49" charset="-122"/>
-                <a:cs typeface="IBM Plex Mono" pitchFamily="49" charset="-120"/>
+                <a:latin typeface="Courier New" pitchFamily="49" charset="0"/>
+                <a:ea typeface="Courier New" pitchFamily="49" charset="-122"/>
+                <a:cs typeface="Courier New" pitchFamily="49" charset="-120"/>
               </a:rPr>
               <a:t>d_icd     = pd.read_csv(DATA / "hosp/d_icd_diagnoses.csv.gz")</a:t>
             </a:r>
@@ -17753,11 +17988,11 @@
                 <a:solidFill>
                   <a:srgbClr val="17212B"/>
                 </a:solidFill>
-                <a:latin typeface="IBM Plex Mono" pitchFamily="49" charset="0"/>
-                <a:ea typeface="IBM Plex Mono" pitchFamily="49" charset="-122"/>
-                <a:cs typeface="IBM Plex Mono" pitchFamily="49" charset="-120"/>
-              </a:rPr>
-              <a:t>primary = diagnosis[diagnosis.seq_num == 1]</a:t>
+                <a:latin typeface="Courier New" pitchFamily="49" charset="0"/>
+                <a:ea typeface="Courier New" pitchFamily="49" charset="-122"/>
+                <a:cs typeface="Courier New" pitchFamily="49" charset="-120"/>
+              </a:rPr>
+              <a:t>primary = diagnosis.loc[diagnosis.seq_num == 1,</a:t>
             </a:r>
             <a:endParaRPr lang="en-US" sz="1200" dirty="0"/>
           </a:p>
@@ -17773,11 +18008,11 @@
                 <a:solidFill>
                   <a:srgbClr val="17212B"/>
                 </a:solidFill>
-                <a:latin typeface="IBM Plex Mono" pitchFamily="49" charset="0"/>
-                <a:ea typeface="IBM Plex Mono" pitchFamily="49" charset="-122"/>
-                <a:cs typeface="IBM Plex Mono" pitchFamily="49" charset="-120"/>
-              </a:rPr>
-              <a:t>cohort = (edstays</a:t>
+                <a:latin typeface="Courier New" pitchFamily="49" charset="0"/>
+                <a:ea typeface="Courier New" pitchFamily="49" charset="-122"/>
+                <a:cs typeface="Courier New" pitchFamily="49" charset="-120"/>
+              </a:rPr>
+              <a:t>    ["stay_id", "icd_code", "icd_version", "icd_title"]]</a:t>
             </a:r>
             <a:endParaRPr lang="en-US" sz="1200" dirty="0"/>
           </a:p>
@@ -17793,11 +18028,11 @@
                 <a:solidFill>
                   <a:srgbClr val="17212B"/>
                 </a:solidFill>
-                <a:latin typeface="IBM Plex Mono" pitchFamily="49" charset="0"/>
-                <a:ea typeface="IBM Plex Mono" pitchFamily="49" charset="-122"/>
-                <a:cs typeface="IBM Plex Mono" pitchFamily="49" charset="-120"/>
-              </a:rPr>
-              <a:t>    .merge(triage, on="stay_id")</a:t>
+                <a:latin typeface="Courier New" pitchFamily="49" charset="0"/>
+                <a:ea typeface="Courier New" pitchFamily="49" charset="-122"/>
+                <a:cs typeface="Courier New" pitchFamily="49" charset="-120"/>
+              </a:rPr>
+              <a:t>cohort = (edstays[["subject_id", "stay_id",</a:t>
             </a:r>
             <a:endParaRPr lang="en-US" sz="1200" dirty="0"/>
           </a:p>
@@ -17813,11 +18048,11 @@
                 <a:solidFill>
                   <a:srgbClr val="17212B"/>
                 </a:solidFill>
-                <a:latin typeface="IBM Plex Mono" pitchFamily="49" charset="0"/>
-                <a:ea typeface="IBM Plex Mono" pitchFamily="49" charset="-122"/>
-                <a:cs typeface="IBM Plex Mono" pitchFamily="49" charset="-120"/>
-              </a:rPr>
-              <a:t>    .merge(patients, on="subject_id")</a:t>
+                <a:latin typeface="Courier New" pitchFamily="49" charset="0"/>
+                <a:ea typeface="Courier New" pitchFamily="49" charset="-122"/>
+                <a:cs typeface="Courier New" pitchFamily="49" charset="-120"/>
+              </a:rPr>
+              <a:t>                   "gender", "arrival_transport"]]</a:t>
             </a:r>
             <a:endParaRPr lang="en-US" sz="1200" dirty="0"/>
           </a:p>
@@ -17833,9 +18068,69 @@
                 <a:solidFill>
                   <a:srgbClr val="17212B"/>
                 </a:solidFill>
-                <a:latin typeface="IBM Plex Mono" pitchFamily="49" charset="0"/>
-                <a:ea typeface="IBM Plex Mono" pitchFamily="49" charset="-122"/>
-                <a:cs typeface="IBM Plex Mono" pitchFamily="49" charset="-120"/>
+                <a:latin typeface="Courier New" pitchFamily="49" charset="0"/>
+                <a:ea typeface="Courier New" pitchFamily="49" charset="-122"/>
+                <a:cs typeface="Courier New" pitchFamily="49" charset="-120"/>
+              </a:rPr>
+              <a:t>    .merge(triage.drop(columns=["subject_id"], errors="ignore"),</a:t>
+            </a:r>
+            <a:endParaRPr lang="en-US" sz="1200" dirty="0"/>
+          </a:p>
+          <a:p>
+            <a:pPr algn="l" indent="0" marL="0">
+              <a:lnSpc>
+                <a:spcPts val="1620"/>
+              </a:lnSpc>
+              <a:buNone/>
+            </a:pPr>
+            <a:r>
+              <a:rPr lang="en-US" sz="1200" dirty="0">
+                <a:solidFill>
+                  <a:srgbClr val="17212B"/>
+                </a:solidFill>
+                <a:latin typeface="Courier New" pitchFamily="49" charset="0"/>
+                <a:ea typeface="Courier New" pitchFamily="49" charset="-122"/>
+                <a:cs typeface="Courier New" pitchFamily="49" charset="-120"/>
+              </a:rPr>
+              <a:t>           on="stay_id")</a:t>
+            </a:r>
+            <a:endParaRPr lang="en-US" sz="1200" dirty="0"/>
+          </a:p>
+          <a:p>
+            <a:pPr algn="l" indent="0" marL="0">
+              <a:lnSpc>
+                <a:spcPts val="1620"/>
+              </a:lnSpc>
+              <a:buNone/>
+            </a:pPr>
+            <a:r>
+              <a:rPr lang="en-US" sz="1200" dirty="0">
+                <a:solidFill>
+                  <a:srgbClr val="17212B"/>
+                </a:solidFill>
+                <a:latin typeface="Courier New" pitchFamily="49" charset="0"/>
+                <a:ea typeface="Courier New" pitchFamily="49" charset="-122"/>
+                <a:cs typeface="Courier New" pitchFamily="49" charset="-120"/>
+              </a:rPr>
+              <a:t>    .merge(patients[["subject_id", "anchor_age"]], on="subject_id")</a:t>
+            </a:r>
+            <a:endParaRPr lang="en-US" sz="1200" dirty="0"/>
+          </a:p>
+          <a:p>
+            <a:pPr algn="l" indent="0" marL="0">
+              <a:lnSpc>
+                <a:spcPts val="1620"/>
+              </a:lnSpc>
+              <a:buNone/>
+            </a:pPr>
+            <a:r>
+              <a:rPr lang="en-US" sz="1200" dirty="0">
+                <a:solidFill>
+                  <a:srgbClr val="17212B"/>
+                </a:solidFill>
+                <a:latin typeface="Courier New" pitchFamily="49" charset="0"/>
+                <a:ea typeface="Courier New" pitchFamily="49" charset="-122"/>
+                <a:cs typeface="Courier New" pitchFamily="49" charset="-120"/>
               </a:rPr>
               <a:t>    .merge(primary, on="stay_id"))</a:t>
             </a:r>
@@ -17851,7 +18146,7 @@
         </p:nvSpPr>
         <p:spPr>
           <a:xfrm>
-            <a:off x="7823200" y="2752775"/>
+            <a:off x="7823200" y="2688630"/>
             <a:ext cx="3556000" cy="0"/>
           </a:xfrm>
           <a:prstGeom prst="line">
@@ -17874,7 +18169,7 @@
         </p:nvSpPr>
         <p:spPr>
           <a:xfrm>
-            <a:off x="7823200" y="2863900"/>
+            <a:off x="7823200" y="2799755"/>
             <a:ext cx="3662680" cy="238720"/>
           </a:xfrm>
           <a:prstGeom prst="rect">
@@ -17900,9 +18195,9 @@
                 <a:solidFill>
                   <a:srgbClr val="0E6E6C"/>
                 </a:solidFill>
-                <a:latin typeface="IBM Plex Sans" pitchFamily="34" charset="0"/>
-                <a:ea typeface="IBM Plex Sans" pitchFamily="34" charset="-122"/>
-                <a:cs typeface="IBM Plex Sans" pitchFamily="34" charset="-120"/>
+                <a:latin typeface="Arial" pitchFamily="34" charset="0"/>
+                <a:ea typeface="Arial" pitchFamily="34" charset="-122"/>
+                <a:cs typeface="Arial" pitchFamily="34" charset="-120"/>
               </a:rPr>
               <a:t>YOU SHOULD SEE</a:t>
             </a:r>
@@ -17918,7 +18213,7 @@
         </p:nvSpPr>
         <p:spPr>
           <a:xfrm>
-            <a:off x="7823200" y="3153420"/>
+            <a:off x="7823200" y="3089275"/>
             <a:ext cx="3662680" cy="436860"/>
           </a:xfrm>
           <a:prstGeom prst="rect">
@@ -17944,9 +18239,9 @@
                 <a:solidFill>
                   <a:srgbClr val="17212B"/>
                 </a:solidFill>
-                <a:latin typeface="IBM Plex Mono" pitchFamily="49" charset="0"/>
-                <a:ea typeface="IBM Plex Mono" pitchFamily="49" charset="-122"/>
-                <a:cs typeface="IBM Plex Mono" pitchFamily="49" charset="-120"/>
+                <a:latin typeface="Courier New" pitchFamily="49" charset="0"/>
+                <a:ea typeface="Courier New" pitchFamily="49" charset="-122"/>
+                <a:cs typeface="Courier New" pitchFamily="49" charset="-120"/>
               </a:rPr>
               <a:t>222 ED stays → 221 with triage + primary diagnosis (63 patients)</a:t>
             </a:r>
@@ -17969,7 +18264,7 @@
           </p:nvPr>
         </p:nvGraphicFramePr>
         <p:xfrm>
-          <a:off x="7835900" y="3704580"/>
+          <a:off x="7835900" y="3640435"/>
           <a:ext cx="3543300" cy="2163763"/>
         </p:xfrm>
         <a:graphic>
@@ -17997,16 +18292,16 @@
                           <a:solidFill>
                             <a:srgbClr val="17212B"/>
                           </a:solidFill>
-                          <a:latin typeface="IBM Plex Sans" pitchFamily="34" charset="0"/>
-                          <a:ea typeface="IBM Plex Sans" pitchFamily="34" charset="-122"/>
-                          <a:cs typeface="IBM Plex Sans" pitchFamily="34" charset="-120"/>
+                          <a:latin typeface="Arial" pitchFamily="34" charset="0"/>
+                          <a:ea typeface="Arial" pitchFamily="34" charset="-122"/>
+                          <a:cs typeface="Arial" pitchFamily="34" charset="-120"/>
                         </a:rPr>
                         <a:t>table</a:t>
                       </a:r>
                       <a:endParaRPr lang="en-US" sz="1200" dirty="0">
-                        <a:latin typeface="IBM Plex Sans" charset="0"/>
-                        <a:ea typeface="IBM Plex Sans" charset="0"/>
-                        <a:cs typeface="IBM Plex Sans" charset="0"/>
+                        <a:latin typeface="Arial" charset="0"/>
+                        <a:ea typeface="Arial" charset="0"/>
+                        <a:cs typeface="Arial" charset="0"/>
                       </a:endParaRPr>
                     </a:p>
                   </a:txBody>
@@ -18068,16 +18363,16 @@
                           <a:solidFill>
                             <a:srgbClr val="17212B"/>
                           </a:solidFill>
-                          <a:latin typeface="IBM Plex Sans" pitchFamily="34" charset="0"/>
-                          <a:ea typeface="IBM Plex Sans" pitchFamily="34" charset="-122"/>
-                          <a:cs typeface="IBM Plex Sans" pitchFamily="34" charset="-120"/>
+                          <a:latin typeface="Arial" pitchFamily="34" charset="0"/>
+                          <a:ea typeface="Arial" pitchFamily="34" charset="-122"/>
+                          <a:cs typeface="Arial" pitchFamily="34" charset="-120"/>
                         </a:rPr>
                         <a:t>used for</a:t>
                       </a:r>
                       <a:endParaRPr lang="en-US" sz="1200" dirty="0">
-                        <a:latin typeface="IBM Plex Sans" charset="0"/>
-                        <a:ea typeface="IBM Plex Sans" charset="0"/>
-                        <a:cs typeface="IBM Plex Sans" charset="0"/>
+                        <a:latin typeface="Arial" charset="0"/>
+                        <a:ea typeface="Arial" charset="0"/>
+                        <a:cs typeface="Arial" charset="0"/>
                       </a:endParaRPr>
                     </a:p>
                   </a:txBody>
@@ -18141,16 +18436,16 @@
                           <a:solidFill>
                             <a:srgbClr val="17212B"/>
                           </a:solidFill>
-                          <a:latin typeface="IBM Plex Sans" pitchFamily="34" charset="0"/>
-                          <a:ea typeface="IBM Plex Sans" pitchFamily="34" charset="-122"/>
-                          <a:cs typeface="IBM Plex Sans" pitchFamily="34" charset="-120"/>
+                          <a:latin typeface="Arial" pitchFamily="34" charset="0"/>
+                          <a:ea typeface="Arial" pitchFamily="34" charset="-122"/>
+                          <a:cs typeface="Arial" pitchFamily="34" charset="-120"/>
                         </a:rPr>
                         <a:t>edstays</a:t>
                       </a:r>
                       <a:endParaRPr lang="en-US" sz="1200" dirty="0">
-                        <a:latin typeface="IBM Plex Sans" charset="0"/>
-                        <a:ea typeface="IBM Plex Sans" charset="0"/>
-                        <a:cs typeface="IBM Plex Sans" charset="0"/>
+                        <a:latin typeface="Arial" charset="0"/>
+                        <a:ea typeface="Arial" charset="0"/>
+                        <a:cs typeface="Arial" charset="0"/>
                       </a:endParaRPr>
                     </a:p>
                   </a:txBody>
@@ -18209,16 +18504,16 @@
                           <a:solidFill>
                             <a:srgbClr val="17212B"/>
                           </a:solidFill>
-                          <a:latin typeface="IBM Plex Sans" pitchFamily="34" charset="0"/>
-                          <a:ea typeface="IBM Plex Sans" pitchFamily="34" charset="-122"/>
-                          <a:cs typeface="IBM Plex Sans" pitchFamily="34" charset="-120"/>
+                          <a:latin typeface="Arial" pitchFamily="34" charset="0"/>
+                          <a:ea typeface="Arial" pitchFamily="34" charset="-122"/>
+                          <a:cs typeface="Arial" pitchFamily="34" charset="-120"/>
                         </a:rPr>
                         <a:t>sex, arrival transport</a:t>
                       </a:r>
                       <a:endParaRPr lang="en-US" sz="1200" dirty="0">
-                        <a:latin typeface="IBM Plex Sans" charset="0"/>
-                        <a:ea typeface="IBM Plex Sans" charset="0"/>
-                        <a:cs typeface="IBM Plex Sans" charset="0"/>
+                        <a:latin typeface="Arial" charset="0"/>
+                        <a:ea typeface="Arial" charset="0"/>
+                        <a:cs typeface="Arial" charset="0"/>
                       </a:endParaRPr>
                     </a:p>
                   </a:txBody>
@@ -18279,16 +18574,16 @@
                           <a:solidFill>
                             <a:srgbClr val="17212B"/>
                           </a:solidFill>
-                          <a:latin typeface="IBM Plex Sans" pitchFamily="34" charset="0"/>
-                          <a:ea typeface="IBM Plex Sans" pitchFamily="34" charset="-122"/>
-                          <a:cs typeface="IBM Plex Sans" pitchFamily="34" charset="-120"/>
+                          <a:latin typeface="Arial" pitchFamily="34" charset="0"/>
+                          <a:ea typeface="Arial" pitchFamily="34" charset="-122"/>
+                          <a:cs typeface="Arial" pitchFamily="34" charset="-120"/>
                         </a:rPr>
                         <a:t>triage</a:t>
                       </a:r>
                       <a:endParaRPr lang="en-US" sz="1200" dirty="0">
-                        <a:latin typeface="IBM Plex Sans" charset="0"/>
-                        <a:ea typeface="IBM Plex Sans" charset="0"/>
-                        <a:cs typeface="IBM Plex Sans" charset="0"/>
+                        <a:latin typeface="Arial" charset="0"/>
+                        <a:ea typeface="Arial" charset="0"/>
+                        <a:cs typeface="Arial" charset="0"/>
                       </a:endParaRPr>
                     </a:p>
                   </a:txBody>
@@ -18347,16 +18642,16 @@
                           <a:solidFill>
                             <a:srgbClr val="17212B"/>
                           </a:solidFill>
-                          <a:latin typeface="IBM Plex Sans" pitchFamily="34" charset="0"/>
-                          <a:ea typeface="IBM Plex Sans" pitchFamily="34" charset="-122"/>
-                          <a:cs typeface="IBM Plex Sans" pitchFamily="34" charset="-120"/>
+                          <a:latin typeface="Arial" pitchFamily="34" charset="0"/>
+                          <a:ea typeface="Arial" pitchFamily="34" charset="-122"/>
+                          <a:cs typeface="Arial" pitchFamily="34" charset="-120"/>
                         </a:rPr>
                         <a:t>complaint, vitals, pain, acuity</a:t>
                       </a:r>
                       <a:endParaRPr lang="en-US" sz="1200" dirty="0">
-                        <a:latin typeface="IBM Plex Sans" charset="0"/>
-                        <a:ea typeface="IBM Plex Sans" charset="0"/>
-                        <a:cs typeface="IBM Plex Sans" charset="0"/>
+                        <a:latin typeface="Arial" charset="0"/>
+                        <a:ea typeface="Arial" charset="0"/>
+                        <a:cs typeface="Arial" charset="0"/>
                       </a:endParaRPr>
                     </a:p>
                   </a:txBody>
@@ -18417,16 +18712,16 @@
                           <a:solidFill>
                             <a:srgbClr val="17212B"/>
                           </a:solidFill>
-                          <a:latin typeface="IBM Plex Sans" pitchFamily="34" charset="0"/>
-                          <a:ea typeface="IBM Plex Sans" pitchFamily="34" charset="-122"/>
-                          <a:cs typeface="IBM Plex Sans" pitchFamily="34" charset="-120"/>
+                          <a:latin typeface="Arial" pitchFamily="34" charset="0"/>
+                          <a:ea typeface="Arial" pitchFamily="34" charset="-122"/>
+                          <a:cs typeface="Arial" pitchFamily="34" charset="-120"/>
                         </a:rPr>
                         <a:t>diagnosis</a:t>
                       </a:r>
                       <a:endParaRPr lang="en-US" sz="1200" dirty="0">
-                        <a:latin typeface="IBM Plex Sans" charset="0"/>
-                        <a:ea typeface="IBM Plex Sans" charset="0"/>
-                        <a:cs typeface="IBM Plex Sans" charset="0"/>
+                        <a:latin typeface="Arial" charset="0"/>
+                        <a:ea typeface="Arial" charset="0"/>
+                        <a:cs typeface="Arial" charset="0"/>
                       </a:endParaRPr>
                     </a:p>
                   </a:txBody>
@@ -18485,16 +18780,16 @@
                           <a:solidFill>
                             <a:srgbClr val="17212B"/>
                           </a:solidFill>
-                          <a:latin typeface="IBM Plex Sans" pitchFamily="34" charset="0"/>
-                          <a:ea typeface="IBM Plex Sans" pitchFamily="34" charset="-122"/>
-                          <a:cs typeface="IBM Plex Sans" pitchFamily="34" charset="-120"/>
+                          <a:latin typeface="Arial" pitchFamily="34" charset="0"/>
+                          <a:ea typeface="Arial" pitchFamily="34" charset="-122"/>
+                          <a:cs typeface="Arial" pitchFamily="34" charset="-120"/>
                         </a:rPr>
                         <a:t>the label (seq_num = 1)</a:t>
                       </a:r>
                       <a:endParaRPr lang="en-US" sz="1200" dirty="0">
-                        <a:latin typeface="IBM Plex Sans" charset="0"/>
-                        <a:ea typeface="IBM Plex Sans" charset="0"/>
-                        <a:cs typeface="IBM Plex Sans" charset="0"/>
+                        <a:latin typeface="Arial" charset="0"/>
+                        <a:ea typeface="Arial" charset="0"/>
+                        <a:cs typeface="Arial" charset="0"/>
                       </a:endParaRPr>
                     </a:p>
                   </a:txBody>
@@ -18555,16 +18850,16 @@
                           <a:solidFill>
                             <a:srgbClr val="17212B"/>
                           </a:solidFill>
-                          <a:latin typeface="IBM Plex Sans" pitchFamily="34" charset="0"/>
-                          <a:ea typeface="IBM Plex Sans" pitchFamily="34" charset="-122"/>
-                          <a:cs typeface="IBM Plex Sans" pitchFamily="34" charset="-120"/>
+                          <a:latin typeface="Arial" pitchFamily="34" charset="0"/>
+                          <a:ea typeface="Arial" pitchFamily="34" charset="-122"/>
+                          <a:cs typeface="Arial" pitchFamily="34" charset="-120"/>
                         </a:rPr>
                         <a:t>patients</a:t>
                       </a:r>
                       <a:endParaRPr lang="en-US" sz="1200" dirty="0">
-                        <a:latin typeface="IBM Plex Sans" charset="0"/>
-                        <a:ea typeface="IBM Plex Sans" charset="0"/>
-                        <a:cs typeface="IBM Plex Sans" charset="0"/>
+                        <a:latin typeface="Arial" charset="0"/>
+                        <a:ea typeface="Arial" charset="0"/>
+                        <a:cs typeface="Arial" charset="0"/>
                       </a:endParaRPr>
                     </a:p>
                   </a:txBody>
@@ -18623,16 +18918,16 @@
                           <a:solidFill>
                             <a:srgbClr val="17212B"/>
                           </a:solidFill>
-                          <a:latin typeface="IBM Plex Sans" pitchFamily="34" charset="0"/>
-                          <a:ea typeface="IBM Plex Sans" pitchFamily="34" charset="-122"/>
-                          <a:cs typeface="IBM Plex Sans" pitchFamily="34" charset="-120"/>
+                          <a:latin typeface="Arial" pitchFamily="34" charset="0"/>
+                          <a:ea typeface="Arial" pitchFamily="34" charset="-122"/>
+                          <a:cs typeface="Arial" pitchFamily="34" charset="-120"/>
                         </a:rPr>
                         <a:t>age (anchor_age)</a:t>
                       </a:r>
                       <a:endParaRPr lang="en-US" sz="1200" dirty="0">
-                        <a:latin typeface="IBM Plex Sans" charset="0"/>
-                        <a:ea typeface="IBM Plex Sans" charset="0"/>
-                        <a:cs typeface="IBM Plex Sans" charset="0"/>
+                        <a:latin typeface="Arial" charset="0"/>
+                        <a:ea typeface="Arial" charset="0"/>
+                        <a:cs typeface="Arial" charset="0"/>
                       </a:endParaRPr>
                     </a:p>
                   </a:txBody>
@@ -18693,16 +18988,16 @@
                           <a:solidFill>
                             <a:srgbClr val="17212B"/>
                           </a:solidFill>
-                          <a:latin typeface="IBM Plex Sans" pitchFamily="34" charset="0"/>
-                          <a:ea typeface="IBM Plex Sans" pitchFamily="34" charset="-122"/>
-                          <a:cs typeface="IBM Plex Sans" pitchFamily="34" charset="-120"/>
+                          <a:latin typeface="Arial" pitchFamily="34" charset="0"/>
+                          <a:ea typeface="Arial" pitchFamily="34" charset="-122"/>
+                          <a:cs typeface="Arial" pitchFamily="34" charset="-120"/>
                         </a:rPr>
                         <a:t>d_icd_diagnoses</a:t>
                       </a:r>
                       <a:endParaRPr lang="en-US" sz="1200" dirty="0">
-                        <a:latin typeface="IBM Plex Sans" charset="0"/>
-                        <a:ea typeface="IBM Plex Sans" charset="0"/>
-                        <a:cs typeface="IBM Plex Sans" charset="0"/>
+                        <a:latin typeface="Arial" charset="0"/>
+                        <a:ea typeface="Arial" charset="0"/>
+                        <a:cs typeface="Arial" charset="0"/>
                       </a:endParaRPr>
                     </a:p>
                   </a:txBody>
@@ -18761,16 +19056,16 @@
                           <a:solidFill>
                             <a:srgbClr val="17212B"/>
                           </a:solidFill>
-                          <a:latin typeface="IBM Plex Sans" pitchFamily="34" charset="0"/>
-                          <a:ea typeface="IBM Plex Sans" pitchFamily="34" charset="-122"/>
-                          <a:cs typeface="IBM Plex Sans" pitchFamily="34" charset="-120"/>
+                          <a:latin typeface="Arial" pitchFamily="34" charset="0"/>
+                          <a:ea typeface="Arial" pitchFamily="34" charset="-122"/>
+                          <a:cs typeface="Arial" pitchFamily="34" charset="-120"/>
                         </a:rPr>
                         <a:t>checking codes in step 6</a:t>
                       </a:r>
                       <a:endParaRPr lang="en-US" sz="1200" dirty="0">
-                        <a:latin typeface="IBM Plex Sans" charset="0"/>
-                        <a:ea typeface="IBM Plex Sans" charset="0"/>
-                        <a:cs typeface="IBM Plex Sans" charset="0"/>
+                        <a:latin typeface="Arial" charset="0"/>
+                        <a:ea typeface="Arial" charset="0"/>
+                        <a:cs typeface="Arial" charset="0"/>
                       </a:endParaRPr>
                     </a:p>
                   </a:txBody>
@@ -18852,11 +19147,11 @@
                 <a:solidFill>
                   <a:srgbClr val="5C6772"/>
                 </a:solidFill>
-                <a:latin typeface="IBM Plex Sans" pitchFamily="34" charset="0"/>
-                <a:ea typeface="IBM Plex Sans" pitchFamily="34" charset="-122"/>
-                <a:cs typeface="IBM Plex Sans" pitchFamily="34" charset="-120"/>
-              </a:rPr>
-              <a:t>Notebook cells 7–9</a:t>
+                <a:latin typeface="Arial" pitchFamily="34" charset="0"/>
+                <a:ea typeface="Arial" pitchFamily="34" charset="-122"/>
+                <a:cs typeface="Arial" pitchFamily="34" charset="-120"/>
+              </a:rPr>
+              <a:t>Notebook cells [4]–[6]</a:t>
             </a:r>
             <a:endParaRPr lang="en-US" sz="1200" dirty="0"/>
           </a:p>
@@ -18896,9 +19191,9 @@
                 <a:solidFill>
                   <a:srgbClr val="5C6772"/>
                 </a:solidFill>
-                <a:latin typeface="IBM Plex Sans" pitchFamily="34" charset="0"/>
-                <a:ea typeface="IBM Plex Sans" pitchFamily="34" charset="-122"/>
-                <a:cs typeface="IBM Plex Sans" pitchFamily="34" charset="-120"/>
+                <a:latin typeface="Arial" pitchFamily="34" charset="0"/>
+                <a:ea typeface="Arial" pitchFamily="34" charset="-122"/>
+                <a:cs typeface="Arial" pitchFamily="34" charset="-120"/>
               </a:rPr>
               <a:t>8</a:t>
             </a:r>
@@ -18947,38 +19242,38 @@
         <p:spPr>
           <a:xfrm>
             <a:off x="812800" y="812800"/>
-            <a:ext cx="10883392" cy="238720"/>
-          </a:xfrm>
-          <a:prstGeom prst="rect">
-            <a:avLst/>
-          </a:prstGeom>
-          <a:noFill/>
-          <a:ln/>
-        </p:spPr>
-        <p:txBody>
-          <a:bodyPr wrap="square" lIns="0" tIns="0" rIns="0" bIns="0" rtlCol="0" anchor="t">
-            <a:normAutofit/>
-          </a:bodyPr>
-          <a:lstStyle/>
-          <a:p>
-            <a:pPr algn="l" indent="0" marL="0">
-              <a:lnSpc>
-                <a:spcPts val="1680"/>
-              </a:lnSpc>
-              <a:buNone/>
-            </a:pPr>
-            <a:r>
-              <a:rPr lang="en-US" sz="1200" spc="100" kern="0" dirty="0">
+            <a:ext cx="10883392" cy="229939"/>
+          </a:xfrm>
+          <a:prstGeom prst="rect">
+            <a:avLst/>
+          </a:prstGeom>
+          <a:noFill/>
+          <a:ln/>
+        </p:spPr>
+        <p:txBody>
+          <a:bodyPr wrap="square" lIns="0" tIns="0" rIns="0" bIns="0" rtlCol="0" anchor="t">
+            <a:normAutofit/>
+          </a:bodyPr>
+          <a:lstStyle/>
+          <a:p>
+            <a:pPr algn="l" indent="0" marL="0">
+              <a:lnSpc>
+                <a:spcPts val="1622"/>
+              </a:lnSpc>
+              <a:buNone/>
+            </a:pPr>
+            <a:r>
+              <a:rPr lang="en-US" sz="1159" spc="100" kern="0" dirty="0">
                 <a:solidFill>
                   <a:srgbClr val="0E6E6C"/>
                 </a:solidFill>
-                <a:latin typeface="IBM Plex Sans" pitchFamily="34" charset="0"/>
-                <a:ea typeface="IBM Plex Sans" pitchFamily="34" charset="-122"/>
-                <a:cs typeface="IBM Plex Sans" pitchFamily="34" charset="-120"/>
+                <a:latin typeface="Arial" pitchFamily="34" charset="0"/>
+                <a:ea typeface="Arial" pitchFamily="34" charset="-122"/>
+                <a:cs typeface="Arial" pitchFamily="34" charset="-120"/>
               </a:rPr>
               <a:t>LABELS (STEP 3 OF 7)</a:t>
             </a:r>
-            <a:endParaRPr lang="en-US" sz="1200" dirty="0"/>
+            <a:endParaRPr lang="en-US" sz="1159" dirty="0"/>
           </a:p>
         </p:txBody>
       </p:sp>
@@ -18992,39 +19287,39 @@
         </p:nvSpPr>
         <p:spPr>
           <a:xfrm>
-            <a:off x="812800" y="1102320"/>
-            <a:ext cx="10464800" cy="784820"/>
-          </a:xfrm>
-          <a:prstGeom prst="rect">
-            <a:avLst/>
-          </a:prstGeom>
-          <a:noFill/>
-          <a:ln/>
-        </p:spPr>
-        <p:txBody>
-          <a:bodyPr wrap="square" lIns="0" tIns="0" rIns="0" bIns="0" rtlCol="0" anchor="t">
-            <a:normAutofit/>
-          </a:bodyPr>
-          <a:lstStyle/>
-          <a:p>
-            <a:pPr algn="l" indent="0" marL="0">
-              <a:lnSpc>
-                <a:spcPts val="2990"/>
-              </a:lnSpc>
-              <a:buNone/>
-            </a:pPr>
-            <a:r>
-              <a:rPr lang="en-US" sz="2600" b="1" i="0" dirty="0">
-                <a:solidFill>
-                  <a:srgbClr val="17212B"/>
-                </a:solidFill>
-                <a:latin typeface="IBM Plex Sans" pitchFamily="34" charset="0"/>
-                <a:ea typeface="IBM Plex Sans" pitchFamily="34" charset="-122"/>
-                <a:cs typeface="IBM Plex Sans" pitchFamily="34" charset="-120"/>
+            <a:off x="812800" y="1093539"/>
+            <a:ext cx="10464800" cy="753566"/>
+          </a:xfrm>
+          <a:prstGeom prst="rect">
+            <a:avLst/>
+          </a:prstGeom>
+          <a:noFill/>
+          <a:ln/>
+        </p:spPr>
+        <p:txBody>
+          <a:bodyPr wrap="square" lIns="0" tIns="0" rIns="0" bIns="0" rtlCol="0" anchor="t">
+            <a:normAutofit/>
+          </a:bodyPr>
+          <a:lstStyle/>
+          <a:p>
+            <a:pPr algn="l" indent="0" marL="0">
+              <a:lnSpc>
+                <a:spcPts val="2887"/>
+              </a:lnSpc>
+              <a:buNone/>
+            </a:pPr>
+            <a:r>
+              <a:rPr lang="en-US" sz="2511" b="1" i="0" dirty="0">
+                <a:solidFill>
+                  <a:srgbClr val="17212B"/>
+                </a:solidFill>
+                <a:latin typeface="Arial" pitchFamily="34" charset="0"/>
+                <a:ea typeface="Arial" pitchFamily="34" charset="-122"/>
+                <a:cs typeface="Arial" pitchFamily="34" charset="-120"/>
               </a:rPr>
               <a:t>Then group each diagnosis into one of 22 ICD-10 chapters so the task is answerable</a:t>
             </a:r>
-            <a:endParaRPr lang="en-US" sz="2600" dirty="0"/>
+            <a:endParaRPr lang="en-US" sz="2511" dirty="0"/>
           </a:p>
         </p:txBody>
       </p:sp>
@@ -19036,8 +19331,8 @@
         </p:nvSpPr>
         <p:spPr>
           <a:xfrm>
-            <a:off x="825500" y="1937941"/>
-            <a:ext cx="0" cy="257175"/>
+            <a:off x="825500" y="1897906"/>
+            <a:ext cx="0" cy="493167"/>
           </a:xfrm>
           <a:prstGeom prst="line">
             <a:avLst/>
@@ -19059,39 +19354,39 @@
         </p:nvSpPr>
         <p:spPr>
           <a:xfrm>
-            <a:off x="965200" y="1937941"/>
-            <a:ext cx="10307828" cy="282575"/>
-          </a:xfrm>
-          <a:prstGeom prst="rect">
-            <a:avLst/>
-          </a:prstGeom>
-          <a:noFill/>
-          <a:ln/>
-        </p:spPr>
-        <p:txBody>
-          <a:bodyPr wrap="square" lIns="0" tIns="0" rIns="0" bIns="0" rtlCol="0" anchor="t">
-            <a:normAutofit/>
-          </a:bodyPr>
-          <a:lstStyle/>
-          <a:p>
-            <a:pPr algn="l" indent="0" marL="0">
-              <a:lnSpc>
-                <a:spcPts val="2025"/>
-              </a:lnSpc>
-              <a:buNone/>
-            </a:pPr>
-            <a:r>
-              <a:rPr lang="en-US" sz="1500" dirty="0">
+            <a:off x="965200" y="1897906"/>
+            <a:ext cx="10307828" cy="518567"/>
+          </a:xfrm>
+          <a:prstGeom prst="rect">
+            <a:avLst/>
+          </a:prstGeom>
+          <a:noFill/>
+          <a:ln/>
+        </p:spPr>
+        <p:txBody>
+          <a:bodyPr wrap="square" lIns="0" tIns="0" rIns="0" bIns="0" rtlCol="0" anchor="t">
+            <a:normAutofit/>
+          </a:bodyPr>
+          <a:lstStyle/>
+          <a:p>
+            <a:pPr algn="l" indent="0" marL="0">
+              <a:lnSpc>
+                <a:spcPts val="1962"/>
+              </a:lnSpc>
+              <a:buNone/>
+            </a:pPr>
+            <a:r>
+              <a:rPr lang="en-US" sz="1453" dirty="0">
                 <a:solidFill>
                   <a:srgbClr val="3A4651"/>
                 </a:solidFill>
-                <a:latin typeface="IBM Plex Sans" pitchFamily="34" charset="0"/>
-                <a:ea typeface="IBM Plex Sans" pitchFamily="34" charset="-122"/>
-                <a:cs typeface="IBM Plex Sans" pitchFamily="34" charset="-120"/>
-              </a:rPr>
-              <a:t>About a third of stays are coded as "Symptoms &amp; signs", which sets the baseline that any prompt has to beat</a:t>
-            </a:r>
-            <a:endParaRPr lang="en-US" sz="1500" dirty="0"/>
+                <a:latin typeface="Arial" pitchFamily="34" charset="0"/>
+                <a:ea typeface="Arial" pitchFamily="34" charset="-122"/>
+                <a:cs typeface="Arial" pitchFamily="34" charset="-120"/>
+              </a:rPr>
+              <a:t>Symptoms &amp; signs is the largest chapter, and always guessing it would score 26% on the stays we evaluate, which is the baseline any prompt has to beat</a:t>
+            </a:r>
+            <a:endParaRPr lang="en-US" sz="1453" dirty="0"/>
           </a:p>
         </p:txBody>
       </p:sp>
@@ -19103,7 +19398,7 @@
         </p:nvSpPr>
         <p:spPr>
           <a:xfrm>
-            <a:off x="812800" y="2458641"/>
+            <a:off x="812800" y="2654598"/>
             <a:ext cx="6604000" cy="0"/>
           </a:xfrm>
           <a:prstGeom prst="line">
@@ -19126,7 +19421,7 @@
         </p:nvSpPr>
         <p:spPr>
           <a:xfrm>
-            <a:off x="812800" y="2569766"/>
+            <a:off x="812800" y="2765723"/>
             <a:ext cx="6802120" cy="269230"/>
           </a:xfrm>
           <a:prstGeom prst="rect">
@@ -19152,9 +19447,9 @@
                 <a:solidFill>
                   <a:srgbClr val="17212B"/>
                 </a:solidFill>
-                <a:latin typeface="IBM Plex Sans" pitchFamily="34" charset="0"/>
-                <a:ea typeface="IBM Plex Sans" pitchFamily="34" charset="-122"/>
-                <a:cs typeface="IBM Plex Sans" pitchFamily="34" charset="-120"/>
+                <a:latin typeface="Arial" pitchFamily="34" charset="0"/>
+                <a:ea typeface="Arial" pitchFamily="34" charset="-122"/>
+                <a:cs typeface="Arial" pitchFamily="34" charset="-120"/>
               </a:rPr>
               <a:t>Map each code to its chapter</a:t>
             </a:r>
@@ -19170,8 +19465,8 @@
         </p:nvSpPr>
         <p:spPr>
           <a:xfrm>
-            <a:off x="812800" y="2889796"/>
-            <a:ext cx="6802120" cy="2494161"/>
+            <a:off x="812800" y="3085753"/>
+            <a:ext cx="6802120" cy="2905621"/>
           </a:xfrm>
           <a:prstGeom prst="rect">
             <a:avLst/>
@@ -19196,9 +19491,9 @@
                 <a:solidFill>
                   <a:srgbClr val="17212B"/>
                 </a:solidFill>
-                <a:latin typeface="IBM Plex Mono" pitchFamily="49" charset="0"/>
-                <a:ea typeface="IBM Plex Mono" pitchFamily="49" charset="-122"/>
-                <a:cs typeface="IBM Plex Mono" pitchFamily="49" charset="-120"/>
+                <a:latin typeface="Courier New" pitchFamily="49" charset="0"/>
+                <a:ea typeface="Courier New" pitchFamily="49" charset="-122"/>
+                <a:cs typeface="Courier New" pitchFamily="49" charset="-120"/>
               </a:rPr>
               <a:t>ICD10_CHAPTERS = [</a:t>
             </a:r>
@@ -19216,9 +19511,9 @@
                 <a:solidFill>
                   <a:srgbClr val="17212B"/>
                 </a:solidFill>
-                <a:latin typeface="IBM Plex Mono" pitchFamily="49" charset="0"/>
-                <a:ea typeface="IBM Plex Mono" pitchFamily="49" charset="-122"/>
-                <a:cs typeface="IBM Plex Mono" pitchFamily="49" charset="-120"/>
+                <a:latin typeface="Courier New" pitchFamily="49" charset="0"/>
+                <a:ea typeface="Courier New" pitchFamily="49" charset="-122"/>
+                <a:cs typeface="Courier New" pitchFamily="49" charset="-120"/>
               </a:rPr>
               <a:t>    ("A00", "B99", "Infectious"),</a:t>
             </a:r>
@@ -19236,9 +19531,9 @@
                 <a:solidFill>
                   <a:srgbClr val="17212B"/>
                 </a:solidFill>
-                <a:latin typeface="IBM Plex Mono" pitchFamily="49" charset="0"/>
-                <a:ea typeface="IBM Plex Mono" pitchFamily="49" charset="-122"/>
-                <a:cs typeface="IBM Plex Mono" pitchFamily="49" charset="-120"/>
+                <a:latin typeface="Courier New" pitchFamily="49" charset="0"/>
+                <a:ea typeface="Courier New" pitchFamily="49" charset="-122"/>
+                <a:cs typeface="Courier New" pitchFamily="49" charset="-120"/>
               </a:rPr>
               <a:t>    </a:t>
             </a:r>
@@ -19247,9 +19542,9 @@
                 <a:solidFill>
                   <a:srgbClr val="5C6772"/>
                 </a:solidFill>
-                <a:latin typeface="IBM Plex Mono" pitchFamily="49" charset="0"/>
-                <a:ea typeface="IBM Plex Mono" pitchFamily="49" charset="-122"/>
-                <a:cs typeface="IBM Plex Mono" pitchFamily="49" charset="-120"/>
+                <a:latin typeface="Courier New" pitchFamily="49" charset="0"/>
+                <a:ea typeface="Courier New" pitchFamily="49" charset="-122"/>
+                <a:cs typeface="Courier New" pitchFamily="49" charset="-120"/>
               </a:rPr>
               <a:t># ... 22 chapters in all</a:t>
             </a:r>
@@ -19267,11 +19562,11 @@
                 <a:solidFill>
                   <a:srgbClr val="17212B"/>
                 </a:solidFill>
-                <a:latin typeface="IBM Plex Mono" pitchFamily="49" charset="0"/>
-                <a:ea typeface="IBM Plex Mono" pitchFamily="49" charset="-122"/>
-                <a:cs typeface="IBM Plex Mono" pitchFamily="49" charset="-120"/>
-              </a:rPr>
-              <a:t>    ("R00", "R99", "Symptoms &amp; signs"),</a:t>
+                <a:latin typeface="Courier New" pitchFamily="49" charset="0"/>
+                <a:ea typeface="Courier New" pitchFamily="49" charset="-122"/>
+                <a:cs typeface="Courier New" pitchFamily="49" charset="-120"/>
+              </a:rPr>
+              <a:t>    ("R00", "R99", "Symptoms &amp; signs"), ...]</a:t>
             </a:r>
             <a:endParaRPr lang="en-US" sz="1200" dirty="0"/>
           </a:p>
@@ -19287,11 +19582,11 @@
                 <a:solidFill>
                   <a:srgbClr val="17212B"/>
                 </a:solidFill>
-                <a:latin typeface="IBM Plex Mono" pitchFamily="49" charset="0"/>
-                <a:ea typeface="IBM Plex Mono" pitchFamily="49" charset="-122"/>
-                <a:cs typeface="IBM Plex Mono" pitchFamily="49" charset="-120"/>
-              </a:rPr>
-              <a:t>    ("S00", "T88", "Injury &amp; poisoning"), ...]</a:t>
+                <a:latin typeface="Courier New" pitchFamily="49" charset="0"/>
+                <a:ea typeface="Courier New" pitchFamily="49" charset="-122"/>
+                <a:cs typeface="Courier New" pitchFamily="49" charset="-120"/>
+              </a:rPr>
+              <a:t>def clean_code(code: str) -&gt; str:</a:t>
             </a:r>
             <a:endParaRPr lang="en-US" sz="1200" dirty="0"/>
           </a:p>
@@ -19302,6 +19597,17 @@
               </a:lnSpc>
               <a:buNone/>
             </a:pPr>
+            <a:r>
+              <a:rPr lang="en-US" sz="1200" dirty="0">
+                <a:solidFill>
+                  <a:srgbClr val="17212B"/>
+                </a:solidFill>
+                <a:latin typeface="Courier New" pitchFamily="49" charset="0"/>
+                <a:ea typeface="Courier New" pitchFamily="49" charset="-122"/>
+                <a:cs typeface="Courier New" pitchFamily="49" charset="-120"/>
+              </a:rPr>
+              <a:t>    return code.strip().upper().replace(".", "")</a:t>
+            </a:r>
             <a:endParaRPr lang="en-US" sz="1200" dirty="0"/>
           </a:p>
           <a:p>
@@ -19316,11 +19622,11 @@
                 <a:solidFill>
                   <a:srgbClr val="17212B"/>
                 </a:solidFill>
-                <a:latin typeface="IBM Plex Mono" pitchFamily="49" charset="0"/>
-                <a:ea typeface="IBM Plex Mono" pitchFamily="49" charset="-122"/>
-                <a:cs typeface="IBM Plex Mono" pitchFamily="49" charset="-120"/>
-              </a:rPr>
-              <a:t>def icd10_chapter(code):</a:t>
+                <a:latin typeface="Courier New" pitchFamily="49" charset="0"/>
+                <a:ea typeface="Courier New" pitchFamily="49" charset="-122"/>
+                <a:cs typeface="Courier New" pitchFamily="49" charset="-120"/>
+              </a:rPr>
+              <a:t>def icd10_chapter(code: str) -&gt; str:</a:t>
             </a:r>
             <a:endParaRPr lang="en-US" sz="1200" dirty="0"/>
           </a:p>
@@ -19336,9 +19642,9 @@
                 <a:solidFill>
                   <a:srgbClr val="17212B"/>
                 </a:solidFill>
-                <a:latin typeface="IBM Plex Mono" pitchFamily="49" charset="0"/>
-                <a:ea typeface="IBM Plex Mono" pitchFamily="49" charset="-122"/>
-                <a:cs typeface="IBM Plex Mono" pitchFamily="49" charset="-120"/>
+                <a:latin typeface="Courier New" pitchFamily="49" charset="0"/>
+                <a:ea typeface="Courier New" pitchFamily="49" charset="-122"/>
+                <a:cs typeface="Courier New" pitchFamily="49" charset="-120"/>
               </a:rPr>
               <a:t>    category = clean_code(code)[:3]</a:t>
             </a:r>
@@ -19356,9 +19662,49 @@
                 <a:solidFill>
                   <a:srgbClr val="17212B"/>
                 </a:solidFill>
-                <a:latin typeface="IBM Plex Mono" pitchFamily="49" charset="0"/>
-                <a:ea typeface="IBM Plex Mono" pitchFamily="49" charset="-122"/>
-                <a:cs typeface="IBM Plex Mono" pitchFamily="49" charset="-120"/>
+                <a:latin typeface="Courier New" pitchFamily="49" charset="0"/>
+                <a:ea typeface="Courier New" pitchFamily="49" charset="-122"/>
+                <a:cs typeface="Courier New" pitchFamily="49" charset="-120"/>
+              </a:rPr>
+              <a:t>    if not re.fullmatch(r"[A-Z]\d[0-9A-Z]", category):</a:t>
+            </a:r>
+            <a:endParaRPr lang="en-US" sz="1200" dirty="0"/>
+          </a:p>
+          <a:p>
+            <a:pPr algn="l" indent="0" marL="0">
+              <a:lnSpc>
+                <a:spcPts val="1620"/>
+              </a:lnSpc>
+              <a:buNone/>
+            </a:pPr>
+            <a:r>
+              <a:rPr lang="en-US" sz="1200" dirty="0">
+                <a:solidFill>
+                  <a:srgbClr val="17212B"/>
+                </a:solidFill>
+                <a:latin typeface="Courier New" pitchFamily="49" charset="0"/>
+                <a:ea typeface="Courier New" pitchFamily="49" charset="-122"/>
+                <a:cs typeface="Courier New" pitchFamily="49" charset="-120"/>
+              </a:rPr>
+              <a:t>        return "Unknown"</a:t>
+            </a:r>
+            <a:endParaRPr lang="en-US" sz="1200" dirty="0"/>
+          </a:p>
+          <a:p>
+            <a:pPr algn="l" indent="0" marL="0">
+              <a:lnSpc>
+                <a:spcPts val="1620"/>
+              </a:lnSpc>
+              <a:buNone/>
+            </a:pPr>
+            <a:r>
+              <a:rPr lang="en-US" sz="1200" dirty="0">
+                <a:solidFill>
+                  <a:srgbClr val="17212B"/>
+                </a:solidFill>
+                <a:latin typeface="Courier New" pitchFamily="49" charset="0"/>
+                <a:ea typeface="Courier New" pitchFamily="49" charset="-122"/>
+                <a:cs typeface="Courier New" pitchFamily="49" charset="-120"/>
               </a:rPr>
               <a:t>    for lo, hi, name in ICD10_CHAPTERS:</a:t>
             </a:r>
@@ -19376,9 +19722,9 @@
                 <a:solidFill>
                   <a:srgbClr val="17212B"/>
                 </a:solidFill>
-                <a:latin typeface="IBM Plex Mono" pitchFamily="49" charset="0"/>
-                <a:ea typeface="IBM Plex Mono" pitchFamily="49" charset="-122"/>
-                <a:cs typeface="IBM Plex Mono" pitchFamily="49" charset="-120"/>
+                <a:latin typeface="Courier New" pitchFamily="49" charset="0"/>
+                <a:ea typeface="Courier New" pitchFamily="49" charset="-122"/>
+                <a:cs typeface="Courier New" pitchFamily="49" charset="-120"/>
               </a:rPr>
               <a:t>        if lo &lt;= category &lt;= hi:</a:t>
             </a:r>
@@ -19396,9 +19742,9 @@
                 <a:solidFill>
                   <a:srgbClr val="17212B"/>
                 </a:solidFill>
-                <a:latin typeface="IBM Plex Mono" pitchFamily="49" charset="0"/>
-                <a:ea typeface="IBM Plex Mono" pitchFamily="49" charset="-122"/>
-                <a:cs typeface="IBM Plex Mono" pitchFamily="49" charset="-120"/>
+                <a:latin typeface="Courier New" pitchFamily="49" charset="0"/>
+                <a:ea typeface="Courier New" pitchFamily="49" charset="-122"/>
+                <a:cs typeface="Courier New" pitchFamily="49" charset="-120"/>
               </a:rPr>
               <a:t>            return name</a:t>
             </a:r>
@@ -19416,9 +19762,9 @@
                 <a:solidFill>
                   <a:srgbClr val="17212B"/>
                 </a:solidFill>
-                <a:latin typeface="IBM Plex Mono" pitchFamily="49" charset="0"/>
-                <a:ea typeface="IBM Plex Mono" pitchFamily="49" charset="-122"/>
-                <a:cs typeface="IBM Plex Mono" pitchFamily="49" charset="-120"/>
+                <a:latin typeface="Courier New" pitchFamily="49" charset="0"/>
+                <a:ea typeface="Courier New" pitchFamily="49" charset="-122"/>
+                <a:cs typeface="Courier New" pitchFamily="49" charset="-120"/>
               </a:rPr>
               <a:t>    return "Unknown"</a:t>
             </a:r>
@@ -19434,7 +19780,7 @@
         </p:nvSpPr>
         <p:spPr>
           <a:xfrm>
-            <a:off x="7823200" y="2458641"/>
+            <a:off x="7823200" y="2654598"/>
             <a:ext cx="3556000" cy="0"/>
           </a:xfrm>
           <a:prstGeom prst="line">
@@ -19457,7 +19803,7 @@
         </p:nvSpPr>
         <p:spPr>
           <a:xfrm>
-            <a:off x="7823200" y="2569766"/>
+            <a:off x="7823200" y="2765723"/>
             <a:ext cx="3662680" cy="238720"/>
           </a:xfrm>
           <a:prstGeom prst="rect">
@@ -19483,9 +19829,9 @@
                 <a:solidFill>
                   <a:srgbClr val="0E6E6C"/>
                 </a:solidFill>
-                <a:latin typeface="IBM Plex Sans" pitchFamily="34" charset="0"/>
-                <a:ea typeface="IBM Plex Sans" pitchFamily="34" charset="-122"/>
-                <a:cs typeface="IBM Plex Sans" pitchFamily="34" charset="-120"/>
+                <a:latin typeface="Arial" pitchFamily="34" charset="0"/>
+                <a:ea typeface="Arial" pitchFamily="34" charset="-122"/>
+                <a:cs typeface="Arial" pitchFamily="34" charset="-120"/>
               </a:rPr>
               <a:t>YOU SHOULD SEE</a:t>
             </a:r>
@@ -19501,7 +19847,7 @@
         </p:nvSpPr>
         <p:spPr>
           <a:xfrm>
-            <a:off x="7823200" y="2859286"/>
+            <a:off x="7823200" y="3055243"/>
             <a:ext cx="3662680" cy="436860"/>
           </a:xfrm>
           <a:prstGeom prst="rect">
@@ -19527,9 +19873,9 @@
                 <a:solidFill>
                   <a:srgbClr val="17212B"/>
                 </a:solidFill>
-                <a:latin typeface="IBM Plex Mono" pitchFamily="49" charset="0"/>
-                <a:ea typeface="IBM Plex Mono" pitchFamily="49" charset="-122"/>
-                <a:cs typeface="IBM Plex Mono" pitchFamily="49" charset="-120"/>
+                <a:latin typeface="Courier New" pitchFamily="49" charset="0"/>
+                <a:ea typeface="Courier New" pitchFamily="49" charset="-122"/>
+                <a:cs typeface="Courier New" pitchFamily="49" charset="-120"/>
               </a:rPr>
               <a:t>Dropped 99 ICD-9 stays → 122 ICD-10 stays</a:t>
             </a:r>
@@ -19545,7 +19891,7 @@
         </p:nvSpPr>
         <p:spPr>
           <a:xfrm>
-            <a:off x="7826375" y="3350121"/>
+            <a:off x="7826375" y="3546078"/>
             <a:ext cx="3549650" cy="2273300"/>
           </a:xfrm>
           <a:prstGeom prst="roundRect">
@@ -19579,7 +19925,7 @@
         </p:blipFill>
         <p:spPr>
           <a:xfrm>
-            <a:off x="7905750" y="3429496"/>
+            <a:off x="7905750" y="3625453"/>
             <a:ext cx="3048000" cy="2114550"/>
           </a:xfrm>
           <a:prstGeom prst="rect">
@@ -19621,11 +19967,11 @@
                 <a:solidFill>
                   <a:srgbClr val="5C6772"/>
                 </a:solidFill>
-                <a:latin typeface="IBM Plex Sans" pitchFamily="34" charset="0"/>
-                <a:ea typeface="IBM Plex Sans" pitchFamily="34" charset="-122"/>
-                <a:cs typeface="IBM Plex Sans" pitchFamily="34" charset="-120"/>
-              </a:rPr>
-              <a:t>Notebook cells 11–13</a:t>
+                <a:latin typeface="Arial" pitchFamily="34" charset="0"/>
+                <a:ea typeface="Arial" pitchFamily="34" charset="-122"/>
+                <a:cs typeface="Arial" pitchFamily="34" charset="-120"/>
+              </a:rPr>
+              <a:t>Notebook cells [7]–[9]</a:t>
             </a:r>
             <a:endParaRPr lang="en-US" sz="1200" dirty="0"/>
           </a:p>
@@ -19665,9 +20011,9 @@
                 <a:solidFill>
                   <a:srgbClr val="5C6772"/>
                 </a:solidFill>
-                <a:latin typeface="IBM Plex Sans" pitchFamily="34" charset="0"/>
-                <a:ea typeface="IBM Plex Sans" pitchFamily="34" charset="-122"/>
-                <a:cs typeface="IBM Plex Sans" pitchFamily="34" charset="-120"/>
+                <a:latin typeface="Arial" pitchFamily="34" charset="0"/>
+                <a:ea typeface="Arial" pitchFamily="34" charset="-122"/>
+                <a:cs typeface="Arial" pitchFamily="34" charset="-120"/>
               </a:rPr>
               <a:t>9</a:t>
             </a:r>
@@ -19726,7 +20072,7 @@
     </a:clrScheme>
     <a:fontScheme name="Classifying ED Visits with an LLM">
       <a:majorFont>
-        <a:latin typeface="IBM Plex Sans"/>
+        <a:latin typeface="Arial"/>
         <a:ea typeface=""/>
         <a:cs typeface=""/>
         <a:font script="Jpan" typeface="游ゴシック Light"/>
@@ -19778,7 +20124,7 @@
         <a:font script="Tfng" typeface="Ebrima"/>
       </a:majorFont>
       <a:minorFont>
-        <a:latin typeface="IBM Plex Sans"/>
+        <a:latin typeface="Arial"/>
         <a:ea typeface=""/>
         <a:cs typeface=""/>
         <a:font script="Jpan" typeface="游ゴシック"/>

--- a/Classifying ED Visits with an LLM.pptx
+++ b/Classifying ED Visits with an LLM.pptx
@@ -1224,7 +1224,7 @@
           <a:p>
             <a:r>
               <a:rPr lang="en-US" dirty="0"/>
-              <a:t>Zero-shot got 31% chapter accuracy, few-shot got 30% and chain-of-thought got 24%. Random guessing across 22 chapters would get under 5%, and always guessing Symptoms &amp; signs gets about 26%. So the model is picking up something from the triage text, but it barely beats the simplest baseline. With only 94 stays the 95% interval is about ±10 points, so I wouldn't read much into the gaps. The thing that surprised me is that few-shot didn't help accuracy. It did cut invented codes from 49% to 43%, so I think the examples teach the format more than the diagnosis. The confusion matrix is for zero-shot, and the biggest miss is 7 Symptoms stays it called Circulatory.</a:t>
+              <a:t>Zero-shot got 31% chapter accuracy, few-shot got 30% and chain-of-thought got 24%. Random guessing across 22 chapters would get under 5%, and always guessing Symptoms &amp; signs gets about 26%. So the model is picking up something from the triage text, but it barely beats the simplest baseline. With only 94 stays the 95% interval is about ±10 points, so I wouldn't read much into the gaps. The thing that surprised me is that few-shot didn't help accuracy. Invented codes dropped a little, from 49% to 43%, but that's inside the same noise, so the most I'd say is the examples might teach the format more than the diagnosis. The confusion matrix is for zero-shot, and the biggest miss is 7 Symptoms stays it called Circulatory.</a:t>
             </a:r>
             <a:endParaRPr lang="en-US" dirty="0"/>
           </a:p>
@@ -2016,7 +2016,7 @@
           <a:p>
             <a:r>
               <a:rPr lang="en-US" dirty="0"/>
-              <a:t>Here I build one row per ED stay from five demo tables. What you know at triage isn't only in the triage table, so sex and arrival transport come from edstays and age comes from patients. The label is the primary diagnosis, which is the one with seq_num 1. I leave out disposition, outtime, hadm_id and the other diagnoses because they're recorded later and would give the answer away. Age is approximate since anchor_age is the patient's age in their anchor year. Picking the columns before each merge also keeps pandas from creating duplicate subject_id and gender columns.</a:t>
+              <a:t>Here I build one row per ED stay from five demo tables. What you know at triage isn't only in the triage table, so sex and arrival transport come from edstays and age comes from patients. The label is the primary diagnosis, which is the one with seq_num 1. I leave out disposition, outtime, hadm_id and the other diagnoses because they're recorded later and would give the answer away. Age is approximate since anchor_age is the patient's age in their anchor year. The valid_icd10 set is what step 6 checks the model's codes against. Picking the columns before each merge also keeps pandas from creating duplicate subject_id and gender columns.</a:t>
             </a:r>
             <a:endParaRPr lang="en-US" dirty="0"/>
           </a:p>
@@ -11513,7 +11513,7 @@
                 <a:ea typeface="Arial" pitchFamily="34" charset="-122"/>
                 <a:cs typeface="Arial" pitchFamily="34" charset="-120"/>
               </a:rPr>
-              <a:t>Few-shot invented fewer codes, which suggests the examples teach the code format more than the diagnosis.</a:t>
+              <a:t>Few-shot invented slightly fewer codes, which hints that the examples teach the code format more than the diagnosis.</a:t>
             </a:r>
             <a:endParaRPr lang="en-US" sz="1200" dirty="0"/>
           </a:p>
@@ -17630,28 +17630,28 @@
         <p:spPr>
           <a:xfrm>
             <a:off x="812800" y="812800"/>
-            <a:ext cx="10883392" cy="227558"/>
-          </a:xfrm>
-          <a:prstGeom prst="rect">
-            <a:avLst/>
-          </a:prstGeom>
-          <a:noFill/>
-          <a:ln/>
-        </p:spPr>
-        <p:txBody>
-          <a:bodyPr wrap="square" lIns="0" tIns="0" rIns="0" bIns="0" rtlCol="0" anchor="t">
-            <a:normAutofit/>
-          </a:bodyPr>
-          <a:lstStyle/>
-          <a:p>
-            <a:pPr algn="l" indent="0" marL="0">
-              <a:lnSpc>
-                <a:spcPts val="1622"/>
-              </a:lnSpc>
-              <a:buNone/>
-            </a:pPr>
-            <a:r>
-              <a:rPr lang="en-US" sz="1159" spc="100" kern="0" dirty="0">
+            <a:ext cx="10883392" cy="223490"/>
+          </a:xfrm>
+          <a:prstGeom prst="rect">
+            <a:avLst/>
+          </a:prstGeom>
+          <a:noFill/>
+          <a:ln/>
+        </p:spPr>
+        <p:txBody>
+          <a:bodyPr wrap="square" lIns="0" tIns="0" rIns="0" bIns="0" rtlCol="0" anchor="t">
+            <a:normAutofit/>
+          </a:bodyPr>
+          <a:lstStyle/>
+          <a:p>
+            <a:pPr algn="l" indent="0" marL="0">
+              <a:lnSpc>
+                <a:spcPts val="1570"/>
+              </a:lnSpc>
+              <a:buNone/>
+            </a:pPr>
+            <a:r>
+              <a:rPr lang="en-US" sz="1121" spc="100" kern="0" dirty="0">
                 <a:solidFill>
                   <a:srgbClr val="0E6E6C"/>
                 </a:solidFill>
@@ -17661,7 +17661,7 @@
               </a:rPr>
               <a:t>DATA (STEP 2 OF 7)</a:t>
             </a:r>
-            <a:endParaRPr lang="en-US" sz="1159" dirty="0"/>
+            <a:endParaRPr lang="en-US" sz="1121" dirty="0"/>
           </a:p>
         </p:txBody>
       </p:sp>
@@ -17675,29 +17675,29 @@
         </p:nvSpPr>
         <p:spPr>
           <a:xfrm>
-            <a:off x="812800" y="1091158"/>
-            <a:ext cx="10464800" cy="744984"/>
-          </a:xfrm>
-          <a:prstGeom prst="rect">
-            <a:avLst/>
-          </a:prstGeom>
-          <a:noFill/>
-          <a:ln/>
-        </p:spPr>
-        <p:txBody>
-          <a:bodyPr wrap="square" lIns="0" tIns="0" rIns="0" bIns="0" rtlCol="0" anchor="t">
-            <a:normAutofit/>
-          </a:bodyPr>
-          <a:lstStyle/>
-          <a:p>
-            <a:pPr algn="l" indent="0" marL="0">
-              <a:lnSpc>
-                <a:spcPts val="2831"/>
-              </a:lnSpc>
-              <a:buNone/>
-            </a:pPr>
-            <a:r>
-              <a:rPr lang="en-US" sz="2462" b="1" i="0" dirty="0">
+            <a:off x="812800" y="1087090"/>
+            <a:ext cx="10464800" cy="730597"/>
+          </a:xfrm>
+          <a:prstGeom prst="rect">
+            <a:avLst/>
+          </a:prstGeom>
+          <a:noFill/>
+          <a:ln/>
+        </p:spPr>
+        <p:txBody>
+          <a:bodyPr wrap="square" lIns="0" tIns="0" rIns="0" bIns="0" rtlCol="0" anchor="t">
+            <a:normAutofit/>
+          </a:bodyPr>
+          <a:lstStyle/>
+          <a:p>
+            <a:pPr algn="l" indent="0" marL="0">
+              <a:lnSpc>
+                <a:spcPts val="2784"/>
+              </a:lnSpc>
+              <a:buNone/>
+            </a:pPr>
+            <a:r>
+              <a:rPr lang="en-US" sz="2421" b="1" i="0" dirty="0">
                 <a:solidFill>
                   <a:srgbClr val="17212B"/>
                 </a:solidFill>
@@ -17707,7 +17707,7 @@
               </a:rPr>
               <a:t>Next, we join five demo tables into one row per ED stay and keep only the fields known at triage</a:t>
             </a:r>
-            <a:endParaRPr lang="en-US" sz="2462" dirty="0"/>
+            <a:endParaRPr lang="en-US" sz="2421" dirty="0"/>
           </a:p>
         </p:txBody>
       </p:sp>
@@ -17719,8 +17719,8 @@
         </p:nvSpPr>
         <p:spPr>
           <a:xfrm>
-            <a:off x="825500" y="1886942"/>
-            <a:ext cx="0" cy="487363"/>
+            <a:off x="825500" y="1868488"/>
+            <a:ext cx="0" cy="477639"/>
           </a:xfrm>
           <a:prstGeom prst="line">
             <a:avLst/>
@@ -17742,29 +17742,29 @@
         </p:nvSpPr>
         <p:spPr>
           <a:xfrm>
-            <a:off x="965200" y="1886942"/>
-            <a:ext cx="10307828" cy="512762"/>
-          </a:xfrm>
-          <a:prstGeom prst="rect">
-            <a:avLst/>
-          </a:prstGeom>
-          <a:noFill/>
-          <a:ln/>
-        </p:spPr>
-        <p:txBody>
-          <a:bodyPr wrap="square" lIns="0" tIns="0" rIns="0" bIns="0" rtlCol="0" anchor="t">
-            <a:normAutofit/>
-          </a:bodyPr>
-          <a:lstStyle/>
-          <a:p>
-            <a:pPr algn="l" indent="0" marL="0">
-              <a:lnSpc>
-                <a:spcPts val="1936"/>
-              </a:lnSpc>
-              <a:buNone/>
-            </a:pPr>
-            <a:r>
-              <a:rPr lang="en-US" sz="1434" dirty="0">
+            <a:off x="965200" y="1868488"/>
+            <a:ext cx="10307828" cy="503039"/>
+          </a:xfrm>
+          <a:prstGeom prst="rect">
+            <a:avLst/>
+          </a:prstGeom>
+          <a:noFill/>
+          <a:ln/>
+        </p:spPr>
+        <p:txBody>
+          <a:bodyPr wrap="square" lIns="0" tIns="0" rIns="0" bIns="0" rtlCol="0" anchor="t">
+            <a:normAutofit/>
+          </a:bodyPr>
+          <a:lstStyle/>
+          <a:p>
+            <a:pPr algn="l" indent="0" marL="0">
+              <a:lnSpc>
+                <a:spcPts val="1886"/>
+              </a:lnSpc>
+              <a:buNone/>
+            </a:pPr>
+            <a:r>
+              <a:rPr lang="en-US" sz="1397" dirty="0">
                 <a:solidFill>
                   <a:srgbClr val="3A4651"/>
                 </a:solidFill>
@@ -17774,7 +17774,7 @@
               </a:rPr>
               <a:t>The cohort has 221 stays from 63 patients, and we leave out anything recorded after the diagnosis so the answer doesn't leak into the prompt</a:t>
             </a:r>
-            <a:endParaRPr lang="en-US" sz="1434" dirty="0"/>
+            <a:endParaRPr lang="en-US" sz="1397" dirty="0"/>
           </a:p>
         </p:txBody>
       </p:sp>
@@ -17786,7 +17786,7 @@
         </p:nvSpPr>
         <p:spPr>
           <a:xfrm>
-            <a:off x="812800" y="2688630"/>
+            <a:off x="812800" y="2660452"/>
             <a:ext cx="6604000" cy="0"/>
           </a:xfrm>
           <a:prstGeom prst="line">
@@ -17809,7 +17809,7 @@
         </p:nvSpPr>
         <p:spPr>
           <a:xfrm>
-            <a:off x="812800" y="2799755"/>
+            <a:off x="812800" y="2771577"/>
             <a:ext cx="6802120" cy="269230"/>
           </a:xfrm>
           <a:prstGeom prst="rect">
@@ -17853,24 +17853,24 @@
         </p:nvSpPr>
         <p:spPr>
           <a:xfrm>
-            <a:off x="812800" y="3119785"/>
-            <a:ext cx="6802120" cy="2905621"/>
-          </a:xfrm>
-          <a:prstGeom prst="rect">
-            <a:avLst/>
-          </a:prstGeom>
-          <a:noFill/>
-          <a:ln/>
-        </p:spPr>
-        <p:txBody>
-          <a:bodyPr wrap="square" lIns="0" tIns="0" rIns="0" bIns="0" rtlCol="0" anchor="t">
-            <a:normAutofit/>
-          </a:bodyPr>
-          <a:lstStyle/>
-          <a:p>
-            <a:pPr algn="l" indent="0" marL="0">
-              <a:lnSpc>
-                <a:spcPts val="1620"/>
+            <a:off x="812800" y="3091607"/>
+            <a:ext cx="6802120" cy="2996754"/>
+          </a:xfrm>
+          <a:prstGeom prst="rect">
+            <a:avLst/>
+          </a:prstGeom>
+          <a:noFill/>
+          <a:ln/>
+        </p:spPr>
+        <p:txBody>
+          <a:bodyPr wrap="square" lIns="0" tIns="0" rIns="0" bIns="0" rtlCol="0" anchor="t">
+            <a:normAutofit/>
+          </a:bodyPr>
+          <a:lstStyle/>
+          <a:p>
+            <a:pPr algn="l" indent="0" marL="0">
+              <a:lnSpc>
+                <a:spcPts val="1560"/>
               </a:lnSpc>
               <a:buNone/>
             </a:pPr>
@@ -17890,7 +17890,7 @@
           <a:p>
             <a:pPr algn="l" indent="0" marL="0">
               <a:lnSpc>
-                <a:spcPts val="1620"/>
+                <a:spcPts val="1560"/>
               </a:lnSpc>
               <a:buNone/>
             </a:pPr>
@@ -17910,7 +17910,7 @@
           <a:p>
             <a:pPr algn="l" indent="0" marL="0">
               <a:lnSpc>
-                <a:spcPts val="1620"/>
+                <a:spcPts val="1560"/>
               </a:lnSpc>
               <a:buNone/>
             </a:pPr>
@@ -17930,7 +17930,7 @@
           <a:p>
             <a:pPr algn="l" indent="0" marL="0">
               <a:lnSpc>
-                <a:spcPts val="1620"/>
+                <a:spcPts val="1560"/>
               </a:lnSpc>
               <a:buNone/>
             </a:pPr>
@@ -17950,7 +17950,7 @@
           <a:p>
             <a:pPr algn="l" indent="0" marL="0">
               <a:lnSpc>
-                <a:spcPts val="1620"/>
+                <a:spcPts val="1560"/>
               </a:lnSpc>
               <a:buNone/>
             </a:pPr>
@@ -17970,16 +17970,7 @@
           <a:p>
             <a:pPr algn="l" indent="0" marL="0">
               <a:lnSpc>
-                <a:spcPts val="1620"/>
-              </a:lnSpc>
-              <a:buNone/>
-            </a:pPr>
-            <a:endParaRPr lang="en-US" sz="1200" dirty="0"/>
-          </a:p>
-          <a:p>
-            <a:pPr algn="l" indent="0" marL="0">
-              <a:lnSpc>
-                <a:spcPts val="1620"/>
+                <a:spcPts val="1560"/>
               </a:lnSpc>
               <a:buNone/>
             </a:pPr>
@@ -17992,14 +17983,14 @@
                 <a:ea typeface="Courier New" pitchFamily="49" charset="-122"/>
                 <a:cs typeface="Courier New" pitchFamily="49" charset="-120"/>
               </a:rPr>
-              <a:t>primary = diagnosis.loc[diagnosis.seq_num == 1,</a:t>
-            </a:r>
-            <a:endParaRPr lang="en-US" sz="1200" dirty="0"/>
-          </a:p>
-          <a:p>
-            <a:pPr algn="l" indent="0" marL="0">
-              <a:lnSpc>
-                <a:spcPts val="1620"/>
+              <a:t>valid_icd10 = set(d_icd.loc[d_icd.icd_version == 10,</a:t>
+            </a:r>
+            <a:endParaRPr lang="en-US" sz="1200" dirty="0"/>
+          </a:p>
+          <a:p>
+            <a:pPr algn="l" indent="0" marL="0">
+              <a:lnSpc>
+                <a:spcPts val="1560"/>
               </a:lnSpc>
               <a:buNone/>
             </a:pPr>
@@ -18012,14 +18003,14 @@
                 <a:ea typeface="Courier New" pitchFamily="49" charset="-122"/>
                 <a:cs typeface="Courier New" pitchFamily="49" charset="-120"/>
               </a:rPr>
-              <a:t>    ["stay_id", "icd_code", "icd_version", "icd_title"]]</a:t>
-            </a:r>
-            <a:endParaRPr lang="en-US" sz="1200" dirty="0"/>
-          </a:p>
-          <a:p>
-            <a:pPr algn="l" indent="0" marL="0">
-              <a:lnSpc>
-                <a:spcPts val="1620"/>
+              <a:t>                            "icd_code"].str.strip())</a:t>
+            </a:r>
+            <a:endParaRPr lang="en-US" sz="1200" dirty="0"/>
+          </a:p>
+          <a:p>
+            <a:pPr algn="l" indent="0" marL="0">
+              <a:lnSpc>
+                <a:spcPts val="1560"/>
               </a:lnSpc>
               <a:buNone/>
             </a:pPr>
@@ -18032,14 +18023,14 @@
                 <a:ea typeface="Courier New" pitchFamily="49" charset="-122"/>
                 <a:cs typeface="Courier New" pitchFamily="49" charset="-120"/>
               </a:rPr>
-              <a:t>cohort = (edstays[["subject_id", "stay_id",</a:t>
-            </a:r>
-            <a:endParaRPr lang="en-US" sz="1200" dirty="0"/>
-          </a:p>
-          <a:p>
-            <a:pPr algn="l" indent="0" marL="0">
-              <a:lnSpc>
-                <a:spcPts val="1620"/>
+              <a:t>primary = diagnosis.loc[diagnosis.seq_num == 1,</a:t>
+            </a:r>
+            <a:endParaRPr lang="en-US" sz="1200" dirty="0"/>
+          </a:p>
+          <a:p>
+            <a:pPr algn="l" indent="0" marL="0">
+              <a:lnSpc>
+                <a:spcPts val="1560"/>
               </a:lnSpc>
               <a:buNone/>
             </a:pPr>
@@ -18052,14 +18043,14 @@
                 <a:ea typeface="Courier New" pitchFamily="49" charset="-122"/>
                 <a:cs typeface="Courier New" pitchFamily="49" charset="-120"/>
               </a:rPr>
-              <a:t>                   "gender", "arrival_transport"]]</a:t>
-            </a:r>
-            <a:endParaRPr lang="en-US" sz="1200" dirty="0"/>
-          </a:p>
-          <a:p>
-            <a:pPr algn="l" indent="0" marL="0">
-              <a:lnSpc>
-                <a:spcPts val="1620"/>
+              <a:t>    ["stay_id", "icd_code", "icd_version", "icd_title"]]</a:t>
+            </a:r>
+            <a:endParaRPr lang="en-US" sz="1200" dirty="0"/>
+          </a:p>
+          <a:p>
+            <a:pPr algn="l" indent="0" marL="0">
+              <a:lnSpc>
+                <a:spcPts val="1560"/>
               </a:lnSpc>
               <a:buNone/>
             </a:pPr>
@@ -18072,14 +18063,14 @@
                 <a:ea typeface="Courier New" pitchFamily="49" charset="-122"/>
                 <a:cs typeface="Courier New" pitchFamily="49" charset="-120"/>
               </a:rPr>
-              <a:t>    .merge(triage.drop(columns=["subject_id"], errors="ignore"),</a:t>
-            </a:r>
-            <a:endParaRPr lang="en-US" sz="1200" dirty="0"/>
-          </a:p>
-          <a:p>
-            <a:pPr algn="l" indent="0" marL="0">
-              <a:lnSpc>
-                <a:spcPts val="1620"/>
+              <a:t>cohort = (edstays[["subject_id", "stay_id",</a:t>
+            </a:r>
+            <a:endParaRPr lang="en-US" sz="1200" dirty="0"/>
+          </a:p>
+          <a:p>
+            <a:pPr algn="l" indent="0" marL="0">
+              <a:lnSpc>
+                <a:spcPts val="1560"/>
               </a:lnSpc>
               <a:buNone/>
             </a:pPr>
@@ -18092,14 +18083,14 @@
                 <a:ea typeface="Courier New" pitchFamily="49" charset="-122"/>
                 <a:cs typeface="Courier New" pitchFamily="49" charset="-120"/>
               </a:rPr>
-              <a:t>           on="stay_id")</a:t>
-            </a:r>
-            <a:endParaRPr lang="en-US" sz="1200" dirty="0"/>
-          </a:p>
-          <a:p>
-            <a:pPr algn="l" indent="0" marL="0">
-              <a:lnSpc>
-                <a:spcPts val="1620"/>
+              <a:t>                   "gender", "arrival_transport"]]</a:t>
+            </a:r>
+            <a:endParaRPr lang="en-US" sz="1200" dirty="0"/>
+          </a:p>
+          <a:p>
+            <a:pPr algn="l" indent="0" marL="0">
+              <a:lnSpc>
+                <a:spcPts val="1560"/>
               </a:lnSpc>
               <a:buNone/>
             </a:pPr>
@@ -18112,14 +18103,14 @@
                 <a:ea typeface="Courier New" pitchFamily="49" charset="-122"/>
                 <a:cs typeface="Courier New" pitchFamily="49" charset="-120"/>
               </a:rPr>
-              <a:t>    .merge(patients[["subject_id", "anchor_age"]], on="subject_id")</a:t>
-            </a:r>
-            <a:endParaRPr lang="en-US" sz="1200" dirty="0"/>
-          </a:p>
-          <a:p>
-            <a:pPr algn="l" indent="0" marL="0">
-              <a:lnSpc>
-                <a:spcPts val="1620"/>
+              <a:t>    .merge(triage.drop(columns=["subject_id"], errors="ignore"),</a:t>
+            </a:r>
+            <a:endParaRPr lang="en-US" sz="1200" dirty="0"/>
+          </a:p>
+          <a:p>
+            <a:pPr algn="l" indent="0" marL="0">
+              <a:lnSpc>
+                <a:spcPts val="1560"/>
               </a:lnSpc>
               <a:buNone/>
             </a:pPr>
@@ -18132,6 +18123,46 @@
                 <a:ea typeface="Courier New" pitchFamily="49" charset="-122"/>
                 <a:cs typeface="Courier New" pitchFamily="49" charset="-120"/>
               </a:rPr>
+              <a:t>           on="stay_id")</a:t>
+            </a:r>
+            <a:endParaRPr lang="en-US" sz="1200" dirty="0"/>
+          </a:p>
+          <a:p>
+            <a:pPr algn="l" indent="0" marL="0">
+              <a:lnSpc>
+                <a:spcPts val="1560"/>
+              </a:lnSpc>
+              <a:buNone/>
+            </a:pPr>
+            <a:r>
+              <a:rPr lang="en-US" sz="1200" dirty="0">
+                <a:solidFill>
+                  <a:srgbClr val="17212B"/>
+                </a:solidFill>
+                <a:latin typeface="Courier New" pitchFamily="49" charset="0"/>
+                <a:ea typeface="Courier New" pitchFamily="49" charset="-122"/>
+                <a:cs typeface="Courier New" pitchFamily="49" charset="-120"/>
+              </a:rPr>
+              <a:t>    .merge(patients[["subject_id", "anchor_age"]], on="subject_id")</a:t>
+            </a:r>
+            <a:endParaRPr lang="en-US" sz="1200" dirty="0"/>
+          </a:p>
+          <a:p>
+            <a:pPr algn="l" indent="0" marL="0">
+              <a:lnSpc>
+                <a:spcPts val="1560"/>
+              </a:lnSpc>
+              <a:buNone/>
+            </a:pPr>
+            <a:r>
+              <a:rPr lang="en-US" sz="1200" dirty="0">
+                <a:solidFill>
+                  <a:srgbClr val="17212B"/>
+                </a:solidFill>
+                <a:latin typeface="Courier New" pitchFamily="49" charset="0"/>
+                <a:ea typeface="Courier New" pitchFamily="49" charset="-122"/>
+                <a:cs typeface="Courier New" pitchFamily="49" charset="-120"/>
+              </a:rPr>
               <a:t>    .merge(primary, on="stay_id"))</a:t>
             </a:r>
             <a:endParaRPr lang="en-US" sz="1200" dirty="0"/>
@@ -18146,7 +18177,7 @@
         </p:nvSpPr>
         <p:spPr>
           <a:xfrm>
-            <a:off x="7823200" y="2688630"/>
+            <a:off x="7823200" y="2660452"/>
             <a:ext cx="3556000" cy="0"/>
           </a:xfrm>
           <a:prstGeom prst="line">
@@ -18169,7 +18200,7 @@
         </p:nvSpPr>
         <p:spPr>
           <a:xfrm>
-            <a:off x="7823200" y="2799755"/>
+            <a:off x="7823200" y="2771577"/>
             <a:ext cx="3662680" cy="238720"/>
           </a:xfrm>
           <a:prstGeom prst="rect">
@@ -18213,7 +18244,7 @@
         </p:nvSpPr>
         <p:spPr>
           <a:xfrm>
-            <a:off x="7823200" y="3089275"/>
+            <a:off x="7823200" y="3061097"/>
             <a:ext cx="3662680" cy="436860"/>
           </a:xfrm>
           <a:prstGeom prst="rect">
@@ -18264,7 +18295,7 @@
           </p:nvPr>
         </p:nvGraphicFramePr>
         <p:xfrm>
-          <a:off x="7835900" y="3640435"/>
+          <a:off x="7835900" y="3612257"/>
           <a:ext cx="3543300" cy="2163763"/>
         </p:xfrm>
         <a:graphic>
